--- a/lectures/week-11/index.pptx
+++ b/lectures/week-11/index.pptx
@@ -8,6 +8,7 @@
     <p:sldId id="256" r:id="rId2"/>
     <p:sldId id="257" r:id="rId3"/>
     <p:sldId id="258" r:id="rId4"/>
+    <p:sldId id="259" r:id="rId5"/>
   </p:sldIdLst>
   <p:sldSz cx="9144000" cy="5143500" type="screen16x9"/>
   <p:notesSz cx="6858000" cy="9144000"/>
@@ -3207,12 +3208,12 @@
       </p:grpSpPr>
       <p:sp>
         <p:nvSpPr>
-          <p:cNvPr id="2" name="Title 1"/>
-          <p:cNvSpPr>
-            <a:spLocks noGrp="1"/>
-          </p:cNvSpPr>
-          <p:nvPr>
-            <p:ph type="title"/>
+          <p:cNvPr id="3" name="Content Placeholder 2"/>
+          <p:cNvSpPr>
+            <a:spLocks noGrp="1"/>
+          </p:cNvSpPr>
+          <p:nvPr>
+            <p:ph idx="1"/>
           </p:nvPr>
         </p:nvSpPr>
         <p:spPr/>
@@ -3224,33 +3225,12 @@
               <a:buNone/>
             </a:pPr>
             <a:r>
+              <a:rPr b="1"/>
+              <a:t>Draft Material:</a:t>
+            </a:r>
+            <a:r>
               <a:rPr/>
-              <a:t>Coming Soon</a:t>
-            </a:r>
-          </a:p>
-        </p:txBody>
-      </p:sp>
-      <p:sp>
-        <p:nvSpPr>
-          <p:cNvPr id="3" name="Content Placeholder 2"/>
-          <p:cNvSpPr>
-            <a:spLocks noGrp="1"/>
-          </p:cNvSpPr>
-          <p:nvPr>
-            <p:ph idx="1"/>
-          </p:nvPr>
-        </p:nvSpPr>
-        <p:spPr/>
-        <p:txBody>
-          <a:bodyPr/>
-          <a:lstStyle/>
-          <a:p>
-            <a:pPr lvl="0" indent="0" marL="0">
-              <a:buNone/>
-            </a:pPr>
-            <a:r>
-              <a:rPr/>
-              <a:t>This lecture is under development.</a:t>
+              <a:t> This content is under development and subject to change.</a:t>
             </a:r>
           </a:p>
         </p:txBody>
@@ -3261,6 +3241,78 @@
 </file>
 
 <file path=ppt/slides/slide3.xml><?xml version="1.0" encoding="utf-8"?>
+<p:sld xmlns:a="http://schemas.openxmlformats.org/drawingml/2006/main" xmlns:r="http://schemas.openxmlformats.org/officeDocument/2006/relationships" xmlns:p="http://schemas.openxmlformats.org/presentationml/2006/main">
+  <p:cSld>
+    <p:spTree>
+      <p:nvGrpSpPr>
+        <p:cNvPr id="1" name=""/>
+        <p:cNvGrpSpPr/>
+        <p:nvPr/>
+      </p:nvGrpSpPr>
+      <p:grpSpPr>
+        <a:xfrm>
+          <a:off x="0" y="0"/>
+          <a:ext cx="0" cy="0"/>
+          <a:chOff x="0" y="0"/>
+          <a:chExt cx="0" cy="0"/>
+        </a:xfrm>
+      </p:grpSpPr>
+      <p:sp>
+        <p:nvSpPr>
+          <p:cNvPr id="2" name="Title 1"/>
+          <p:cNvSpPr>
+            <a:spLocks noGrp="1"/>
+          </p:cNvSpPr>
+          <p:nvPr>
+            <p:ph type="title"/>
+          </p:nvPr>
+        </p:nvSpPr>
+        <p:spPr/>
+        <p:txBody>
+          <a:bodyPr/>
+          <a:lstStyle/>
+          <a:p>
+            <a:pPr lvl="0" indent="0" marL="0">
+              <a:buNone/>
+            </a:pPr>
+            <a:r>
+              <a:rPr/>
+              <a:t>Coming Soon</a:t>
+            </a:r>
+          </a:p>
+        </p:txBody>
+      </p:sp>
+      <p:sp>
+        <p:nvSpPr>
+          <p:cNvPr id="3" name="Content Placeholder 2"/>
+          <p:cNvSpPr>
+            <a:spLocks noGrp="1"/>
+          </p:cNvSpPr>
+          <p:nvPr>
+            <p:ph idx="1"/>
+          </p:nvPr>
+        </p:nvSpPr>
+        <p:spPr/>
+        <p:txBody>
+          <a:bodyPr/>
+          <a:lstStyle/>
+          <a:p>
+            <a:pPr lvl="0" indent="0" marL="0">
+              <a:buNone/>
+            </a:pPr>
+            <a:r>
+              <a:rPr/>
+              <a:t>This lecture is under development.</a:t>
+            </a:r>
+          </a:p>
+        </p:txBody>
+      </p:sp>
+    </p:spTree>
+  </p:cSld>
+</p:sld>
+</file>
+
+<file path=ppt/slides/slide4.xml><?xml version="1.0" encoding="utf-8"?>
 <p:sld xmlns:a="http://schemas.openxmlformats.org/drawingml/2006/main" xmlns:r="http://schemas.openxmlformats.org/officeDocument/2006/relationships" xmlns:p="http://schemas.openxmlformats.org/presentationml/2006/main">
   <p:cSld>
     <p:spTree>

--- a/lectures/week-11/index.pptx
+++ b/lectures/week-11/index.pptx
@@ -9,6 +9,7 @@
     <p:sldId id="257" r:id="rId3"/>
     <p:sldId id="258" r:id="rId4"/>
     <p:sldId id="259" r:id="rId5"/>
+    <p:sldId id="260" r:id="rId6"/>
   </p:sldIdLst>
   <p:sldSz cx="9144000" cy="5143500" type="screen16x9"/>
   <p:notesSz cx="6858000" cy="9144000"/>
@@ -3118,7 +3119,7 @@
             </a:pPr>
             <a:r>
               <a:rPr/>
-              <a:t>Exploratory Modeling &amp; Scenario Discovery</a:t>
+              <a:t>Sequential Decision Making</a:t>
             </a:r>
           </a:p>
         </p:txBody>
@@ -3282,31 +3283,195 @@
           </a:p>
         </p:txBody>
       </p:sp>
-      <p:sp>
-        <p:nvSpPr>
-          <p:cNvPr id="3" name="Content Placeholder 2"/>
-          <p:cNvSpPr>
-            <a:spLocks noGrp="1"/>
-          </p:cNvSpPr>
-          <p:nvPr>
-            <p:ph idx="1"/>
-          </p:nvPr>
-        </p:nvSpPr>
-        <p:spPr/>
-        <p:txBody>
-          <a:bodyPr/>
-          <a:lstStyle/>
-          <a:p>
-            <a:pPr lvl="0" indent="0" marL="0">
-              <a:buNone/>
-            </a:pPr>
-            <a:r>
-              <a:rPr/>
-              <a:t>This lecture is under development.</a:t>
-            </a:r>
-          </a:p>
-        </p:txBody>
-      </p:sp>
+      <mc:AlternateContent xmlns:mc="http://schemas.openxmlformats.org/markup-compatibility/2006">
+        <mc:Choice xmlns:a14="http://schemas.microsoft.com/office/drawing/2010/main" Requires="a14">
+          <p:sp>
+            <p:nvSpPr>
+              <p:cNvPr id="3" name="Content Placeholder 2"/>
+              <p:cNvSpPr>
+                <a:spLocks noGrp="1"/>
+              </p:cNvSpPr>
+              <p:nvPr>
+                <p:ph idx="1"/>
+              </p:nvPr>
+            </p:nvSpPr>
+            <p:spPr/>
+            <p:txBody>
+              <a:bodyPr/>
+              <a:lstStyle/>
+              <a:p>
+                <a:pPr lvl="0" indent="0" marL="0">
+                  <a:buNone/>
+                </a:pPr>
+                <a:r>
+                  <a:rPr/>
+                  <a:t>This lecture is under development.</a:t>
+                </a:r>
+              </a:p>
+              <a:p>
+                <a:pPr lvl="0" indent="0" marL="0">
+                  <a:buNone/>
+                </a:pPr>
+                <a:r>
+                  <a:rPr/>
+                  <a:t>Content to adapt from previous course:</a:t>
+                </a:r>
+              </a:p>
+              <a:p>
+                <a:pPr lvl="0"/>
+                <a:r>
+                  <a:rPr/>
+                  <a:t>Static vs. sequential decision framing</a:t>
+                </a:r>
+              </a:p>
+              <a:p>
+                <a:pPr lvl="0"/>
+                <a:r>
+                  <a:rPr/>
+                  <a:t>State evolution: </a:t>
+                </a:r>
+                <a14:m>
+                  <m:oMath xmlns:m="http://schemas.openxmlformats.org/officeDocument/2006/math">
+                    <m:sSub>
+                      <m:e>
+                        <m:r>
+                          <m:rPr>
+                            <m:sty m:val="b"/>
+                          </m:rPr>
+                          <m:t>x</m:t>
+                        </m:r>
+                      </m:e>
+                      <m:sub>
+                        <m:r>
+                          <m:t>t</m:t>
+                        </m:r>
+                        <m:r>
+                          <m:rPr>
+                            <m:sty m:val="p"/>
+                          </m:rPr>
+                          <m:t>+</m:t>
+                        </m:r>
+                        <m:r>
+                          <m:t>1</m:t>
+                        </m:r>
+                      </m:sub>
+                    </m:sSub>
+                    <m:r>
+                      <m:rPr>
+                        <m:sty m:val="p"/>
+                      </m:rPr>
+                      <m:t>=</m:t>
+                    </m:r>
+                    <m:sSub>
+                      <m:e>
+                        <m:r>
+                          <m:t>f</m:t>
+                        </m:r>
+                      </m:e>
+                      <m:sub>
+                        <m:r>
+                          <m:t>t</m:t>
+                        </m:r>
+                      </m:sub>
+                    </m:sSub>
+                    <m:d>
+                      <m:dPr>
+                        <m:begChr m:val="("/>
+                        <m:sepChr m:val=""/>
+                        <m:endChr m:val=")"/>
+                        <m:grow/>
+                      </m:dPr>
+                      <m:e>
+                        <m:sSub>
+                          <m:e>
+                            <m:r>
+                              <m:rPr>
+                                <m:sty m:val="b"/>
+                              </m:rPr>
+                              <m:t>x</m:t>
+                            </m:r>
+                          </m:e>
+                          <m:sub>
+                            <m:r>
+                              <m:t>t</m:t>
+                            </m:r>
+                          </m:sub>
+                        </m:sSub>
+                        <m:r>
+                          <m:rPr>
+                            <m:sty m:val="p"/>
+                          </m:rPr>
+                          <m:t>,</m:t>
+                        </m:r>
+                        <m:sSub>
+                          <m:e>
+                            <m:r>
+                              <m:t>a</m:t>
+                            </m:r>
+                          </m:e>
+                          <m:sub>
+                            <m:r>
+                              <m:t>t</m:t>
+                            </m:r>
+                          </m:sub>
+                        </m:sSub>
+                        <m:r>
+                          <m:rPr>
+                            <m:sty m:val="p"/>
+                          </m:rPr>
+                          <m:t>,</m:t>
+                        </m:r>
+                        <m:sSub>
+                          <m:e>
+                            <m:r>
+                              <m:t>e</m:t>
+                            </m:r>
+                          </m:e>
+                          <m:sub>
+                            <m:r>
+                              <m:t>t</m:t>
+                            </m:r>
+                            <m:r>
+                              <m:rPr>
+                                <m:sty m:val="p"/>
+                              </m:rPr>
+                              <m:t>+</m:t>
+                            </m:r>
+                            <m:r>
+                              <m:t>1</m:t>
+                            </m:r>
+                          </m:sub>
+                        </m:sSub>
+                      </m:e>
+                    </m:d>
+                  </m:oMath>
+                </a14:m>
+              </a:p>
+              <a:p>
+                <a:pPr lvl="0"/>
+                <a:r>
+                  <a:rPr/>
+                  <a:t>Reward and value functions</a:t>
+                </a:r>
+              </a:p>
+              <a:p>
+                <a:pPr lvl="0"/>
+                <a:r>
+                  <a:rPr/>
+                  <a:t>Solution methods: open loop, dynamic programming, policy search</a:t>
+                </a:r>
+              </a:p>
+              <a:p>
+                <a:pPr lvl="0"/>
+                <a:r>
+                  <a:rPr/>
+                  <a:t>Real options and the value of flexibility</a:t>
+                </a:r>
+              </a:p>
+            </p:txBody>
+          </p:sp>
+        </mc:Choice>
+      </mc:AlternateContent>
     </p:spTree>
   </p:cSld>
 </p:sld>
@@ -3349,7 +3514,122 @@
             </a:pPr>
             <a:r>
               <a:rPr/>
+              <a:t>Preparation</a:t>
+            </a:r>
+          </a:p>
+        </p:txBody>
+      </p:sp>
+      <p:sp>
+        <p:nvSpPr>
+          <p:cNvPr id="3" name="Content Placeholder 2"/>
+          <p:cNvSpPr>
+            <a:spLocks noGrp="1"/>
+          </p:cNvSpPr>
+          <p:nvPr>
+            <p:ph idx="1"/>
+          </p:nvPr>
+        </p:nvSpPr>
+        <p:spPr/>
+        <p:txBody>
+          <a:bodyPr/>
+          <a:lstStyle/>
+          <a:p>
+            <a:pPr lvl="0" indent="0" marL="0">
+              <a:buNone/>
+            </a:pPr>
+            <a:r>
+              <a:rPr/>
+              <a:t>Read Herman et al. (2020), in particular focusing on …</a:t>
+            </a:r>
+          </a:p>
+        </p:txBody>
+      </p:sp>
+    </p:spTree>
+  </p:cSld>
+</p:sld>
+</file>
+
+<file path=ppt/slides/slide5.xml><?xml version="1.0" encoding="utf-8"?>
+<p:sld xmlns:a="http://schemas.openxmlformats.org/drawingml/2006/main" xmlns:r="http://schemas.openxmlformats.org/officeDocument/2006/relationships" xmlns:p="http://schemas.openxmlformats.org/presentationml/2006/main">
+  <p:cSld>
+    <p:spTree>
+      <p:nvGrpSpPr>
+        <p:cNvPr id="1" name=""/>
+        <p:cNvGrpSpPr/>
+        <p:nvPr/>
+      </p:nvGrpSpPr>
+      <p:grpSpPr>
+        <a:xfrm>
+          <a:off x="0" y="0"/>
+          <a:ext cx="0" cy="0"/>
+          <a:chOff x="0" y="0"/>
+          <a:chExt cx="0" cy="0"/>
+        </a:xfrm>
+      </p:grpSpPr>
+      <p:sp>
+        <p:nvSpPr>
+          <p:cNvPr id="2" name="Title 1"/>
+          <p:cNvSpPr>
+            <a:spLocks noGrp="1"/>
+          </p:cNvSpPr>
+          <p:nvPr>
+            <p:ph type="title"/>
+          </p:nvPr>
+        </p:nvSpPr>
+        <p:spPr/>
+        <p:txBody>
+          <a:bodyPr/>
+          <a:lstStyle/>
+          <a:p>
+            <a:pPr lvl="0" indent="0" marL="0">
+              <a:buNone/>
+            </a:pPr>
+            <a:r>
+              <a:rPr/>
               <a:t>References</a:t>
+            </a:r>
+          </a:p>
+        </p:txBody>
+      </p:sp>
+      <p:sp>
+        <p:nvSpPr>
+          <p:cNvPr id="3" name="Content Placeholder 2"/>
+          <p:cNvSpPr>
+            <a:spLocks noGrp="1"/>
+          </p:cNvSpPr>
+          <p:nvPr>
+            <p:ph idx="1"/>
+          </p:nvPr>
+        </p:nvSpPr>
+        <p:spPr/>
+        <p:txBody>
+          <a:bodyPr/>
+          <a:lstStyle/>
+          <a:p>
+            <a:pPr lvl="0" indent="0" marL="0">
+              <a:buNone/>
+            </a:pPr>
+            <a:r>
+              <a:rPr/>
+              <a:t>Herman, Jonathan D., Julianne D. Quinn, Scott Steinschneider, Matteo Giuliani, and Sarah Fletcher. 2020. “Climate Adaptation as a Control Problem: Review and Perspectives on Dynamic Water Resources Planning Under Uncertainty.” </a:t>
+            </a:r>
+            <a:r>
+              <a:rPr i="1"/>
+              <a:t>Water Resources Research</a:t>
+            </a:r>
+            <a:r>
+              <a:rPr/>
+              <a:t>, January, e24389. </a:t>
+            </a:r>
+            <a:r>
+              <a:rPr>
+                <a:hlinkClick r:id="rId2"/>
+              </a:rPr>
+              <a:t>https://doi.org/10.1029/2019wr025502</a:t>
+            </a:r>
+            <a:r>
+              <a:rPr/>
+              <a:t>.</a:t>
             </a:r>
           </a:p>
         </p:txBody>

--- a/lectures/week-11/index.pptx
+++ b/lectures/week-11/index.pptx
@@ -4,12 +4,33 @@
   <p:sldMasterIdLst>
     <p:sldMasterId id="2147483648" r:id="rId1"/>
   </p:sldMasterIdLst>
+  <p:notesMasterIdLst>
+    <p:notesMasterId r:id="rId25"/>
+  </p:notesMasterIdLst>
   <p:sldIdLst>
     <p:sldId id="256" r:id="rId2"/>
     <p:sldId id="257" r:id="rId3"/>
     <p:sldId id="258" r:id="rId4"/>
     <p:sldId id="259" r:id="rId5"/>
     <p:sldId id="260" r:id="rId6"/>
+    <p:sldId id="261" r:id="rId7"/>
+    <p:sldId id="262" r:id="rId8"/>
+    <p:sldId id="263" r:id="rId9"/>
+    <p:sldId id="264" r:id="rId10"/>
+    <p:sldId id="265" r:id="rId11"/>
+    <p:sldId id="266" r:id="rId12"/>
+    <p:sldId id="267" r:id="rId13"/>
+    <p:sldId id="268" r:id="rId14"/>
+    <p:sldId id="269" r:id="rId15"/>
+    <p:sldId id="270" r:id="rId16"/>
+    <p:sldId id="271" r:id="rId17"/>
+    <p:sldId id="272" r:id="rId18"/>
+    <p:sldId id="273" r:id="rId19"/>
+    <p:sldId id="274" r:id="rId20"/>
+    <p:sldId id="275" r:id="rId21"/>
+    <p:sldId id="276" r:id="rId22"/>
+    <p:sldId id="277" r:id="rId23"/>
+    <p:sldId id="278" r:id="rId24"/>
   </p:sldIdLst>
   <p:sldSz cx="9144000" cy="5143500" type="screen16x9"/>
   <p:notesSz cx="6858000" cy="9144000"/>
@@ -125,6 +146,1929 @@
     </p:ext>
   </p:extLst>
 </p:presentation>
+</file>
+
+<file path=ppt/notesMasters/notesMaster1.xml><?xml version="1.0" encoding="utf-8"?>
+<p:notesMaster xmlns:a="http://schemas.openxmlformats.org/drawingml/2006/main" xmlns:r="http://schemas.openxmlformats.org/officeDocument/2006/relationships" xmlns:p="http://schemas.openxmlformats.org/presentationml/2006/main">
+  <p:cSld>
+    <p:bg>
+      <p:bgRef idx="1001">
+        <a:schemeClr val="bg1"/>
+      </p:bgRef>
+    </p:bg>
+    <p:spTree>
+      <p:nvGrpSpPr>
+        <p:cNvPr id="1" name=""/>
+        <p:cNvGrpSpPr/>
+        <p:nvPr/>
+      </p:nvGrpSpPr>
+      <p:grpSpPr>
+        <a:xfrm>
+          <a:off x="0" y="0"/>
+          <a:ext cx="0" cy="0"/>
+          <a:chOff x="0" y="0"/>
+          <a:chExt cx="0" cy="0"/>
+        </a:xfrm>
+      </p:grpSpPr>
+      <p:sp>
+        <p:nvSpPr>
+          <p:cNvPr id="2" name="Header Placeholder 1"/>
+          <p:cNvSpPr>
+            <a:spLocks noGrp="1"/>
+          </p:cNvSpPr>
+          <p:nvPr>
+            <p:ph type="hdr" sz="quarter"/>
+          </p:nvPr>
+        </p:nvSpPr>
+        <p:spPr>
+          <a:xfrm>
+            <a:off x="0" y="0"/>
+            <a:ext cx="2971800" cy="458788"/>
+          </a:xfrm>
+          <a:prstGeom prst="rect">
+            <a:avLst/>
+          </a:prstGeom>
+        </p:spPr>
+        <p:txBody>
+          <a:bodyPr vert="horz" lIns="91440" tIns="45720" rIns="91440" bIns="45720" rtlCol="0"/>
+          <a:lstStyle>
+            <a:lvl1pPr algn="l">
+              <a:defRPr sz="1200"/>
+            </a:lvl1pPr>
+          </a:lstStyle>
+          <a:p>
+            <a:endParaRPr lang="en-US"/>
+          </a:p>
+        </p:txBody>
+      </p:sp>
+      <p:sp>
+        <p:nvSpPr>
+          <p:cNvPr id="3" name="Date Placeholder 2"/>
+          <p:cNvSpPr>
+            <a:spLocks noGrp="1"/>
+          </p:cNvSpPr>
+          <p:nvPr>
+            <p:ph type="dt" idx="1"/>
+          </p:nvPr>
+        </p:nvSpPr>
+        <p:spPr>
+          <a:xfrm>
+            <a:off x="3884613" y="0"/>
+            <a:ext cx="2971800" cy="458788"/>
+          </a:xfrm>
+          <a:prstGeom prst="rect">
+            <a:avLst/>
+          </a:prstGeom>
+        </p:spPr>
+        <p:txBody>
+          <a:bodyPr vert="horz" lIns="91440" tIns="45720" rIns="91440" bIns="45720" rtlCol="0"/>
+          <a:lstStyle>
+            <a:lvl1pPr algn="r">
+              <a:defRPr sz="1200"/>
+            </a:lvl1pPr>
+          </a:lstStyle>
+          <a:p>
+            <a:fld id="{0F9C1CCF-B725-44A7-AA57-5E433BD85C9F}" type="datetimeFigureOut">
+              <a:rPr lang="en-US" smtClean="0"/>
+              <a:t>1/2/22</a:t>
+            </a:fld>
+            <a:endParaRPr lang="en-US"/>
+          </a:p>
+        </p:txBody>
+      </p:sp>
+      <p:sp>
+        <p:nvSpPr>
+          <p:cNvPr id="4" name="Slide Image Placeholder 3"/>
+          <p:cNvSpPr>
+            <a:spLocks noGrp="1" noRot="1" noChangeAspect="1"/>
+          </p:cNvSpPr>
+          <p:nvPr>
+            <p:ph type="sldImg" idx="2"/>
+          </p:nvPr>
+        </p:nvSpPr>
+        <p:spPr>
+          <a:xfrm>
+            <a:off x="685800" y="1143000"/>
+            <a:ext cx="5486400" cy="3086100"/>
+          </a:xfrm>
+          <a:prstGeom prst="rect">
+            <a:avLst/>
+          </a:prstGeom>
+          <a:noFill/>
+          <a:ln w="12700">
+            <a:solidFill>
+              <a:prstClr val="black"/>
+            </a:solidFill>
+          </a:ln>
+        </p:spPr>
+        <p:txBody>
+          <a:bodyPr vert="horz" lIns="91440" tIns="45720" rIns="91440" bIns="45720" rtlCol="0" anchor="ctr"/>
+          <a:lstStyle/>
+          <a:p>
+            <a:endParaRPr lang="en-US"/>
+          </a:p>
+        </p:txBody>
+      </p:sp>
+      <p:sp>
+        <p:nvSpPr>
+          <p:cNvPr id="5" name="Notes Placeholder 4"/>
+          <p:cNvSpPr>
+            <a:spLocks noGrp="1"/>
+          </p:cNvSpPr>
+          <p:nvPr>
+            <p:ph type="body" sz="quarter" idx="3"/>
+          </p:nvPr>
+        </p:nvSpPr>
+        <p:spPr>
+          <a:xfrm>
+            <a:off x="685800" y="4400550"/>
+            <a:ext cx="5486400" cy="3600450"/>
+          </a:xfrm>
+          <a:prstGeom prst="rect">
+            <a:avLst/>
+          </a:prstGeom>
+        </p:spPr>
+        <p:txBody>
+          <a:bodyPr vert="horz" lIns="91440" tIns="45720" rIns="91440" bIns="45720" rtlCol="0"/>
+          <a:lstStyle/>
+          <a:p>
+            <a:pPr lvl="0"/>
+            <a:r>
+              <a:rPr lang="en-US"/>
+              <a:t>Click to edit Master text styles</a:t>
+            </a:r>
+          </a:p>
+          <a:p>
+            <a:pPr lvl="1"/>
+            <a:r>
+              <a:rPr lang="en-US"/>
+              <a:t>Second level</a:t>
+            </a:r>
+          </a:p>
+          <a:p>
+            <a:pPr lvl="2"/>
+            <a:r>
+              <a:rPr lang="en-US"/>
+              <a:t>Third level</a:t>
+            </a:r>
+          </a:p>
+          <a:p>
+            <a:pPr lvl="3"/>
+            <a:r>
+              <a:rPr lang="en-US"/>
+              <a:t>Fourth level</a:t>
+            </a:r>
+          </a:p>
+          <a:p>
+            <a:pPr lvl="4"/>
+            <a:r>
+              <a:rPr lang="en-US"/>
+              <a:t>Fifth level</a:t>
+            </a:r>
+          </a:p>
+        </p:txBody>
+      </p:sp>
+      <p:sp>
+        <p:nvSpPr>
+          <p:cNvPr id="6" name="Footer Placeholder 5"/>
+          <p:cNvSpPr>
+            <a:spLocks noGrp="1"/>
+          </p:cNvSpPr>
+          <p:nvPr>
+            <p:ph type="ftr" sz="quarter" idx="4"/>
+          </p:nvPr>
+        </p:nvSpPr>
+        <p:spPr>
+          <a:xfrm>
+            <a:off x="0" y="8685213"/>
+            <a:ext cx="2971800" cy="458787"/>
+          </a:xfrm>
+          <a:prstGeom prst="rect">
+            <a:avLst/>
+          </a:prstGeom>
+        </p:spPr>
+        <p:txBody>
+          <a:bodyPr vert="horz" lIns="91440" tIns="45720" rIns="91440" bIns="45720" rtlCol="0" anchor="b"/>
+          <a:lstStyle>
+            <a:lvl1pPr algn="l">
+              <a:defRPr sz="1200"/>
+            </a:lvl1pPr>
+          </a:lstStyle>
+          <a:p>
+            <a:endParaRPr lang="en-US"/>
+          </a:p>
+        </p:txBody>
+      </p:sp>
+      <p:sp>
+        <p:nvSpPr>
+          <p:cNvPr id="7" name="Slide Number Placeholder 6"/>
+          <p:cNvSpPr>
+            <a:spLocks noGrp="1"/>
+          </p:cNvSpPr>
+          <p:nvPr>
+            <p:ph type="sldNum" sz="quarter" idx="5"/>
+          </p:nvPr>
+        </p:nvSpPr>
+        <p:spPr>
+          <a:xfrm>
+            <a:off x="3884613" y="8685213"/>
+            <a:ext cx="2971800" cy="458787"/>
+          </a:xfrm>
+          <a:prstGeom prst="rect">
+            <a:avLst/>
+          </a:prstGeom>
+        </p:spPr>
+        <p:txBody>
+          <a:bodyPr vert="horz" lIns="91440" tIns="45720" rIns="91440" bIns="45720" rtlCol="0" anchor="b"/>
+          <a:lstStyle>
+            <a:lvl1pPr algn="r">
+              <a:defRPr sz="1200"/>
+            </a:lvl1pPr>
+          </a:lstStyle>
+          <a:p>
+            <a:fld id="{18BDFEC3-8487-43E8-A154-7C12CBC1FFF2}" type="slidenum">
+              <a:rPr lang="en-US" smtClean="0"/>
+              <a:t>‹#›</a:t>
+            </a:fld>
+            <a:endParaRPr lang="en-US"/>
+          </a:p>
+        </p:txBody>
+      </p:sp>
+    </p:spTree>
+    <p:extLst>
+      <p:ext uri="{BB962C8B-B14F-4D97-AF65-F5344CB8AC3E}">
+        <p14:creationId xmlns:p14="http://schemas.microsoft.com/office/powerpoint/2010/main" val="3782709779"/>
+      </p:ext>
+    </p:extLst>
+  </p:cSld>
+  <p:clrMap bg1="lt1" tx1="dk1" bg2="lt2" tx2="dk2" accent1="accent1" accent2="accent2" accent3="accent3" accent4="accent4" accent5="accent5" accent6="accent6" hlink="hlink" folHlink="folHlink"/>
+  <p:notesStyle>
+    <a:lvl1pPr marL="0" algn="l" defTabSz="914400" rtl="0" eaLnBrk="1" latinLnBrk="0" hangingPunct="1">
+      <a:defRPr sz="1200" kern="1200">
+        <a:solidFill>
+          <a:schemeClr val="tx1"/>
+        </a:solidFill>
+        <a:latin typeface="+mn-lt"/>
+        <a:ea typeface="+mn-ea"/>
+        <a:cs typeface="+mn-cs"/>
+      </a:defRPr>
+    </a:lvl1pPr>
+    <a:lvl2pPr marL="457200" algn="l" defTabSz="914400" rtl="0" eaLnBrk="1" latinLnBrk="0" hangingPunct="1">
+      <a:defRPr sz="1200" kern="1200">
+        <a:solidFill>
+          <a:schemeClr val="tx1"/>
+        </a:solidFill>
+        <a:latin typeface="+mn-lt"/>
+        <a:ea typeface="+mn-ea"/>
+        <a:cs typeface="+mn-cs"/>
+      </a:defRPr>
+    </a:lvl2pPr>
+    <a:lvl3pPr marL="914400" algn="l" defTabSz="914400" rtl="0" eaLnBrk="1" latinLnBrk="0" hangingPunct="1">
+      <a:defRPr sz="1200" kern="1200">
+        <a:solidFill>
+          <a:schemeClr val="tx1"/>
+        </a:solidFill>
+        <a:latin typeface="+mn-lt"/>
+        <a:ea typeface="+mn-ea"/>
+        <a:cs typeface="+mn-cs"/>
+      </a:defRPr>
+    </a:lvl3pPr>
+    <a:lvl4pPr marL="1371600" algn="l" defTabSz="914400" rtl="0" eaLnBrk="1" latinLnBrk="0" hangingPunct="1">
+      <a:defRPr sz="1200" kern="1200">
+        <a:solidFill>
+          <a:schemeClr val="tx1"/>
+        </a:solidFill>
+        <a:latin typeface="+mn-lt"/>
+        <a:ea typeface="+mn-ea"/>
+        <a:cs typeface="+mn-cs"/>
+      </a:defRPr>
+    </a:lvl4pPr>
+    <a:lvl5pPr marL="1828800" algn="l" defTabSz="914400" rtl="0" eaLnBrk="1" latinLnBrk="0" hangingPunct="1">
+      <a:defRPr sz="1200" kern="1200">
+        <a:solidFill>
+          <a:schemeClr val="tx1"/>
+        </a:solidFill>
+        <a:latin typeface="+mn-lt"/>
+        <a:ea typeface="+mn-ea"/>
+        <a:cs typeface="+mn-cs"/>
+      </a:defRPr>
+    </a:lvl5pPr>
+    <a:lvl6pPr marL="2286000" algn="l" defTabSz="914400" rtl="0" eaLnBrk="1" latinLnBrk="0" hangingPunct="1">
+      <a:defRPr sz="1200" kern="1200">
+        <a:solidFill>
+          <a:schemeClr val="tx1"/>
+        </a:solidFill>
+        <a:latin typeface="+mn-lt"/>
+        <a:ea typeface="+mn-ea"/>
+        <a:cs typeface="+mn-cs"/>
+      </a:defRPr>
+    </a:lvl6pPr>
+    <a:lvl7pPr marL="2743200" algn="l" defTabSz="914400" rtl="0" eaLnBrk="1" latinLnBrk="0" hangingPunct="1">
+      <a:defRPr sz="1200" kern="1200">
+        <a:solidFill>
+          <a:schemeClr val="tx1"/>
+        </a:solidFill>
+        <a:latin typeface="+mn-lt"/>
+        <a:ea typeface="+mn-ea"/>
+        <a:cs typeface="+mn-cs"/>
+      </a:defRPr>
+    </a:lvl7pPr>
+    <a:lvl8pPr marL="3200400" algn="l" defTabSz="914400" rtl="0" eaLnBrk="1" latinLnBrk="0" hangingPunct="1">
+      <a:defRPr sz="1200" kern="1200">
+        <a:solidFill>
+          <a:schemeClr val="tx1"/>
+        </a:solidFill>
+        <a:latin typeface="+mn-lt"/>
+        <a:ea typeface="+mn-ea"/>
+        <a:cs typeface="+mn-cs"/>
+      </a:defRPr>
+    </a:lvl8pPr>
+    <a:lvl9pPr marL="3657600" algn="l" defTabSz="914400" rtl="0" eaLnBrk="1" latinLnBrk="0" hangingPunct="1">
+      <a:defRPr sz="1200" kern="1200">
+        <a:solidFill>
+          <a:schemeClr val="tx1"/>
+        </a:solidFill>
+        <a:latin typeface="+mn-lt"/>
+        <a:ea typeface="+mn-ea"/>
+        <a:cs typeface="+mn-cs"/>
+      </a:defRPr>
+    </a:lvl9pPr>
+  </p:notesStyle>
+</p:notesMaster>
+</file>
+
+<file path=ppt/notesSlides/notesSlide1.xml><?xml version="1.0" encoding="utf-8"?>
+<p:notes xmlns:a="http://schemas.openxmlformats.org/drawingml/2006/main" xmlns:r="http://schemas.openxmlformats.org/officeDocument/2006/relationships" xmlns:p="http://schemas.openxmlformats.org/presentationml/2006/main">
+  <p:cSld>
+    <p:spTree>
+      <p:nvGrpSpPr>
+        <p:cNvPr id="1" name=""/>
+        <p:cNvGrpSpPr/>
+        <p:nvPr/>
+      </p:nvGrpSpPr>
+      <p:grpSpPr>
+        <a:xfrm>
+          <a:off x="0" y="0"/>
+          <a:ext cx="0" cy="0"/>
+          <a:chOff x="0" y="0"/>
+          <a:chExt cx="0" cy="0"/>
+        </a:xfrm>
+      </p:grpSpPr>
+      <p:sp>
+        <p:nvSpPr>
+          <p:cNvPr id="2" name="Slide Image Placeholder 1"/>
+          <p:cNvSpPr>
+            <a:spLocks noGrp="1" noRot="1" noChangeAspect="1"/>
+          </p:cNvSpPr>
+          <p:nvPr>
+            <p:ph type="sldImg"/>
+          </p:nvPr>
+        </p:nvSpPr>
+        <p:spPr/>
+      </p:sp>
+      <p:sp>
+        <p:nvSpPr>
+          <p:cNvPr id="3" name="Notes Placeholder 2"/>
+          <p:cNvSpPr>
+            <a:spLocks noGrp="1"/>
+          </p:cNvSpPr>
+          <p:nvPr>
+            <p:ph type="body" idx="1"/>
+          </p:nvPr>
+        </p:nvSpPr>
+        <p:spPr/>
+        <p:txBody>
+          <a:bodyPr/>
+          <a:lstStyle/>
+          <a:p>
+            <a:pPr lvl="0" indent="0" marL="0">
+              <a:buNone/>
+            </a:pPr>
+            <a:r>
+              <a:rPr/>
+              <a:t>Target: 1:03. All three embedded flexibility deliberately — at a cost — before the future was known. The Tagus bridge story is especially nice: the engineers in 1966 couldn’t know if rail would ever be built, but they kept the option alive. The satellite example shows this isn’t just civil infrastructure — staged deployment is a general principle. Ask students: “What’s the cost of building in this flexibility?” — It’s paid upfront, regardless of whether the option is exercised.</a:t>
+            </a:r>
+          </a:p>
+        </p:txBody>
+      </p:sp>
+      <p:sp>
+        <p:nvSpPr>
+          <p:cNvPr id="4" name="Slide Number Placeholder 3"/>
+          <p:cNvSpPr>
+            <a:spLocks noGrp="1"/>
+          </p:cNvSpPr>
+          <p:nvPr>
+            <p:ph type="sldNum" sz="quarter" idx="10"/>
+          </p:nvPr>
+        </p:nvSpPr>
+        <p:spPr/>
+        <p:txBody>
+          <a:bodyPr/>
+          <a:lstStyle/>
+          <a:p>
+            <a:fld id="{18BDFEC3-8487-43E8-A154-7C12CBC1FFF2}" type="slidenum">
+              <a:rPr lang="en-US"/>
+              <a:t>3</a:t>
+            </a:fld>
+            <a:endParaRPr lang="en-US"/>
+          </a:p>
+        </p:txBody>
+      </p:sp>
+    </p:spTree>
+  </p:cSld>
+</p:notes>
+</file>
+
+<file path=ppt/notesSlides/notesSlide10.xml><?xml version="1.0" encoding="utf-8"?>
+<p:notes xmlns:a="http://schemas.openxmlformats.org/drawingml/2006/main" xmlns:r="http://schemas.openxmlformats.org/officeDocument/2006/relationships" xmlns:p="http://schemas.openxmlformats.org/presentationml/2006/main">
+  <p:cSld>
+    <p:spTree>
+      <p:nvGrpSpPr>
+        <p:cNvPr id="1" name=""/>
+        <p:cNvGrpSpPr/>
+        <p:nvPr/>
+      </p:nvGrpSpPr>
+      <p:grpSpPr>
+        <a:xfrm>
+          <a:off x="0" y="0"/>
+          <a:ext cx="0" cy="0"/>
+          <a:chOff x="0" y="0"/>
+          <a:chExt cx="0" cy="0"/>
+        </a:xfrm>
+      </p:grpSpPr>
+      <p:sp>
+        <p:nvSpPr>
+          <p:cNvPr id="2" name="Slide Image Placeholder 1"/>
+          <p:cNvSpPr>
+            <a:spLocks noGrp="1" noRot="1" noChangeAspect="1"/>
+          </p:cNvSpPr>
+          <p:nvPr>
+            <p:ph type="sldImg"/>
+          </p:nvPr>
+        </p:nvSpPr>
+        <p:spPr/>
+      </p:sp>
+      <p:sp>
+        <p:nvSpPr>
+          <p:cNvPr id="3" name="Notes Placeholder 2"/>
+          <p:cNvSpPr>
+            <a:spLocks noGrp="1"/>
+          </p:cNvSpPr>
+          <p:nvPr>
+            <p:ph type="body" idx="1"/>
+          </p:nvPr>
+        </p:nvSpPr>
+        <p:spPr/>
+        <p:txBody>
+          <a:bodyPr/>
+          <a:lstStyle/>
+          <a:p>
+            <a:pPr lvl="0" indent="0" marL="0">
+              <a:buNone/>
+            </a:pPr>
+            <a:r>
+              <a:rPr/>
+              <a:t>Target: 1:30. This is what the Garner/Keller “intertemporal” formulation does — 300 annual heightenings decided at the start. Students can intuit the problem: if you set a schedule in 2025 assuming median SLR, you’ll under-build in the high-SLR future and over-build in the low-SLR future. The policy can’t adapt.</a:t>
+            </a:r>
+          </a:p>
+        </p:txBody>
+      </p:sp>
+      <p:sp>
+        <p:nvSpPr>
+          <p:cNvPr id="4" name="Slide Number Placeholder 3"/>
+          <p:cNvSpPr>
+            <a:spLocks noGrp="1"/>
+          </p:cNvSpPr>
+          <p:nvPr>
+            <p:ph type="sldNum" sz="quarter" idx="10"/>
+          </p:nvPr>
+        </p:nvSpPr>
+        <p:spPr/>
+        <p:txBody>
+          <a:bodyPr/>
+          <a:lstStyle/>
+          <a:p>
+            <a:fld id="{18BDFEC3-8487-43E8-A154-7C12CBC1FFF2}" type="slidenum">
+              <a:rPr lang="en-US"/>
+              <a:t>14</a:t>
+            </a:fld>
+            <a:endParaRPr lang="en-US"/>
+          </a:p>
+        </p:txBody>
+      </p:sp>
+    </p:spTree>
+  </p:cSld>
+</p:notes>
+</file>
+
+<file path=ppt/notesSlides/notesSlide11.xml><?xml version="1.0" encoding="utf-8"?>
+<p:notes xmlns:a="http://schemas.openxmlformats.org/drawingml/2006/main" xmlns:r="http://schemas.openxmlformats.org/officeDocument/2006/relationships" xmlns:p="http://schemas.openxmlformats.org/presentationml/2006/main">
+  <p:cSld>
+    <p:spTree>
+      <p:nvGrpSpPr>
+        <p:cNvPr id="1" name=""/>
+        <p:cNvGrpSpPr/>
+        <p:nvPr/>
+      </p:nvGrpSpPr>
+      <p:grpSpPr>
+        <a:xfrm>
+          <a:off x="0" y="0"/>
+          <a:ext cx="0" cy="0"/>
+          <a:chOff x="0" y="0"/>
+          <a:chExt cx="0" cy="0"/>
+        </a:xfrm>
+      </p:grpSpPr>
+      <p:sp>
+        <p:nvSpPr>
+          <p:cNvPr id="2" name="Slide Image Placeholder 1"/>
+          <p:cNvSpPr>
+            <a:spLocks noGrp="1" noRot="1" noChangeAspect="1"/>
+          </p:cNvSpPr>
+          <p:nvPr>
+            <p:ph type="sldImg"/>
+          </p:nvPr>
+        </p:nvSpPr>
+        <p:spPr/>
+      </p:sp>
+      <p:sp>
+        <p:nvSpPr>
+          <p:cNvPr id="3" name="Notes Placeholder 2"/>
+          <p:cNvSpPr>
+            <a:spLocks noGrp="1"/>
+          </p:cNvSpPr>
+          <p:nvPr>
+            <p:ph type="body" idx="1"/>
+          </p:nvPr>
+        </p:nvSpPr>
+        <p:spPr/>
+        <p:txBody>
+          <a:bodyPr/>
+          <a:lstStyle/>
+          <a:p>
+            <a:pPr lvl="0" indent="0" marL="0">
+              <a:buNone/>
+            </a:pPr>
+            <a:r>
+              <a:rPr/>
+              <a:t>Target: 1:34. The Bellman equation: “Today’s optimal action depends on the expected value of being in each possible future state, weighted by how likely each future state is.” Emphasize the key constraint: SDP requires you to specify a probability distribution for the forcing, AND to discretize the state space. If your uncertainty is deep — if you can’t write down a credible probability model — SDP struggles. Curse of dimensionality: doubling the number of state variables squares the state space. Practical limit is about 3-4 continuous state variables.</a:t>
+            </a:r>
+          </a:p>
+        </p:txBody>
+      </p:sp>
+      <p:sp>
+        <p:nvSpPr>
+          <p:cNvPr id="4" name="Slide Number Placeholder 3"/>
+          <p:cNvSpPr>
+            <a:spLocks noGrp="1"/>
+          </p:cNvSpPr>
+          <p:nvPr>
+            <p:ph type="sldNum" sz="quarter" idx="10"/>
+          </p:nvPr>
+        </p:nvSpPr>
+        <p:spPr/>
+        <p:txBody>
+          <a:bodyPr/>
+          <a:lstStyle/>
+          <a:p>
+            <a:fld id="{18BDFEC3-8487-43E8-A154-7C12CBC1FFF2}" type="slidenum">
+              <a:rPr lang="en-US"/>
+              <a:t>15</a:t>
+            </a:fld>
+            <a:endParaRPr lang="en-US"/>
+          </a:p>
+        </p:txBody>
+      </p:sp>
+    </p:spTree>
+  </p:cSld>
+</p:notes>
+</file>
+
+<file path=ppt/notesSlides/notesSlide12.xml><?xml version="1.0" encoding="utf-8"?>
+<p:notes xmlns:a="http://schemas.openxmlformats.org/drawingml/2006/main" xmlns:r="http://schemas.openxmlformats.org/officeDocument/2006/relationships" xmlns:p="http://schemas.openxmlformats.org/presentationml/2006/main">
+  <p:cSld>
+    <p:spTree>
+      <p:nvGrpSpPr>
+        <p:cNvPr id="1" name=""/>
+        <p:cNvGrpSpPr/>
+        <p:nvPr/>
+      </p:nvGrpSpPr>
+      <p:grpSpPr>
+        <a:xfrm>
+          <a:off x="0" y="0"/>
+          <a:ext cx="0" cy="0"/>
+          <a:chOff x="0" y="0"/>
+          <a:chExt cx="0" cy="0"/>
+        </a:xfrm>
+      </p:grpSpPr>
+      <p:sp>
+        <p:nvSpPr>
+          <p:cNvPr id="2" name="Slide Image Placeholder 1"/>
+          <p:cNvSpPr>
+            <a:spLocks noGrp="1" noRot="1" noChangeAspect="1"/>
+          </p:cNvSpPr>
+          <p:nvPr>
+            <p:ph type="sldImg"/>
+          </p:nvPr>
+        </p:nvSpPr>
+        <p:spPr/>
+      </p:sp>
+      <p:sp>
+        <p:nvSpPr>
+          <p:cNvPr id="3" name="Notes Placeholder 2"/>
+          <p:cNvSpPr>
+            <a:spLocks noGrp="1"/>
+          </p:cNvSpPr>
+          <p:nvPr>
+            <p:ph type="body" idx="1"/>
+          </p:nvPr>
+        </p:nvSpPr>
+        <p:spPr/>
+        <p:txBody>
+          <a:bodyPr/>
+          <a:lstStyle/>
+          <a:p>
+            <a:pPr lvl="0" indent="0" marL="0">
+              <a:buNone/>
+            </a:pPr>
+            <a:r>
+              <a:rPr/>
+              <a:t>Target: 1:38. This is the key insight to land hard. In SDP, you encode uncertainty into a probability model inside the equation. In DPS, you draw scenarios and simulate. Students have been drawing scenarios and simulating since Week 4. Function classes for π: simple threshold rules, radial basis functions, neural networks. The choice is a modeling decision. DPS scales much better than SDP: 10 parameters instead of a full value function over a discretized state space. Optimizer: often an evolutionary algorithm (can handle non-smooth, high-dimensional θ search).</a:t>
+            </a:r>
+          </a:p>
+        </p:txBody>
+      </p:sp>
+      <p:sp>
+        <p:nvSpPr>
+          <p:cNvPr id="4" name="Slide Number Placeholder 3"/>
+          <p:cNvSpPr>
+            <a:spLocks noGrp="1"/>
+          </p:cNvSpPr>
+          <p:nvPr>
+            <p:ph type="sldNum" sz="quarter" idx="10"/>
+          </p:nvPr>
+        </p:nvSpPr>
+        <p:spPr/>
+        <p:txBody>
+          <a:bodyPr/>
+          <a:lstStyle/>
+          <a:p>
+            <a:fld id="{18BDFEC3-8487-43E8-A154-7C12CBC1FFF2}" type="slidenum">
+              <a:rPr lang="en-US"/>
+              <a:t>16</a:t>
+            </a:fld>
+            <a:endParaRPr lang="en-US"/>
+          </a:p>
+        </p:txBody>
+      </p:sp>
+    </p:spTree>
+  </p:cSld>
+</p:notes>
+</file>
+
+<file path=ppt/notesSlides/notesSlide13.xml><?xml version="1.0" encoding="utf-8"?>
+<p:notes xmlns:a="http://schemas.openxmlformats.org/drawingml/2006/main" xmlns:r="http://schemas.openxmlformats.org/officeDocument/2006/relationships" xmlns:p="http://schemas.openxmlformats.org/presentationml/2006/main">
+  <p:cSld>
+    <p:spTree>
+      <p:nvGrpSpPr>
+        <p:cNvPr id="1" name=""/>
+        <p:cNvGrpSpPr/>
+        <p:nvPr/>
+      </p:nvGrpSpPr>
+      <p:grpSpPr>
+        <a:xfrm>
+          <a:off x="0" y="0"/>
+          <a:ext cx="0" cy="0"/>
+          <a:chOff x="0" y="0"/>
+          <a:chExt cx="0" cy="0"/>
+        </a:xfrm>
+      </p:grpSpPr>
+      <p:sp>
+        <p:nvSpPr>
+          <p:cNvPr id="2" name="Slide Image Placeholder 1"/>
+          <p:cNvSpPr>
+            <a:spLocks noGrp="1" noRot="1" noChangeAspect="1"/>
+          </p:cNvSpPr>
+          <p:nvPr>
+            <p:ph type="sldImg"/>
+          </p:nvPr>
+        </p:nvSpPr>
+        <p:spPr/>
+      </p:sp>
+      <p:sp>
+        <p:nvSpPr>
+          <p:cNvPr id="3" name="Notes Placeholder 2"/>
+          <p:cNvSpPr>
+            <a:spLocks noGrp="1"/>
+          </p:cNvSpPr>
+          <p:nvPr>
+            <p:ph type="body" idx="1"/>
+          </p:nvPr>
+        </p:nvSpPr>
+        <p:spPr/>
+        <p:txBody>
+          <a:bodyPr/>
+          <a:lstStyle/>
+          <a:p>
+            <a:pPr lvl="0" indent="0" marL="0">
+              <a:buNone/>
+            </a:pPr>
+            <a:r>
+              <a:rPr/>
+              <a:t>Target: 1:41. The figure makes the idea vivid without requiring students to have read the paper. Key observation: the intertemporal policy is a single rigid staircase — same for every scenario. The DPS policy adapts: under the high-SLR scenario (red) it builds aggressively; under the low-SLR scenario (green) it barely builds at all. Result: DPS achieves lower cost AND lower damages — it dominates the intertemporal approach. Save the detailed mechanics (what exactly the state variables are, the Pareto comparison) for Wednesday’s discussion.</a:t>
+            </a:r>
+          </a:p>
+        </p:txBody>
+      </p:sp>
+      <p:sp>
+        <p:nvSpPr>
+          <p:cNvPr id="4" name="Slide Number Placeholder 3"/>
+          <p:cNvSpPr>
+            <a:spLocks noGrp="1"/>
+          </p:cNvSpPr>
+          <p:nvPr>
+            <p:ph type="sldNum" sz="quarter" idx="10"/>
+          </p:nvPr>
+        </p:nvSpPr>
+        <p:spPr/>
+        <p:txBody>
+          <a:bodyPr/>
+          <a:lstStyle/>
+          <a:p>
+            <a:fld id="{18BDFEC3-8487-43E8-A154-7C12CBC1FFF2}" type="slidenum">
+              <a:rPr lang="en-US"/>
+              <a:t>17</a:t>
+            </a:fld>
+            <a:endParaRPr lang="en-US"/>
+          </a:p>
+        </p:txBody>
+      </p:sp>
+    </p:spTree>
+  </p:cSld>
+</p:notes>
+</file>
+
+<file path=ppt/notesSlides/notesSlide14.xml><?xml version="1.0" encoding="utf-8"?>
+<p:notes xmlns:a="http://schemas.openxmlformats.org/drawingml/2006/main" xmlns:r="http://schemas.openxmlformats.org/officeDocument/2006/relationships" xmlns:p="http://schemas.openxmlformats.org/presentationml/2006/main">
+  <p:cSld>
+    <p:spTree>
+      <p:nvGrpSpPr>
+        <p:cNvPr id="1" name=""/>
+        <p:cNvGrpSpPr/>
+        <p:nvPr/>
+      </p:nvGrpSpPr>
+      <p:grpSpPr>
+        <a:xfrm>
+          <a:off x="0" y="0"/>
+          <a:ext cx="0" cy="0"/>
+          <a:chOff x="0" y="0"/>
+          <a:chExt cx="0" cy="0"/>
+        </a:xfrm>
+      </p:grpSpPr>
+      <p:sp>
+        <p:nvSpPr>
+          <p:cNvPr id="2" name="Slide Image Placeholder 1"/>
+          <p:cNvSpPr>
+            <a:spLocks noGrp="1" noRot="1" noChangeAspect="1"/>
+          </p:cNvSpPr>
+          <p:nvPr>
+            <p:ph type="sldImg"/>
+          </p:nvPr>
+        </p:nvSpPr>
+        <p:spPr/>
+      </p:sp>
+      <p:sp>
+        <p:nvSpPr>
+          <p:cNvPr id="3" name="Notes Placeholder 2"/>
+          <p:cNvSpPr>
+            <a:spLocks noGrp="1"/>
+          </p:cNvSpPr>
+          <p:nvPr>
+            <p:ph type="body" idx="1"/>
+          </p:nvPr>
+        </p:nvSpPr>
+        <p:spPr/>
+        <p:txBody>
+          <a:bodyPr/>
+          <a:lstStyle/>
+          <a:p>
+            <a:pPr lvl="0" indent="0" marL="0">
+              <a:buNone/>
+            </a:pPr>
+            <a:r>
+              <a:rPr/>
+              <a:t>Target: 1:44. The false positive / false negative framing connects to frequentist hypothesis testing students know from statistics. The thermodynamic vs. dynamic distinction from Herman: sea level is a cleaner signal than precipitation. This affects what you should be watching. We’ll revisit indicator selection more carefully next week with case studies.</a:t>
+            </a:r>
+          </a:p>
+        </p:txBody>
+      </p:sp>
+      <p:sp>
+        <p:nvSpPr>
+          <p:cNvPr id="4" name="Slide Number Placeholder 3"/>
+          <p:cNvSpPr>
+            <a:spLocks noGrp="1"/>
+          </p:cNvSpPr>
+          <p:nvPr>
+            <p:ph type="sldNum" sz="quarter" idx="10"/>
+          </p:nvPr>
+        </p:nvSpPr>
+        <p:spPr/>
+        <p:txBody>
+          <a:bodyPr/>
+          <a:lstStyle/>
+          <a:p>
+            <a:fld id="{18BDFEC3-8487-43E8-A154-7C12CBC1FFF2}" type="slidenum">
+              <a:rPr lang="en-US"/>
+              <a:t>18</a:t>
+            </a:fld>
+            <a:endParaRPr lang="en-US"/>
+          </a:p>
+        </p:txBody>
+      </p:sp>
+    </p:spTree>
+  </p:cSld>
+</p:notes>
+</file>
+
+<file path=ppt/notesSlides/notesSlide15.xml><?xml version="1.0" encoding="utf-8"?>
+<p:notes xmlns:a="http://schemas.openxmlformats.org/drawingml/2006/main" xmlns:r="http://schemas.openxmlformats.org/officeDocument/2006/relationships" xmlns:p="http://schemas.openxmlformats.org/presentationml/2006/main">
+  <p:cSld>
+    <p:spTree>
+      <p:nvGrpSpPr>
+        <p:cNvPr id="1" name=""/>
+        <p:cNvGrpSpPr/>
+        <p:nvPr/>
+      </p:nvGrpSpPr>
+      <p:grpSpPr>
+        <a:xfrm>
+          <a:off x="0" y="0"/>
+          <a:ext cx="0" cy="0"/>
+          <a:chOff x="0" y="0"/>
+          <a:chExt cx="0" cy="0"/>
+        </a:xfrm>
+      </p:grpSpPr>
+      <p:sp>
+        <p:nvSpPr>
+          <p:cNvPr id="2" name="Slide Image Placeholder 1"/>
+          <p:cNvSpPr>
+            <a:spLocks noGrp="1" noRot="1" noChangeAspect="1"/>
+          </p:cNvSpPr>
+          <p:nvPr>
+            <p:ph type="sldImg"/>
+          </p:nvPr>
+        </p:nvSpPr>
+        <p:spPr/>
+      </p:sp>
+      <p:sp>
+        <p:nvSpPr>
+          <p:cNvPr id="3" name="Notes Placeholder 2"/>
+          <p:cNvSpPr>
+            <a:spLocks noGrp="1"/>
+          </p:cNvSpPr>
+          <p:nvPr>
+            <p:ph type="body" idx="1"/>
+          </p:nvPr>
+        </p:nvSpPr>
+        <p:spPr/>
+        <p:txBody>
+          <a:bodyPr/>
+          <a:lstStyle/>
+          <a:p>
+            <a:pPr lvl="0" indent="0" marL="0">
+              <a:buNone/>
+            </a:pPr>
+            <a:r>
+              <a:rPr/>
+              <a:t>Target: 1:46. This is the payoff of the opening. The connection should feel satisfying — we’ve been building toward this since slide 1. “Building in the real option” = choosing a state transition function </a:t>
+            </a:r>
+            <a:r>
+              <a:rPr/>
+              <a:t>f</a:t>
+            </a:r>
+            <a:r>
+              <a:rPr/>
+              <a:t> that makes certain future actions possible. You can only build the extra floors if the columns were reinforced.</a:t>
+            </a:r>
+          </a:p>
+        </p:txBody>
+      </p:sp>
+      <p:sp>
+        <p:nvSpPr>
+          <p:cNvPr id="4" name="Slide Number Placeholder 3"/>
+          <p:cNvSpPr>
+            <a:spLocks noGrp="1"/>
+          </p:cNvSpPr>
+          <p:nvPr>
+            <p:ph type="sldNum" sz="quarter" idx="10"/>
+          </p:nvPr>
+        </p:nvSpPr>
+        <p:spPr/>
+        <p:txBody>
+          <a:bodyPr/>
+          <a:lstStyle/>
+          <a:p>
+            <a:fld id="{18BDFEC3-8487-43E8-A154-7C12CBC1FFF2}" type="slidenum">
+              <a:rPr lang="en-US"/>
+              <a:t>19</a:t>
+            </a:fld>
+            <a:endParaRPr lang="en-US"/>
+          </a:p>
+        </p:txBody>
+      </p:sp>
+    </p:spTree>
+  </p:cSld>
+</p:notes>
+</file>
+
+<file path=ppt/notesSlides/notesSlide16.xml><?xml version="1.0" encoding="utf-8"?>
+<p:notes xmlns:a="http://schemas.openxmlformats.org/drawingml/2006/main" xmlns:r="http://schemas.openxmlformats.org/officeDocument/2006/relationships" xmlns:p="http://schemas.openxmlformats.org/presentationml/2006/main">
+  <p:cSld>
+    <p:spTree>
+      <p:nvGrpSpPr>
+        <p:cNvPr id="1" name=""/>
+        <p:cNvGrpSpPr/>
+        <p:nvPr/>
+      </p:nvGrpSpPr>
+      <p:grpSpPr>
+        <a:xfrm>
+          <a:off x="0" y="0"/>
+          <a:ext cx="0" cy="0"/>
+          <a:chOff x="0" y="0"/>
+          <a:chExt cx="0" cy="0"/>
+        </a:xfrm>
+      </p:grpSpPr>
+      <p:sp>
+        <p:nvSpPr>
+          <p:cNvPr id="2" name="Slide Image Placeholder 1"/>
+          <p:cNvSpPr>
+            <a:spLocks noGrp="1" noRot="1" noChangeAspect="1"/>
+          </p:cNvSpPr>
+          <p:nvPr>
+            <p:ph type="sldImg"/>
+          </p:nvPr>
+        </p:nvSpPr>
+        <p:spPr/>
+      </p:sp>
+      <p:sp>
+        <p:nvSpPr>
+          <p:cNvPr id="3" name="Notes Placeholder 2"/>
+          <p:cNvSpPr>
+            <a:spLocks noGrp="1"/>
+          </p:cNvSpPr>
+          <p:nvPr>
+            <p:ph type="body" idx="1"/>
+          </p:nvPr>
+        </p:nvSpPr>
+        <p:spPr/>
+        <p:txBody>
+          <a:bodyPr/>
+          <a:lstStyle/>
+          <a:p>
+            <a:pPr lvl="0" indent="0" marL="0">
+              <a:buNone/>
+            </a:pPr>
+            <a:r>
+              <a:rPr/>
+              <a:t>Target: 1:48. The distinction matters practically: a policy evaluated robustly may still have been designed against a narrow set of scenarios. If the future is outside that envelope, the policy may fail.</a:t>
+            </a:r>
+          </a:p>
+        </p:txBody>
+      </p:sp>
+      <p:sp>
+        <p:nvSpPr>
+          <p:cNvPr id="4" name="Slide Number Placeholder 3"/>
+          <p:cNvSpPr>
+            <a:spLocks noGrp="1"/>
+          </p:cNvSpPr>
+          <p:nvPr>
+            <p:ph type="sldNum" sz="quarter" idx="10"/>
+          </p:nvPr>
+        </p:nvSpPr>
+        <p:spPr/>
+        <p:txBody>
+          <a:bodyPr/>
+          <a:lstStyle/>
+          <a:p>
+            <a:fld id="{18BDFEC3-8487-43E8-A154-7C12CBC1FFF2}" type="slidenum">
+              <a:rPr lang="en-US"/>
+              <a:t>20</a:t>
+            </a:fld>
+            <a:endParaRPr lang="en-US"/>
+          </a:p>
+        </p:txBody>
+      </p:sp>
+    </p:spTree>
+  </p:cSld>
+</p:notes>
+</file>
+
+<file path=ppt/notesSlides/notesSlide17.xml><?xml version="1.0" encoding="utf-8"?>
+<p:notes xmlns:a="http://schemas.openxmlformats.org/drawingml/2006/main" xmlns:r="http://schemas.openxmlformats.org/officeDocument/2006/relationships" xmlns:p="http://schemas.openxmlformats.org/presentationml/2006/main">
+  <p:cSld>
+    <p:spTree>
+      <p:nvGrpSpPr>
+        <p:cNvPr id="1" name=""/>
+        <p:cNvGrpSpPr/>
+        <p:nvPr/>
+      </p:nvGrpSpPr>
+      <p:grpSpPr>
+        <a:xfrm>
+          <a:off x="0" y="0"/>
+          <a:ext cx="0" cy="0"/>
+          <a:chOff x="0" y="0"/>
+          <a:chExt cx="0" cy="0"/>
+        </a:xfrm>
+      </p:grpSpPr>
+      <p:sp>
+        <p:nvSpPr>
+          <p:cNvPr id="2" name="Slide Image Placeholder 1"/>
+          <p:cNvSpPr>
+            <a:spLocks noGrp="1" noRot="1" noChangeAspect="1"/>
+          </p:cNvSpPr>
+          <p:nvPr>
+            <p:ph type="sldImg"/>
+          </p:nvPr>
+        </p:nvSpPr>
+        <p:spPr/>
+      </p:sp>
+      <p:sp>
+        <p:nvSpPr>
+          <p:cNvPr id="3" name="Notes Placeholder 2"/>
+          <p:cNvSpPr>
+            <a:spLocks noGrp="1"/>
+          </p:cNvSpPr>
+          <p:nvPr>
+            <p:ph type="body" idx="1"/>
+          </p:nvPr>
+        </p:nvSpPr>
+        <p:spPr/>
+        <p:txBody>
+          <a:bodyPr/>
+          <a:lstStyle/>
+          <a:p>
+            <a:pPr lvl="0" indent="0" marL="0">
+              <a:buNone/>
+            </a:pPr>
+            <a:r>
+              <a:rPr/>
+              <a:t>Target: 1:49. Five possible outcomes for a policy tested out-of-sample: 1. Meets requirement — good 2. Overfit — performs well in training, not in validation; need more/different scenarios 3. Action-constrained — even perfect foresight can’t meet target; need different actions 4. Information-constrained — perfect foresight works but your policy doesn’t; need better indicator variables 5. No adaptation needed — target met without doing anything; maybe you already have enough robustness The distinction between cases 3 and 4 is especially useful: it tells you whether you need to change WHAT you can do vs. WHAT you observe.</a:t>
+            </a:r>
+          </a:p>
+        </p:txBody>
+      </p:sp>
+      <p:sp>
+        <p:nvSpPr>
+          <p:cNvPr id="4" name="Slide Number Placeholder 3"/>
+          <p:cNvSpPr>
+            <a:spLocks noGrp="1"/>
+          </p:cNvSpPr>
+          <p:nvPr>
+            <p:ph type="sldNum" sz="quarter" idx="10"/>
+          </p:nvPr>
+        </p:nvSpPr>
+        <p:spPr/>
+        <p:txBody>
+          <a:bodyPr/>
+          <a:lstStyle/>
+          <a:p>
+            <a:fld id="{18BDFEC3-8487-43E8-A154-7C12CBC1FFF2}" type="slidenum">
+              <a:rPr lang="en-US"/>
+              <a:t>21</a:t>
+            </a:fld>
+            <a:endParaRPr lang="en-US"/>
+          </a:p>
+        </p:txBody>
+      </p:sp>
+    </p:spTree>
+  </p:cSld>
+</p:notes>
+</file>
+
+<file path=ppt/notesSlides/notesSlide18.xml><?xml version="1.0" encoding="utf-8"?>
+<p:notes xmlns:a="http://schemas.openxmlformats.org/drawingml/2006/main" xmlns:r="http://schemas.openxmlformats.org/officeDocument/2006/relationships" xmlns:p="http://schemas.openxmlformats.org/presentationml/2006/main">
+  <p:cSld>
+    <p:spTree>
+      <p:nvGrpSpPr>
+        <p:cNvPr id="1" name=""/>
+        <p:cNvGrpSpPr/>
+        <p:nvPr/>
+      </p:nvGrpSpPr>
+      <p:grpSpPr>
+        <a:xfrm>
+          <a:off x="0" y="0"/>
+          <a:ext cx="0" cy="0"/>
+          <a:chOff x="0" y="0"/>
+          <a:chExt cx="0" cy="0"/>
+        </a:xfrm>
+      </p:grpSpPr>
+      <p:sp>
+        <p:nvSpPr>
+          <p:cNvPr id="2" name="Slide Image Placeholder 1"/>
+          <p:cNvSpPr>
+            <a:spLocks noGrp="1" noRot="1" noChangeAspect="1"/>
+          </p:cNvSpPr>
+          <p:nvPr>
+            <p:ph type="sldImg"/>
+          </p:nvPr>
+        </p:nvSpPr>
+        <p:spPr/>
+      </p:sp>
+      <p:sp>
+        <p:nvSpPr>
+          <p:cNvPr id="3" name="Notes Placeholder 2"/>
+          <p:cNvSpPr>
+            <a:spLocks noGrp="1"/>
+          </p:cNvSpPr>
+          <p:nvPr>
+            <p:ph type="body" idx="1"/>
+          </p:nvPr>
+        </p:nvSpPr>
+        <p:spPr/>
+        <p:txBody>
+          <a:bodyPr/>
+          <a:lstStyle/>
+          <a:p>
+            <a:pPr lvl="0" indent="0" marL="0">
+              <a:buNone/>
+            </a:pPr>
+            <a:r>
+              <a:rPr/>
+              <a:t>Target: 1:50. Flag the error in Garner/Keller clearly so students know before discussion. The summary list should feel like a coherent arc, not a bag of concepts.</a:t>
+            </a:r>
+          </a:p>
+        </p:txBody>
+      </p:sp>
+      <p:sp>
+        <p:nvSpPr>
+          <p:cNvPr id="4" name="Slide Number Placeholder 3"/>
+          <p:cNvSpPr>
+            <a:spLocks noGrp="1"/>
+          </p:cNvSpPr>
+          <p:nvPr>
+            <p:ph type="sldNum" sz="quarter" idx="10"/>
+          </p:nvPr>
+        </p:nvSpPr>
+        <p:spPr/>
+        <p:txBody>
+          <a:bodyPr/>
+          <a:lstStyle/>
+          <a:p>
+            <a:fld id="{18BDFEC3-8487-43E8-A154-7C12CBC1FFF2}" type="slidenum">
+              <a:rPr lang="en-US"/>
+              <a:t>22</a:t>
+            </a:fld>
+            <a:endParaRPr lang="en-US"/>
+          </a:p>
+        </p:txBody>
+      </p:sp>
+    </p:spTree>
+  </p:cSld>
+</p:notes>
+</file>
+
+<file path=ppt/notesSlides/notesSlide19.xml><?xml version="1.0" encoding="utf-8"?>
+<p:notes xmlns:a="http://schemas.openxmlformats.org/drawingml/2006/main" xmlns:r="http://schemas.openxmlformats.org/officeDocument/2006/relationships" xmlns:p="http://schemas.openxmlformats.org/presentationml/2006/main">
+  <p:cSld>
+    <p:spTree>
+      <p:nvGrpSpPr>
+        <p:cNvPr id="1" name=""/>
+        <p:cNvGrpSpPr/>
+        <p:nvPr/>
+      </p:nvGrpSpPr>
+      <p:grpSpPr>
+        <a:xfrm>
+          <a:off x="0" y="0"/>
+          <a:ext cx="0" cy="0"/>
+          <a:chOff x="0" y="0"/>
+          <a:chExt cx="0" cy="0"/>
+        </a:xfrm>
+      </p:grpSpPr>
+      <p:sp>
+        <p:nvSpPr>
+          <p:cNvPr id="2" name="Slide Image Placeholder 1"/>
+          <p:cNvSpPr>
+            <a:spLocks noGrp="1" noRot="1" noChangeAspect="1"/>
+          </p:cNvSpPr>
+          <p:nvPr>
+            <p:ph type="sldImg"/>
+          </p:nvPr>
+        </p:nvSpPr>
+        <p:spPr/>
+      </p:sp>
+      <p:sp>
+        <p:nvSpPr>
+          <p:cNvPr id="3" name="Notes Placeholder 2"/>
+          <p:cNvSpPr>
+            <a:spLocks noGrp="1"/>
+          </p:cNvSpPr>
+          <p:nvPr>
+            <p:ph type="body" idx="1"/>
+          </p:nvPr>
+        </p:nvSpPr>
+        <p:spPr/>
+        <p:txBody>
+          <a:bodyPr/>
+          <a:lstStyle/>
+          <a:p>
+            <a:pPr lvl="0" indent="0" marL="0">
+              <a:buNone/>
+            </a:pPr>
+            <a:r>
+              <a:rPr/>
+              <a:t>References slide — no notes needed.</a:t>
+            </a:r>
+          </a:p>
+        </p:txBody>
+      </p:sp>
+      <p:sp>
+        <p:nvSpPr>
+          <p:cNvPr id="4" name="Slide Number Placeholder 3"/>
+          <p:cNvSpPr>
+            <a:spLocks noGrp="1"/>
+          </p:cNvSpPr>
+          <p:nvPr>
+            <p:ph type="sldNum" sz="quarter" idx="10"/>
+          </p:nvPr>
+        </p:nvSpPr>
+        <p:spPr/>
+        <p:txBody>
+          <a:bodyPr/>
+          <a:lstStyle/>
+          <a:p>
+            <a:fld id="{18BDFEC3-8487-43E8-A154-7C12CBC1FFF2}" type="slidenum">
+              <a:rPr lang="en-US"/>
+              <a:t>23</a:t>
+            </a:fld>
+            <a:endParaRPr lang="en-US"/>
+          </a:p>
+        </p:txBody>
+      </p:sp>
+    </p:spTree>
+  </p:cSld>
+</p:notes>
+</file>
+
+<file path=ppt/notesSlides/notesSlide2.xml><?xml version="1.0" encoding="utf-8"?>
+<p:notes xmlns:a="http://schemas.openxmlformats.org/drawingml/2006/main" xmlns:r="http://schemas.openxmlformats.org/officeDocument/2006/relationships" xmlns:p="http://schemas.openxmlformats.org/presentationml/2006/main">
+  <p:cSld>
+    <p:spTree>
+      <p:nvGrpSpPr>
+        <p:cNvPr id="1" name=""/>
+        <p:cNvGrpSpPr/>
+        <p:nvPr/>
+      </p:nvGrpSpPr>
+      <p:grpSpPr>
+        <a:xfrm>
+          <a:off x="0" y="0"/>
+          <a:ext cx="0" cy="0"/>
+          <a:chOff x="0" y="0"/>
+          <a:chExt cx="0" cy="0"/>
+        </a:xfrm>
+      </p:grpSpPr>
+      <p:sp>
+        <p:nvSpPr>
+          <p:cNvPr id="2" name="Slide Image Placeholder 1"/>
+          <p:cNvSpPr>
+            <a:spLocks noGrp="1" noRot="1" noChangeAspect="1"/>
+          </p:cNvSpPr>
+          <p:nvPr>
+            <p:ph type="sldImg"/>
+          </p:nvPr>
+        </p:nvSpPr>
+        <p:spPr/>
+      </p:sp>
+      <p:sp>
+        <p:nvSpPr>
+          <p:cNvPr id="3" name="Notes Placeholder 2"/>
+          <p:cNvSpPr>
+            <a:spLocks noGrp="1"/>
+          </p:cNvSpPr>
+          <p:nvPr>
+            <p:ph type="body" idx="1"/>
+          </p:nvPr>
+        </p:nvSpPr>
+        <p:spPr/>
+        <p:txBody>
+          <a:bodyPr/>
+          <a:lstStyle/>
+          <a:p>
+            <a:pPr lvl="0" indent="0" marL="0">
+              <a:buNone/>
+            </a:pPr>
+            <a:r>
+              <a:rPr/>
+              <a:t>Target: 1:06. The asymmetry point is key: you only exercise when good, so bad outcomes don’t cost you the extra investment. This will connect naturally to the formal framework — a real option IS a policy with a rule.</a:t>
+            </a:r>
+          </a:p>
+        </p:txBody>
+      </p:sp>
+      <p:sp>
+        <p:nvSpPr>
+          <p:cNvPr id="4" name="Slide Number Placeholder 3"/>
+          <p:cNvSpPr>
+            <a:spLocks noGrp="1"/>
+          </p:cNvSpPr>
+          <p:nvPr>
+            <p:ph type="sldNum" sz="quarter" idx="10"/>
+          </p:nvPr>
+        </p:nvSpPr>
+        <p:spPr/>
+        <p:txBody>
+          <a:bodyPr/>
+          <a:lstStyle/>
+          <a:p>
+            <a:fld id="{18BDFEC3-8487-43E8-A154-7C12CBC1FFF2}" type="slidenum">
+              <a:rPr lang="en-US"/>
+              <a:t>4</a:t>
+            </a:fld>
+            <a:endParaRPr lang="en-US"/>
+          </a:p>
+        </p:txBody>
+      </p:sp>
+    </p:spTree>
+  </p:cSld>
+</p:notes>
+</file>
+
+<file path=ppt/notesSlides/notesSlide3.xml><?xml version="1.0" encoding="utf-8"?>
+<p:notes xmlns:a="http://schemas.openxmlformats.org/drawingml/2006/main" xmlns:r="http://schemas.openxmlformats.org/officeDocument/2006/relationships" xmlns:p="http://schemas.openxmlformats.org/presentationml/2006/main">
+  <p:cSld>
+    <p:spTree>
+      <p:nvGrpSpPr>
+        <p:cNvPr id="1" name=""/>
+        <p:cNvGrpSpPr/>
+        <p:nvPr/>
+      </p:nvGrpSpPr>
+      <p:grpSpPr>
+        <a:xfrm>
+          <a:off x="0" y="0"/>
+          <a:ext cx="0" cy="0"/>
+          <a:chOff x="0" y="0"/>
+          <a:chExt cx="0" cy="0"/>
+        </a:xfrm>
+      </p:grpSpPr>
+      <p:sp>
+        <p:nvSpPr>
+          <p:cNvPr id="2" name="Slide Image Placeholder 1"/>
+          <p:cNvSpPr>
+            <a:spLocks noGrp="1" noRot="1" noChangeAspect="1"/>
+          </p:cNvSpPr>
+          <p:nvPr>
+            <p:ph type="sldImg"/>
+          </p:nvPr>
+        </p:nvSpPr>
+        <p:spPr/>
+      </p:sp>
+      <p:sp>
+        <p:nvSpPr>
+          <p:cNvPr id="3" name="Notes Placeholder 2"/>
+          <p:cNvSpPr>
+            <a:spLocks noGrp="1"/>
+          </p:cNvSpPr>
+          <p:nvPr>
+            <p:ph type="body" idx="1"/>
+          </p:nvPr>
+        </p:nvSpPr>
+        <p:spPr/>
+        <p:txBody>
+          <a:bodyPr/>
+          <a:lstStyle/>
+          <a:p>
+            <a:pPr lvl="0" indent="0" marL="0">
+              <a:buNone/>
+            </a:pPr>
+            <a:r>
+              <a:rPr/>
+              <a:t>Target: 1:10. Walk through the table. The flexible design actually costs LESS upfront (build 4 floors, not 6) AND has higher ENPV. The columns cost extra, but you avoid the cost of over-building. The VaR figure makes the asymmetry vivid: the rigid design has a long left tail; the flexible design truncates it. Don’t over-explain — they’ll go deep on Wednesday. Just establish the pattern.</a:t>
+            </a:r>
+          </a:p>
+        </p:txBody>
+      </p:sp>
+      <p:sp>
+        <p:nvSpPr>
+          <p:cNvPr id="4" name="Slide Number Placeholder 3"/>
+          <p:cNvSpPr>
+            <a:spLocks noGrp="1"/>
+          </p:cNvSpPr>
+          <p:nvPr>
+            <p:ph type="sldNum" sz="quarter" idx="10"/>
+          </p:nvPr>
+        </p:nvSpPr>
+        <p:spPr/>
+        <p:txBody>
+          <a:bodyPr/>
+          <a:lstStyle/>
+          <a:p>
+            <a:fld id="{18BDFEC3-8487-43E8-A154-7C12CBC1FFF2}" type="slidenum">
+              <a:rPr lang="en-US"/>
+              <a:t>6</a:t>
+            </a:fld>
+            <a:endParaRPr lang="en-US"/>
+          </a:p>
+        </p:txBody>
+      </p:sp>
+    </p:spTree>
+  </p:cSld>
+</p:notes>
+</file>
+
+<file path=ppt/notesSlides/notesSlide4.xml><?xml version="1.0" encoding="utf-8"?>
+<p:notes xmlns:a="http://schemas.openxmlformats.org/drawingml/2006/main" xmlns:r="http://schemas.openxmlformats.org/officeDocument/2006/relationships" xmlns:p="http://schemas.openxmlformats.org/presentationml/2006/main">
+  <p:cSld>
+    <p:spTree>
+      <p:nvGrpSpPr>
+        <p:cNvPr id="1" name=""/>
+        <p:cNvGrpSpPr/>
+        <p:nvPr/>
+      </p:nvGrpSpPr>
+      <p:grpSpPr>
+        <a:xfrm>
+          <a:off x="0" y="0"/>
+          <a:ext cx="0" cy="0"/>
+          <a:chOff x="0" y="0"/>
+          <a:chExt cx="0" cy="0"/>
+        </a:xfrm>
+      </p:grpSpPr>
+      <p:sp>
+        <p:nvSpPr>
+          <p:cNvPr id="2" name="Slide Image Placeholder 1"/>
+          <p:cNvSpPr>
+            <a:spLocks noGrp="1" noRot="1" noChangeAspect="1"/>
+          </p:cNvSpPr>
+          <p:nvPr>
+            <p:ph type="sldImg"/>
+          </p:nvPr>
+        </p:nvSpPr>
+        <p:spPr/>
+      </p:sp>
+      <p:sp>
+        <p:nvSpPr>
+          <p:cNvPr id="3" name="Notes Placeholder 2"/>
+          <p:cNvSpPr>
+            <a:spLocks noGrp="1"/>
+          </p:cNvSpPr>
+          <p:nvPr>
+            <p:ph type="body" idx="1"/>
+          </p:nvPr>
+        </p:nvSpPr>
+        <p:spPr/>
+        <p:txBody>
+          <a:bodyPr/>
+          <a:lstStyle/>
+          <a:p>
+            <a:pPr lvl="0" indent="0" marL="0">
+              <a:buNone/>
+            </a:pPr>
+            <a:r>
+              <a:rPr/>
+              <a:t>Target: 1:13. Make the transition crisp. This is the pivot from Module 2 to today. “Rule” is the key word — we’re not picking an action, we’re picking a mapping from observations to actions.</a:t>
+            </a:r>
+          </a:p>
+        </p:txBody>
+      </p:sp>
+      <p:sp>
+        <p:nvSpPr>
+          <p:cNvPr id="4" name="Slide Number Placeholder 3"/>
+          <p:cNvSpPr>
+            <a:spLocks noGrp="1"/>
+          </p:cNvSpPr>
+          <p:nvPr>
+            <p:ph type="sldNum" sz="quarter" idx="10"/>
+          </p:nvPr>
+        </p:nvSpPr>
+        <p:spPr/>
+        <p:txBody>
+          <a:bodyPr/>
+          <a:lstStyle/>
+          <a:p>
+            <a:fld id="{18BDFEC3-8487-43E8-A154-7C12CBC1FFF2}" type="slidenum">
+              <a:rPr lang="en-US"/>
+              <a:t>7</a:t>
+            </a:fld>
+            <a:endParaRPr lang="en-US"/>
+          </a:p>
+        </p:txBody>
+      </p:sp>
+    </p:spTree>
+  </p:cSld>
+</p:notes>
+</file>
+
+<file path=ppt/notesSlides/notesSlide5.xml><?xml version="1.0" encoding="utf-8"?>
+<p:notes xmlns:a="http://schemas.openxmlformats.org/drawingml/2006/main" xmlns:r="http://schemas.openxmlformats.org/officeDocument/2006/relationships" xmlns:p="http://schemas.openxmlformats.org/presentationml/2006/main">
+  <p:cSld>
+    <p:spTree>
+      <p:nvGrpSpPr>
+        <p:cNvPr id="1" name=""/>
+        <p:cNvGrpSpPr/>
+        <p:nvPr/>
+      </p:nvGrpSpPr>
+      <p:grpSpPr>
+        <a:xfrm>
+          <a:off x="0" y="0"/>
+          <a:ext cx="0" cy="0"/>
+          <a:chOff x="0" y="0"/>
+          <a:chExt cx="0" cy="0"/>
+        </a:xfrm>
+      </p:grpSpPr>
+      <p:sp>
+        <p:nvSpPr>
+          <p:cNvPr id="2" name="Slide Image Placeholder 1"/>
+          <p:cNvSpPr>
+            <a:spLocks noGrp="1" noRot="1" noChangeAspect="1"/>
+          </p:cNvSpPr>
+          <p:nvPr>
+            <p:ph type="sldImg"/>
+          </p:nvPr>
+        </p:nvSpPr>
+        <p:spPr/>
+      </p:sp>
+      <p:sp>
+        <p:nvSpPr>
+          <p:cNvPr id="3" name="Notes Placeholder 2"/>
+          <p:cNvSpPr>
+            <a:spLocks noGrp="1"/>
+          </p:cNvSpPr>
+          <p:nvPr>
+            <p:ph type="body" idx="1"/>
+          </p:nvPr>
+        </p:nvSpPr>
+        <p:spPr/>
+        <p:txBody>
+          <a:bodyPr/>
+          <a:lstStyle/>
+          <a:p>
+            <a:pPr lvl="0" indent="0" marL="0">
+              <a:buNone/>
+            </a:pPr>
+            <a:r>
+              <a:rPr/>
+              <a:t>Target: 1:15. Robust planning (Weeks 7–9): find alternatives that hold up across scenarios. Bottom-up, scenario-based. Students know this well. Dynamic planning (today): design policies that </a:t>
+            </a:r>
+            <a:r>
+              <a:rPr i="1"/>
+              <a:t>respond</a:t>
+            </a:r>
+            <a:r>
+              <a:rPr/>
+              <a:t> to new observations over time. Higher dependence on uncertainty characterization because you’re optimizing a sequence of decisions through time, not just a single action. A dynamic plan can also be robust; static robust plans tend toward overdesign because they can’t exploit information as it arrives. Point to the figure: dynamic planning is highlighted. Note that both can co-exist in practice.</a:t>
+            </a:r>
+          </a:p>
+        </p:txBody>
+      </p:sp>
+      <p:sp>
+        <p:nvSpPr>
+          <p:cNvPr id="4" name="Slide Number Placeholder 3"/>
+          <p:cNvSpPr>
+            <a:spLocks noGrp="1"/>
+          </p:cNvSpPr>
+          <p:nvPr>
+            <p:ph type="sldNum" sz="quarter" idx="10"/>
+          </p:nvPr>
+        </p:nvSpPr>
+        <p:spPr/>
+        <p:txBody>
+          <a:bodyPr/>
+          <a:lstStyle/>
+          <a:p>
+            <a:fld id="{18BDFEC3-8487-43E8-A154-7C12CBC1FFF2}" type="slidenum">
+              <a:rPr lang="en-US"/>
+              <a:t>8</a:t>
+            </a:fld>
+            <a:endParaRPr lang="en-US"/>
+          </a:p>
+        </p:txBody>
+      </p:sp>
+    </p:spTree>
+  </p:cSld>
+</p:notes>
+</file>
+
+<file path=ppt/notesSlides/notesSlide6.xml><?xml version="1.0" encoding="utf-8"?>
+<p:notes xmlns:a="http://schemas.openxmlformats.org/drawingml/2006/main" xmlns:r="http://schemas.openxmlformats.org/officeDocument/2006/relationships" xmlns:p="http://schemas.openxmlformats.org/presentationml/2006/main">
+  <p:cSld>
+    <p:spTree>
+      <p:nvGrpSpPr>
+        <p:cNvPr id="1" name=""/>
+        <p:cNvGrpSpPr/>
+        <p:nvPr/>
+      </p:nvGrpSpPr>
+      <p:grpSpPr>
+        <a:xfrm>
+          <a:off x="0" y="0"/>
+          <a:ext cx="0" cy="0"/>
+          <a:chOff x="0" y="0"/>
+          <a:chExt cx="0" cy="0"/>
+        </a:xfrm>
+      </p:grpSpPr>
+      <p:sp>
+        <p:nvSpPr>
+          <p:cNvPr id="2" name="Slide Image Placeholder 1"/>
+          <p:cNvSpPr>
+            <a:spLocks noGrp="1" noRot="1" noChangeAspect="1"/>
+          </p:cNvSpPr>
+          <p:nvPr>
+            <p:ph type="sldImg"/>
+          </p:nvPr>
+        </p:nvSpPr>
+        <p:spPr/>
+      </p:sp>
+      <p:sp>
+        <p:nvSpPr>
+          <p:cNvPr id="3" name="Notes Placeholder 2"/>
+          <p:cNvSpPr>
+            <a:spLocks noGrp="1"/>
+          </p:cNvSpPr>
+          <p:nvPr>
+            <p:ph type="body" idx="1"/>
+          </p:nvPr>
+        </p:nvSpPr>
+        <p:spPr/>
+        <p:txBody>
+          <a:bodyPr/>
+          <a:lstStyle/>
+          <a:p>
+            <a:pPr lvl="0" indent="0" marL="0">
+              <a:buNone/>
+            </a:pPr>
+            <a:r>
+              <a:rPr/>
+              <a:t>Target: 1:17. Walk students through the diagram carefully — this is the conceptual map for the lecture. Left box: the policy. Two flavors shown — SDP (value function Q, discretized states) and policy search (ANN or tree mapping I_t to a_t). We’ll discuss both. Top: the chain of forcing uncertainty — GHG emissions → GCM → regional climate → hydrology. This is the “cascade of uncertainty” from Herman. Center: the human-environmental system with its state transition f_t. This is where dike heights, reservoir levels, and infrastructure capacity live. Right: performance metrics J — cost, damages, reliability. The non-climate forcing arrow (economic, regulatory) is a nice reminder that human systems are also uncertain.</a:t>
+            </a:r>
+          </a:p>
+        </p:txBody>
+      </p:sp>
+      <p:sp>
+        <p:nvSpPr>
+          <p:cNvPr id="4" name="Slide Number Placeholder 3"/>
+          <p:cNvSpPr>
+            <a:spLocks noGrp="1"/>
+          </p:cNvSpPr>
+          <p:nvPr>
+            <p:ph type="sldNum" sz="quarter" idx="10"/>
+          </p:nvPr>
+        </p:nvSpPr>
+        <p:spPr/>
+        <p:txBody>
+          <a:bodyPr/>
+          <a:lstStyle/>
+          <a:p>
+            <a:fld id="{18BDFEC3-8487-43E8-A154-7C12CBC1FFF2}" type="slidenum">
+              <a:rPr lang="en-US"/>
+              <a:t>9</a:t>
+            </a:fld>
+            <a:endParaRPr lang="en-US"/>
+          </a:p>
+        </p:txBody>
+      </p:sp>
+    </p:spTree>
+  </p:cSld>
+</p:notes>
+</file>
+
+<file path=ppt/notesSlides/notesSlide7.xml><?xml version="1.0" encoding="utf-8"?>
+<p:notes xmlns:a="http://schemas.openxmlformats.org/drawingml/2006/main" xmlns:r="http://schemas.openxmlformats.org/officeDocument/2006/relationships" xmlns:p="http://schemas.openxmlformats.org/presentationml/2006/main">
+  <p:cSld>
+    <p:spTree>
+      <p:nvGrpSpPr>
+        <p:cNvPr id="1" name=""/>
+        <p:cNvGrpSpPr/>
+        <p:nvPr/>
+      </p:nvGrpSpPr>
+      <p:grpSpPr>
+        <a:xfrm>
+          <a:off x="0" y="0"/>
+          <a:ext cx="0" cy="0"/>
+          <a:chOff x="0" y="0"/>
+          <a:chExt cx="0" cy="0"/>
+        </a:xfrm>
+      </p:grpSpPr>
+      <p:sp>
+        <p:nvSpPr>
+          <p:cNvPr id="2" name="Slide Image Placeholder 1"/>
+          <p:cNvSpPr>
+            <a:spLocks noGrp="1" noRot="1" noChangeAspect="1"/>
+          </p:cNvSpPr>
+          <p:nvPr>
+            <p:ph type="sldImg"/>
+          </p:nvPr>
+        </p:nvSpPr>
+        <p:spPr/>
+      </p:sp>
+      <p:sp>
+        <p:nvSpPr>
+          <p:cNvPr id="3" name="Notes Placeholder 2"/>
+          <p:cNvSpPr>
+            <a:spLocks noGrp="1"/>
+          </p:cNvSpPr>
+          <p:nvPr>
+            <p:ph type="body" idx="1"/>
+          </p:nvPr>
+        </p:nvSpPr>
+        <p:spPr/>
+        <p:txBody>
+          <a:bodyPr/>
+          <a:lstStyle/>
+          <a:p>
+            <a:pPr lvl="0" indent="0" marL="0">
+              <a:buNone/>
+            </a:pPr>
+            <a:r>
+              <a:rPr/>
+              <a:t>Target: 1:20. Walk through the table one row at a time. “The dike height is a state — it’s a number we observe before we decide. The forcing is stochastic — we don’t know next year’s storm surge, but we do know the dike height right now.” The state transition equation: given where we are, what we do, and what happens, where do we end up?</a:t>
+            </a:r>
+          </a:p>
+        </p:txBody>
+      </p:sp>
+      <p:sp>
+        <p:nvSpPr>
+          <p:cNvPr id="4" name="Slide Number Placeholder 3"/>
+          <p:cNvSpPr>
+            <a:spLocks noGrp="1"/>
+          </p:cNvSpPr>
+          <p:nvPr>
+            <p:ph type="sldNum" sz="quarter" idx="10"/>
+          </p:nvPr>
+        </p:nvSpPr>
+        <p:spPr/>
+        <p:txBody>
+          <a:bodyPr/>
+          <a:lstStyle/>
+          <a:p>
+            <a:fld id="{18BDFEC3-8487-43E8-A154-7C12CBC1FFF2}" type="slidenum">
+              <a:rPr lang="en-US"/>
+              <a:t>11</a:t>
+            </a:fld>
+            <a:endParaRPr lang="en-US"/>
+          </a:p>
+        </p:txBody>
+      </p:sp>
+    </p:spTree>
+  </p:cSld>
+</p:notes>
+</file>
+
+<file path=ppt/notesSlides/notesSlide8.xml><?xml version="1.0" encoding="utf-8"?>
+<p:notes xmlns:a="http://schemas.openxmlformats.org/drawingml/2006/main" xmlns:r="http://schemas.openxmlformats.org/officeDocument/2006/relationships" xmlns:p="http://schemas.openxmlformats.org/presentationml/2006/main">
+  <p:cSld>
+    <p:spTree>
+      <p:nvGrpSpPr>
+        <p:cNvPr id="1" name=""/>
+        <p:cNvGrpSpPr/>
+        <p:nvPr/>
+      </p:nvGrpSpPr>
+      <p:grpSpPr>
+        <a:xfrm>
+          <a:off x="0" y="0"/>
+          <a:ext cx="0" cy="0"/>
+          <a:chOff x="0" y="0"/>
+          <a:chExt cx="0" cy="0"/>
+        </a:xfrm>
+      </p:grpSpPr>
+      <p:sp>
+        <p:nvSpPr>
+          <p:cNvPr id="2" name="Slide Image Placeholder 1"/>
+          <p:cNvSpPr>
+            <a:spLocks noGrp="1" noRot="1" noChangeAspect="1"/>
+          </p:cNvSpPr>
+          <p:nvPr>
+            <p:ph type="sldImg"/>
+          </p:nvPr>
+        </p:nvSpPr>
+        <p:spPr/>
+      </p:sp>
+      <p:sp>
+        <p:nvSpPr>
+          <p:cNvPr id="3" name="Notes Placeholder 2"/>
+          <p:cNvSpPr>
+            <a:spLocks noGrp="1"/>
+          </p:cNvSpPr>
+          <p:nvPr>
+            <p:ph type="body" idx="1"/>
+          </p:nvPr>
+        </p:nvSpPr>
+        <p:spPr/>
+        <p:txBody>
+          <a:bodyPr/>
+          <a:lstStyle/>
+          <a:p>
+            <a:pPr lvl="0" indent="0" marL="0">
+              <a:buNone/>
+            </a:pPr>
+            <a:r>
+              <a:rPr/>
+              <a:t>Target: 1:23. Dwell on the distinction: optimizing a rule vs. optimizing actions. In the static case, we pick numbers (dike height = 3.5m). In the sequential case, we pick a function (“raise the dike when the observed water level exceeds the buffer by X cm”). The expectation is over all the uncertainty in forcing — this connects to scenarios they’ve been using all semester. The subscript on the expectation, E_e, is important: we’re averaging over possible forcing trajectories. Each trajectory is a scenario. The last line sets up the three solution methods to follow.</a:t>
+            </a:r>
+          </a:p>
+        </p:txBody>
+      </p:sp>
+      <p:sp>
+        <p:nvSpPr>
+          <p:cNvPr id="4" name="Slide Number Placeholder 3"/>
+          <p:cNvSpPr>
+            <a:spLocks noGrp="1"/>
+          </p:cNvSpPr>
+          <p:nvPr>
+            <p:ph type="sldNum" sz="quarter" idx="10"/>
+          </p:nvPr>
+        </p:nvSpPr>
+        <p:spPr/>
+        <p:txBody>
+          <a:bodyPr/>
+          <a:lstStyle/>
+          <a:p>
+            <a:fld id="{18BDFEC3-8487-43E8-A154-7C12CBC1FFF2}" type="slidenum">
+              <a:rPr lang="en-US"/>
+              <a:t>12</a:t>
+            </a:fld>
+            <a:endParaRPr lang="en-US"/>
+          </a:p>
+        </p:txBody>
+      </p:sp>
+    </p:spTree>
+  </p:cSld>
+</p:notes>
+</file>
+
+<file path=ppt/notesSlides/notesSlide9.xml><?xml version="1.0" encoding="utf-8"?>
+<p:notes xmlns:a="http://schemas.openxmlformats.org/drawingml/2006/main" xmlns:r="http://schemas.openxmlformats.org/officeDocument/2006/relationships" xmlns:p="http://schemas.openxmlformats.org/presentationml/2006/main">
+  <p:cSld>
+    <p:spTree>
+      <p:nvGrpSpPr>
+        <p:cNvPr id="1" name=""/>
+        <p:cNvGrpSpPr/>
+        <p:nvPr/>
+      </p:nvGrpSpPr>
+      <p:grpSpPr>
+        <a:xfrm>
+          <a:off x="0" y="0"/>
+          <a:ext cx="0" cy="0"/>
+          <a:chOff x="0" y="0"/>
+          <a:chExt cx="0" cy="0"/>
+        </a:xfrm>
+      </p:grpSpPr>
+      <p:sp>
+        <p:nvSpPr>
+          <p:cNvPr id="2" name="Slide Image Placeholder 1"/>
+          <p:cNvSpPr>
+            <a:spLocks noGrp="1" noRot="1" noChangeAspect="1"/>
+          </p:cNvSpPr>
+          <p:nvPr>
+            <p:ph type="sldImg"/>
+          </p:nvPr>
+        </p:nvSpPr>
+        <p:spPr/>
+      </p:sp>
+      <p:sp>
+        <p:nvSpPr>
+          <p:cNvPr id="3" name="Notes Placeholder 2"/>
+          <p:cNvSpPr>
+            <a:spLocks noGrp="1"/>
+          </p:cNvSpPr>
+          <p:nvPr>
+            <p:ph type="body" idx="1"/>
+          </p:nvPr>
+        </p:nvSpPr>
+        <p:spPr/>
+        <p:txBody>
+          <a:bodyPr/>
+          <a:lstStyle/>
+          <a:p>
+            <a:pPr lvl="0" indent="0" marL="0">
+              <a:buNone/>
+            </a:pPr>
+            <a:r>
+              <a:rPr/>
+              <a:t>Target: 1:27. This taxonomy is directly from the paper. It’s useful because different uncertainty types call for different responses. Key insight: thermodynamic changes (SLR, snowpack loss) are more detectable and plannable around than dynamic changes (precipitation trends). That affects what indicator variables are useful. The last line is critical — foreshadows the validation discussion at the end.</a:t>
+            </a:r>
+          </a:p>
+        </p:txBody>
+      </p:sp>
+      <p:sp>
+        <p:nvSpPr>
+          <p:cNvPr id="4" name="Slide Number Placeholder 3"/>
+          <p:cNvSpPr>
+            <a:spLocks noGrp="1"/>
+          </p:cNvSpPr>
+          <p:nvPr>
+            <p:ph type="sldNum" sz="quarter" idx="10"/>
+          </p:nvPr>
+        </p:nvSpPr>
+        <p:spPr/>
+        <p:txBody>
+          <a:bodyPr/>
+          <a:lstStyle/>
+          <a:p>
+            <a:fld id="{18BDFEC3-8487-43E8-A154-7C12CBC1FFF2}" type="slidenum">
+              <a:rPr lang="en-US"/>
+              <a:t>13</a:t>
+            </a:fld>
+            <a:endParaRPr lang="en-US"/>
+          </a:p>
+        </p:txBody>
+      </p:sp>
+    </p:spTree>
+  </p:cSld>
+</p:notes>
 </file>
 
 <file path=ppt/slideLayouts/slideLayout1.xml><?xml version="1.0" encoding="utf-8"?>
@@ -3155,7 +5099,7 @@
             <a:br/>
             <a:r>
               <a:rPr/>
-              <a:t>Dr. James Doss-Gollin</a:t>
+              <a:t>James Doss-Gollin</a:t>
             </a:r>
           </a:p>
         </p:txBody>
@@ -3185,6 +5129,3965 @@
           </a:p>
         </p:txBody>
       </p:sp>
+    </p:spTree>
+  </p:cSld>
+</p:sld>
+</file>
+
+<file path=ppt/slides/slide10.xml><?xml version="1.0" encoding="UTF-8"?><p:sld xmlns:a="http://schemas.openxmlformats.org/drawingml/2006/main" xmlns:r="http://schemas.openxmlformats.org/officeDocument/2006/relationships" xmlns:p="http://schemas.openxmlformats.org/presentationml/2006/main"><p:cSld><p:spTree><p:nvGrpSpPr><p:cNvPr id="1" name="" /><p:cNvGrpSpPr /><p:nvPr /></p:nvGrpSpPr><p:grpSpPr><a:xfrm><a:off x="0" y="0" /><a:ext cx="0" cy="0" /><a:chOff x="0" y="0" /><a:chExt cx="0" cy="0" /></a:xfrm></p:grpSpPr><p:sp><p:nvSpPr><p:cNvPr id="2" name="Title 1" /><p:cNvSpPr><a:spLocks noGrp="1" /></p:cNvSpPr><p:nvPr><p:ph type="title" /></p:nvPr></p:nvSpPr><p:spPr><a:xfrm><a:off x="457201" y="204787" /><a:ext cx="3008313" cy="871538" /></a:xfrm></p:spPr><p:txBody><a:bodyPr /><a:lstStyle /><a:p><a:pPr lvl="0" indent="0" marL="0"><a:buNone /></a:pPr><a:r><a:rPr /><a:t>State, Action, Forcing</a:t></a:r></a:p></p:txBody></p:sp><mc:AlternateContent xmlns:mc="http://schemas.openxmlformats.org/markup-compatibility/2006"><mc:Choice xmlns:a14="http://schemas.microsoft.com/office/drawing/2010/main" Requires="a14"><p:sp><p:nvSpPr><p:cNvPr id="4" name="Text Placeholder 3" /><p:cNvSpPr><a:spLocks noGrp="1" /></p:cNvSpPr><p:nvPr><p:ph idx="2" sz="half" type="body" /></p:nvPr></p:nvSpPr><p:spPr /><p:txBody><a:bodyPr /><a:lstStyle /><a:p><a:pPr lvl="0" indent="0" marL="0"><a:buNone /></a:pPr><a:r><a:rPr /><a:t>Formal setup: at each time step </a:t></a:r><a14:m><m:oMath xmlns:m="http://schemas.openxmlformats.org/officeDocument/2006/math"><m:r><m:t>t</m:t></m:r></m:oMath></a14:m><a:r><a:rPr /><a:t>,</a:t></a:r></a:p></p:txBody></p:sp></mc:Choice></mc:AlternateContent><p:graphicFrame><p:nvGraphicFramePr><p:cNvPr id="6" name="Content Placeholder 5" /><p:cNvGraphicFramePr><a:graphicFrameLocks noGrp="1" /></p:cNvGraphicFramePr><p:nvPr><p:ph idx="1" /></p:nvPr></p:nvGraphicFramePr><p:xfrm><a:off x="3568700" y="203200" /><a:ext cx="5105400" cy="4381500" /></p:xfrm><a:graphic><a:graphicData uri="http://schemas.openxmlformats.org/drawingml/2006/table"><a:tbl><a:tblPr firstRow="1" bandRow="1"><a:tableStyleId>{5C22544A-7EE6-4342-B048-85BDC9FD1C3A}</a:tableStyleId></a:tblPr><a:tblGrid><a:gridCol w="1701800" /><a:gridCol w="1701800" /><a:gridCol w="1701800" /></a:tblGrid><a:tr h="0"><a:tc><a:txBody><a:bodyPr /><a:lstStyle /><a:p><a:pPr lvl="0" indent="0" marL="0"><a:buNone /></a:pPr><a:r><a:rPr /><a:t>Symbol</a:t></a:r></a:p></a:txBody><a:tcPr /></a:tc><a:tc><a:txBody><a:bodyPr /><a:lstStyle /><a:p><a:pPr lvl="0" indent="0" marL="0"><a:buNone /></a:pPr><a:r><a:rPr /><a:t>Meaning</a:t></a:r></a:p></a:txBody><a:tcPr /></a:tc><a:tc><a:txBody><a:bodyPr /><a:lstStyle /><a:p><a:pPr lvl="0" indent="0" marL="0"><a:buNone /></a:pPr><a:r><a:rPr /><a:t>Example</a:t></a:r></a:p></a:txBody><a:tcPr /></a:tc></a:tr><a:tr h="0"><a:tc><a:txBody><a:bodyPr /><a:lstStyle /><a:p><a:pPr lvl="0" indent="0" marL="0"><a:buNone /></a:pPr><a14:m><m:oMath xmlns:m="http://schemas.openxmlformats.org/officeDocument/2006/math"><m:sSub><m:e><m:r><m:rPr><m:sty m:val="b" /></m:rPr><m:t>x</m:t></m:r></m:e><m:sub><m:r><m:t>t</m:t></m:r></m:sub></m:sSub></m:oMath></a14:m></a:p></a:txBody></a:tc><a:tc><a:txBody><a:bodyPr /><a:lstStyle /><a:p><a:pPr lvl="0" indent="0" marL="0"><a:buNone /></a:pPr><a:r><a:rPr /><a:t>System state</a:t></a:r></a:p></a:txBody></a:tc><a:tc><a:txBody><a:bodyPr /><a:lstStyle /><a:p><a:pPr lvl="0" indent="0" marL="0"><a:buNone /></a:pPr><a:r><a:rPr /><a:t>Dike height, reservoir storage</a:t></a:r></a:p></a:txBody></a:tc></a:tr><a:tr h="0"><a:tc><a:txBody><a:bodyPr /><a:lstStyle /><a:p><a:pPr lvl="0" indent="0" marL="0"><a:buNone /></a:pPr><a14:m><m:oMath xmlns:m="http://schemas.openxmlformats.org/officeDocument/2006/math"><m:sSub><m:e><m:r><m:t>a</m:t></m:r></m:e><m:sub><m:r><m:t>t</m:t></m:r></m:sub></m:sSub><m:r><m:rPr><m:sty m:val="p" /></m:rPr><m:t>∈</m:t></m:r><m:r><m:rPr><m:sty m:val="p" /><m:scr m:val="script" /></m:rPr><m:t>A</m:t></m:r></m:oMath></a14:m></a:p></a:txBody></a:tc><a:tc><a:txBody><a:bodyPr /><a:lstStyle /><a:p><a:pPr lvl="0" indent="0" marL="0"><a:buNone /></a:pPr><a:r><a:rPr /><a:t>Action</a:t></a:r></a:p></a:txBody></a:tc><a:tc><a:txBody><a:bodyPr /><a:lstStyle /><a:p><a:pPr lvl="0" indent="0" marL="0"><a:buNone /></a:pPr><a:r><a:rPr /><a:t>Heighten by </a:t></a:r><a14:m><m:oMath xmlns:m="http://schemas.openxmlformats.org/officeDocument/2006/math"><m:sSub><m:e><m:r><m:t>u</m:t></m:r></m:e><m:sub><m:r><m:t>t</m:t></m:r></m:sub></m:sSub></m:oMath></a14:m><a:r><a:rPr /><a:t>; expand; do nothing</a:t></a:r></a:p></a:txBody></a:tc></a:tr><a:tr h="0"><a:tc><a:txBody><a:bodyPr /><a:lstStyle /><a:p><a:pPr lvl="0" indent="0" marL="0"><a:buNone /></a:pPr><a14:m><m:oMath xmlns:m="http://schemas.openxmlformats.org/officeDocument/2006/math"><m:sSub><m:e><m:r><m:rPr><m:sty m:val="b" /></m:rPr><m:t>e</m:t></m:r></m:e><m:sub><m:r><m:t>t</m:t></m:r></m:sub></m:sSub></m:oMath></a14:m></a:p></a:txBody></a:tc><a:tc><a:txBody><a:bodyPr /><a:lstStyle /><a:p><a:pPr lvl="0" indent="0" marL="0"><a:buNone /></a:pPr><a:r><a:rPr /><a:t>Stochastic forcing</a:t></a:r></a:p></a:txBody></a:tc><a:tc><a:txBody><a:bodyPr /><a:lstStyle /><a:p><a:pPr lvl="0" indent="0" marL="0"><a:buNone /></a:pPr><a:r><a:rPr /><a:t>SLR realization, storm surge, precipitation</a:t></a:r></a:p></a:txBody></a:tc></a:tr><a:tr h="0"><a:tc><a:txBody><a:bodyPr /><a:lstStyle /><a:p><a:pPr lvl="0" indent="0" marL="0"><a:buNone /></a:pPr><a14:m><m:oMath xmlns:m="http://schemas.openxmlformats.org/officeDocument/2006/math"><m:sSub><m:e><m:r><m:t>J</m:t></m:r></m:e><m:sub><m:r><m:t>t</m:t></m:r></m:sub></m:sSub></m:oMath></a14:m></a:p></a:txBody></a:tc><a:tc><a:txBody><a:bodyPr /><a:lstStyle /><a:p><a:pPr lvl="0" indent="0" marL="0"><a:buNone /></a:pPr><a:r><a:rPr /><a:t>Cost</a:t></a:r></a:p></a:txBody></a:tc><a:tc><a:txBody><a:bodyPr /><a:lstStyle /><a:p><a:pPr lvl="0" indent="0" marL="0"><a:buNone /></a:pPr><a:r><a:rPr /><a:t>Investment cost + expected damages</a:t></a:r></a:p></a:txBody></a:tc></a:tr></a:tbl></a:graphicData></a:graphic></p:graphicFrame></p:spTree></p:cSld></p:sld>
+</file>
+
+<file path=ppt/slides/slide11.xml><?xml version="1.0" encoding="utf-8"?>
+<p:sld xmlns:a="http://schemas.openxmlformats.org/drawingml/2006/main" xmlns:r="http://schemas.openxmlformats.org/officeDocument/2006/relationships" xmlns:p="http://schemas.openxmlformats.org/presentationml/2006/main">
+  <p:cSld>
+    <p:spTree>
+      <p:nvGrpSpPr>
+        <p:cNvPr id="1" name=""/>
+        <p:cNvGrpSpPr/>
+        <p:nvPr/>
+      </p:nvGrpSpPr>
+      <p:grpSpPr>
+        <a:xfrm>
+          <a:off x="0" y="0"/>
+          <a:ext cx="0" cy="0"/>
+          <a:chOff x="0" y="0"/>
+          <a:chExt cx="0" cy="0"/>
+        </a:xfrm>
+      </p:grpSpPr>
+      <mc:AlternateContent xmlns:mc="http://schemas.openxmlformats.org/markup-compatibility/2006">
+        <mc:Choice xmlns:a14="http://schemas.microsoft.com/office/drawing/2010/main" Requires="a14">
+          <p:sp>
+            <p:nvSpPr>
+              <p:cNvPr id="3" name="Content Placeholder 2"/>
+              <p:cNvSpPr>
+                <a:spLocks noGrp="1"/>
+              </p:cNvSpPr>
+              <p:nvPr>
+                <p:ph idx="1"/>
+              </p:nvPr>
+            </p:nvSpPr>
+            <p:spPr/>
+            <p:txBody>
+              <a:bodyPr/>
+              <a:lstStyle/>
+              <a:p>
+                <a:pPr lvl="0" indent="0" marL="0">
+                  <a:buNone/>
+                </a:pPr>
+                <a:r>
+                  <a:rPr/>
+                  <a:t>. . .</a:t>
+                </a:r>
+              </a:p>
+              <a:p>
+                <a:pPr lvl="0" indent="0" marL="0">
+                  <a:buNone/>
+                </a:pPr>
+                <a:r>
+                  <a:rPr b="1"/>
+                  <a:t>State transition:</a:t>
+                </a:r>
+              </a:p>
+              <a:p>
+                <a:pPr lvl="0" indent="0" marL="0">
+                  <a:buNone/>
+                </a:pPr>
+                <a14:m>
+                  <m:oMathPara xmlns:m="http://schemas.openxmlformats.org/officeDocument/2006/math">
+                    <m:oMathParaPr>
+                      <m:jc m:val="center"/>
+                    </m:oMathParaPr>
+                    <m:oMath>
+                      <m:sSub>
+                        <m:e>
+                          <m:r>
+                            <m:rPr>
+                              <m:sty m:val="b"/>
+                            </m:rPr>
+                            <m:t>x</m:t>
+                          </m:r>
+                        </m:e>
+                        <m:sub>
+                          <m:r>
+                            <m:t>t</m:t>
+                          </m:r>
+                          <m:r>
+                            <m:rPr>
+                              <m:sty m:val="p"/>
+                            </m:rPr>
+                            <m:t>+</m:t>
+                          </m:r>
+                          <m:r>
+                            <m:t>1</m:t>
+                          </m:r>
+                        </m:sub>
+                      </m:sSub>
+                      <m:r>
+                        <m:rPr>
+                          <m:sty m:val="p"/>
+                        </m:rPr>
+                        <m:t>=</m:t>
+                      </m:r>
+                      <m:sSub>
+                        <m:e>
+                          <m:r>
+                            <m:t>f</m:t>
+                          </m:r>
+                        </m:e>
+                        <m:sub>
+                          <m:r>
+                            <m:t>t</m:t>
+                          </m:r>
+                        </m:sub>
+                      </m:sSub>
+                      <m:d>
+                        <m:dPr>
+                          <m:begChr m:val="("/>
+                          <m:sepChr m:val=""/>
+                          <m:endChr m:val=")"/>
+                          <m:grow/>
+                        </m:dPr>
+                        <m:e>
+                          <m:sSub>
+                            <m:e>
+                              <m:r>
+                                <m:rPr>
+                                  <m:sty m:val="b"/>
+                                </m:rPr>
+                                <m:t>x</m:t>
+                              </m:r>
+                            </m:e>
+                            <m:sub>
+                              <m:r>
+                                <m:t>t</m:t>
+                              </m:r>
+                            </m:sub>
+                          </m:sSub>
+                          <m:r>
+                            <m:rPr>
+                              <m:sty m:val="p"/>
+                            </m:rPr>
+                            <m:t>,</m:t>
+                          </m:r>
+                          <m:r>
+                            <m:t> </m:t>
+                          </m:r>
+                          <m:sSub>
+                            <m:e>
+                              <m:r>
+                                <m:t>a</m:t>
+                              </m:r>
+                            </m:e>
+                            <m:sub>
+                              <m:r>
+                                <m:t>t</m:t>
+                              </m:r>
+                            </m:sub>
+                          </m:sSub>
+                          <m:r>
+                            <m:rPr>
+                              <m:sty m:val="p"/>
+                            </m:rPr>
+                            <m:t>,</m:t>
+                          </m:r>
+                          <m:r>
+                            <m:t> </m:t>
+                          </m:r>
+                          <m:sSub>
+                            <m:e>
+                              <m:r>
+                                <m:rPr>
+                                  <m:sty m:val="b"/>
+                                </m:rPr>
+                                <m:t>e</m:t>
+                              </m:r>
+                            </m:e>
+                            <m:sub>
+                              <m:r>
+                                <m:t>t</m:t>
+                              </m:r>
+                              <m:r>
+                                <m:rPr>
+                                  <m:sty m:val="p"/>
+                                </m:rPr>
+                                <m:t>+</m:t>
+                              </m:r>
+                              <m:r>
+                                <m:t>1</m:t>
+                              </m:r>
+                            </m:sub>
+                          </m:sSub>
+                        </m:e>
+                      </m:d>
+                    </m:oMath>
+                  </m:oMathPara>
+                </a14:m>
+              </a:p>
+              <a:p>
+                <a:pPr lvl="0" indent="0" marL="0">
+                  <a:buNone/>
+                </a:pPr>
+                <a:r>
+                  <a:rPr/>
+                  <a:t>Actions are chosen </a:t>
+                </a:r>
+                <a:r>
+                  <a:rPr i="1"/>
+                  <a:t>after</a:t>
+                </a:r>
+                <a:r>
+                  <a:rPr/>
+                  <a:t> observing </a:t>
+                </a:r>
+                <a14:m>
+                  <m:oMath xmlns:m="http://schemas.openxmlformats.org/officeDocument/2006/math">
+                    <m:sSub>
+                      <m:e>
+                        <m:r>
+                          <m:rPr>
+                            <m:sty m:val="b"/>
+                          </m:rPr>
+                          <m:t>x</m:t>
+                        </m:r>
+                      </m:e>
+                      <m:sub>
+                        <m:r>
+                          <m:t>t</m:t>
+                        </m:r>
+                      </m:sub>
+                    </m:sSub>
+                  </m:oMath>
+                </a14:m>
+                <a:r>
+                  <a:rPr/>
+                  <a:t> — this is what makes the problem sequential.</a:t>
+                </a:r>
+              </a:p>
+            </p:txBody>
+          </p:sp>
+        </mc:Choice>
+      </mc:AlternateContent>
+    </p:spTree>
+  </p:cSld>
+</p:sld>
+</file>
+
+<file path=ppt/slides/slide12.xml><?xml version="1.0" encoding="utf-8"?>
+<p:sld xmlns:a="http://schemas.openxmlformats.org/drawingml/2006/main" xmlns:r="http://schemas.openxmlformats.org/officeDocument/2006/relationships" xmlns:p="http://schemas.openxmlformats.org/presentationml/2006/main">
+  <p:cSld>
+    <p:spTree>
+      <p:nvGrpSpPr>
+        <p:cNvPr id="1" name=""/>
+        <p:cNvGrpSpPr/>
+        <p:nvPr/>
+      </p:nvGrpSpPr>
+      <p:grpSpPr>
+        <a:xfrm>
+          <a:off x="0" y="0"/>
+          <a:ext cx="0" cy="0"/>
+          <a:chOff x="0" y="0"/>
+          <a:chExt cx="0" cy="0"/>
+        </a:xfrm>
+      </p:grpSpPr>
+      <p:sp>
+        <p:nvSpPr>
+          <p:cNvPr id="2" name="Title 1"/>
+          <p:cNvSpPr>
+            <a:spLocks noGrp="1"/>
+          </p:cNvSpPr>
+          <p:nvPr>
+            <p:ph type="title"/>
+          </p:nvPr>
+        </p:nvSpPr>
+        <p:spPr/>
+        <p:txBody>
+          <a:bodyPr/>
+          <a:lstStyle/>
+          <a:p>
+            <a:pPr lvl="0" indent="0" marL="0">
+              <a:buNone/>
+            </a:pPr>
+            <a:r>
+              <a:rPr/>
+              <a:t>Policy and Objective</a:t>
+            </a:r>
+          </a:p>
+        </p:txBody>
+      </p:sp>
+      <mc:AlternateContent xmlns:mc="http://schemas.openxmlformats.org/markup-compatibility/2006">
+        <mc:Choice xmlns:a14="http://schemas.microsoft.com/office/drawing/2010/main" Requires="a14">
+          <p:sp>
+            <p:nvSpPr>
+              <p:cNvPr id="3" name="Content Placeholder 2"/>
+              <p:cNvSpPr>
+                <a:spLocks noGrp="1"/>
+              </p:cNvSpPr>
+              <p:nvPr>
+                <p:ph idx="1"/>
+              </p:nvPr>
+            </p:nvSpPr>
+            <p:spPr/>
+            <p:txBody>
+              <a:bodyPr/>
+              <a:lstStyle/>
+              <a:p>
+                <a:pPr lvl="0" indent="0" marL="0">
+                  <a:buNone/>
+                </a:pPr>
+                <a:r>
+                  <a:rPr/>
+                  <a:t>The agent applies a </a:t>
+                </a:r>
+                <a:r>
+                  <a:rPr b="1"/>
+                  <a:t>policy</a:t>
+                </a:r>
+                <a:r>
+                  <a:rPr/>
+                  <a:t> </a:t>
+                </a:r>
+                <a14:m>
+                  <m:oMath xmlns:m="http://schemas.openxmlformats.org/officeDocument/2006/math">
+                    <m:r>
+                      <m:t>π</m:t>
+                    </m:r>
+                  </m:oMath>
+                </a14:m>
+                <a:r>
+                  <a:rPr/>
+                  <a:t> to observable information </a:t>
+                </a:r>
+                <a14:m>
+                  <m:oMath xmlns:m="http://schemas.openxmlformats.org/officeDocument/2006/math">
+                    <m:sSub>
+                      <m:e>
+                        <m:r>
+                          <m:rPr>
+                            <m:sty m:val="b"/>
+                          </m:rPr>
+                          <m:t>I</m:t>
+                        </m:r>
+                      </m:e>
+                      <m:sub>
+                        <m:r>
+                          <m:t>t</m:t>
+                        </m:r>
+                      </m:sub>
+                    </m:sSub>
+                  </m:oMath>
+                </a14:m>
+                <a:r>
+                  <a:rPr/>
+                  <a:t>:</a:t>
+                </a:r>
+              </a:p>
+              <a:p>
+                <a:pPr lvl="0" indent="0" marL="0">
+                  <a:buNone/>
+                </a:pPr>
+                <a14:m>
+                  <m:oMathPara xmlns:m="http://schemas.openxmlformats.org/officeDocument/2006/math">
+                    <m:oMathParaPr>
+                      <m:jc m:val="center"/>
+                    </m:oMathParaPr>
+                    <m:oMath>
+                      <m:sSub>
+                        <m:e>
+                          <m:r>
+                            <m:t>a</m:t>
+                          </m:r>
+                        </m:e>
+                        <m:sub>
+                          <m:r>
+                            <m:t>t</m:t>
+                          </m:r>
+                        </m:sub>
+                      </m:sSub>
+                      <m:r>
+                        <m:rPr>
+                          <m:sty m:val="p"/>
+                        </m:rPr>
+                        <m:t>=</m:t>
+                      </m:r>
+                      <m:r>
+                        <m:t>π</m:t>
+                      </m:r>
+                      <m:d>
+                        <m:dPr>
+                          <m:begChr m:val="("/>
+                          <m:sepChr m:val=""/>
+                          <m:endChr m:val=")"/>
+                          <m:grow/>
+                        </m:dPr>
+                        <m:e>
+                          <m:sSub>
+                            <m:e>
+                              <m:r>
+                                <m:rPr>
+                                  <m:sty m:val="b"/>
+                                </m:rPr>
+                                <m:t>I</m:t>
+                              </m:r>
+                            </m:e>
+                            <m:sub>
+                              <m:r>
+                                <m:t>t</m:t>
+                              </m:r>
+                            </m:sub>
+                          </m:sSub>
+                        </m:e>
+                      </m:d>
+                    </m:oMath>
+                  </m:oMathPara>
+                </a14:m>
+              </a:p>
+              <a:p>
+                <a:pPr lvl="0" indent="0" marL="0">
+                  <a:buNone/>
+                </a:pPr>
+                <a14:m>
+                  <m:oMath xmlns:m="http://schemas.openxmlformats.org/officeDocument/2006/math">
+                    <m:sSub>
+                      <m:e>
+                        <m:r>
+                          <m:rPr>
+                            <m:sty m:val="b"/>
+                          </m:rPr>
+                          <m:t>I</m:t>
+                        </m:r>
+                      </m:e>
+                      <m:sub>
+                        <m:r>
+                          <m:t>t</m:t>
+                        </m:r>
+                      </m:sub>
+                    </m:sSub>
+                  </m:oMath>
+                </a14:m>
+                <a:r>
+                  <a:rPr/>
+                  <a:t> can include current states, trend estimates, projections — anything observable.</a:t>
+                </a:r>
+              </a:p>
+              <a:p>
+                <a:pPr lvl="0" indent="0" marL="0">
+                  <a:buNone/>
+                </a:pPr>
+                <a:r>
+                  <a:rPr/>
+                  <a:t>. . .</a:t>
+                </a:r>
+              </a:p>
+              <a:p>
+                <a:pPr lvl="0" indent="0" marL="0">
+                  <a:buNone/>
+                </a:pPr>
+                <a:r>
+                  <a:rPr b="1"/>
+                  <a:t>Objective:</a:t>
+                </a:r>
+                <a:r>
+                  <a:rPr/>
+                  <a:t> minimize expected total cost over a planning horizon </a:t>
+                </a:r>
+                <a14:m>
+                  <m:oMath xmlns:m="http://schemas.openxmlformats.org/officeDocument/2006/math">
+                    <m:r>
+                      <m:t>H</m:t>
+                    </m:r>
+                  </m:oMath>
+                </a14:m>
+                <a:r>
+                  <a:rPr/>
+                  <a:t>:</a:t>
+                </a:r>
+              </a:p>
+              <a:p>
+                <a:pPr lvl="0" indent="0" marL="0">
+                  <a:buNone/>
+                </a:pPr>
+                <a14:m>
+                  <m:oMathPara xmlns:m="http://schemas.openxmlformats.org/officeDocument/2006/math">
+                    <m:oMathParaPr>
+                      <m:jc m:val="center"/>
+                    </m:oMathParaPr>
+                    <m:oMath>
+                      <m:limLow>
+                        <m:e>
+                          <m:r>
+                            <m:rPr>
+                              <m:sty m:val="p"/>
+                            </m:rPr>
+                            <m:t>min</m:t>
+                          </m:r>
+                        </m:e>
+                        <m:lim>
+                          <m:r>
+                            <m:t>π</m:t>
+                          </m:r>
+                        </m:lim>
+                      </m:limLow>
+                      <m:r>
+                        <m:t> </m:t>
+                      </m:r>
+                      <m:sSub>
+                        <m:e>
+                          <m:r>
+                            <m:rPr>
+                              <m:sty m:val="p"/>
+                              <m:scr m:val="double-struck"/>
+                            </m:rPr>
+                            <m:t>E</m:t>
+                          </m:r>
+                        </m:e>
+                        <m:sub>
+                          <m:r>
+                            <m:rPr>
+                              <m:sty m:val="b"/>
+                            </m:rPr>
+                            <m:t>e</m:t>
+                          </m:r>
+                        </m:sub>
+                      </m:sSub>
+                      <m:r>
+                        <m:t>​</m:t>
+                      </m:r>
+                      <m:d>
+                        <m:dPr>
+                          <m:begChr m:val="["/>
+                          <m:sepChr m:val=""/>
+                          <m:endChr m:val="]"/>
+                          <m:grow/>
+                        </m:dPr>
+                        <m:e>
+                          <m:nary>
+                            <m:naryPr>
+                              <m:chr m:val="∑"/>
+                              <m:limLoc m:val="undOvr"/>
+                              <m:subHide m:val="off"/>
+                              <m:supHide m:val="off"/>
+                            </m:naryPr>
+                            <m:sub>
+                              <m:r>
+                                <m:t>t</m:t>
+                              </m:r>
+                              <m:r>
+                                <m:rPr>
+                                  <m:sty m:val="p"/>
+                                </m:rPr>
+                                <m:t>=</m:t>
+                              </m:r>
+                              <m:r>
+                                <m:t>0</m:t>
+                              </m:r>
+                            </m:sub>
+                            <m:sup>
+                              <m:r>
+                                <m:t>H</m:t>
+                              </m:r>
+                              <m:r>
+                                <m:rPr>
+                                  <m:sty m:val="p"/>
+                                </m:rPr>
+                                <m:t>−</m:t>
+                              </m:r>
+                              <m:r>
+                                <m:t>1</m:t>
+                              </m:r>
+                            </m:sup>
+                            <m:e>
+                              <m:sSub>
+                                <m:e>
+                                  <m:r>
+                                    <m:t>J</m:t>
+                                  </m:r>
+                                </m:e>
+                                <m:sub>
+                                  <m:r>
+                                    <m:t>t</m:t>
+                                  </m:r>
+                                </m:sub>
+                              </m:sSub>
+                            </m:e>
+                          </m:nary>
+                          <m:d>
+                            <m:dPr>
+                              <m:begChr m:val="("/>
+                              <m:sepChr m:val=""/>
+                              <m:endChr m:val=")"/>
+                              <m:grow/>
+                            </m:dPr>
+                            <m:e>
+                              <m:sSub>
+                                <m:e>
+                                  <m:r>
+                                    <m:rPr>
+                                      <m:sty m:val="b"/>
+                                    </m:rPr>
+                                    <m:t>x</m:t>
+                                  </m:r>
+                                </m:e>
+                                <m:sub>
+                                  <m:r>
+                                    <m:t>t</m:t>
+                                  </m:r>
+                                </m:sub>
+                              </m:sSub>
+                              <m:r>
+                                <m:rPr>
+                                  <m:sty m:val="p"/>
+                                </m:rPr>
+                                <m:t>,</m:t>
+                              </m:r>
+                              <m:r>
+                                <m:t> </m:t>
+                              </m:r>
+                              <m:sSub>
+                                <m:e>
+                                  <m:r>
+                                    <m:t>a</m:t>
+                                  </m:r>
+                                </m:e>
+                                <m:sub>
+                                  <m:r>
+                                    <m:t>t</m:t>
+                                  </m:r>
+                                </m:sub>
+                              </m:sSub>
+                              <m:r>
+                                <m:rPr>
+                                  <m:sty m:val="p"/>
+                                </m:rPr>
+                                <m:t>,</m:t>
+                              </m:r>
+                              <m:r>
+                                <m:t> </m:t>
+                              </m:r>
+                              <m:sSub>
+                                <m:e>
+                                  <m:r>
+                                    <m:rPr>
+                                      <m:sty m:val="b"/>
+                                    </m:rPr>
+                                    <m:t>e</m:t>
+                                  </m:r>
+                                </m:e>
+                                <m:sub>
+                                  <m:r>
+                                    <m:t>t</m:t>
+                                  </m:r>
+                                  <m:r>
+                                    <m:rPr>
+                                      <m:sty m:val="p"/>
+                                    </m:rPr>
+                                    <m:t>+</m:t>
+                                  </m:r>
+                                  <m:r>
+                                    <m:t>1</m:t>
+                                  </m:r>
+                                </m:sub>
+                              </m:sSub>
+                            </m:e>
+                          </m:d>
+                        </m:e>
+                      </m:d>
+                    </m:oMath>
+                  </m:oMathPara>
+                </a14:m>
+              </a:p>
+              <a:p>
+                <a:pPr lvl="0" indent="0" marL="0">
+                  <a:buNone/>
+                </a:pPr>
+                <a:r>
+                  <a:rPr/>
+                  <a:t>. . .</a:t>
+                </a:r>
+              </a:p>
+              <a:p>
+                <a:pPr lvl="0" indent="0" marL="0">
+                  <a:buNone/>
+                </a:pPr>
+                <a:r>
+                  <a:rPr/>
+                  <a:t>We are optimizing </a:t>
+                </a:r>
+                <a:r>
+                  <a:rPr b="1"/>
+                  <a:t>a rule</a:t>
+                </a:r>
+                <a:r>
+                  <a:rPr/>
+                  <a:t>, not a sequence of actions.</a:t>
+                </a:r>
+              </a:p>
+              <a:p>
+                <a:pPr lvl="0" indent="0" marL="0">
+                  <a:buNone/>
+                </a:pPr>
+                <a:r>
+                  <a:rPr/>
+                  <a:t>Different solution methods disagree on </a:t>
+                </a:r>
+                <a:r>
+                  <a:rPr i="1"/>
+                  <a:t>how</a:t>
+                </a:r>
+                <a:r>
+                  <a:rPr/>
+                  <a:t> to find the best </a:t>
+                </a:r>
+                <a14:m>
+                  <m:oMath xmlns:m="http://schemas.openxmlformats.org/officeDocument/2006/math">
+                    <m:r>
+                      <m:t>π</m:t>
+                    </m:r>
+                  </m:oMath>
+                </a14:m>
+                <a:r>
+                  <a:rPr/>
+                  <a:t> — that’s the rest of this lecture.</a:t>
+                </a:r>
+              </a:p>
+            </p:txBody>
+          </p:sp>
+        </mc:Choice>
+      </mc:AlternateContent>
+    </p:spTree>
+  </p:cSld>
+</p:sld>
+</file>
+
+<file path=ppt/slides/slide13.xml><?xml version="1.0" encoding="utf-8"?>
+<p:sld xmlns:a="http://schemas.openxmlformats.org/drawingml/2006/main" xmlns:r="http://schemas.openxmlformats.org/officeDocument/2006/relationships" xmlns:p="http://schemas.openxmlformats.org/presentationml/2006/main">
+  <p:cSld>
+    <p:spTree>
+      <p:nvGrpSpPr>
+        <p:cNvPr id="1" name=""/>
+        <p:cNvGrpSpPr/>
+        <p:nvPr/>
+      </p:nvGrpSpPr>
+      <p:grpSpPr>
+        <a:xfrm>
+          <a:off x="0" y="0"/>
+          <a:ext cx="0" cy="0"/>
+          <a:chOff x="0" y="0"/>
+          <a:chExt cx="0" cy="0"/>
+        </a:xfrm>
+      </p:grpSpPr>
+      <p:sp>
+        <p:nvSpPr>
+          <p:cNvPr id="2" name="Title 1"/>
+          <p:cNvSpPr>
+            <a:spLocks noGrp="1"/>
+          </p:cNvSpPr>
+          <p:nvPr>
+            <p:ph type="title"/>
+          </p:nvPr>
+        </p:nvSpPr>
+        <p:spPr/>
+        <p:txBody>
+          <a:bodyPr/>
+          <a:lstStyle/>
+          <a:p>
+            <a:pPr lvl="0" indent="0" marL="0">
+              <a:buNone/>
+            </a:pPr>
+            <a:r>
+              <a:rPr/>
+              <a:t>Why Is This Hard? Three Sources of Uncertainty</a:t>
+            </a:r>
+          </a:p>
+        </p:txBody>
+      </p:sp>
+      <p:sp>
+        <p:nvSpPr>
+          <p:cNvPr id="3" name="Content Placeholder 2"/>
+          <p:cNvSpPr>
+            <a:spLocks noGrp="1"/>
+          </p:cNvSpPr>
+          <p:nvPr>
+            <p:ph idx="1"/>
+          </p:nvPr>
+        </p:nvSpPr>
+        <p:spPr/>
+        <p:txBody>
+          <a:bodyPr/>
+          <a:lstStyle/>
+          <a:p>
+            <a:pPr lvl="0" indent="0" marL="0">
+              <a:buNone/>
+            </a:pPr>
+            <a:r>
+              <a:rPr/>
+              <a:t>Herman et al. (2020) identify three distinct sources:</a:t>
+            </a:r>
+          </a:p>
+          <a:p>
+            <a:pPr lvl="0" indent="-342900" marL="342900">
+              <a:buAutoNum type="arabicPeriod"/>
+            </a:pPr>
+            <a:r>
+              <a:rPr b="1"/>
+              <a:t>Sampling uncertainty</a:t>
+            </a:r>
+            <a:r>
+              <a:rPr/>
+              <a:t> — finite historical record; rare events underrepresented. </a:t>
+            </a:r>
+            <a:r>
+              <a:rPr i="1"/>
+              <a:t>30 years of storm surge data doesn’t capture the full tail.</a:t>
+            </a:r>
+          </a:p>
+          <a:p>
+            <a:pPr lvl="0" indent="-342900" marL="342900">
+              <a:buAutoNum type="arabicPeriod"/>
+            </a:pPr>
+            <a:r>
+              <a:rPr b="1"/>
+              <a:t>Exogenous hydroclimate uncertainty</a:t>
+            </a:r>
+            <a:r>
+              <a:rPr/>
+              <a:t> — cascade from emissions → GCMs → downscaling → hydrology. </a:t>
+            </a:r>
+            <a:r>
+              <a:rPr i="1"/>
+              <a:t>Dynamic changes (precipitation, storm tracks) far more uncertain than thermodynamic (SLR, snowpack).</a:t>
+            </a:r>
+          </a:p>
+          <a:p>
+            <a:pPr lvl="0" indent="-342900" marL="342900">
+              <a:buAutoNum type="arabicPeriod"/>
+            </a:pPr>
+            <a:r>
+              <a:rPr b="1"/>
+              <a:t>Endogenous human-environment uncertainty</a:t>
+            </a:r>
+            <a:r>
+              <a:rPr/>
+              <a:t> — water demand, land use, institutional capacity. </a:t>
+            </a:r>
+            <a:r>
+              <a:rPr i="1"/>
+              <a:t>Often exceeds climate uncertainty on decadal planning horizons.</a:t>
+            </a:r>
+          </a:p>
+          <a:p>
+            <a:pPr lvl="0" indent="0" marL="0">
+              <a:buNone/>
+            </a:pPr>
+            <a:r>
+              <a:rPr/>
+              <a:t>. . .</a:t>
+            </a:r>
+          </a:p>
+          <a:p>
+            <a:pPr lvl="0" indent="0" marL="0">
+              <a:buNone/>
+            </a:pPr>
+            <a:r>
+              <a:rPr/>
+              <a:t>A policy optimized against a narrow set of scenarios may fail outside that envelope.</a:t>
+            </a:r>
+          </a:p>
+        </p:txBody>
+      </p:sp>
+    </p:spTree>
+  </p:cSld>
+  <p:timing>
+    <p:tnLst>
+      <p:par>
+        <p:cTn id="1" dur="indefinite" restart="never" nodeType="tmRoot">
+          <p:childTnLst>
+            <p:seq concurrent="1" nextAc="seek">
+              <p:cTn id="2" dur="indefinite" nodeType="mainSeq">
+                <p:childTnLst>
+                  <p:par>
+                    <p:cTn id="3" fill="hold">
+                      <p:stCondLst>
+                        <p:cond delay="indefinite"/>
+                      </p:stCondLst>
+                      <p:childTnLst>
+                        <p:par>
+                          <p:cTn id="4" fill="hold">
+                            <p:stCondLst>
+                              <p:cond delay="0"/>
+                            </p:stCondLst>
+                            <p:childTnLst>
+                              <p:par>
+                                <p:cTn id="5" presetID="1" presetClass="entr" presetSubtype="0" fill="hold" grpId="0" nodeType="clickEffect">
+                                  <p:stCondLst>
+                                    <p:cond delay="0"/>
+                                  </p:stCondLst>
+                                  <p:childTnLst>
+                                    <p:set>
+                                      <p:cBhvr>
+                                        <p:cTn id="6" dur="1" fill="hold">
+                                          <p:stCondLst>
+                                            <p:cond delay="0"/>
+                                          </p:stCondLst>
+                                        </p:cTn>
+                                        <p:tgtEl>
+                                          <p:spTgt spid="3">
+                                            <p:txEl>
+                                              <p:pRg st="1" end="1"/>
+                                            </p:txEl>
+                                          </p:spTgt>
+                                        </p:tgtEl>
+                                        <p:attrNameLst>
+                                          <p:attrName>style.visibility</p:attrName>
+                                        </p:attrNameLst>
+                                      </p:cBhvr>
+                                      <p:to>
+                                        <p:strVal val="visible"/>
+                                      </p:to>
+                                    </p:set>
+                                  </p:childTnLst>
+                                </p:cTn>
+                              </p:par>
+                            </p:childTnLst>
+                          </p:cTn>
+                        </p:par>
+                      </p:childTnLst>
+                    </p:cTn>
+                  </p:par>
+                  <p:par>
+                    <p:cTn id="7" fill="hold">
+                      <p:stCondLst>
+                        <p:cond delay="indefinite"/>
+                      </p:stCondLst>
+                      <p:childTnLst>
+                        <p:par>
+                          <p:cTn id="8" fill="hold">
+                            <p:stCondLst>
+                              <p:cond delay="0"/>
+                            </p:stCondLst>
+                            <p:childTnLst>
+                              <p:par>
+                                <p:cTn id="9" presetID="1" presetClass="entr" presetSubtype="0" fill="hold" grpId="0" nodeType="clickEffect">
+                                  <p:stCondLst>
+                                    <p:cond delay="0"/>
+                                  </p:stCondLst>
+                                  <p:childTnLst>
+                                    <p:set>
+                                      <p:cBhvr>
+                                        <p:cTn id="10" dur="1" fill="hold">
+                                          <p:stCondLst>
+                                            <p:cond delay="0"/>
+                                          </p:stCondLst>
+                                        </p:cTn>
+                                        <p:tgtEl>
+                                          <p:spTgt spid="3">
+                                            <p:txEl>
+                                              <p:pRg st="2" end="2"/>
+                                            </p:txEl>
+                                          </p:spTgt>
+                                        </p:tgtEl>
+                                        <p:attrNameLst>
+                                          <p:attrName>style.visibility</p:attrName>
+                                        </p:attrNameLst>
+                                      </p:cBhvr>
+                                      <p:to>
+                                        <p:strVal val="visible"/>
+                                      </p:to>
+                                    </p:set>
+                                  </p:childTnLst>
+                                </p:cTn>
+                              </p:par>
+                            </p:childTnLst>
+                          </p:cTn>
+                        </p:par>
+                      </p:childTnLst>
+                    </p:cTn>
+                  </p:par>
+                  <p:par>
+                    <p:cTn id="11" fill="hold">
+                      <p:stCondLst>
+                        <p:cond delay="indefinite"/>
+                      </p:stCondLst>
+                      <p:childTnLst>
+                        <p:par>
+                          <p:cTn id="12" fill="hold">
+                            <p:stCondLst>
+                              <p:cond delay="0"/>
+                            </p:stCondLst>
+                            <p:childTnLst>
+                              <p:par>
+                                <p:cTn id="13" presetID="1" presetClass="entr" presetSubtype="0" fill="hold" grpId="0" nodeType="clickEffect">
+                                  <p:stCondLst>
+                                    <p:cond delay="0"/>
+                                  </p:stCondLst>
+                                  <p:childTnLst>
+                                    <p:set>
+                                      <p:cBhvr>
+                                        <p:cTn id="14" dur="1" fill="hold">
+                                          <p:stCondLst>
+                                            <p:cond delay="0"/>
+                                          </p:stCondLst>
+                                        </p:cTn>
+                                        <p:tgtEl>
+                                          <p:spTgt spid="3">
+                                            <p:txEl>
+                                              <p:pRg st="3" end="3"/>
+                                            </p:txEl>
+                                          </p:spTgt>
+                                        </p:tgtEl>
+                                        <p:attrNameLst>
+                                          <p:attrName>style.visibility</p:attrName>
+                                        </p:attrNameLst>
+                                      </p:cBhvr>
+                                      <p:to>
+                                        <p:strVal val="visible"/>
+                                      </p:to>
+                                    </p:set>
+                                  </p:childTnLst>
+                                </p:cTn>
+                              </p:par>
+                            </p:childTnLst>
+                          </p:cTn>
+                        </p:par>
+                      </p:childTnLst>
+                    </p:cTn>
+                  </p:par>
+                </p:childTnLst>
+              </p:cTn>
+              <p:prevCondLst>
+                <p:cond evt="onPrev" delay="0">
+                  <p:tgtEl>
+                    <p:sldTgt/>
+                  </p:tgtEl>
+                </p:cond>
+              </p:prevCondLst>
+              <p:nextCondLst>
+                <p:cond evt="onNext" delay="0">
+                  <p:tgtEl>
+                    <p:sldTgt/>
+                  </p:tgtEl>
+                </p:cond>
+              </p:nextCondLst>
+            </p:seq>
+          </p:childTnLst>
+        </p:cTn>
+      </p:par>
+    </p:tnLst>
+    <p:bldLst>
+      <p:bldP spid="3" grpId="0" uiExpand="1" build="p"/>
+    </p:bldLst>
+  </p:timing>
+</p:sld>
+</file>
+
+<file path=ppt/slides/slide14.xml><?xml version="1.0" encoding="utf-8"?>
+<p:sld xmlns:a="http://schemas.openxmlformats.org/drawingml/2006/main" xmlns:r="http://schemas.openxmlformats.org/officeDocument/2006/relationships" xmlns:p="http://schemas.openxmlformats.org/presentationml/2006/main">
+  <p:cSld>
+    <p:spTree>
+      <p:nvGrpSpPr>
+        <p:cNvPr id="1" name=""/>
+        <p:cNvGrpSpPr/>
+        <p:nvPr/>
+      </p:nvGrpSpPr>
+      <p:grpSpPr>
+        <a:xfrm>
+          <a:off x="0" y="0"/>
+          <a:ext cx="0" cy="0"/>
+          <a:chOff x="0" y="0"/>
+          <a:chExt cx="0" cy="0"/>
+        </a:xfrm>
+      </p:grpSpPr>
+      <p:sp>
+        <p:nvSpPr>
+          <p:cNvPr id="2" name="Title 1"/>
+          <p:cNvSpPr>
+            <a:spLocks noGrp="1"/>
+          </p:cNvSpPr>
+          <p:nvPr>
+            <p:ph type="title"/>
+          </p:nvPr>
+        </p:nvSpPr>
+        <p:spPr/>
+        <p:txBody>
+          <a:bodyPr/>
+          <a:lstStyle/>
+          <a:p>
+            <a:pPr lvl="0" indent="0" marL="0">
+              <a:buNone/>
+            </a:pPr>
+            <a:r>
+              <a:rPr/>
+              <a:t>Solution Method 1: Open-Loop Control</a:t>
+            </a:r>
+          </a:p>
+        </p:txBody>
+      </p:sp>
+      <mc:AlternateContent xmlns:mc="http://schemas.openxmlformats.org/markup-compatibility/2006">
+        <mc:Choice xmlns:a14="http://schemas.microsoft.com/office/drawing/2010/main" Requires="a14">
+          <p:sp>
+            <p:nvSpPr>
+              <p:cNvPr id="3" name="Content Placeholder 2"/>
+              <p:cNvSpPr>
+                <a:spLocks noGrp="1"/>
+              </p:cNvSpPr>
+              <p:nvPr>
+                <p:ph idx="1"/>
+              </p:nvPr>
+            </p:nvSpPr>
+            <p:spPr/>
+            <p:txBody>
+              <a:bodyPr/>
+              <a:lstStyle/>
+              <a:p>
+                <a:pPr lvl="0" indent="0" marL="0">
+                  <a:buNone/>
+                </a:pPr>
+                <a:r>
+                  <a:rPr/>
+                  <a:t>The simplest approach: decide the full action sequence now, commit.</a:t>
+                </a:r>
+              </a:p>
+              <a:p>
+                <a:pPr lvl="0" indent="0" marL="0">
+                  <a:buNone/>
+                </a:pPr>
+                <a14:m>
+                  <m:oMathPara xmlns:m="http://schemas.openxmlformats.org/officeDocument/2006/math">
+                    <m:oMathParaPr>
+                      <m:jc m:val="center"/>
+                    </m:oMathParaPr>
+                    <m:oMath>
+                      <m:r>
+                        <m:rPr>
+                          <m:sty m:val="p"/>
+                        </m:rPr>
+                        <m:t>{</m:t>
+                      </m:r>
+                      <m:sSub>
+                        <m:e>
+                          <m:r>
+                            <m:t>a</m:t>
+                          </m:r>
+                        </m:e>
+                        <m:sub>
+                          <m:r>
+                            <m:t>0</m:t>
+                          </m:r>
+                        </m:sub>
+                      </m:sSub>
+                      <m:r>
+                        <m:rPr>
+                          <m:sty m:val="p"/>
+                        </m:rPr>
+                        <m:t>,</m:t>
+                      </m:r>
+                      <m:r>
+                        <m:t> </m:t>
+                      </m:r>
+                      <m:sSub>
+                        <m:e>
+                          <m:r>
+                            <m:t>a</m:t>
+                          </m:r>
+                        </m:e>
+                        <m:sub>
+                          <m:r>
+                            <m:t>1</m:t>
+                          </m:r>
+                        </m:sub>
+                      </m:sSub>
+                      <m:r>
+                        <m:rPr>
+                          <m:sty m:val="p"/>
+                        </m:rPr>
+                        <m:t>,</m:t>
+                      </m:r>
+                      <m:r>
+                        <m:t> </m:t>
+                      </m:r>
+                      <m:r>
+                        <m:rPr>
+                          <m:sty m:val="p"/>
+                        </m:rPr>
+                        <m:t>…</m:t>
+                      </m:r>
+                      <m:r>
+                        <m:rPr>
+                          <m:sty m:val="p"/>
+                        </m:rPr>
+                        <m:t>,</m:t>
+                      </m:r>
+                      <m:r>
+                        <m:t> </m:t>
+                      </m:r>
+                      <m:sSub>
+                        <m:e>
+                          <m:r>
+                            <m:t>a</m:t>
+                          </m:r>
+                        </m:e>
+                        <m:sub>
+                          <m:r>
+                            <m:t>H</m:t>
+                          </m:r>
+                          <m:r>
+                            <m:rPr>
+                              <m:sty m:val="p"/>
+                            </m:rPr>
+                            <m:t>−</m:t>
+                          </m:r>
+                          <m:r>
+                            <m:t>1</m:t>
+                          </m:r>
+                        </m:sub>
+                      </m:sSub>
+                      <m:r>
+                        <m:rPr>
+                          <m:sty m:val="p"/>
+                        </m:rPr>
+                        <m:t>}</m:t>
+                      </m:r>
+                      <m:r>
+                        <m:rPr>
+                          <m:sty m:val="p"/>
+                        </m:rPr>
+                        <m:t>=</m:t>
+                      </m:r>
+                      <m:r>
+                        <m:t>π</m:t>
+                      </m:r>
+                      <m:d>
+                        <m:dPr>
+                          <m:begChr m:val="("/>
+                          <m:sepChr m:val=""/>
+                          <m:endChr m:val=")"/>
+                          <m:grow/>
+                        </m:dPr>
+                        <m:e>
+                          <m:r>
+                            <m:t>t</m:t>
+                          </m:r>
+                        </m:e>
+                      </m:d>
+                    </m:oMath>
+                  </m:oMathPara>
+                </a14:m>
+              </a:p>
+              <a:p>
+                <a:pPr lvl="0" indent="0" marL="0">
+                  <a:buNone/>
+                </a:pPr>
+                <a:r>
+                  <a:rPr/>
+                  <a:t>Actions depend only on </a:t>
+                </a:r>
+                <a:r>
+                  <a:rPr b="1"/>
+                  <a:t>time</a:t>
+                </a:r>
+                <a:r>
+                  <a:rPr/>
+                  <a:t>, not on observations.</a:t>
+                </a:r>
+              </a:p>
+              <a:p>
+                <a:pPr lvl="0"/>
+                <a:r>
+                  <a:rPr/>
+                  <a:t>Equivalent to extended static BCA: optimize once, execute forever</a:t>
+                </a:r>
+              </a:p>
+              <a:p>
+                <a:pPr lvl="0"/>
+                <a:r>
+                  <a:rPr/>
+                  <a:t>No feedback — same dike-heightening schedule regardless of whether SLR is fast or slow</a:t>
+                </a:r>
+              </a:p>
+              <a:p>
+                <a:pPr lvl="0"/>
+                <a:r>
+                  <a:rPr/>
+                  <a:t>To meet reliability constraints under all futures, must </a:t>
+                </a:r>
+                <a:r>
+                  <a:rPr b="1"/>
+                  <a:t>over-build</a:t>
+                </a:r>
+                <a:r>
+                  <a:rPr/>
+                  <a:t> for the worst case</a:t>
+                </a:r>
+              </a:p>
+              <a:p>
+                <a:pPr lvl="0"/>
+                <a:r>
+                  <a:rPr/>
+                  <a:t>Computationally simple; 300-year problem = 300 decision variables</a:t>
+                </a:r>
+              </a:p>
+            </p:txBody>
+          </p:sp>
+        </mc:Choice>
+      </mc:AlternateContent>
+    </p:spTree>
+  </p:cSld>
+  <p:timing>
+    <p:tnLst>
+      <p:par>
+        <p:cTn id="1" dur="indefinite" restart="never" nodeType="tmRoot">
+          <p:childTnLst>
+            <p:seq concurrent="1" nextAc="seek">
+              <p:cTn id="2" dur="indefinite" nodeType="mainSeq">
+                <p:childTnLst>
+                  <p:par>
+                    <p:cTn id="3" fill="hold">
+                      <p:stCondLst>
+                        <p:cond delay="indefinite"/>
+                      </p:stCondLst>
+                      <p:childTnLst>
+                        <p:par>
+                          <p:cTn id="4" fill="hold">
+                            <p:stCondLst>
+                              <p:cond delay="0"/>
+                            </p:stCondLst>
+                            <p:childTnLst>
+                              <p:par>
+                                <p:cTn id="5" presetID="1" presetClass="entr" presetSubtype="0" fill="hold" grpId="0" nodeType="clickEffect">
+                                  <p:stCondLst>
+                                    <p:cond delay="0"/>
+                                  </p:stCondLst>
+                                  <p:childTnLst>
+                                    <p:set>
+                                      <p:cBhvr>
+                                        <p:cTn id="6" dur="1" fill="hold">
+                                          <p:stCondLst>
+                                            <p:cond delay="0"/>
+                                          </p:stCondLst>
+                                        </p:cTn>
+                                        <p:tgtEl>
+                                          <p:spTgt spid="3">
+                                            <p:txEl>
+                                              <p:pRg st="3" end="3"/>
+                                            </p:txEl>
+                                          </p:spTgt>
+                                        </p:tgtEl>
+                                        <p:attrNameLst>
+                                          <p:attrName>style.visibility</p:attrName>
+                                        </p:attrNameLst>
+                                      </p:cBhvr>
+                                      <p:to>
+                                        <p:strVal val="visible"/>
+                                      </p:to>
+                                    </p:set>
+                                  </p:childTnLst>
+                                </p:cTn>
+                              </p:par>
+                            </p:childTnLst>
+                          </p:cTn>
+                        </p:par>
+                      </p:childTnLst>
+                    </p:cTn>
+                  </p:par>
+                  <p:par>
+                    <p:cTn id="7" fill="hold">
+                      <p:stCondLst>
+                        <p:cond delay="indefinite"/>
+                      </p:stCondLst>
+                      <p:childTnLst>
+                        <p:par>
+                          <p:cTn id="8" fill="hold">
+                            <p:stCondLst>
+                              <p:cond delay="0"/>
+                            </p:stCondLst>
+                            <p:childTnLst>
+                              <p:par>
+                                <p:cTn id="9" presetID="1" presetClass="entr" presetSubtype="0" fill="hold" grpId="0" nodeType="clickEffect">
+                                  <p:stCondLst>
+                                    <p:cond delay="0"/>
+                                  </p:stCondLst>
+                                  <p:childTnLst>
+                                    <p:set>
+                                      <p:cBhvr>
+                                        <p:cTn id="10" dur="1" fill="hold">
+                                          <p:stCondLst>
+                                            <p:cond delay="0"/>
+                                          </p:stCondLst>
+                                        </p:cTn>
+                                        <p:tgtEl>
+                                          <p:spTgt spid="3">
+                                            <p:txEl>
+                                              <p:pRg st="4" end="4"/>
+                                            </p:txEl>
+                                          </p:spTgt>
+                                        </p:tgtEl>
+                                        <p:attrNameLst>
+                                          <p:attrName>style.visibility</p:attrName>
+                                        </p:attrNameLst>
+                                      </p:cBhvr>
+                                      <p:to>
+                                        <p:strVal val="visible"/>
+                                      </p:to>
+                                    </p:set>
+                                  </p:childTnLst>
+                                </p:cTn>
+                              </p:par>
+                            </p:childTnLst>
+                          </p:cTn>
+                        </p:par>
+                      </p:childTnLst>
+                    </p:cTn>
+                  </p:par>
+                  <p:par>
+                    <p:cTn id="11" fill="hold">
+                      <p:stCondLst>
+                        <p:cond delay="indefinite"/>
+                      </p:stCondLst>
+                      <p:childTnLst>
+                        <p:par>
+                          <p:cTn id="12" fill="hold">
+                            <p:stCondLst>
+                              <p:cond delay="0"/>
+                            </p:stCondLst>
+                            <p:childTnLst>
+                              <p:par>
+                                <p:cTn id="13" presetID="1" presetClass="entr" presetSubtype="0" fill="hold" grpId="0" nodeType="clickEffect">
+                                  <p:stCondLst>
+                                    <p:cond delay="0"/>
+                                  </p:stCondLst>
+                                  <p:childTnLst>
+                                    <p:set>
+                                      <p:cBhvr>
+                                        <p:cTn id="14" dur="1" fill="hold">
+                                          <p:stCondLst>
+                                            <p:cond delay="0"/>
+                                          </p:stCondLst>
+                                        </p:cTn>
+                                        <p:tgtEl>
+                                          <p:spTgt spid="3">
+                                            <p:txEl>
+                                              <p:pRg st="5" end="5"/>
+                                            </p:txEl>
+                                          </p:spTgt>
+                                        </p:tgtEl>
+                                        <p:attrNameLst>
+                                          <p:attrName>style.visibility</p:attrName>
+                                        </p:attrNameLst>
+                                      </p:cBhvr>
+                                      <p:to>
+                                        <p:strVal val="visible"/>
+                                      </p:to>
+                                    </p:set>
+                                  </p:childTnLst>
+                                </p:cTn>
+                              </p:par>
+                            </p:childTnLst>
+                          </p:cTn>
+                        </p:par>
+                      </p:childTnLst>
+                    </p:cTn>
+                  </p:par>
+                  <p:par>
+                    <p:cTn id="15" fill="hold">
+                      <p:stCondLst>
+                        <p:cond delay="indefinite"/>
+                      </p:stCondLst>
+                      <p:childTnLst>
+                        <p:par>
+                          <p:cTn id="16" fill="hold">
+                            <p:stCondLst>
+                              <p:cond delay="0"/>
+                            </p:stCondLst>
+                            <p:childTnLst>
+                              <p:par>
+                                <p:cTn id="17" presetID="1" presetClass="entr" presetSubtype="0" fill="hold" grpId="0" nodeType="clickEffect">
+                                  <p:stCondLst>
+                                    <p:cond delay="0"/>
+                                  </p:stCondLst>
+                                  <p:childTnLst>
+                                    <p:set>
+                                      <p:cBhvr>
+                                        <p:cTn id="18" dur="1" fill="hold">
+                                          <p:stCondLst>
+                                            <p:cond delay="0"/>
+                                          </p:stCondLst>
+                                        </p:cTn>
+                                        <p:tgtEl>
+                                          <p:spTgt spid="3">
+                                            <p:txEl>
+                                              <p:pRg st="6" end="6"/>
+                                            </p:txEl>
+                                          </p:spTgt>
+                                        </p:tgtEl>
+                                        <p:attrNameLst>
+                                          <p:attrName>style.visibility</p:attrName>
+                                        </p:attrNameLst>
+                                      </p:cBhvr>
+                                      <p:to>
+                                        <p:strVal val="visible"/>
+                                      </p:to>
+                                    </p:set>
+                                  </p:childTnLst>
+                                </p:cTn>
+                              </p:par>
+                            </p:childTnLst>
+                          </p:cTn>
+                        </p:par>
+                      </p:childTnLst>
+                    </p:cTn>
+                  </p:par>
+                </p:childTnLst>
+              </p:cTn>
+              <p:prevCondLst>
+                <p:cond evt="onPrev" delay="0">
+                  <p:tgtEl>
+                    <p:sldTgt/>
+                  </p:tgtEl>
+                </p:cond>
+              </p:prevCondLst>
+              <p:nextCondLst>
+                <p:cond evt="onNext" delay="0">
+                  <p:tgtEl>
+                    <p:sldTgt/>
+                  </p:tgtEl>
+                </p:cond>
+              </p:nextCondLst>
+            </p:seq>
+          </p:childTnLst>
+        </p:cTn>
+      </p:par>
+    </p:tnLst>
+    <p:bldLst>
+      <p:bldP spid="3" grpId="0" uiExpand="1" build="p"/>
+    </p:bldLst>
+  </p:timing>
+</p:sld>
+</file>
+
+<file path=ppt/slides/slide15.xml><?xml version="1.0" encoding="utf-8"?>
+<p:sld xmlns:a="http://schemas.openxmlformats.org/drawingml/2006/main" xmlns:r="http://schemas.openxmlformats.org/officeDocument/2006/relationships" xmlns:p="http://schemas.openxmlformats.org/presentationml/2006/main">
+  <p:cSld>
+    <p:spTree>
+      <p:nvGrpSpPr>
+        <p:cNvPr id="1" name=""/>
+        <p:cNvGrpSpPr/>
+        <p:nvPr/>
+      </p:nvGrpSpPr>
+      <p:grpSpPr>
+        <a:xfrm>
+          <a:off x="0" y="0"/>
+          <a:ext cx="0" cy="0"/>
+          <a:chOff x="0" y="0"/>
+          <a:chExt cx="0" cy="0"/>
+        </a:xfrm>
+      </p:grpSpPr>
+      <p:sp>
+        <p:nvSpPr>
+          <p:cNvPr id="2" name="Title 1"/>
+          <p:cNvSpPr>
+            <a:spLocks noGrp="1"/>
+          </p:cNvSpPr>
+          <p:nvPr>
+            <p:ph type="title"/>
+          </p:nvPr>
+        </p:nvSpPr>
+        <p:spPr/>
+        <p:txBody>
+          <a:bodyPr/>
+          <a:lstStyle/>
+          <a:p>
+            <a:pPr lvl="0" indent="0" marL="0">
+              <a:buNone/>
+            </a:pPr>
+            <a:r>
+              <a:rPr/>
+              <a:t>Solution Method 2: Stochastic Dynamic Programming</a:t>
+            </a:r>
+          </a:p>
+        </p:txBody>
+      </p:sp>
+      <mc:AlternateContent xmlns:mc="http://schemas.openxmlformats.org/markup-compatibility/2006">
+        <mc:Choice xmlns:a14="http://schemas.microsoft.com/office/drawing/2010/main" Requires="a14">
+          <p:sp>
+            <p:nvSpPr>
+              <p:cNvPr id="3" name="Content Placeholder 2"/>
+              <p:cNvSpPr>
+                <a:spLocks noGrp="1"/>
+              </p:cNvSpPr>
+              <p:nvPr>
+                <p:ph idx="1"/>
+              </p:nvPr>
+            </p:nvSpPr>
+            <p:spPr/>
+            <p:txBody>
+              <a:bodyPr/>
+              <a:lstStyle/>
+              <a:p>
+                <a:pPr lvl="0" indent="0" marL="0">
+                  <a:buNone/>
+                </a:pPr>
+                <a:r>
+                  <a:rPr/>
+                  <a:t>Closed-loop: work backward from the terminal state using </a:t>
+                </a:r>
+                <a:r>
+                  <a:rPr b="1"/>
+                  <a:t>Bellman’s equation</a:t>
+                </a:r>
+                <a:r>
+                  <a:rPr/>
+                  <a:t>.</a:t>
+                </a:r>
+              </a:p>
+              <a:p>
+                <a:pPr lvl="0" indent="0" marL="0">
+                  <a:buNone/>
+                </a:pPr>
+                <a14:m>
+                  <m:oMathPara xmlns:m="http://schemas.openxmlformats.org/officeDocument/2006/math">
+                    <m:oMathParaPr>
+                      <m:jc m:val="center"/>
+                    </m:oMathParaPr>
+                    <m:oMath>
+                      <m:sSub>
+                        <m:e>
+                          <m:r>
+                            <m:t>Q</m:t>
+                          </m:r>
+                        </m:e>
+                        <m:sub>
+                          <m:r>
+                            <m:t>t</m:t>
+                          </m:r>
+                        </m:sub>
+                      </m:sSub>
+                      <m:d>
+                        <m:dPr>
+                          <m:begChr m:val="("/>
+                          <m:sepChr m:val=""/>
+                          <m:endChr m:val=")"/>
+                          <m:grow/>
+                        </m:dPr>
+                        <m:e>
+                          <m:sSub>
+                            <m:e>
+                              <m:r>
+                                <m:rPr>
+                                  <m:sty m:val="b"/>
+                                </m:rPr>
+                                <m:t>x</m:t>
+                              </m:r>
+                            </m:e>
+                            <m:sub>
+                              <m:r>
+                                <m:t>t</m:t>
+                              </m:r>
+                            </m:sub>
+                          </m:sSub>
+                        </m:e>
+                      </m:d>
+                      <m:r>
+                        <m:rPr>
+                          <m:sty m:val="p"/>
+                        </m:rPr>
+                        <m:t>=</m:t>
+                      </m:r>
+                      <m:limLow>
+                        <m:e>
+                          <m:r>
+                            <m:rPr>
+                              <m:sty m:val="p"/>
+                            </m:rPr>
+                            <m:t>min</m:t>
+                          </m:r>
+                        </m:e>
+                        <m:lim>
+                          <m:sSub>
+                            <m:e>
+                              <m:r>
+                                <m:t>a</m:t>
+                              </m:r>
+                            </m:e>
+                            <m:sub>
+                              <m:r>
+                                <m:t>t</m:t>
+                              </m:r>
+                            </m:sub>
+                          </m:sSub>
+                        </m:lim>
+                      </m:limLow>
+                      <m:r>
+                        <m:t> </m:t>
+                      </m:r>
+                      <m:sSub>
+                        <m:e>
+                          <m:r>
+                            <m:rPr>
+                              <m:sty m:val="p"/>
+                              <m:scr m:val="double-struck"/>
+                            </m:rPr>
+                            <m:t>E</m:t>
+                          </m:r>
+                        </m:e>
+                        <m:sub>
+                          <m:sSub>
+                            <m:e>
+                              <m:r>
+                                <m:rPr>
+                                  <m:sty m:val="b"/>
+                                </m:rPr>
+                                <m:t>e</m:t>
+                              </m:r>
+                            </m:e>
+                            <m:sub>
+                              <m:r>
+                                <m:t>t</m:t>
+                              </m:r>
+                              <m:r>
+                                <m:rPr>
+                                  <m:sty m:val="p"/>
+                                </m:rPr>
+                                <m:t>+</m:t>
+                              </m:r>
+                              <m:r>
+                                <m:t>1</m:t>
+                              </m:r>
+                            </m:sub>
+                          </m:sSub>
+                        </m:sub>
+                      </m:sSub>
+                      <m:r>
+                        <m:t>​</m:t>
+                      </m:r>
+                      <m:d>
+                        <m:dPr>
+                          <m:begChr m:val="["/>
+                          <m:sepChr m:val=""/>
+                          <m:endChr m:val="]"/>
+                          <m:grow/>
+                        </m:dPr>
+                        <m:e>
+                          <m:r>
+                            <m:t> </m:t>
+                          </m:r>
+                          <m:r>
+                            <m:t>J</m:t>
+                          </m:r>
+                          <m:d>
+                            <m:dPr>
+                              <m:begChr m:val="("/>
+                              <m:sepChr m:val=""/>
+                              <m:endChr m:val=")"/>
+                              <m:grow/>
+                            </m:dPr>
+                            <m:e>
+                              <m:sSub>
+                                <m:e>
+                                  <m:r>
+                                    <m:rPr>
+                                      <m:sty m:val="b"/>
+                                    </m:rPr>
+                                    <m:t>x</m:t>
+                                  </m:r>
+                                </m:e>
+                                <m:sub>
+                                  <m:r>
+                                    <m:t>t</m:t>
+                                  </m:r>
+                                </m:sub>
+                              </m:sSub>
+                              <m:r>
+                                <m:rPr>
+                                  <m:sty m:val="p"/>
+                                </m:rPr>
+                                <m:t>,</m:t>
+                              </m:r>
+                              <m:r>
+                                <m:t> </m:t>
+                              </m:r>
+                              <m:sSub>
+                                <m:e>
+                                  <m:r>
+                                    <m:t>a</m:t>
+                                  </m:r>
+                                </m:e>
+                                <m:sub>
+                                  <m:r>
+                                    <m:t>t</m:t>
+                                  </m:r>
+                                </m:sub>
+                              </m:sSub>
+                              <m:r>
+                                <m:rPr>
+                                  <m:sty m:val="p"/>
+                                </m:rPr>
+                                <m:t>,</m:t>
+                              </m:r>
+                              <m:r>
+                                <m:t> </m:t>
+                              </m:r>
+                              <m:sSub>
+                                <m:e>
+                                  <m:r>
+                                    <m:rPr>
+                                      <m:sty m:val="b"/>
+                                    </m:rPr>
+                                    <m:t>e</m:t>
+                                  </m:r>
+                                </m:e>
+                                <m:sub>
+                                  <m:r>
+                                    <m:t>t</m:t>
+                                  </m:r>
+                                  <m:r>
+                                    <m:rPr>
+                                      <m:sty m:val="p"/>
+                                    </m:rPr>
+                                    <m:t>+</m:t>
+                                  </m:r>
+                                  <m:r>
+                                    <m:t>1</m:t>
+                                  </m:r>
+                                </m:sub>
+                              </m:sSub>
+                            </m:e>
+                          </m:d>
+                          <m:r>
+                            <m:t> </m:t>
+                          </m:r>
+                          <m:r>
+                            <m:rPr>
+                              <m:sty m:val="p"/>
+                            </m:rPr>
+                            <m:t>+</m:t>
+                          </m:r>
+                          <m:r>
+                            <m:t> </m:t>
+                          </m:r>
+                          <m:r>
+                            <m:t>γ</m:t>
+                          </m:r>
+                          <m:r>
+                            <m:t> </m:t>
+                          </m:r>
+                          <m:sSub>
+                            <m:e>
+                              <m:r>
+                                <m:t>Q</m:t>
+                              </m:r>
+                            </m:e>
+                            <m:sub>
+                              <m:r>
+                                <m:t>t</m:t>
+                              </m:r>
+                              <m:r>
+                                <m:rPr>
+                                  <m:sty m:val="p"/>
+                                </m:rPr>
+                                <m:t>+</m:t>
+                              </m:r>
+                              <m:r>
+                                <m:t>1</m:t>
+                              </m:r>
+                            </m:sub>
+                          </m:sSub>
+                          <m:d>
+                            <m:dPr>
+                              <m:begChr m:val="("/>
+                              <m:sepChr m:val=""/>
+                              <m:endChr m:val=")"/>
+                              <m:grow/>
+                            </m:dPr>
+                            <m:e>
+                              <m:sSub>
+                                <m:e>
+                                  <m:r>
+                                    <m:rPr>
+                                      <m:sty m:val="b"/>
+                                    </m:rPr>
+                                    <m:t>x</m:t>
+                                  </m:r>
+                                </m:e>
+                                <m:sub>
+                                  <m:r>
+                                    <m:t>t</m:t>
+                                  </m:r>
+                                  <m:r>
+                                    <m:rPr>
+                                      <m:sty m:val="p"/>
+                                    </m:rPr>
+                                    <m:t>+</m:t>
+                                  </m:r>
+                                  <m:r>
+                                    <m:t>1</m:t>
+                                  </m:r>
+                                </m:sub>
+                              </m:sSub>
+                            </m:e>
+                          </m:d>
+                          <m:r>
+                            <m:t> </m:t>
+                          </m:r>
+                        </m:e>
+                      </m:d>
+                    </m:oMath>
+                  </m:oMathPara>
+                </a14:m>
+              </a:p>
+              <a:p>
+                <a:pPr lvl="0"/>
+                <a14:m>
+                  <m:oMath xmlns:m="http://schemas.openxmlformats.org/officeDocument/2006/math">
+                    <m:sSub>
+                      <m:e>
+                        <m:r>
+                          <m:t>Q</m:t>
+                        </m:r>
+                      </m:e>
+                      <m:sub>
+                        <m:r>
+                          <m:t>t</m:t>
+                        </m:r>
+                      </m:sub>
+                    </m:sSub>
+                    <m:d>
+                      <m:dPr>
+                        <m:begChr m:val="("/>
+                        <m:sepChr m:val=""/>
+                        <m:endChr m:val=")"/>
+                        <m:grow/>
+                      </m:dPr>
+                      <m:e>
+                        <m:r>
+                          <m:rPr>
+                            <m:sty m:val="b"/>
+                          </m:rPr>
+                          <m:t>x</m:t>
+                        </m:r>
+                      </m:e>
+                    </m:d>
+                  </m:oMath>
+                </a14:m>
+                <a:r>
+                  <a:rPr/>
+                  <a:t>: optimal cost-to-go from state </a:t>
+                </a:r>
+                <a14:m>
+                  <m:oMath xmlns:m="http://schemas.openxmlformats.org/officeDocument/2006/math">
+                    <m:r>
+                      <m:rPr>
+                        <m:sty m:val="b"/>
+                      </m:rPr>
+                      <m:t>x</m:t>
+                    </m:r>
+                  </m:oMath>
+                </a14:m>
+                <a:r>
+                  <a:rPr/>
+                  <a:t> at time </a:t>
+                </a:r>
+                <a14:m>
+                  <m:oMath xmlns:m="http://schemas.openxmlformats.org/officeDocument/2006/math">
+                    <m:r>
+                      <m:t>t</m:t>
+                    </m:r>
+                  </m:oMath>
+                </a14:m>
+              </a:p>
+              <a:p>
+                <a:pPr lvl="0"/>
+                <a:r>
+                  <a:rPr/>
+                  <a:t>Recursive: solve </a:t>
+                </a:r>
+                <a14:m>
+                  <m:oMath xmlns:m="http://schemas.openxmlformats.org/officeDocument/2006/math">
+                    <m:sSub>
+                      <m:e>
+                        <m:r>
+                          <m:t>Q</m:t>
+                        </m:r>
+                      </m:e>
+                      <m:sub>
+                        <m:r>
+                          <m:t>H</m:t>
+                        </m:r>
+                      </m:sub>
+                    </m:sSub>
+                  </m:oMath>
+                </a14:m>
+                <a:r>
+                  <a:rPr/>
+                  <a:t>, then </a:t>
+                </a:r>
+                <a14:m>
+                  <m:oMath xmlns:m="http://schemas.openxmlformats.org/officeDocument/2006/math">
+                    <m:sSub>
+                      <m:e>
+                        <m:r>
+                          <m:t>Q</m:t>
+                        </m:r>
+                      </m:e>
+                      <m:sub>
+                        <m:r>
+                          <m:t>H</m:t>
+                        </m:r>
+                        <m:r>
+                          <m:rPr>
+                            <m:sty m:val="p"/>
+                          </m:rPr>
+                          <m:t>−</m:t>
+                        </m:r>
+                        <m:r>
+                          <m:t>1</m:t>
+                        </m:r>
+                      </m:sub>
+                    </m:sSub>
+                  </m:oMath>
+                </a14:m>
+                <a:r>
+                  <a:rPr/>
+                  <a:t>, …, then </a:t>
+                </a:r>
+                <a14:m>
+                  <m:oMath xmlns:m="http://schemas.openxmlformats.org/officeDocument/2006/math">
+                    <m:sSub>
+                      <m:e>
+                        <m:r>
+                          <m:t>Q</m:t>
+                        </m:r>
+                      </m:e>
+                      <m:sub>
+                        <m:r>
+                          <m:t>0</m:t>
+                        </m:r>
+                      </m:sub>
+                    </m:sSub>
+                  </m:oMath>
+                </a14:m>
+              </a:p>
+              <a:p>
+                <a:pPr lvl="0"/>
+                <a:r>
+                  <a:rPr/>
+                  <a:t>The expectation requires a </a:t>
+                </a:r>
+                <a:r>
+                  <a:rPr b="1"/>
+                  <a:t>probability model for </a:t>
+                </a:r>
+                <a14:m>
+                  <m:oMath xmlns:m="http://schemas.openxmlformats.org/officeDocument/2006/math">
+                    <m:sSub>
+                      <m:e>
+                        <m:r>
+                          <m:rPr>
+                            <m:sty m:val="b"/>
+                          </m:rPr>
+                          <m:t>e</m:t>
+                        </m:r>
+                      </m:e>
+                      <m:sub>
+                        <m:r>
+                          <m:t>t</m:t>
+                        </m:r>
+                        <m:r>
+                          <m:rPr>
+                            <m:sty m:val="p"/>
+                          </m:rPr>
+                          <m:t>+</m:t>
+                        </m:r>
+                        <m:r>
+                          <m:t>1</m:t>
+                        </m:r>
+                      </m:sub>
+                    </m:sSub>
+                  </m:oMath>
+                </a14:m>
+                <a:r>
+                  <a:rPr/>
+                  <a:t> — you must encode all uncertainty into the transition distribution</a:t>
+                </a:r>
+              </a:p>
+              <a:p>
+                <a:pPr lvl="0"/>
+                <a:r>
+                  <a:rPr b="1"/>
+                  <a:t>Curse of dimensionality</a:t>
+                </a:r>
+                <a:r>
+                  <a:rPr/>
+                  <a:t>: computational cost explodes with the number of state variables</a:t>
+                </a:r>
+              </a:p>
+            </p:txBody>
+          </p:sp>
+        </mc:Choice>
+      </mc:AlternateContent>
+    </p:spTree>
+  </p:cSld>
+  <p:timing>
+    <p:tnLst>
+      <p:par>
+        <p:cTn id="1" dur="indefinite" restart="never" nodeType="tmRoot">
+          <p:childTnLst>
+            <p:seq concurrent="1" nextAc="seek">
+              <p:cTn id="2" dur="indefinite" nodeType="mainSeq">
+                <p:childTnLst>
+                  <p:par>
+                    <p:cTn id="3" fill="hold">
+                      <p:stCondLst>
+                        <p:cond delay="indefinite"/>
+                      </p:stCondLst>
+                      <p:childTnLst>
+                        <p:par>
+                          <p:cTn id="4" fill="hold">
+                            <p:stCondLst>
+                              <p:cond delay="0"/>
+                            </p:stCondLst>
+                            <p:childTnLst>
+                              <p:par>
+                                <p:cTn id="5" presetID="1" presetClass="entr" presetSubtype="0" fill="hold" grpId="0" nodeType="clickEffect">
+                                  <p:stCondLst>
+                                    <p:cond delay="0"/>
+                                  </p:stCondLst>
+                                  <p:childTnLst>
+                                    <p:set>
+                                      <p:cBhvr>
+                                        <p:cTn id="6" dur="1" fill="hold">
+                                          <p:stCondLst>
+                                            <p:cond delay="0"/>
+                                          </p:stCondLst>
+                                        </p:cTn>
+                                        <p:tgtEl>
+                                          <p:spTgt spid="3">
+                                            <p:txEl>
+                                              <p:pRg st="2" end="2"/>
+                                            </p:txEl>
+                                          </p:spTgt>
+                                        </p:tgtEl>
+                                        <p:attrNameLst>
+                                          <p:attrName>style.visibility</p:attrName>
+                                        </p:attrNameLst>
+                                      </p:cBhvr>
+                                      <p:to>
+                                        <p:strVal val="visible"/>
+                                      </p:to>
+                                    </p:set>
+                                  </p:childTnLst>
+                                </p:cTn>
+                              </p:par>
+                            </p:childTnLst>
+                          </p:cTn>
+                        </p:par>
+                      </p:childTnLst>
+                    </p:cTn>
+                  </p:par>
+                  <p:par>
+                    <p:cTn id="7" fill="hold">
+                      <p:stCondLst>
+                        <p:cond delay="indefinite"/>
+                      </p:stCondLst>
+                      <p:childTnLst>
+                        <p:par>
+                          <p:cTn id="8" fill="hold">
+                            <p:stCondLst>
+                              <p:cond delay="0"/>
+                            </p:stCondLst>
+                            <p:childTnLst>
+                              <p:par>
+                                <p:cTn id="9" presetID="1" presetClass="entr" presetSubtype="0" fill="hold" grpId="0" nodeType="clickEffect">
+                                  <p:stCondLst>
+                                    <p:cond delay="0"/>
+                                  </p:stCondLst>
+                                  <p:childTnLst>
+                                    <p:set>
+                                      <p:cBhvr>
+                                        <p:cTn id="10" dur="1" fill="hold">
+                                          <p:stCondLst>
+                                            <p:cond delay="0"/>
+                                          </p:stCondLst>
+                                        </p:cTn>
+                                        <p:tgtEl>
+                                          <p:spTgt spid="3">
+                                            <p:txEl>
+                                              <p:pRg st="3" end="3"/>
+                                            </p:txEl>
+                                          </p:spTgt>
+                                        </p:tgtEl>
+                                        <p:attrNameLst>
+                                          <p:attrName>style.visibility</p:attrName>
+                                        </p:attrNameLst>
+                                      </p:cBhvr>
+                                      <p:to>
+                                        <p:strVal val="visible"/>
+                                      </p:to>
+                                    </p:set>
+                                  </p:childTnLst>
+                                </p:cTn>
+                              </p:par>
+                            </p:childTnLst>
+                          </p:cTn>
+                        </p:par>
+                      </p:childTnLst>
+                    </p:cTn>
+                  </p:par>
+                  <p:par>
+                    <p:cTn id="11" fill="hold">
+                      <p:stCondLst>
+                        <p:cond delay="indefinite"/>
+                      </p:stCondLst>
+                      <p:childTnLst>
+                        <p:par>
+                          <p:cTn id="12" fill="hold">
+                            <p:stCondLst>
+                              <p:cond delay="0"/>
+                            </p:stCondLst>
+                            <p:childTnLst>
+                              <p:par>
+                                <p:cTn id="13" presetID="1" presetClass="entr" presetSubtype="0" fill="hold" grpId="0" nodeType="clickEffect">
+                                  <p:stCondLst>
+                                    <p:cond delay="0"/>
+                                  </p:stCondLst>
+                                  <p:childTnLst>
+                                    <p:set>
+                                      <p:cBhvr>
+                                        <p:cTn id="14" dur="1" fill="hold">
+                                          <p:stCondLst>
+                                            <p:cond delay="0"/>
+                                          </p:stCondLst>
+                                        </p:cTn>
+                                        <p:tgtEl>
+                                          <p:spTgt spid="3">
+                                            <p:txEl>
+                                              <p:pRg st="4" end="4"/>
+                                            </p:txEl>
+                                          </p:spTgt>
+                                        </p:tgtEl>
+                                        <p:attrNameLst>
+                                          <p:attrName>style.visibility</p:attrName>
+                                        </p:attrNameLst>
+                                      </p:cBhvr>
+                                      <p:to>
+                                        <p:strVal val="visible"/>
+                                      </p:to>
+                                    </p:set>
+                                  </p:childTnLst>
+                                </p:cTn>
+                              </p:par>
+                            </p:childTnLst>
+                          </p:cTn>
+                        </p:par>
+                      </p:childTnLst>
+                    </p:cTn>
+                  </p:par>
+                  <p:par>
+                    <p:cTn id="15" fill="hold">
+                      <p:stCondLst>
+                        <p:cond delay="indefinite"/>
+                      </p:stCondLst>
+                      <p:childTnLst>
+                        <p:par>
+                          <p:cTn id="16" fill="hold">
+                            <p:stCondLst>
+                              <p:cond delay="0"/>
+                            </p:stCondLst>
+                            <p:childTnLst>
+                              <p:par>
+                                <p:cTn id="17" presetID="1" presetClass="entr" presetSubtype="0" fill="hold" grpId="0" nodeType="clickEffect">
+                                  <p:stCondLst>
+                                    <p:cond delay="0"/>
+                                  </p:stCondLst>
+                                  <p:childTnLst>
+                                    <p:set>
+                                      <p:cBhvr>
+                                        <p:cTn id="18" dur="1" fill="hold">
+                                          <p:stCondLst>
+                                            <p:cond delay="0"/>
+                                          </p:stCondLst>
+                                        </p:cTn>
+                                        <p:tgtEl>
+                                          <p:spTgt spid="3">
+                                            <p:txEl>
+                                              <p:pRg st="5" end="5"/>
+                                            </p:txEl>
+                                          </p:spTgt>
+                                        </p:tgtEl>
+                                        <p:attrNameLst>
+                                          <p:attrName>style.visibility</p:attrName>
+                                        </p:attrNameLst>
+                                      </p:cBhvr>
+                                      <p:to>
+                                        <p:strVal val="visible"/>
+                                      </p:to>
+                                    </p:set>
+                                  </p:childTnLst>
+                                </p:cTn>
+                              </p:par>
+                            </p:childTnLst>
+                          </p:cTn>
+                        </p:par>
+                      </p:childTnLst>
+                    </p:cTn>
+                  </p:par>
+                </p:childTnLst>
+              </p:cTn>
+              <p:prevCondLst>
+                <p:cond evt="onPrev" delay="0">
+                  <p:tgtEl>
+                    <p:sldTgt/>
+                  </p:tgtEl>
+                </p:cond>
+              </p:prevCondLst>
+              <p:nextCondLst>
+                <p:cond evt="onNext" delay="0">
+                  <p:tgtEl>
+                    <p:sldTgt/>
+                  </p:tgtEl>
+                </p:cond>
+              </p:nextCondLst>
+            </p:seq>
+          </p:childTnLst>
+        </p:cTn>
+      </p:par>
+    </p:tnLst>
+    <p:bldLst>
+      <p:bldP spid="3" grpId="0" uiExpand="1" build="p"/>
+    </p:bldLst>
+  </p:timing>
+</p:sld>
+</file>
+
+<file path=ppt/slides/slide16.xml><?xml version="1.0" encoding="utf-8"?>
+<p:sld xmlns:a="http://schemas.openxmlformats.org/drawingml/2006/main" xmlns:r="http://schemas.openxmlformats.org/officeDocument/2006/relationships" xmlns:p="http://schemas.openxmlformats.org/presentationml/2006/main">
+  <p:cSld>
+    <p:spTree>
+      <p:nvGrpSpPr>
+        <p:cNvPr id="1" name=""/>
+        <p:cNvGrpSpPr/>
+        <p:nvPr/>
+      </p:nvGrpSpPr>
+      <p:grpSpPr>
+        <a:xfrm>
+          <a:off x="0" y="0"/>
+          <a:ext cx="0" cy="0"/>
+          <a:chOff x="0" y="0"/>
+          <a:chExt cx="0" cy="0"/>
+        </a:xfrm>
+      </p:grpSpPr>
+      <p:sp>
+        <p:nvSpPr>
+          <p:cNvPr id="2" name="Title 1"/>
+          <p:cNvSpPr>
+            <a:spLocks noGrp="1"/>
+          </p:cNvSpPr>
+          <p:nvPr>
+            <p:ph type="title"/>
+          </p:nvPr>
+        </p:nvSpPr>
+        <p:spPr/>
+        <p:txBody>
+          <a:bodyPr/>
+          <a:lstStyle/>
+          <a:p>
+            <a:pPr lvl="0" indent="0" marL="0">
+              <a:buNone/>
+            </a:pPr>
+            <a:r>
+              <a:rPr/>
+              <a:t>Solution Method 3: Direct Policy Search</a:t>
+            </a:r>
+          </a:p>
+        </p:txBody>
+      </p:sp>
+      <mc:AlternateContent xmlns:mc="http://schemas.openxmlformats.org/markup-compatibility/2006">
+        <mc:Choice xmlns:a14="http://schemas.microsoft.com/office/drawing/2010/main" Requires="a14">
+          <p:sp>
+            <p:nvSpPr>
+              <p:cNvPr id="3" name="Content Placeholder 2"/>
+              <p:cNvSpPr>
+                <a:spLocks noGrp="1"/>
+              </p:cNvSpPr>
+              <p:nvPr>
+                <p:ph idx="1"/>
+              </p:nvPr>
+            </p:nvSpPr>
+            <p:spPr/>
+            <p:txBody>
+              <a:bodyPr/>
+              <a:lstStyle/>
+              <a:p>
+                <a:pPr lvl="0" indent="0" marL="0">
+                  <a:buNone/>
+                </a:pPr>
+                <a:r>
+                  <a:rPr/>
+                  <a:t>Instead of solving for the value function, </a:t>
+                </a:r>
+                <a:r>
+                  <a:rPr b="1"/>
+                  <a:t>parameterize the policy directly</a:t>
+                </a:r>
+                <a:r>
+                  <a:rPr/>
+                  <a:t>:</a:t>
+                </a:r>
+              </a:p>
+              <a:p>
+                <a:pPr lvl="0" indent="0" marL="0">
+                  <a:buNone/>
+                </a:pPr>
+                <a14:m>
+                  <m:oMathPara xmlns:m="http://schemas.openxmlformats.org/officeDocument/2006/math">
+                    <m:oMathParaPr>
+                      <m:jc m:val="center"/>
+                    </m:oMathParaPr>
+                    <m:oMath>
+                      <m:sSub>
+                        <m:e>
+                          <m:r>
+                            <m:t>a</m:t>
+                          </m:r>
+                        </m:e>
+                        <m:sub>
+                          <m:r>
+                            <m:t>t</m:t>
+                          </m:r>
+                        </m:sub>
+                      </m:sSub>
+                      <m:r>
+                        <m:rPr>
+                          <m:sty m:val="p"/>
+                        </m:rPr>
+                        <m:t>=</m:t>
+                      </m:r>
+                      <m:r>
+                        <m:t>π</m:t>
+                      </m:r>
+                      <m:d>
+                        <m:dPr>
+                          <m:begChr m:val="("/>
+                          <m:sepChr m:val=""/>
+                          <m:endChr m:val=")"/>
+                          <m:grow/>
+                        </m:dPr>
+                        <m:e>
+                          <m:sSub>
+                            <m:e>
+                              <m:r>
+                                <m:rPr>
+                                  <m:sty m:val="b"/>
+                                </m:rPr>
+                                <m:t>I</m:t>
+                              </m:r>
+                            </m:e>
+                            <m:sub>
+                              <m:r>
+                                <m:t>t</m:t>
+                              </m:r>
+                            </m:sub>
+                          </m:sSub>
+                          <m:r>
+                            <m:rPr>
+                              <m:sty m:val="p"/>
+                            </m:rPr>
+                            <m:t>,</m:t>
+                          </m:r>
+                          <m:r>
+                            <m:t> </m:t>
+                          </m:r>
+                          <m:r>
+                            <m:t>θ</m:t>
+                          </m:r>
+                        </m:e>
+                      </m:d>
+                    </m:oMath>
+                  </m:oMathPara>
+                </a14:m>
+              </a:p>
+              <a:p>
+                <a:pPr lvl="0" indent="0" marL="0">
+                  <a:buNone/>
+                </a:pPr>
+                <a14:m>
+                  <m:oMath xmlns:m="http://schemas.openxmlformats.org/officeDocument/2006/math">
+                    <m:r>
+                      <m:t>θ</m:t>
+                    </m:r>
+                  </m:oMath>
+                </a14:m>
+                <a:r>
+                  <a:rPr/>
+                  <a:t> can parameterize a threshold rule, a radial basis function, a neural network — any differentiable or simulable function.</a:t>
+                </a:r>
+              </a:p>
+              <a:p>
+                <a:pPr lvl="0" indent="0" marL="0">
+                  <a:buNone/>
+                </a:pPr>
+                <a:r>
+                  <a:rPr/>
+                  <a:t>. . .</a:t>
+                </a:r>
+              </a:p>
+              <a:p>
+                <a:pPr lvl="0" indent="0" marL="0">
+                  <a:buNone/>
+                </a:pPr>
+                <a:r>
+                  <a:rPr/>
+                  <a:t>Optimize </a:t>
+                </a:r>
+                <a14:m>
+                  <m:oMath xmlns:m="http://schemas.openxmlformats.org/officeDocument/2006/math">
+                    <m:r>
+                      <m:t>θ</m:t>
+                    </m:r>
+                  </m:oMath>
+                </a14:m>
+                <a:r>
+                  <a:rPr/>
+                  <a:t> by </a:t>
+                </a:r>
+                <a:r>
+                  <a:rPr b="1"/>
+                  <a:t>evaluating the policy over an ensemble of scenarios</a:t>
+                </a:r>
+                <a:r>
+                  <a:rPr/>
+                  <a:t>:</a:t>
+                </a:r>
+              </a:p>
+              <a:p>
+                <a:pPr lvl="0" indent="0" marL="0">
+                  <a:buNone/>
+                </a:pPr>
+                <a14:m>
+                  <m:oMathPara xmlns:m="http://schemas.openxmlformats.org/officeDocument/2006/math">
+                    <m:oMathParaPr>
+                      <m:jc m:val="center"/>
+                    </m:oMathParaPr>
+                    <m:oMath>
+                      <m:limLow>
+                        <m:e>
+                          <m:r>
+                            <m:rPr>
+                              <m:sty m:val="p"/>
+                            </m:rPr>
+                            <m:t>min</m:t>
+                          </m:r>
+                        </m:e>
+                        <m:lim>
+                          <m:r>
+                            <m:t>θ</m:t>
+                          </m:r>
+                        </m:lim>
+                      </m:limLow>
+                      <m:r>
+                        <m:t> </m:t>
+                      </m:r>
+                      <m:f>
+                        <m:fPr>
+                          <m:type m:val="bar"/>
+                        </m:fPr>
+                        <m:num>
+                          <m:r>
+                            <m:t>1</m:t>
+                          </m:r>
+                        </m:num>
+                        <m:den>
+                          <m:r>
+                            <m:t>N</m:t>
+                          </m:r>
+                        </m:den>
+                      </m:f>
+                      <m:nary>
+                        <m:naryPr>
+                          <m:chr m:val="∑"/>
+                          <m:limLoc m:val="undOvr"/>
+                          <m:subHide m:val="off"/>
+                          <m:supHide m:val="off"/>
+                        </m:naryPr>
+                        <m:sub>
+                          <m:r>
+                            <m:t>i</m:t>
+                          </m:r>
+                          <m:r>
+                            <m:rPr>
+                              <m:sty m:val="p"/>
+                            </m:rPr>
+                            <m:t>=</m:t>
+                          </m:r>
+                          <m:r>
+                            <m:t>1</m:t>
+                          </m:r>
+                        </m:sub>
+                        <m:sup>
+                          <m:r>
+                            <m:t>N</m:t>
+                          </m:r>
+                        </m:sup>
+                        <m:e>
+                          <m:nary>
+                            <m:naryPr>
+                              <m:chr m:val="∑"/>
+                              <m:limLoc m:val="undOvr"/>
+                              <m:subHide m:val="off"/>
+                              <m:supHide m:val="off"/>
+                            </m:naryPr>
+                            <m:sub>
+                              <m:r>
+                                <m:t>t</m:t>
+                              </m:r>
+                              <m:r>
+                                <m:rPr>
+                                  <m:sty m:val="p"/>
+                                </m:rPr>
+                                <m:t>=</m:t>
+                              </m:r>
+                              <m:r>
+                                <m:t>0</m:t>
+                              </m:r>
+                            </m:sub>
+                            <m:sup>
+                              <m:r>
+                                <m:t>H</m:t>
+                              </m:r>
+                              <m:r>
+                                <m:rPr>
+                                  <m:sty m:val="p"/>
+                                </m:rPr>
+                                <m:t>−</m:t>
+                              </m:r>
+                              <m:r>
+                                <m:t>1</m:t>
+                              </m:r>
+                            </m:sup>
+                            <m:e>
+                              <m:sSubSup>
+                                <m:e>
+                                  <m:r>
+                                    <m:t>J</m:t>
+                                  </m:r>
+                                </m:e>
+                                <m:sub>
+                                  <m:r>
+                                    <m:t>t</m:t>
+                                  </m:r>
+                                </m:sub>
+                                <m:sup>
+                                  <m:d>
+                                    <m:dPr>
+                                      <m:begChr m:val="("/>
+                                      <m:sepChr m:val=""/>
+                                      <m:endChr m:val=")"/>
+                                      <m:grow/>
+                                    </m:dPr>
+                                    <m:e>
+                                      <m:r>
+                                        <m:t>i</m:t>
+                                      </m:r>
+                                    </m:e>
+                                  </m:d>
+                                </m:sup>
+                              </m:sSubSup>
+                            </m:e>
+                          </m:nary>
+                        </m:e>
+                      </m:nary>
+                      <m:d>
+                        <m:dPr>
+                          <m:begChr m:val="("/>
+                          <m:sepChr m:val=""/>
+                          <m:endChr m:val=")"/>
+                          <m:grow/>
+                        </m:dPr>
+                        <m:e>
+                          <m:sSub>
+                            <m:e>
+                              <m:r>
+                                <m:rPr>
+                                  <m:sty m:val="b"/>
+                                </m:rPr>
+                                <m:t>x</m:t>
+                              </m:r>
+                            </m:e>
+                            <m:sub>
+                              <m:r>
+                                <m:t>t</m:t>
+                              </m:r>
+                            </m:sub>
+                          </m:sSub>
+                          <m:r>
+                            <m:rPr>
+                              <m:sty m:val="p"/>
+                            </m:rPr>
+                            <m:t>,</m:t>
+                          </m:r>
+                          <m:r>
+                            <m:t> </m:t>
+                          </m:r>
+                          <m:r>
+                            <m:t>π</m:t>
+                          </m:r>
+                          <m:d>
+                            <m:dPr>
+                              <m:begChr m:val="("/>
+                              <m:sepChr m:val=""/>
+                              <m:endChr m:val=")"/>
+                              <m:grow/>
+                            </m:dPr>
+                            <m:e>
+                              <m:sSub>
+                                <m:e>
+                                  <m:r>
+                                    <m:rPr>
+                                      <m:sty m:val="b"/>
+                                    </m:rPr>
+                                    <m:t>I</m:t>
+                                  </m:r>
+                                </m:e>
+                                <m:sub>
+                                  <m:r>
+                                    <m:t>t</m:t>
+                                  </m:r>
+                                </m:sub>
+                              </m:sSub>
+                              <m:r>
+                                <m:rPr>
+                                  <m:sty m:val="p"/>
+                                </m:rPr>
+                                <m:t>,</m:t>
+                              </m:r>
+                              <m:r>
+                                <m:t> </m:t>
+                              </m:r>
+                              <m:r>
+                                <m:t>θ</m:t>
+                              </m:r>
+                            </m:e>
+                          </m:d>
+                          <m:r>
+                            <m:rPr>
+                              <m:sty m:val="p"/>
+                            </m:rPr>
+                            <m:t>,</m:t>
+                          </m:r>
+                          <m:r>
+                            <m:t> </m:t>
+                          </m:r>
+                          <m:sSubSup>
+                            <m:e>
+                              <m:r>
+                                <m:rPr>
+                                  <m:sty m:val="b"/>
+                                </m:rPr>
+                                <m:t>e</m:t>
+                              </m:r>
+                            </m:e>
+                            <m:sub>
+                              <m:r>
+                                <m:t>t</m:t>
+                              </m:r>
+                              <m:r>
+                                <m:rPr>
+                                  <m:sty m:val="p"/>
+                                </m:rPr>
+                                <m:t>+</m:t>
+                              </m:r>
+                              <m:r>
+                                <m:t>1</m:t>
+                              </m:r>
+                            </m:sub>
+                            <m:sup>
+                              <m:d>
+                                <m:dPr>
+                                  <m:begChr m:val="("/>
+                                  <m:sepChr m:val=""/>
+                                  <m:endChr m:val=")"/>
+                                  <m:grow/>
+                                </m:dPr>
+                                <m:e>
+                                  <m:r>
+                                    <m:t>i</m:t>
+                                  </m:r>
+                                </m:e>
+                              </m:d>
+                            </m:sup>
+                          </m:sSubSup>
+                        </m:e>
+                      </m:d>
+                    </m:oMath>
+                  </m:oMathPara>
+                </a14:m>
+              </a:p>
+              <a:p>
+                <a:pPr lvl="0" indent="0" marL="0">
+                  <a:buNone/>
+                </a:pPr>
+                <a:r>
+                  <a:rPr/>
+                  <a:t>where </a:t>
+                </a:r>
+                <a14:m>
+                  <m:oMath xmlns:m="http://schemas.openxmlformats.org/officeDocument/2006/math">
+                    <m:r>
+                      <m:t>i</m:t>
+                    </m:r>
+                  </m:oMath>
+                </a14:m>
+                <a:r>
+                  <a:rPr/>
+                  <a:t> indexes scenarios.</a:t>
+                </a:r>
+              </a:p>
+              <a:p>
+                <a:pPr lvl="0" indent="0" marL="0">
+                  <a:buNone/>
+                </a:pPr>
+                <a:r>
+                  <a:rPr/>
+                  <a:t>. . .</a:t>
+                </a:r>
+              </a:p>
+              <a:p>
+                <a:pPr lvl="0" indent="0" marL="0">
+                  <a:buNone/>
+                </a:pPr>
+                <a:r>
+                  <a:rPr/>
+                  <a:t>This is the </a:t>
+                </a:r>
+                <a:r>
+                  <a:rPr b="1"/>
+                  <a:t>scenario framework you’ve been using all semester</a:t>
+                </a:r>
+                <a:r>
+                  <a:rPr/>
+                  <a:t> — simulate forward, aggregate performance.</a:t>
+                </a:r>
+              </a:p>
+            </p:txBody>
+          </p:sp>
+        </mc:Choice>
+      </mc:AlternateContent>
+    </p:spTree>
+  </p:cSld>
+</p:sld>
+</file>
+
+<file path=ppt/slides/slide17.xml><?xml version="1.0" encoding="utf-8"?>
+<p:sld xmlns:a="http://schemas.openxmlformats.org/drawingml/2006/main" xmlns:r="http://schemas.openxmlformats.org/officeDocument/2006/relationships" xmlns:p="http://schemas.openxmlformats.org/presentationml/2006/main">
+  <p:cSld>
+    <p:spTree>
+      <p:nvGrpSpPr>
+        <p:cNvPr id="1" name=""/>
+        <p:cNvGrpSpPr/>
+        <p:nvPr/>
+      </p:nvGrpSpPr>
+      <p:grpSpPr>
+        <a:xfrm>
+          <a:off x="0" y="0"/>
+          <a:ext cx="0" cy="0"/>
+          <a:chOff x="0" y="0"/>
+          <a:chExt cx="0" cy="0"/>
+        </a:xfrm>
+      </p:grpSpPr>
+      <p:sp>
+        <p:nvSpPr>
+          <p:cNvPr id="2" name="Title 1"/>
+          <p:cNvSpPr>
+            <a:spLocks noGrp="1"/>
+          </p:cNvSpPr>
+          <p:nvPr>
+            <p:ph type="title"/>
+          </p:nvPr>
+        </p:nvSpPr>
+        <p:spPr>
+          <a:xfrm>
+            <a:off x="457201" y="204787"/>
+            <a:ext cx="3008313" cy="871538"/>
+          </a:xfrm>
+        </p:spPr>
+        <p:txBody>
+          <a:bodyPr/>
+          <a:lstStyle/>
+          <a:p>
+            <a:pPr lvl="0" indent="0" marL="0">
+              <a:buNone/>
+            </a:pPr>
+            <a:r>
+              <a:rPr/>
+              <a:t>DPS in Action: The Levee Problem</a:t>
+            </a:r>
+          </a:p>
+        </p:txBody>
+      </p:sp>
+      <mc:AlternateContent xmlns:mc="http://schemas.openxmlformats.org/markup-compatibility/2006">
+        <mc:Choice xmlns:a14="http://schemas.microsoft.com/office/drawing/2010/main" Requires="a14">
+          <p:sp>
+            <p:nvSpPr>
+              <p:cNvPr id="4" name="Text Placeholder 3"/>
+              <p:cNvSpPr>
+                <a:spLocks noGrp="1"/>
+              </p:cNvSpPr>
+              <p:nvPr>
+                <p:ph idx="2" sz="half" type="body"/>
+              </p:nvPr>
+            </p:nvSpPr>
+            <p:spPr/>
+            <p:txBody>
+              <a:bodyPr/>
+              <a:lstStyle/>
+              <a:p>
+                <a:pPr lvl="0" indent="0" marL="0">
+                  <a:buNone/>
+                </a:pPr>
+                <a:r>
+                  <a:rPr/>
+                  <a:t>Intertemporal (open-loop): prescribe annual heightenings </a:t>
+                </a:r>
+                <a14:m>
+                  <m:oMath xmlns:m="http://schemas.openxmlformats.org/officeDocument/2006/math">
+                    <m:sSub>
+                      <m:e>
+                        <m:r>
+                          <m:t>u</m:t>
+                        </m:r>
+                      </m:e>
+                      <m:sub>
+                        <m:r>
+                          <m:t>1</m:t>
+                        </m:r>
+                      </m:sub>
+                    </m:sSub>
+                    <m:r>
+                      <m:rPr>
+                        <m:sty m:val="p"/>
+                      </m:rPr>
+                      <m:t>,</m:t>
+                    </m:r>
+                    <m:r>
+                      <m:rPr>
+                        <m:sty m:val="p"/>
+                      </m:rPr>
+                      <m:t>…</m:t>
+                    </m:r>
+                    <m:r>
+                      <m:rPr>
+                        <m:sty m:val="p"/>
+                      </m:rPr>
+                      <m:t>,</m:t>
+                    </m:r>
+                    <m:sSub>
+                      <m:e>
+                        <m:r>
+                          <m:t>u</m:t>
+                        </m:r>
+                      </m:e>
+                      <m:sub>
+                        <m:r>
+                          <m:t>300</m:t>
+                        </m:r>
+                      </m:sub>
+                    </m:sSub>
+                  </m:oMath>
+                </a14:m>
+                <a:r>
+                  <a:rPr/>
+                  <a:t> at the start. Same schedule for every future.</a:t>
+                </a:r>
+              </a:p>
+              <a:p>
+                <a:pPr lvl="0" indent="0" marL="0">
+                  <a:buNone/>
+                </a:pPr>
+                <a:r>
+                  <a:rPr/>
+                  <a:t>. . .</a:t>
+                </a:r>
+              </a:p>
+              <a:p>
+                <a:pPr lvl="0" indent="0" marL="0">
+                  <a:buNone/>
+                </a:pPr>
+                <a:r>
+                  <a:rPr/>
+                  <a:t>DPS (closed-loop): observe the </a:t>
+                </a:r>
+                <a:r>
+                  <a:rPr b="1"/>
+                  <a:t>rate of water rise</a:t>
+                </a:r>
+                <a:r>
+                  <a:rPr/>
+                  <a:t> and </a:t>
+                </a:r>
+                <a:r>
+                  <a:rPr b="1"/>
+                  <a:t>variability around the trend</a:t>
+                </a:r>
+                <a:r>
+                  <a:rPr/>
+                  <a:t>. Apply a rule: “heighten by enough to restore the buffer, plus freeboard.”</a:t>
+                </a:r>
+              </a:p>
+            </p:txBody>
+          </p:sp>
+        </mc:Choice>
+      </mc:AlternateContent>
+      <p:pic>
+        <p:nvPicPr>
+          <p:cNvPr descr="garner_fig3.png" id="0" name="Picture 1"/>
+          <p:cNvPicPr>
+            <a:picLocks noGrp="1" noChangeAspect="1"/>
+          </p:cNvPicPr>
+          <p:nvPr/>
+        </p:nvPicPr>
+        <p:blipFill>
+          <a:blip r:embed="rId3"/>
+          <a:stretch>
+            <a:fillRect/>
+          </a:stretch>
+        </p:blipFill>
+        <p:spPr bwMode="auto">
+          <a:xfrm>
+            <a:off x="4940300" y="203200"/>
+            <a:ext cx="2362200" cy="3873500"/>
+          </a:xfrm>
+          <a:prstGeom prst="rect">
+            <a:avLst/>
+          </a:prstGeom>
+          <a:noFill/>
+          <a:ln w="9525">
+            <a:noFill/>
+            <a:headEnd/>
+            <a:tailEnd/>
+          </a:ln>
+        </p:spPr>
+      </p:pic>
+      <p:sp>
+        <p:nvSpPr>
+          <p:cNvPr id="1" name="TextBox 3"/>
+          <p:cNvSpPr txBox="1"/>
+          <p:nvPr/>
+        </p:nvSpPr>
+        <p:spPr>
+          <a:xfrm>
+            <a:off x="3568700" y="4076700"/>
+            <a:ext cx="5105400" cy="508000"/>
+          </a:xfrm>
+          <a:prstGeom prst="rect">
+            <a:avLst/>
+          </a:prstGeom>
+          <a:noFill/>
+        </p:spPr>
+        <p:txBody>
+          <a:bodyPr/>
+          <a:lstStyle/>
+          <a:p>
+            <a:pPr lvl="0" indent="0" marL="0" algn="ctr">
+              <a:buNone/>
+            </a:pPr>
+            <a:r>
+              <a:rPr/>
+              <a:t>Figure 4: Dike height trajectories under DPS (colored) vs. intertemporal (solid black), for three scenarios. Source: Garner and Keller (2018)</a:t>
+            </a:r>
+          </a:p>
+        </p:txBody>
+      </p:sp>
+    </p:spTree>
+  </p:cSld>
+</p:sld>
+</file>
+
+<file path=ppt/slides/slide18.xml><?xml version="1.0" encoding="utf-8"?>
+<p:sld xmlns:a="http://schemas.openxmlformats.org/drawingml/2006/main" xmlns:r="http://schemas.openxmlformats.org/officeDocument/2006/relationships" xmlns:p="http://schemas.openxmlformats.org/presentationml/2006/main">
+  <p:cSld>
+    <p:spTree>
+      <p:nvGrpSpPr>
+        <p:cNvPr id="1" name=""/>
+        <p:cNvGrpSpPr/>
+        <p:nvPr/>
+      </p:nvGrpSpPr>
+      <p:grpSpPr>
+        <a:xfrm>
+          <a:off x="0" y="0"/>
+          <a:ext cx="0" cy="0"/>
+          <a:chOff x="0" y="0"/>
+          <a:chExt cx="0" cy="0"/>
+        </a:xfrm>
+      </p:grpSpPr>
+      <p:sp>
+        <p:nvSpPr>
+          <p:cNvPr id="2" name="Title 1"/>
+          <p:cNvSpPr>
+            <a:spLocks noGrp="1"/>
+          </p:cNvSpPr>
+          <p:nvPr>
+            <p:ph type="title"/>
+          </p:nvPr>
+        </p:nvSpPr>
+        <p:spPr/>
+        <p:txBody>
+          <a:bodyPr/>
+          <a:lstStyle/>
+          <a:p>
+            <a:pPr lvl="0" indent="0" marL="0">
+              <a:buNone/>
+            </a:pPr>
+            <a:r>
+              <a:rPr/>
+              <a:t>Indicator Variables: What Do You Observe?</a:t>
+            </a:r>
+          </a:p>
+        </p:txBody>
+      </p:sp>
+      <mc:AlternateContent xmlns:mc="http://schemas.openxmlformats.org/markup-compatibility/2006">
+        <mc:Choice xmlns:a14="http://schemas.microsoft.com/office/drawing/2010/main" Requires="a14">
+          <p:sp>
+            <p:nvSpPr>
+              <p:cNvPr id="3" name="Content Placeholder 2"/>
+              <p:cNvSpPr>
+                <a:spLocks noGrp="1"/>
+              </p:cNvSpPr>
+              <p:nvPr>
+                <p:ph idx="1"/>
+              </p:nvPr>
+            </p:nvSpPr>
+            <p:spPr/>
+            <p:txBody>
+              <a:bodyPr/>
+              <a:lstStyle/>
+              <a:p>
+                <a:pPr lvl="0" indent="0" marL="0">
+                  <a:buNone/>
+                </a:pPr>
+                <a:r>
+                  <a:rPr/>
+                  <a:t>The policy </a:t>
+                </a:r>
+                <a14:m>
+                  <m:oMath xmlns:m="http://schemas.openxmlformats.org/officeDocument/2006/math">
+                    <m:r>
+                      <m:t>π</m:t>
+                    </m:r>
+                    <m:d>
+                      <m:dPr>
+                        <m:begChr m:val="("/>
+                        <m:sepChr m:val=""/>
+                        <m:endChr m:val=")"/>
+                        <m:grow/>
+                      </m:dPr>
+                      <m:e>
+                        <m:sSub>
+                          <m:e>
+                            <m:r>
+                              <m:rPr>
+                                <m:sty m:val="b"/>
+                              </m:rPr>
+                              <m:t>I</m:t>
+                            </m:r>
+                          </m:e>
+                          <m:sub>
+                            <m:r>
+                              <m:t>t</m:t>
+                            </m:r>
+                          </m:sub>
+                        </m:sSub>
+                        <m:r>
+                          <m:rPr>
+                            <m:sty m:val="p"/>
+                          </m:rPr>
+                          <m:t>,</m:t>
+                        </m:r>
+                        <m:r>
+                          <m:t>θ</m:t>
+                        </m:r>
+                      </m:e>
+                    </m:d>
+                  </m:oMath>
+                </a14:m>
+                <a:r>
+                  <a:rPr/>
+                  <a:t> is only as useful as the information in </a:t>
+                </a:r>
+                <a14:m>
+                  <m:oMath xmlns:m="http://schemas.openxmlformats.org/officeDocument/2006/math">
+                    <m:sSub>
+                      <m:e>
+                        <m:r>
+                          <m:rPr>
+                            <m:sty m:val="b"/>
+                          </m:rPr>
+                          <m:t>I</m:t>
+                        </m:r>
+                      </m:e>
+                      <m:sub>
+                        <m:r>
+                          <m:t>t</m:t>
+                        </m:r>
+                      </m:sub>
+                    </m:sSub>
+                  </m:oMath>
+                </a14:m>
+                <a:r>
+                  <a:rPr/>
+                  <a:t>.</a:t>
+                </a:r>
+              </a:p>
+              <a:p>
+                <a:pPr lvl="0"/>
+                <a:r>
+                  <a:rPr/>
+                  <a:t>An </a:t>
+                </a:r>
+                <a:r>
+                  <a:rPr b="1"/>
+                  <a:t>indicator</a:t>
+                </a:r>
+                <a:r>
+                  <a:rPr/>
+                  <a:t> = variable + timescale + aggregation window + transform </a:t>
+                </a:r>
+                <a:r>
+                  <a:rPr i="1"/>
+                  <a:t>“30-year moving average of annual inflow”</a:t>
+                </a:r>
+                <a:r>
+                  <a:rPr/>
+                  <a:t> </a:t>
+                </a:r>
+                <a:r>
+                  <a:rPr i="1"/>
+                  <a:t>“Rate of water rise over the prior 30 simulation years”</a:t>
+                </a:r>
+              </a:p>
+              <a:p>
+                <a:pPr lvl="0"/>
+                <a:r>
+                  <a:rPr b="1"/>
+                  <a:t>False positive</a:t>
+                </a:r>
+                <a:r>
+                  <a:rPr/>
+                  <a:t>: adapt when you didn’t need to — wasted investment</a:t>
+                </a:r>
+              </a:p>
+              <a:p>
+                <a:pPr lvl="0"/>
+                <a:r>
+                  <a:rPr b="1"/>
+                  <a:t>False negative</a:t>
+                </a:r>
+                <a:r>
+                  <a:rPr/>
+                  <a:t>: fail to adapt when you should — damages or failure</a:t>
+                </a:r>
+              </a:p>
+              <a:p>
+                <a:pPr lvl="0"/>
+                <a:r>
+                  <a:rPr/>
+                  <a:t>Short observation window → more false positives</a:t>
+                </a:r>
+              </a:p>
+              <a:p>
+                <a:pPr lvl="0"/>
+                <a:r>
+                  <a:rPr/>
+                  <a:t>Long observation window → more false negatives</a:t>
+                </a:r>
+              </a:p>
+              <a:p>
+                <a:pPr lvl="0" indent="0" marL="0">
+                  <a:buNone/>
+                </a:pPr>
+                <a:r>
+                  <a:rPr/>
+                  <a:t>. . .</a:t>
+                </a:r>
+              </a:p>
+              <a:p>
+                <a:pPr lvl="0" indent="0" marL="0">
+                  <a:buNone/>
+                </a:pPr>
+                <a:r>
+                  <a:rPr/>
+                  <a:t>Thermodynamic signals (SLR, snowpack) detectable sooner. Dynamic signals (precipitation trends) may take 50+ years to emerge.</a:t>
+                </a:r>
+              </a:p>
+            </p:txBody>
+          </p:sp>
+        </mc:Choice>
+      </mc:AlternateContent>
+    </p:spTree>
+  </p:cSld>
+  <p:timing>
+    <p:tnLst>
+      <p:par>
+        <p:cTn id="1" dur="indefinite" restart="never" nodeType="tmRoot">
+          <p:childTnLst>
+            <p:seq concurrent="1" nextAc="seek">
+              <p:cTn id="2" dur="indefinite" nodeType="mainSeq">
+                <p:childTnLst>
+                  <p:par>
+                    <p:cTn id="3" fill="hold">
+                      <p:stCondLst>
+                        <p:cond delay="indefinite"/>
+                      </p:stCondLst>
+                      <p:childTnLst>
+                        <p:par>
+                          <p:cTn id="4" fill="hold">
+                            <p:stCondLst>
+                              <p:cond delay="0"/>
+                            </p:stCondLst>
+                            <p:childTnLst>
+                              <p:par>
+                                <p:cTn id="5" presetID="1" presetClass="entr" presetSubtype="0" fill="hold" grpId="0" nodeType="clickEffect">
+                                  <p:stCondLst>
+                                    <p:cond delay="0"/>
+                                  </p:stCondLst>
+                                  <p:childTnLst>
+                                    <p:set>
+                                      <p:cBhvr>
+                                        <p:cTn id="6" dur="1" fill="hold">
+                                          <p:stCondLst>
+                                            <p:cond delay="0"/>
+                                          </p:stCondLst>
+                                        </p:cTn>
+                                        <p:tgtEl>
+                                          <p:spTgt spid="3">
+                                            <p:txEl>
+                                              <p:pRg st="1" end="1"/>
+                                            </p:txEl>
+                                          </p:spTgt>
+                                        </p:tgtEl>
+                                        <p:attrNameLst>
+                                          <p:attrName>style.visibility</p:attrName>
+                                        </p:attrNameLst>
+                                      </p:cBhvr>
+                                      <p:to>
+                                        <p:strVal val="visible"/>
+                                      </p:to>
+                                    </p:set>
+                                  </p:childTnLst>
+                                </p:cTn>
+                              </p:par>
+                            </p:childTnLst>
+                          </p:cTn>
+                        </p:par>
+                      </p:childTnLst>
+                    </p:cTn>
+                  </p:par>
+                  <p:par>
+                    <p:cTn id="7" fill="hold">
+                      <p:stCondLst>
+                        <p:cond delay="indefinite"/>
+                      </p:stCondLst>
+                      <p:childTnLst>
+                        <p:par>
+                          <p:cTn id="8" fill="hold">
+                            <p:stCondLst>
+                              <p:cond delay="0"/>
+                            </p:stCondLst>
+                            <p:childTnLst>
+                              <p:par>
+                                <p:cTn id="9" presetID="1" presetClass="entr" presetSubtype="0" fill="hold" grpId="0" nodeType="clickEffect">
+                                  <p:stCondLst>
+                                    <p:cond delay="0"/>
+                                  </p:stCondLst>
+                                  <p:childTnLst>
+                                    <p:set>
+                                      <p:cBhvr>
+                                        <p:cTn id="10" dur="1" fill="hold">
+                                          <p:stCondLst>
+                                            <p:cond delay="0"/>
+                                          </p:stCondLst>
+                                        </p:cTn>
+                                        <p:tgtEl>
+                                          <p:spTgt spid="3">
+                                            <p:txEl>
+                                              <p:pRg st="2" end="2"/>
+                                            </p:txEl>
+                                          </p:spTgt>
+                                        </p:tgtEl>
+                                        <p:attrNameLst>
+                                          <p:attrName>style.visibility</p:attrName>
+                                        </p:attrNameLst>
+                                      </p:cBhvr>
+                                      <p:to>
+                                        <p:strVal val="visible"/>
+                                      </p:to>
+                                    </p:set>
+                                  </p:childTnLst>
+                                </p:cTn>
+                              </p:par>
+                            </p:childTnLst>
+                          </p:cTn>
+                        </p:par>
+                      </p:childTnLst>
+                    </p:cTn>
+                  </p:par>
+                  <p:par>
+                    <p:cTn id="11" fill="hold">
+                      <p:stCondLst>
+                        <p:cond delay="indefinite"/>
+                      </p:stCondLst>
+                      <p:childTnLst>
+                        <p:par>
+                          <p:cTn id="12" fill="hold">
+                            <p:stCondLst>
+                              <p:cond delay="0"/>
+                            </p:stCondLst>
+                            <p:childTnLst>
+                              <p:par>
+                                <p:cTn id="13" presetID="1" presetClass="entr" presetSubtype="0" fill="hold" grpId="0" nodeType="clickEffect">
+                                  <p:stCondLst>
+                                    <p:cond delay="0"/>
+                                  </p:stCondLst>
+                                  <p:childTnLst>
+                                    <p:set>
+                                      <p:cBhvr>
+                                        <p:cTn id="14" dur="1" fill="hold">
+                                          <p:stCondLst>
+                                            <p:cond delay="0"/>
+                                          </p:stCondLst>
+                                        </p:cTn>
+                                        <p:tgtEl>
+                                          <p:spTgt spid="3">
+                                            <p:txEl>
+                                              <p:pRg st="3" end="3"/>
+                                            </p:txEl>
+                                          </p:spTgt>
+                                        </p:tgtEl>
+                                        <p:attrNameLst>
+                                          <p:attrName>style.visibility</p:attrName>
+                                        </p:attrNameLst>
+                                      </p:cBhvr>
+                                      <p:to>
+                                        <p:strVal val="visible"/>
+                                      </p:to>
+                                    </p:set>
+                                  </p:childTnLst>
+                                </p:cTn>
+                              </p:par>
+                            </p:childTnLst>
+                          </p:cTn>
+                        </p:par>
+                      </p:childTnLst>
+                    </p:cTn>
+                  </p:par>
+                  <p:par>
+                    <p:cTn id="15" fill="hold">
+                      <p:stCondLst>
+                        <p:cond delay="indefinite"/>
+                      </p:stCondLst>
+                      <p:childTnLst>
+                        <p:par>
+                          <p:cTn id="16" fill="hold">
+                            <p:stCondLst>
+                              <p:cond delay="0"/>
+                            </p:stCondLst>
+                            <p:childTnLst>
+                              <p:par>
+                                <p:cTn id="17" presetID="1" presetClass="entr" presetSubtype="0" fill="hold" grpId="0" nodeType="clickEffect">
+                                  <p:stCondLst>
+                                    <p:cond delay="0"/>
+                                  </p:stCondLst>
+                                  <p:childTnLst>
+                                    <p:set>
+                                      <p:cBhvr>
+                                        <p:cTn id="18" dur="1" fill="hold">
+                                          <p:stCondLst>
+                                            <p:cond delay="0"/>
+                                          </p:stCondLst>
+                                        </p:cTn>
+                                        <p:tgtEl>
+                                          <p:spTgt spid="3">
+                                            <p:txEl>
+                                              <p:pRg st="4" end="4"/>
+                                            </p:txEl>
+                                          </p:spTgt>
+                                        </p:tgtEl>
+                                        <p:attrNameLst>
+                                          <p:attrName>style.visibility</p:attrName>
+                                        </p:attrNameLst>
+                                      </p:cBhvr>
+                                      <p:to>
+                                        <p:strVal val="visible"/>
+                                      </p:to>
+                                    </p:set>
+                                  </p:childTnLst>
+                                </p:cTn>
+                              </p:par>
+                            </p:childTnLst>
+                          </p:cTn>
+                        </p:par>
+                      </p:childTnLst>
+                    </p:cTn>
+                  </p:par>
+                  <p:par>
+                    <p:cTn id="19" fill="hold">
+                      <p:stCondLst>
+                        <p:cond delay="indefinite"/>
+                      </p:stCondLst>
+                      <p:childTnLst>
+                        <p:par>
+                          <p:cTn id="20" fill="hold">
+                            <p:stCondLst>
+                              <p:cond delay="0"/>
+                            </p:stCondLst>
+                            <p:childTnLst>
+                              <p:par>
+                                <p:cTn id="21" presetID="1" presetClass="entr" presetSubtype="0" fill="hold" grpId="0" nodeType="clickEffect">
+                                  <p:stCondLst>
+                                    <p:cond delay="0"/>
+                                  </p:stCondLst>
+                                  <p:childTnLst>
+                                    <p:set>
+                                      <p:cBhvr>
+                                        <p:cTn id="22" dur="1" fill="hold">
+                                          <p:stCondLst>
+                                            <p:cond delay="0"/>
+                                          </p:stCondLst>
+                                        </p:cTn>
+                                        <p:tgtEl>
+                                          <p:spTgt spid="3">
+                                            <p:txEl>
+                                              <p:pRg st="5" end="5"/>
+                                            </p:txEl>
+                                          </p:spTgt>
+                                        </p:tgtEl>
+                                        <p:attrNameLst>
+                                          <p:attrName>style.visibility</p:attrName>
+                                        </p:attrNameLst>
+                                      </p:cBhvr>
+                                      <p:to>
+                                        <p:strVal val="visible"/>
+                                      </p:to>
+                                    </p:set>
+                                  </p:childTnLst>
+                                </p:cTn>
+                              </p:par>
+                            </p:childTnLst>
+                          </p:cTn>
+                        </p:par>
+                      </p:childTnLst>
+                    </p:cTn>
+                  </p:par>
+                </p:childTnLst>
+              </p:cTn>
+              <p:prevCondLst>
+                <p:cond evt="onPrev" delay="0">
+                  <p:tgtEl>
+                    <p:sldTgt/>
+                  </p:tgtEl>
+                </p:cond>
+              </p:prevCondLst>
+              <p:nextCondLst>
+                <p:cond evt="onNext" delay="0">
+                  <p:tgtEl>
+                    <p:sldTgt/>
+                  </p:tgtEl>
+                </p:cond>
+              </p:nextCondLst>
+            </p:seq>
+          </p:childTnLst>
+        </p:cTn>
+      </p:par>
+    </p:tnLst>
+    <p:bldLst>
+      <p:bldP spid="3" grpId="0" uiExpand="1" build="p"/>
+    </p:bldLst>
+  </p:timing>
+</p:sld>
+</file>
+
+<file path=ppt/slides/slide19.xml><?xml version="1.0" encoding="utf-8"?>
+<p:sld xmlns:a="http://schemas.openxmlformats.org/drawingml/2006/main" xmlns:r="http://schemas.openxmlformats.org/officeDocument/2006/relationships" xmlns:p="http://schemas.openxmlformats.org/presentationml/2006/main">
+  <p:cSld>
+    <p:spTree>
+      <p:nvGrpSpPr>
+        <p:cNvPr id="1" name=""/>
+        <p:cNvGrpSpPr/>
+        <p:nvPr/>
+      </p:nvGrpSpPr>
+      <p:grpSpPr>
+        <a:xfrm>
+          <a:off x="0" y="0"/>
+          <a:ext cx="0" cy="0"/>
+          <a:chOff x="0" y="0"/>
+          <a:chExt cx="0" cy="0"/>
+        </a:xfrm>
+      </p:grpSpPr>
+      <p:sp>
+        <p:nvSpPr>
+          <p:cNvPr id="2" name="Title 1"/>
+          <p:cNvSpPr>
+            <a:spLocks noGrp="1"/>
+          </p:cNvSpPr>
+          <p:nvPr>
+            <p:ph type="title"/>
+          </p:nvPr>
+        </p:nvSpPr>
+        <p:spPr/>
+        <p:txBody>
+          <a:bodyPr/>
+          <a:lstStyle/>
+          <a:p>
+            <a:pPr lvl="0" indent="0" marL="0">
+              <a:buNone/>
+            </a:pPr>
+            <a:r>
+              <a:rPr/>
+              <a:t>Real Options Revisited</a:t>
+            </a:r>
+          </a:p>
+        </p:txBody>
+      </p:sp>
+      <mc:AlternateContent xmlns:mc="http://schemas.openxmlformats.org/markup-compatibility/2006">
+        <mc:Choice xmlns:a14="http://schemas.microsoft.com/office/drawing/2010/main" Requires="a14">
+          <p:sp>
+            <p:nvSpPr>
+              <p:cNvPr id="3" name="Content Placeholder 2"/>
+              <p:cNvSpPr>
+                <a:spLocks noGrp="1"/>
+              </p:cNvSpPr>
+              <p:nvPr>
+                <p:ph idx="1"/>
+              </p:nvPr>
+            </p:nvSpPr>
+            <p:spPr/>
+            <p:txBody>
+              <a:bodyPr/>
+              <a:lstStyle/>
+              <a:p>
+                <a:pPr lvl="0" indent="0" marL="0">
+                  <a:buNone/>
+                </a:pPr>
+                <a:r>
+                  <a:rPr/>
+                  <a:t>Now that we have the vocabulary: a real option is simply a </a:t>
+                </a:r>
+                <a:r>
+                  <a:rPr b="1"/>
+                  <a:t>policy with a rule</a:t>
+                </a:r>
+                <a:r>
+                  <a:rPr/>
+                  <a:t>.</a:t>
+                </a:r>
+              </a:p>
+              <a:p>
+                <a:pPr lvl="0" indent="0" marL="0">
+                  <a:buNone/>
+                </a:pPr>
+                <a:r>
+                  <a:rPr/>
+                  <a:t>. . .</a:t>
+                </a:r>
+              </a:p>
+              <a:p>
+                <a:pPr lvl="0" indent="0" marL="0">
+                  <a:buNone/>
+                </a:pPr>
+                <a:r>
+                  <a:rPr/>
+                  <a:t>The parking garage policy:</a:t>
+                </a:r>
+              </a:p>
+              <a:p>
+                <a:pPr lvl="0" indent="0" marL="0">
+                  <a:buNone/>
+                </a:pPr>
+                <a14:m>
+                  <m:oMathPara xmlns:m="http://schemas.openxmlformats.org/officeDocument/2006/math">
+                    <m:oMathParaPr>
+                      <m:jc m:val="center"/>
+                    </m:oMathParaPr>
+                    <m:oMath>
+                      <m:sSub>
+                        <m:e>
+                          <m:r>
+                            <m:t>a</m:t>
+                          </m:r>
+                        </m:e>
+                        <m:sub>
+                          <m:r>
+                            <m:t>t</m:t>
+                          </m:r>
+                        </m:sub>
+                      </m:sSub>
+                      <m:r>
+                        <m:rPr>
+                          <m:sty m:val="p"/>
+                        </m:rPr>
+                        <m:t>=</m:t>
+                      </m:r>
+                      <m:d>
+                        <m:dPr>
+                          <m:begChr m:val="{"/>
+                          <m:sepChr m:val=""/>
+                          <m:endChr m:val=""/>
+                          <m:grow/>
+                        </m:dPr>
+                        <m:e>
+                          <m:m>
+                            <m:mPr>
+                              <m:baseJc m:val="center"/>
+                              <m:plcHide m:val="on"/>
+                              <m:mcs>
+                                <m:mc>
+                                  <m:mcPr>
+                                    <m:mcJc m:val="left"/>
+                                    <m:count m:val="1"/>
+                                  </m:mcPr>
+                                </m:mc>
+                                <m:mc>
+                                  <m:mcPr>
+                                    <m:mcJc m:val="left"/>
+                                    <m:count m:val="1"/>
+                                  </m:mcPr>
+                                </m:mc>
+                              </m:mcs>
+                            </m:mPr>
+                            <m:mr>
+                              <m:e>
+                                <m:r>
+                                  <m:rPr>
+                                    <m:nor/>
+                                    <m:sty m:val="p"/>
+                                  </m:rPr>
+                                  <m:t>add a floor</m:t>
+                                </m:r>
+                              </m:e>
+                              <m:e>
+                                <m:r>
+                                  <m:rPr>
+                                    <m:nor/>
+                                    <m:sty m:val="p"/>
+                                  </m:rPr>
+                                  <m:t>if occupancy</m:t>
+                                </m:r>
+                                <m:r>
+                                  <m:rPr>
+                                    <m:sty m:val="p"/>
+                                  </m:rPr>
+                                  <m:t>&gt;</m:t>
+                                </m:r>
+                                <m:r>
+                                  <m:t>τ</m:t>
+                                </m:r>
+                                <m:r>
+                                  <m:rPr>
+                                    <m:nor/>
+                                    <m:sty m:val="p"/>
+                                  </m:rPr>
+                                  <m:t> for two consecutive years</m:t>
+                                </m:r>
+                              </m:e>
+                            </m:mr>
+                            <m:mr>
+                              <m:e>
+                                <m:r>
+                                  <m:rPr>
+                                    <m:nor/>
+                                    <m:sty m:val="p"/>
+                                  </m:rPr>
+                                  <m:t>do nothing</m:t>
+                                </m:r>
+                              </m:e>
+                              <m:e>
+                                <m:r>
+                                  <m:rPr>
+                                    <m:nor/>
+                                    <m:sty m:val="p"/>
+                                  </m:rPr>
+                                  <m:t>otherwise</m:t>
+                                </m:r>
+                              </m:e>
+                            </m:mr>
+                          </m:m>
+                        </m:e>
+                      </m:d>
+                    </m:oMath>
+                  </m:oMathPara>
+                </a14:m>
+              </a:p>
+              <a:p>
+                <a:pPr lvl="0" indent="0" marL="0">
+                  <a:buNone/>
+                </a:pPr>
+                <a:r>
+                  <a:rPr/>
+                  <a:t>This is </a:t>
+                </a:r>
+                <a14:m>
+                  <m:oMath xmlns:m="http://schemas.openxmlformats.org/officeDocument/2006/math">
+                    <m:r>
+                      <m:t>π</m:t>
+                    </m:r>
+                    <m:d>
+                      <m:dPr>
+                        <m:begChr m:val="("/>
+                        <m:sepChr m:val=""/>
+                        <m:endChr m:val=")"/>
+                        <m:grow/>
+                      </m:dPr>
+                      <m:e>
+                        <m:sSub>
+                          <m:e>
+                            <m:r>
+                              <m:rPr>
+                                <m:sty m:val="b"/>
+                              </m:rPr>
+                              <m:t>I</m:t>
+                            </m:r>
+                          </m:e>
+                          <m:sub>
+                            <m:r>
+                              <m:t>t</m:t>
+                            </m:r>
+                          </m:sub>
+                        </m:sSub>
+                        <m:r>
+                          <m:rPr>
+                            <m:sty m:val="p"/>
+                          </m:rPr>
+                          <m:t>,</m:t>
+                        </m:r>
+                        <m:r>
+                          <m:t>θ</m:t>
+                        </m:r>
+                      </m:e>
+                    </m:d>
+                  </m:oMath>
+                </a14:m>
+                <a:r>
+                  <a:rPr/>
+                  <a:t> with </a:t>
+                </a:r>
+                <a14:m>
+                  <m:oMath xmlns:m="http://schemas.openxmlformats.org/officeDocument/2006/math">
+                    <m:r>
+                      <m:t>θ</m:t>
+                    </m:r>
+                    <m:r>
+                      <m:rPr>
+                        <m:sty m:val="p"/>
+                      </m:rPr>
+                      <m:t>=</m:t>
+                    </m:r>
+                    <m:r>
+                      <m:t>τ</m:t>
+                    </m:r>
+                  </m:oMath>
+                </a14:m>
+                <a:r>
+                  <a:rPr/>
+                  <a:t> and </a:t>
+                </a:r>
+                <a14:m>
+                  <m:oMath xmlns:m="http://schemas.openxmlformats.org/officeDocument/2006/math">
+                    <m:sSub>
+                      <m:e>
+                        <m:r>
+                          <m:rPr>
+                            <m:sty m:val="b"/>
+                          </m:rPr>
+                          <m:t>I</m:t>
+                        </m:r>
+                      </m:e>
+                      <m:sub>
+                        <m:r>
+                          <m:t>t</m:t>
+                        </m:r>
+                      </m:sub>
+                    </m:sSub>
+                    <m:r>
+                      <m:rPr>
+                        <m:sty m:val="p"/>
+                      </m:rPr>
+                      <m:t>=</m:t>
+                    </m:r>
+                    <m:sSub>
+                      <m:e>
+                        <m:r>
+                          <m:rPr>
+                            <m:nor/>
+                            <m:sty m:val="p"/>
+                          </m:rPr>
+                          <m:t>occupancy</m:t>
+                        </m:r>
+                      </m:e>
+                      <m:sub>
+                        <m:r>
+                          <m:t>t</m:t>
+                        </m:r>
+                      </m:sub>
+                    </m:sSub>
+                  </m:oMath>
+                </a14:m>
+                <a:r>
+                  <a:rPr/>
+                  <a:t>.</a:t>
+                </a:r>
+              </a:p>
+              <a:p>
+                <a:pPr lvl="0" indent="0" marL="0">
+                  <a:buNone/>
+                </a:pPr>
+                <a:r>
+                  <a:rPr/>
+                  <a:t>. . .</a:t>
+                </a:r>
+              </a:p>
+              <a:p>
+                <a:pPr lvl="0" indent="0" marL="0">
+                  <a:buNone/>
+                </a:pPr>
+                <a:r>
+                  <a:rPr/>
+                  <a:t>De Neufville found it by intuition and simulation. DPS finds it by optimization over </a:t>
+                </a:r>
+                <a14:m>
+                  <m:oMath xmlns:m="http://schemas.openxmlformats.org/officeDocument/2006/math">
+                    <m:r>
+                      <m:t>θ</m:t>
+                    </m:r>
+                  </m:oMath>
+                </a14:m>
+                <a:r>
+                  <a:rPr/>
+                  <a:t> across many scenarios.</a:t>
+                </a:r>
+              </a:p>
+              <a:p>
+                <a:pPr lvl="0" indent="0" marL="0">
+                  <a:buNone/>
+                </a:pPr>
+                <a:r>
+                  <a:rPr/>
+                  <a:t>. . .</a:t>
+                </a:r>
+              </a:p>
+              <a:p>
+                <a:pPr lvl="0" indent="0" marL="0">
+                  <a:buNone/>
+                </a:pPr>
+                <a:r>
+                  <a:rPr b="1"/>
+                  <a:t>The option premium</a:t>
+                </a:r>
+                <a:r>
+                  <a:rPr/>
+                  <a:t> = cost of reinforcing the columns = cost to make this policy feasible.</a:t>
+                </a:r>
+              </a:p>
+            </p:txBody>
+          </p:sp>
+        </mc:Choice>
+      </mc:AlternateContent>
     </p:spTree>
   </p:cSld>
 </p:sld>
@@ -3241,7 +9144,7 @@
 </p:sld>
 </file>
 
-<file path=ppt/slides/slide3.xml><?xml version="1.0" encoding="utf-8"?>
+<file path=ppt/slides/slide20.xml><?xml version="1.0" encoding="utf-8"?>
 <p:sld xmlns:a="http://schemas.openxmlformats.org/drawingml/2006/main" xmlns:r="http://schemas.openxmlformats.org/officeDocument/2006/relationships" xmlns:p="http://schemas.openxmlformats.org/presentationml/2006/main">
   <p:cSld>
     <p:spTree>
@@ -3278,7 +9181,7 @@
             </a:pPr>
             <a:r>
               <a:rPr/>
-              <a:t>Coming Soon</a:t>
+              <a:t>Evaluating vs. Designing Policies</a:t>
             </a:r>
           </a:p>
         </p:txBody>
@@ -3305,7 +9208,7 @@
                 </a:pPr>
                 <a:r>
                   <a:rPr/>
-                  <a:t>This lecture is under development.</a:t>
+                  <a:t>These are different tasks and are easy to confuse.</a:t>
                 </a:r>
               </a:p>
               <a:p>
@@ -3313,67 +9216,314 @@
                   <a:buNone/>
                 </a:pPr>
                 <a:r>
+                  <a:rPr b="1"/>
+                  <a:t>Evaluating</a:t>
+                </a:r>
+                <a:r>
                   <a:rPr/>
-                  <a:t>Content to adapt from previous course:</a:t>
+                  <a:t> a policy: given fixed </a:t>
+                </a:r>
+                <a14:m>
+                  <m:oMath xmlns:m="http://schemas.openxmlformats.org/officeDocument/2006/math">
+                    <m:r>
+                      <m:t>θ</m:t>
+                    </m:r>
+                  </m:oMath>
+                </a14:m>
+                <a:r>
+                  <a:rPr/>
+                  <a:t>, simulate over scenarios and compute costs. This is what robustness analysis in Weeks 7–8 did.</a:t>
+                </a:r>
+              </a:p>
+              <a:p>
+                <a:pPr lvl="0" indent="0" marL="0">
+                  <a:buNone/>
+                </a:pPr>
+                <a:r>
+                  <a:rPr/>
+                  <a:t>. . .</a:t>
+                </a:r>
+              </a:p>
+              <a:p>
+                <a:pPr lvl="0" indent="0" marL="0">
+                  <a:buNone/>
+                </a:pPr>
+                <a:r>
+                  <a:rPr b="1"/>
+                  <a:t>Designing</a:t>
+                </a:r>
+                <a:r>
+                  <a:rPr/>
+                  <a:t> a policy: search over </a:t>
+                </a:r>
+                <a14:m>
+                  <m:oMath xmlns:m="http://schemas.openxmlformats.org/officeDocument/2006/math">
+                    <m:r>
+                      <m:t>θ</m:t>
+                    </m:r>
+                  </m:oMath>
+                </a14:m>
+                <a:r>
+                  <a:rPr/>
+                  <a:t> to minimize expected costs across the ensemble. This is what DPS does.</a:t>
+                </a:r>
+              </a:p>
+              <a:p>
+                <a:pPr lvl="0" indent="0" marL="0">
+                  <a:buNone/>
+                </a:pPr>
+                <a:r>
+                  <a:rPr/>
+                  <a:t>. . .</a:t>
+                </a:r>
+              </a:p>
+              <a:p>
+                <a:pPr lvl="0" indent="0" marL="0">
+                  <a:buNone/>
+                </a:pPr>
+                <a:r>
+                  <a:rPr/>
+                  <a:t>The quality of a designed policy depends on the quality of the uncertainty characterization used during optimization.</a:t>
+                </a:r>
+              </a:p>
+            </p:txBody>
+          </p:sp>
+        </mc:Choice>
+      </mc:AlternateContent>
+    </p:spTree>
+  </p:cSld>
+</p:sld>
+</file>
+
+<file path=ppt/slides/slide21.xml><?xml version="1.0" encoding="utf-8"?>
+<p:sld xmlns:a="http://schemas.openxmlformats.org/drawingml/2006/main" xmlns:r="http://schemas.openxmlformats.org/officeDocument/2006/relationships" xmlns:p="http://schemas.openxmlformats.org/presentationml/2006/main">
+  <p:cSld>
+    <p:spTree>
+      <p:nvGrpSpPr>
+        <p:cNvPr id="1" name=""/>
+        <p:cNvGrpSpPr/>
+        <p:nvPr/>
+      </p:nvGrpSpPr>
+      <p:grpSpPr>
+        <a:xfrm>
+          <a:off x="0" y="0"/>
+          <a:ext cx="0" cy="0"/>
+          <a:chOff x="0" y="0"/>
+          <a:chExt cx="0" cy="0"/>
+        </a:xfrm>
+      </p:grpSpPr>
+      <p:sp>
+        <p:nvSpPr>
+          <p:cNvPr id="2" name="Title 1"/>
+          <p:cNvSpPr>
+            <a:spLocks noGrp="1"/>
+          </p:cNvSpPr>
+          <p:nvPr>
+            <p:ph type="title"/>
+          </p:nvPr>
+        </p:nvSpPr>
+        <p:spPr>
+          <a:xfrm>
+            <a:off x="457201" y="204787"/>
+            <a:ext cx="3008313" cy="871538"/>
+          </a:xfrm>
+        </p:spPr>
+        <p:txBody>
+          <a:bodyPr/>
+          <a:lstStyle/>
+          <a:p>
+            <a:pPr lvl="0" indent="0" marL="0">
+              <a:buNone/>
+            </a:pPr>
+            <a:r>
+              <a:rPr/>
+              <a:t>Validation: How Good Is Your Policy?</a:t>
+            </a:r>
+          </a:p>
+        </p:txBody>
+      </p:sp>
+      <p:sp>
+        <p:nvSpPr>
+          <p:cNvPr id="4" name="Text Placeholder 3"/>
+          <p:cNvSpPr>
+            <a:spLocks noGrp="1"/>
+          </p:cNvSpPr>
+          <p:nvPr>
+            <p:ph idx="2" sz="half" type="body"/>
+          </p:nvPr>
+        </p:nvSpPr>
+        <p:spPr/>
+        <p:txBody>
+          <a:bodyPr/>
+          <a:lstStyle/>
+          <a:p>
+            <a:pPr lvl="0" indent="0" marL="0">
+              <a:buNone/>
+            </a:pPr>
+            <a:r>
+              <a:rPr/>
+              <a:t>Test the optimized policy against scenarios </a:t>
+            </a:r>
+            <a:r>
+              <a:rPr i="1"/>
+              <a:t>not used in optimization</a:t>
+            </a:r>
+            <a:r>
+              <a:rPr/>
+              <a:t>. Five possible outcomes (Herman et al. (2020), Fig. 6):</a:t>
+            </a:r>
+          </a:p>
+        </p:txBody>
+      </p:sp>
+      <p:pic>
+        <p:nvPicPr>
+          <p:cNvPr descr="herman_fig6.png" id="0" name="Picture 1"/>
+          <p:cNvPicPr>
+            <a:picLocks noGrp="1" noChangeAspect="1"/>
+          </p:cNvPicPr>
+          <p:nvPr/>
+        </p:nvPicPr>
+        <p:blipFill>
+          <a:blip r:embed="rId3"/>
+          <a:stretch>
+            <a:fillRect/>
+          </a:stretch>
+        </p:blipFill>
+        <p:spPr bwMode="auto">
+          <a:xfrm>
+            <a:off x="3568700" y="419100"/>
+            <a:ext cx="5105400" cy="3441700"/>
+          </a:xfrm>
+          <a:prstGeom prst="rect">
+            <a:avLst/>
+          </a:prstGeom>
+          <a:noFill/>
+          <a:ln w="9525">
+            <a:noFill/>
+            <a:headEnd/>
+            <a:tailEnd/>
+          </a:ln>
+        </p:spPr>
+      </p:pic>
+      <p:sp>
+        <p:nvSpPr>
+          <p:cNvPr id="1" name="TextBox 3"/>
+          <p:cNvSpPr txBox="1"/>
+          <p:nvPr/>
+        </p:nvSpPr>
+        <p:spPr>
+          <a:xfrm>
+            <a:off x="3568700" y="4076700"/>
+            <a:ext cx="5105400" cy="508000"/>
+          </a:xfrm>
+          <a:prstGeom prst="rect">
+            <a:avLst/>
+          </a:prstGeom>
+          <a:noFill/>
+        </p:spPr>
+        <p:txBody>
+          <a:bodyPr/>
+          <a:lstStyle/>
+          <a:p>
+            <a:pPr lvl="0" indent="0" marL="0" algn="ctr">
+              <a:buNone/>
+            </a:pPr>
+            <a:r>
+              <a:rPr/>
+              <a:t>Figure 5: NA = no action; V = validation; O = optimization; P = perfect foresight.</a:t>
+            </a:r>
+          </a:p>
+        </p:txBody>
+      </p:sp>
+    </p:spTree>
+  </p:cSld>
+</p:sld>
+</file>
+
+<file path=ppt/slides/slide22.xml><?xml version="1.0" encoding="utf-8"?>
+<p:sld xmlns:a="http://schemas.openxmlformats.org/drawingml/2006/main" xmlns:r="http://schemas.openxmlformats.org/officeDocument/2006/relationships" xmlns:p="http://schemas.openxmlformats.org/presentationml/2006/main">
+  <p:cSld>
+    <p:spTree>
+      <p:nvGrpSpPr>
+        <p:cNvPr id="1" name=""/>
+        <p:cNvGrpSpPr/>
+        <p:nvPr/>
+      </p:nvGrpSpPr>
+      <p:grpSpPr>
+        <a:xfrm>
+          <a:off x="0" y="0"/>
+          <a:ext cx="0" cy="0"/>
+          <a:chOff x="0" y="0"/>
+          <a:chExt cx="0" cy="0"/>
+        </a:xfrm>
+      </p:grpSpPr>
+      <p:sp>
+        <p:nvSpPr>
+          <p:cNvPr id="2" name="Title 1"/>
+          <p:cNvSpPr>
+            <a:spLocks noGrp="1"/>
+          </p:cNvSpPr>
+          <p:nvPr>
+            <p:ph type="title"/>
+          </p:nvPr>
+        </p:nvSpPr>
+        <p:spPr/>
+        <p:txBody>
+          <a:bodyPr/>
+          <a:lstStyle/>
+          <a:p>
+            <a:pPr lvl="0" indent="0" marL="0">
+              <a:buNone/>
+            </a:pPr>
+            <a:r>
+              <a:rPr/>
+              <a:t>Summary</a:t>
+            </a:r>
+          </a:p>
+        </p:txBody>
+      </p:sp>
+      <mc:AlternateContent xmlns:mc="http://schemas.openxmlformats.org/markup-compatibility/2006">
+        <mc:Choice xmlns:a14="http://schemas.microsoft.com/office/drawing/2010/main" Requires="a14">
+          <p:sp>
+            <p:nvSpPr>
+              <p:cNvPr id="3" name="Content Placeholder 2"/>
+              <p:cNvSpPr>
+                <a:spLocks noGrp="1"/>
+              </p:cNvSpPr>
+              <p:nvPr>
+                <p:ph idx="1"/>
+              </p:nvPr>
+            </p:nvSpPr>
+            <p:spPr/>
+            <p:txBody>
+              <a:bodyPr/>
+              <a:lstStyle/>
+              <a:p>
+                <a:pPr lvl="0"/>
+                <a:r>
+                  <a:rPr b="1"/>
+                  <a:t>Real options</a:t>
+                </a:r>
+                <a:r>
+                  <a:rPr/>
+                  <a:t>: build in the right to act later; option value = ENPV gain from flexibility</a:t>
                 </a:r>
               </a:p>
               <a:p>
                 <a:pPr lvl="0"/>
                 <a:r>
+                  <a:rPr b="1"/>
+                  <a:t>Sequential decisions</a:t>
+                </a:r>
+                <a:r>
                   <a:rPr/>
-                  <a:t>Static vs. sequential decision framing</a:t>
-                </a:r>
-              </a:p>
-              <a:p>
-                <a:pPr lvl="0"/>
-                <a:r>
-                  <a:rPr/>
-                  <a:t>State evolution: </a:t>
+                  <a:t>: optimize a policy </a:t>
                 </a:r>
                 <a14:m>
                   <m:oMath xmlns:m="http://schemas.openxmlformats.org/officeDocument/2006/math">
-                    <m:sSub>
-                      <m:e>
-                        <m:r>
-                          <m:rPr>
-                            <m:sty m:val="b"/>
-                          </m:rPr>
-                          <m:t>x</m:t>
-                        </m:r>
-                      </m:e>
-                      <m:sub>
-                        <m:r>
-                          <m:t>t</m:t>
-                        </m:r>
-                        <m:r>
-                          <m:rPr>
-                            <m:sty m:val="p"/>
-                          </m:rPr>
-                          <m:t>+</m:t>
-                        </m:r>
-                        <m:r>
-                          <m:t>1</m:t>
-                        </m:r>
-                      </m:sub>
-                    </m:sSub>
                     <m:r>
-                      <m:rPr>
-                        <m:sty m:val="p"/>
-                      </m:rPr>
-                      <m:t>=</m:t>
+                      <m:t>π</m:t>
                     </m:r>
-                    <m:sSub>
-                      <m:e>
-                        <m:r>
-                          <m:t>f</m:t>
-                        </m:r>
-                      </m:e>
-                      <m:sub>
-                        <m:r>
-                          <m:t>t</m:t>
-                        </m:r>
-                      </m:sub>
-                    </m:sSub>
                     <m:d>
                       <m:dPr>
                         <m:begChr m:val="("/>
@@ -3388,7 +9538,7 @@
                               <m:rPr>
                                 <m:sty m:val="b"/>
                               </m:rPr>
-                              <m:t>x</m:t>
+                              <m:t>I</m:t>
                             </m:r>
                           </m:e>
                           <m:sub>
@@ -3403,69 +9553,91 @@
                           </m:rPr>
                           <m:t>,</m:t>
                         </m:r>
-                        <m:sSub>
-                          <m:e>
-                            <m:r>
-                              <m:t>a</m:t>
-                            </m:r>
-                          </m:e>
-                          <m:sub>
-                            <m:r>
-                              <m:t>t</m:t>
-                            </m:r>
-                          </m:sub>
-                        </m:sSub>
                         <m:r>
-                          <m:rPr>
-                            <m:sty m:val="p"/>
-                          </m:rPr>
-                          <m:t>,</m:t>
+                          <m:t>θ</m:t>
                         </m:r>
-                        <m:sSub>
-                          <m:e>
-                            <m:r>
-                              <m:t>e</m:t>
-                            </m:r>
-                          </m:e>
-                          <m:sub>
-                            <m:r>
-                              <m:t>t</m:t>
-                            </m:r>
-                            <m:r>
-                              <m:rPr>
-                                <m:sty m:val="p"/>
-                              </m:rPr>
-                              <m:t>+</m:t>
-                            </m:r>
-                            <m:r>
-                              <m:t>1</m:t>
-                            </m:r>
-                          </m:sub>
-                        </m:sSub>
                       </m:e>
                     </m:d>
                   </m:oMath>
                 </a14:m>
+                <a:r>
+                  <a:rPr/>
+                  <a:t> — a rule mapping observations to actions</a:t>
+                </a:r>
               </a:p>
               <a:p>
                 <a:pPr lvl="0"/>
                 <a:r>
+                  <a:rPr b="1"/>
+                  <a:t>Open loop</a:t>
+                </a:r>
+                <a:r>
                   <a:rPr/>
-                  <a:t>Reward and value functions</a:t>
+                  <a:t>: no feedback; must over-build to cover worst case</a:t>
                 </a:r>
               </a:p>
               <a:p>
                 <a:pPr lvl="0"/>
                 <a:r>
+                  <a:rPr b="1"/>
+                  <a:t>SDP</a:t>
+                </a:r>
+                <a:r>
                   <a:rPr/>
-                  <a:t>Solution methods: open loop, dynamic programming, policy search</a:t>
+                  <a:t>: closed loop, exact, requires probability model + discretized state space</a:t>
                 </a:r>
               </a:p>
               <a:p>
                 <a:pPr lvl="0"/>
                 <a:r>
+                  <a:rPr b="1"/>
+                  <a:t>DPS</a:t>
+                </a:r>
+                <a:r>
                   <a:rPr/>
-                  <a:t>Real options and the value of flexibility</a:t>
+                  <a:t>: closed loop, scalable, evaluates policy over scenarios — the framework we’ve been using</a:t>
+                </a:r>
+              </a:p>
+              <a:p>
+                <a:pPr lvl="0"/>
+                <a:r>
+                  <a:rPr b="1"/>
+                  <a:t>Validation</a:t>
+                </a:r>
+                <a:r>
+                  <a:rPr/>
+                  <a:t>: evaluating ≠ designing; test out-of-sample or risk overfit to your training scenarios</a:t>
+                </a:r>
+              </a:p>
+              <a:p>
+                <a:pPr lvl="0" indent="0" marL="0">
+                  <a:buNone/>
+                </a:pPr>
+                <a:r>
+                  <a:rPr/>
+                  <a:t>. . .</a:t>
+                </a:r>
+              </a:p>
+              <a:p>
+                <a:pPr lvl="0" indent="0" marL="0">
+                  <a:buNone/>
+                </a:pPr>
+                <a:r>
+                  <a:rPr b="1"/>
+                  <a:t>Wednesday:</a:t>
+                </a:r>
+                <a:r>
+                  <a:rPr/>
+                  <a:t> Fuad leads discussion of Garner and Keller (2018) and de Neufville, Scholtes, and Wang (2006).</a:t>
+                </a:r>
+              </a:p>
+              <a:p>
+                <a:pPr lvl="0" indent="0" marL="0">
+                  <a:buNone/>
+                </a:pPr>
+                <a:r>
+                  <a:rPr/>
+                  <a:t>Note: there is a known unit error in Garner and Keller (2018) — storm surge is off by a factor of 10, over-weighting SLR. Methods and qualitative findings remain valid.</a:t>
                 </a:r>
               </a:p>
             </p:txBody>
@@ -3474,6 +9646,783 @@
       </mc:AlternateContent>
     </p:spTree>
   </p:cSld>
+  <p:timing>
+    <p:tnLst>
+      <p:par>
+        <p:cTn id="1" dur="indefinite" restart="never" nodeType="tmRoot">
+          <p:childTnLst>
+            <p:seq concurrent="1" nextAc="seek">
+              <p:cTn id="2" dur="indefinite" nodeType="mainSeq">
+                <p:childTnLst>
+                  <p:par>
+                    <p:cTn id="3" fill="hold">
+                      <p:stCondLst>
+                        <p:cond delay="indefinite"/>
+                      </p:stCondLst>
+                      <p:childTnLst>
+                        <p:par>
+                          <p:cTn id="4" fill="hold">
+                            <p:stCondLst>
+                              <p:cond delay="0"/>
+                            </p:stCondLst>
+                            <p:childTnLst>
+                              <p:par>
+                                <p:cTn id="5" presetID="1" presetClass="entr" presetSubtype="0" fill="hold" grpId="0" nodeType="clickEffect">
+                                  <p:stCondLst>
+                                    <p:cond delay="0"/>
+                                  </p:stCondLst>
+                                  <p:childTnLst>
+                                    <p:set>
+                                      <p:cBhvr>
+                                        <p:cTn id="6" dur="1" fill="hold">
+                                          <p:stCondLst>
+                                            <p:cond delay="0"/>
+                                          </p:stCondLst>
+                                        </p:cTn>
+                                        <p:tgtEl>
+                                          <p:spTgt spid="3">
+                                            <p:txEl>
+                                              <p:pRg st="0" end="0"/>
+                                            </p:txEl>
+                                          </p:spTgt>
+                                        </p:tgtEl>
+                                        <p:attrNameLst>
+                                          <p:attrName>style.visibility</p:attrName>
+                                        </p:attrNameLst>
+                                      </p:cBhvr>
+                                      <p:to>
+                                        <p:strVal val="visible"/>
+                                      </p:to>
+                                    </p:set>
+                                  </p:childTnLst>
+                                </p:cTn>
+                              </p:par>
+                            </p:childTnLst>
+                          </p:cTn>
+                        </p:par>
+                      </p:childTnLst>
+                    </p:cTn>
+                  </p:par>
+                  <p:par>
+                    <p:cTn id="7" fill="hold">
+                      <p:stCondLst>
+                        <p:cond delay="indefinite"/>
+                      </p:stCondLst>
+                      <p:childTnLst>
+                        <p:par>
+                          <p:cTn id="8" fill="hold">
+                            <p:stCondLst>
+                              <p:cond delay="0"/>
+                            </p:stCondLst>
+                            <p:childTnLst>
+                              <p:par>
+                                <p:cTn id="9" presetID="1" presetClass="entr" presetSubtype="0" fill="hold" grpId="0" nodeType="clickEffect">
+                                  <p:stCondLst>
+                                    <p:cond delay="0"/>
+                                  </p:stCondLst>
+                                  <p:childTnLst>
+                                    <p:set>
+                                      <p:cBhvr>
+                                        <p:cTn id="10" dur="1" fill="hold">
+                                          <p:stCondLst>
+                                            <p:cond delay="0"/>
+                                          </p:stCondLst>
+                                        </p:cTn>
+                                        <p:tgtEl>
+                                          <p:spTgt spid="3">
+                                            <p:txEl>
+                                              <p:pRg st="1" end="1"/>
+                                            </p:txEl>
+                                          </p:spTgt>
+                                        </p:tgtEl>
+                                        <p:attrNameLst>
+                                          <p:attrName>style.visibility</p:attrName>
+                                        </p:attrNameLst>
+                                      </p:cBhvr>
+                                      <p:to>
+                                        <p:strVal val="visible"/>
+                                      </p:to>
+                                    </p:set>
+                                  </p:childTnLst>
+                                </p:cTn>
+                              </p:par>
+                            </p:childTnLst>
+                          </p:cTn>
+                        </p:par>
+                      </p:childTnLst>
+                    </p:cTn>
+                  </p:par>
+                  <p:par>
+                    <p:cTn id="11" fill="hold">
+                      <p:stCondLst>
+                        <p:cond delay="indefinite"/>
+                      </p:stCondLst>
+                      <p:childTnLst>
+                        <p:par>
+                          <p:cTn id="12" fill="hold">
+                            <p:stCondLst>
+                              <p:cond delay="0"/>
+                            </p:stCondLst>
+                            <p:childTnLst>
+                              <p:par>
+                                <p:cTn id="13" presetID="1" presetClass="entr" presetSubtype="0" fill="hold" grpId="0" nodeType="clickEffect">
+                                  <p:stCondLst>
+                                    <p:cond delay="0"/>
+                                  </p:stCondLst>
+                                  <p:childTnLst>
+                                    <p:set>
+                                      <p:cBhvr>
+                                        <p:cTn id="14" dur="1" fill="hold">
+                                          <p:stCondLst>
+                                            <p:cond delay="0"/>
+                                          </p:stCondLst>
+                                        </p:cTn>
+                                        <p:tgtEl>
+                                          <p:spTgt spid="3">
+                                            <p:txEl>
+                                              <p:pRg st="2" end="2"/>
+                                            </p:txEl>
+                                          </p:spTgt>
+                                        </p:tgtEl>
+                                        <p:attrNameLst>
+                                          <p:attrName>style.visibility</p:attrName>
+                                        </p:attrNameLst>
+                                      </p:cBhvr>
+                                      <p:to>
+                                        <p:strVal val="visible"/>
+                                      </p:to>
+                                    </p:set>
+                                  </p:childTnLst>
+                                </p:cTn>
+                              </p:par>
+                            </p:childTnLst>
+                          </p:cTn>
+                        </p:par>
+                      </p:childTnLst>
+                    </p:cTn>
+                  </p:par>
+                  <p:par>
+                    <p:cTn id="15" fill="hold">
+                      <p:stCondLst>
+                        <p:cond delay="indefinite"/>
+                      </p:stCondLst>
+                      <p:childTnLst>
+                        <p:par>
+                          <p:cTn id="16" fill="hold">
+                            <p:stCondLst>
+                              <p:cond delay="0"/>
+                            </p:stCondLst>
+                            <p:childTnLst>
+                              <p:par>
+                                <p:cTn id="17" presetID="1" presetClass="entr" presetSubtype="0" fill="hold" grpId="0" nodeType="clickEffect">
+                                  <p:stCondLst>
+                                    <p:cond delay="0"/>
+                                  </p:stCondLst>
+                                  <p:childTnLst>
+                                    <p:set>
+                                      <p:cBhvr>
+                                        <p:cTn id="18" dur="1" fill="hold">
+                                          <p:stCondLst>
+                                            <p:cond delay="0"/>
+                                          </p:stCondLst>
+                                        </p:cTn>
+                                        <p:tgtEl>
+                                          <p:spTgt spid="3">
+                                            <p:txEl>
+                                              <p:pRg st="3" end="3"/>
+                                            </p:txEl>
+                                          </p:spTgt>
+                                        </p:tgtEl>
+                                        <p:attrNameLst>
+                                          <p:attrName>style.visibility</p:attrName>
+                                        </p:attrNameLst>
+                                      </p:cBhvr>
+                                      <p:to>
+                                        <p:strVal val="visible"/>
+                                      </p:to>
+                                    </p:set>
+                                  </p:childTnLst>
+                                </p:cTn>
+                              </p:par>
+                            </p:childTnLst>
+                          </p:cTn>
+                        </p:par>
+                      </p:childTnLst>
+                    </p:cTn>
+                  </p:par>
+                  <p:par>
+                    <p:cTn id="19" fill="hold">
+                      <p:stCondLst>
+                        <p:cond delay="indefinite"/>
+                      </p:stCondLst>
+                      <p:childTnLst>
+                        <p:par>
+                          <p:cTn id="20" fill="hold">
+                            <p:stCondLst>
+                              <p:cond delay="0"/>
+                            </p:stCondLst>
+                            <p:childTnLst>
+                              <p:par>
+                                <p:cTn id="21" presetID="1" presetClass="entr" presetSubtype="0" fill="hold" grpId="0" nodeType="clickEffect">
+                                  <p:stCondLst>
+                                    <p:cond delay="0"/>
+                                  </p:stCondLst>
+                                  <p:childTnLst>
+                                    <p:set>
+                                      <p:cBhvr>
+                                        <p:cTn id="22" dur="1" fill="hold">
+                                          <p:stCondLst>
+                                            <p:cond delay="0"/>
+                                          </p:stCondLst>
+                                        </p:cTn>
+                                        <p:tgtEl>
+                                          <p:spTgt spid="3">
+                                            <p:txEl>
+                                              <p:pRg st="4" end="4"/>
+                                            </p:txEl>
+                                          </p:spTgt>
+                                        </p:tgtEl>
+                                        <p:attrNameLst>
+                                          <p:attrName>style.visibility</p:attrName>
+                                        </p:attrNameLst>
+                                      </p:cBhvr>
+                                      <p:to>
+                                        <p:strVal val="visible"/>
+                                      </p:to>
+                                    </p:set>
+                                  </p:childTnLst>
+                                </p:cTn>
+                              </p:par>
+                            </p:childTnLst>
+                          </p:cTn>
+                        </p:par>
+                      </p:childTnLst>
+                    </p:cTn>
+                  </p:par>
+                  <p:par>
+                    <p:cTn id="23" fill="hold">
+                      <p:stCondLst>
+                        <p:cond delay="indefinite"/>
+                      </p:stCondLst>
+                      <p:childTnLst>
+                        <p:par>
+                          <p:cTn id="24" fill="hold">
+                            <p:stCondLst>
+                              <p:cond delay="0"/>
+                            </p:stCondLst>
+                            <p:childTnLst>
+                              <p:par>
+                                <p:cTn id="25" presetID="1" presetClass="entr" presetSubtype="0" fill="hold" grpId="0" nodeType="clickEffect">
+                                  <p:stCondLst>
+                                    <p:cond delay="0"/>
+                                  </p:stCondLst>
+                                  <p:childTnLst>
+                                    <p:set>
+                                      <p:cBhvr>
+                                        <p:cTn id="26" dur="1" fill="hold">
+                                          <p:stCondLst>
+                                            <p:cond delay="0"/>
+                                          </p:stCondLst>
+                                        </p:cTn>
+                                        <p:tgtEl>
+                                          <p:spTgt spid="3">
+                                            <p:txEl>
+                                              <p:pRg st="5" end="5"/>
+                                            </p:txEl>
+                                          </p:spTgt>
+                                        </p:tgtEl>
+                                        <p:attrNameLst>
+                                          <p:attrName>style.visibility</p:attrName>
+                                        </p:attrNameLst>
+                                      </p:cBhvr>
+                                      <p:to>
+                                        <p:strVal val="visible"/>
+                                      </p:to>
+                                    </p:set>
+                                  </p:childTnLst>
+                                </p:cTn>
+                              </p:par>
+                            </p:childTnLst>
+                          </p:cTn>
+                        </p:par>
+                      </p:childTnLst>
+                    </p:cTn>
+                  </p:par>
+                </p:childTnLst>
+              </p:cTn>
+              <p:prevCondLst>
+                <p:cond evt="onPrev" delay="0">
+                  <p:tgtEl>
+                    <p:sldTgt/>
+                  </p:tgtEl>
+                </p:cond>
+              </p:prevCondLst>
+              <p:nextCondLst>
+                <p:cond evt="onNext" delay="0">
+                  <p:tgtEl>
+                    <p:sldTgt/>
+                  </p:tgtEl>
+                </p:cond>
+              </p:nextCondLst>
+            </p:seq>
+          </p:childTnLst>
+        </p:cTn>
+      </p:par>
+    </p:tnLst>
+    <p:bldLst>
+      <p:bldP spid="3" grpId="0" uiExpand="1" build="p"/>
+    </p:bldLst>
+  </p:timing>
+</p:sld>
+</file>
+
+<file path=ppt/slides/slide23.xml><?xml version="1.0" encoding="utf-8"?>
+<p:sld xmlns:a="http://schemas.openxmlformats.org/drawingml/2006/main" xmlns:r="http://schemas.openxmlformats.org/officeDocument/2006/relationships" xmlns:p="http://schemas.openxmlformats.org/presentationml/2006/main">
+  <p:cSld>
+    <p:spTree>
+      <p:nvGrpSpPr>
+        <p:cNvPr id="1" name=""/>
+        <p:cNvGrpSpPr/>
+        <p:nvPr/>
+      </p:nvGrpSpPr>
+      <p:grpSpPr>
+        <a:xfrm>
+          <a:off x="0" y="0"/>
+          <a:ext cx="0" cy="0"/>
+          <a:chOff x="0" y="0"/>
+          <a:chExt cx="0" cy="0"/>
+        </a:xfrm>
+      </p:grpSpPr>
+      <p:sp>
+        <p:nvSpPr>
+          <p:cNvPr id="2" name="Title 1"/>
+          <p:cNvSpPr>
+            <a:spLocks noGrp="1"/>
+          </p:cNvSpPr>
+          <p:nvPr>
+            <p:ph type="title"/>
+          </p:nvPr>
+        </p:nvSpPr>
+        <p:spPr/>
+        <p:txBody>
+          <a:bodyPr/>
+          <a:lstStyle/>
+          <a:p>
+            <a:pPr lvl="0" indent="0" marL="0">
+              <a:buNone/>
+            </a:pPr>
+            <a:r>
+              <a:rPr/>
+              <a:t>References</a:t>
+            </a:r>
+          </a:p>
+        </p:txBody>
+      </p:sp>
+      <p:sp>
+        <p:nvSpPr>
+          <p:cNvPr id="3" name="Content Placeholder 2"/>
+          <p:cNvSpPr>
+            <a:spLocks noGrp="1"/>
+          </p:cNvSpPr>
+          <p:nvPr>
+            <p:ph idx="1"/>
+          </p:nvPr>
+        </p:nvSpPr>
+        <p:spPr/>
+        <p:txBody>
+          <a:bodyPr/>
+          <a:lstStyle/>
+          <a:p>
+            <a:pPr lvl="0" indent="0" marL="0">
+              <a:buNone/>
+            </a:pPr>
+            <a:r>
+              <a:rPr/>
+              <a:t>Garner, Gregory G., and Klaus Keller. 2018. “Using Direct Policy Search to Identify Robust Strategies in Adapting to Uncertain Sea-Level Rise and Storm Surge.” </a:t>
+            </a:r>
+            <a:r>
+              <a:rPr i="1"/>
+              <a:t>Environmental Modelling &amp; Software</a:t>
+            </a:r>
+            <a:r>
+              <a:rPr/>
+              <a:t> 107 (September): 96–104. </a:t>
+            </a:r>
+            <a:r>
+              <a:rPr>
+                <a:hlinkClick r:id="rId3"/>
+              </a:rPr>
+              <a:t>https://doi.org/10.1016/j.envsoft.2018.05.006</a:t>
+            </a:r>
+            <a:r>
+              <a:rPr/>
+              <a:t>.</a:t>
+            </a:r>
+          </a:p>
+          <a:p>
+            <a:pPr lvl="0" indent="0" marL="0">
+              <a:buNone/>
+            </a:pPr>
+            <a:r>
+              <a:rPr/>
+              <a:t>Herman, Jonathan D., Julianne D. Quinn, Scott Steinschneider, Matteo Giuliani, and Sarah Fletcher. 2020. “Climate Adaptation as a Control Problem: Review and Perspectives on Dynamic Water Resources Planning Under Uncertainty.” </a:t>
+            </a:r>
+            <a:r>
+              <a:rPr i="1"/>
+              <a:t>Water Resources Research</a:t>
+            </a:r>
+            <a:r>
+              <a:rPr/>
+              <a:t>, January, e24389. </a:t>
+            </a:r>
+            <a:r>
+              <a:rPr>
+                <a:hlinkClick r:id="rId4"/>
+              </a:rPr>
+              <a:t>https://doi.org/10.1029/2019wr025502</a:t>
+            </a:r>
+            <a:r>
+              <a:rPr/>
+              <a:t>.</a:t>
+            </a:r>
+          </a:p>
+          <a:p>
+            <a:pPr lvl="0" indent="0" marL="0">
+              <a:buNone/>
+            </a:pPr>
+            <a:r>
+              <a:rPr/>
+              <a:t>Neufville, Richard de, Stefan Scholtes, and Tao Wang. 2006. “Real Options by Spreadsheet: Parking Garage Case Example.” </a:t>
+            </a:r>
+            <a:r>
+              <a:rPr i="1"/>
+              <a:t>Journal of Infrastructure Systems</a:t>
+            </a:r>
+            <a:r>
+              <a:rPr/>
+              <a:t> 12 (2): 107–11. </a:t>
+            </a:r>
+            <a:r>
+              <a:rPr>
+                <a:hlinkClick r:id="rId5"/>
+              </a:rPr>
+              <a:t>https://doi.org/10.1061/(asce)1076-0342(2006)12:2(107)</a:t>
+            </a:r>
+            <a:r>
+              <a:rPr/>
+              <a:t>.</a:t>
+            </a:r>
+          </a:p>
+        </p:txBody>
+      </p:sp>
+    </p:spTree>
+  </p:cSld>
+</p:sld>
+</file>
+
+<file path=ppt/slides/slide3.xml><?xml version="1.0" encoding="utf-8"?>
+<p:sld xmlns:a="http://schemas.openxmlformats.org/drawingml/2006/main" xmlns:r="http://schemas.openxmlformats.org/officeDocument/2006/relationships" xmlns:p="http://schemas.openxmlformats.org/presentationml/2006/main">
+  <p:cSld>
+    <p:spTree>
+      <p:nvGrpSpPr>
+        <p:cNvPr id="1" name=""/>
+        <p:cNvGrpSpPr/>
+        <p:nvPr/>
+      </p:nvGrpSpPr>
+      <p:grpSpPr>
+        <a:xfrm>
+          <a:off x="0" y="0"/>
+          <a:ext cx="0" cy="0"/>
+          <a:chOff x="0" y="0"/>
+          <a:chExt cx="0" cy="0"/>
+        </a:xfrm>
+      </p:grpSpPr>
+      <p:sp>
+        <p:nvSpPr>
+          <p:cNvPr id="2" name="Title 1"/>
+          <p:cNvSpPr>
+            <a:spLocks noGrp="1"/>
+          </p:cNvSpPr>
+          <p:nvPr>
+            <p:ph type="title"/>
+          </p:nvPr>
+        </p:nvSpPr>
+        <p:spPr/>
+        <p:txBody>
+          <a:bodyPr/>
+          <a:lstStyle/>
+          <a:p>
+            <a:pPr lvl="0" indent="0" marL="0">
+              <a:buNone/>
+            </a:pPr>
+            <a:r>
+              <a:rPr/>
+              <a:t>Three Infrastructure Puzzles</a:t>
+            </a:r>
+          </a:p>
+        </p:txBody>
+      </p:sp>
+      <p:sp>
+        <p:nvSpPr>
+          <p:cNvPr id="3" name="Content Placeholder 2"/>
+          <p:cNvSpPr>
+            <a:spLocks noGrp="1"/>
+          </p:cNvSpPr>
+          <p:nvPr>
+            <p:ph idx="1"/>
+          </p:nvPr>
+        </p:nvSpPr>
+        <p:spPr/>
+        <p:txBody>
+          <a:bodyPr/>
+          <a:lstStyle/>
+          <a:p>
+            <a:pPr lvl="0"/>
+            <a:r>
+              <a:rPr/>
+              <a:t>The </a:t>
+            </a:r>
+            <a:r>
+              <a:rPr b="1"/>
+              <a:t>Tagus River bridge</a:t>
+            </a:r>
+            <a:r>
+              <a:rPr/>
+              <a:t> (Lisbon, 1966) was built for road traffic. Rail was added in 1999 — because the original design reserved the option.</a:t>
+            </a:r>
+          </a:p>
+          <a:p>
+            <a:pPr lvl="0"/>
+            <a:r>
+              <a:rPr/>
+              <a:t>A </a:t>
+            </a:r>
+            <a:r>
+              <a:rPr b="1"/>
+              <a:t>satellite constellation</a:t>
+            </a:r>
+            <a:r>
+              <a:rPr/>
+              <a:t> (de Weck et al., 2004): staging deployment in phases rather than launching all satellites at once improved expected value by ~30%.</a:t>
+            </a:r>
+          </a:p>
+          <a:p>
+            <a:pPr lvl="0"/>
+            <a:r>
+              <a:rPr/>
+              <a:t>A </a:t>
+            </a:r>
+            <a:r>
+              <a:rPr b="1"/>
+              <a:t>parking garage</a:t>
+            </a:r>
+            <a:r>
+              <a:rPr/>
+              <a:t> in England reinforced its columns during construction. Extra floors were added later when demand grew.</a:t>
+            </a:r>
+          </a:p>
+          <a:p>
+            <a:pPr lvl="0" indent="0" marL="0">
+              <a:buNone/>
+            </a:pPr>
+            <a:r>
+              <a:rPr/>
+              <a:t>. . .</a:t>
+            </a:r>
+          </a:p>
+          <a:p>
+            <a:pPr lvl="0" indent="0" marL="0">
+              <a:buNone/>
+            </a:pPr>
+            <a:r>
+              <a:rPr/>
+              <a:t>What do these have in common?</a:t>
+            </a:r>
+          </a:p>
+        </p:txBody>
+      </p:sp>
+    </p:spTree>
+  </p:cSld>
+  <p:timing>
+    <p:tnLst>
+      <p:par>
+        <p:cTn id="1" dur="indefinite" restart="never" nodeType="tmRoot">
+          <p:childTnLst>
+            <p:seq concurrent="1" nextAc="seek">
+              <p:cTn id="2" dur="indefinite" nodeType="mainSeq">
+                <p:childTnLst>
+                  <p:par>
+                    <p:cTn id="3" fill="hold">
+                      <p:stCondLst>
+                        <p:cond delay="indefinite"/>
+                      </p:stCondLst>
+                      <p:childTnLst>
+                        <p:par>
+                          <p:cTn id="4" fill="hold">
+                            <p:stCondLst>
+                              <p:cond delay="0"/>
+                            </p:stCondLst>
+                            <p:childTnLst>
+                              <p:par>
+                                <p:cTn id="5" presetID="1" presetClass="entr" presetSubtype="0" fill="hold" grpId="0" nodeType="clickEffect">
+                                  <p:stCondLst>
+                                    <p:cond delay="0"/>
+                                  </p:stCondLst>
+                                  <p:childTnLst>
+                                    <p:set>
+                                      <p:cBhvr>
+                                        <p:cTn id="6" dur="1" fill="hold">
+                                          <p:stCondLst>
+                                            <p:cond delay="0"/>
+                                          </p:stCondLst>
+                                        </p:cTn>
+                                        <p:tgtEl>
+                                          <p:spTgt spid="3">
+                                            <p:txEl>
+                                              <p:pRg st="0" end="0"/>
+                                            </p:txEl>
+                                          </p:spTgt>
+                                        </p:tgtEl>
+                                        <p:attrNameLst>
+                                          <p:attrName>style.visibility</p:attrName>
+                                        </p:attrNameLst>
+                                      </p:cBhvr>
+                                      <p:to>
+                                        <p:strVal val="visible"/>
+                                      </p:to>
+                                    </p:set>
+                                  </p:childTnLst>
+                                </p:cTn>
+                              </p:par>
+                            </p:childTnLst>
+                          </p:cTn>
+                        </p:par>
+                      </p:childTnLst>
+                    </p:cTn>
+                  </p:par>
+                  <p:par>
+                    <p:cTn id="7" fill="hold">
+                      <p:stCondLst>
+                        <p:cond delay="indefinite"/>
+                      </p:stCondLst>
+                      <p:childTnLst>
+                        <p:par>
+                          <p:cTn id="8" fill="hold">
+                            <p:stCondLst>
+                              <p:cond delay="0"/>
+                            </p:stCondLst>
+                            <p:childTnLst>
+                              <p:par>
+                                <p:cTn id="9" presetID="1" presetClass="entr" presetSubtype="0" fill="hold" grpId="0" nodeType="clickEffect">
+                                  <p:stCondLst>
+                                    <p:cond delay="0"/>
+                                  </p:stCondLst>
+                                  <p:childTnLst>
+                                    <p:set>
+                                      <p:cBhvr>
+                                        <p:cTn id="10" dur="1" fill="hold">
+                                          <p:stCondLst>
+                                            <p:cond delay="0"/>
+                                          </p:stCondLst>
+                                        </p:cTn>
+                                        <p:tgtEl>
+                                          <p:spTgt spid="3">
+                                            <p:txEl>
+                                              <p:pRg st="1" end="1"/>
+                                            </p:txEl>
+                                          </p:spTgt>
+                                        </p:tgtEl>
+                                        <p:attrNameLst>
+                                          <p:attrName>style.visibility</p:attrName>
+                                        </p:attrNameLst>
+                                      </p:cBhvr>
+                                      <p:to>
+                                        <p:strVal val="visible"/>
+                                      </p:to>
+                                    </p:set>
+                                  </p:childTnLst>
+                                </p:cTn>
+                              </p:par>
+                            </p:childTnLst>
+                          </p:cTn>
+                        </p:par>
+                      </p:childTnLst>
+                    </p:cTn>
+                  </p:par>
+                  <p:par>
+                    <p:cTn id="11" fill="hold">
+                      <p:stCondLst>
+                        <p:cond delay="indefinite"/>
+                      </p:stCondLst>
+                      <p:childTnLst>
+                        <p:par>
+                          <p:cTn id="12" fill="hold">
+                            <p:stCondLst>
+                              <p:cond delay="0"/>
+                            </p:stCondLst>
+                            <p:childTnLst>
+                              <p:par>
+                                <p:cTn id="13" presetID="1" presetClass="entr" presetSubtype="0" fill="hold" grpId="0" nodeType="clickEffect">
+                                  <p:stCondLst>
+                                    <p:cond delay="0"/>
+                                  </p:stCondLst>
+                                  <p:childTnLst>
+                                    <p:set>
+                                      <p:cBhvr>
+                                        <p:cTn id="14" dur="1" fill="hold">
+                                          <p:stCondLst>
+                                            <p:cond delay="0"/>
+                                          </p:stCondLst>
+                                        </p:cTn>
+                                        <p:tgtEl>
+                                          <p:spTgt spid="3">
+                                            <p:txEl>
+                                              <p:pRg st="2" end="2"/>
+                                            </p:txEl>
+                                          </p:spTgt>
+                                        </p:tgtEl>
+                                        <p:attrNameLst>
+                                          <p:attrName>style.visibility</p:attrName>
+                                        </p:attrNameLst>
+                                      </p:cBhvr>
+                                      <p:to>
+                                        <p:strVal val="visible"/>
+                                      </p:to>
+                                    </p:set>
+                                  </p:childTnLst>
+                                </p:cTn>
+                              </p:par>
+                            </p:childTnLst>
+                          </p:cTn>
+                        </p:par>
+                      </p:childTnLst>
+                    </p:cTn>
+                  </p:par>
+                </p:childTnLst>
+              </p:cTn>
+              <p:prevCondLst>
+                <p:cond evt="onPrev" delay="0">
+                  <p:tgtEl>
+                    <p:sldTgt/>
+                  </p:tgtEl>
+                </p:cond>
+              </p:prevCondLst>
+              <p:nextCondLst>
+                <p:cond evt="onNext" delay="0">
+                  <p:tgtEl>
+                    <p:sldTgt/>
+                  </p:tgtEl>
+                </p:cond>
+              </p:nextCondLst>
+            </p:seq>
+          </p:childTnLst>
+        </p:cTn>
+      </p:par>
+    </p:tnLst>
+    <p:bldLst>
+      <p:bldP spid="3" grpId="0" uiExpand="1" build="p"/>
+    </p:bldLst>
+  </p:timing>
 </p:sld>
 </file>
 
@@ -3514,7 +10463,7 @@
             </a:pPr>
             <a:r>
               <a:rPr/>
-              <a:t>Preparation</a:t>
+              <a:t>Real Options: Vocabulary</a:t>
             </a:r>
           </a:p>
         </p:txBody>
@@ -3539,13 +10488,268 @@
             </a:pPr>
             <a:r>
               <a:rPr/>
-              <a:t>Read Herman et al. (2020), in particular focusing on …</a:t>
+              <a:t>A </a:t>
+            </a:r>
+            <a:r>
+              <a:rPr b="1"/>
+              <a:t>real option</a:t>
+            </a:r>
+            <a:r>
+              <a:rPr/>
+              <a:t> is the right — but not the obligation — to take an action in the future.</a:t>
+            </a:r>
+          </a:p>
+          <a:p>
+            <a:pPr lvl="0"/>
+            <a:r>
+              <a:rPr b="1"/>
+              <a:t>Option premium</a:t>
+            </a:r>
+            <a:r>
+              <a:rPr/>
+              <a:t>: upfront cost to preserve flexibility </a:t>
+            </a:r>
+            <a:r>
+              <a:rPr i="1"/>
+              <a:t>Reinforcing the columns; over-engineering the bridge</a:t>
+            </a:r>
+          </a:p>
+          <a:p>
+            <a:pPr lvl="0"/>
+            <a:r>
+              <a:rPr b="1"/>
+              <a:t>Option value</a:t>
+            </a:r>
+            <a:r>
+              <a:rPr/>
+              <a:t>: expected gain from having the option </a:t>
+            </a:r>
+            <a:r>
+              <a:rPr i="1"/>
+              <a:t>Higher expected NPV (ENPV), lower downside risk</a:t>
+            </a:r>
+          </a:p>
+          <a:p>
+            <a:pPr lvl="0"/>
+            <a:r>
+              <a:rPr/>
+              <a:t>You exercise the option </a:t>
+            </a:r>
+            <a:r>
+              <a:rPr b="1"/>
+              <a:t>only when conditions favor it</a:t>
+            </a:r>
+            <a:r>
+              <a:rPr/>
+              <a:t> — asymmetric upside</a:t>
+            </a:r>
+          </a:p>
+          <a:p>
+            <a:pPr lvl="0" indent="0" marL="0">
+              <a:buNone/>
+            </a:pPr>
+            <a:r>
+              <a:rPr/>
+              <a:t>. . .</a:t>
+            </a:r>
+          </a:p>
+          <a:p>
+            <a:pPr lvl="0" indent="0" marL="0">
+              <a:buNone/>
+            </a:pPr>
+            <a:r>
+              <a:rPr b="1"/>
+              <a:t>Options are valuable precisely because the future is uncertain.</a:t>
+            </a:r>
+            <a:r>
+              <a:rPr/>
+              <a:t> If you knew the future, you’d either always build the extra floors or never.</a:t>
             </a:r>
           </a:p>
         </p:txBody>
       </p:sp>
     </p:spTree>
   </p:cSld>
+  <p:timing>
+    <p:tnLst>
+      <p:par>
+        <p:cTn id="1" dur="indefinite" restart="never" nodeType="tmRoot">
+          <p:childTnLst>
+            <p:seq concurrent="1" nextAc="seek">
+              <p:cTn id="2" dur="indefinite" nodeType="mainSeq">
+                <p:childTnLst>
+                  <p:par>
+                    <p:cTn id="3" fill="hold">
+                      <p:stCondLst>
+                        <p:cond delay="indefinite"/>
+                      </p:stCondLst>
+                      <p:childTnLst>
+                        <p:par>
+                          <p:cTn id="4" fill="hold">
+                            <p:stCondLst>
+                              <p:cond delay="0"/>
+                            </p:stCondLst>
+                            <p:childTnLst>
+                              <p:par>
+                                <p:cTn id="5" presetID="1" presetClass="entr" presetSubtype="0" fill="hold" grpId="0" nodeType="clickEffect">
+                                  <p:stCondLst>
+                                    <p:cond delay="0"/>
+                                  </p:stCondLst>
+                                  <p:childTnLst>
+                                    <p:set>
+                                      <p:cBhvr>
+                                        <p:cTn id="6" dur="1" fill="hold">
+                                          <p:stCondLst>
+                                            <p:cond delay="0"/>
+                                          </p:stCondLst>
+                                        </p:cTn>
+                                        <p:tgtEl>
+                                          <p:spTgt spid="3">
+                                            <p:txEl>
+                                              <p:pRg st="1" end="1"/>
+                                            </p:txEl>
+                                          </p:spTgt>
+                                        </p:tgtEl>
+                                        <p:attrNameLst>
+                                          <p:attrName>style.visibility</p:attrName>
+                                        </p:attrNameLst>
+                                      </p:cBhvr>
+                                      <p:to>
+                                        <p:strVal val="visible"/>
+                                      </p:to>
+                                    </p:set>
+                                  </p:childTnLst>
+                                </p:cTn>
+                              </p:par>
+                            </p:childTnLst>
+                          </p:cTn>
+                        </p:par>
+                      </p:childTnLst>
+                    </p:cTn>
+                  </p:par>
+                  <p:par>
+                    <p:cTn id="7" fill="hold">
+                      <p:stCondLst>
+                        <p:cond delay="indefinite"/>
+                      </p:stCondLst>
+                      <p:childTnLst>
+                        <p:par>
+                          <p:cTn id="8" fill="hold">
+                            <p:stCondLst>
+                              <p:cond delay="0"/>
+                            </p:stCondLst>
+                            <p:childTnLst>
+                              <p:par>
+                                <p:cTn id="9" presetID="1" presetClass="entr" presetSubtype="0" fill="hold" grpId="0" nodeType="clickEffect">
+                                  <p:stCondLst>
+                                    <p:cond delay="0"/>
+                                  </p:stCondLst>
+                                  <p:childTnLst>
+                                    <p:set>
+                                      <p:cBhvr>
+                                        <p:cTn id="10" dur="1" fill="hold">
+                                          <p:stCondLst>
+                                            <p:cond delay="0"/>
+                                          </p:stCondLst>
+                                        </p:cTn>
+                                        <p:tgtEl>
+                                          <p:spTgt spid="3">
+                                            <p:txEl>
+                                              <p:pRg st="2" end="2"/>
+                                            </p:txEl>
+                                          </p:spTgt>
+                                        </p:tgtEl>
+                                        <p:attrNameLst>
+                                          <p:attrName>style.visibility</p:attrName>
+                                        </p:attrNameLst>
+                                      </p:cBhvr>
+                                      <p:to>
+                                        <p:strVal val="visible"/>
+                                      </p:to>
+                                    </p:set>
+                                  </p:childTnLst>
+                                </p:cTn>
+                              </p:par>
+                            </p:childTnLst>
+                          </p:cTn>
+                        </p:par>
+                      </p:childTnLst>
+                    </p:cTn>
+                  </p:par>
+                  <p:par>
+                    <p:cTn id="11" fill="hold">
+                      <p:stCondLst>
+                        <p:cond delay="indefinite"/>
+                      </p:stCondLst>
+                      <p:childTnLst>
+                        <p:par>
+                          <p:cTn id="12" fill="hold">
+                            <p:stCondLst>
+                              <p:cond delay="0"/>
+                            </p:stCondLst>
+                            <p:childTnLst>
+                              <p:par>
+                                <p:cTn id="13" presetID="1" presetClass="entr" presetSubtype="0" fill="hold" grpId="0" nodeType="clickEffect">
+                                  <p:stCondLst>
+                                    <p:cond delay="0"/>
+                                  </p:stCondLst>
+                                  <p:childTnLst>
+                                    <p:set>
+                                      <p:cBhvr>
+                                        <p:cTn id="14" dur="1" fill="hold">
+                                          <p:stCondLst>
+                                            <p:cond delay="0"/>
+                                          </p:stCondLst>
+                                        </p:cTn>
+                                        <p:tgtEl>
+                                          <p:spTgt spid="3">
+                                            <p:txEl>
+                                              <p:pRg st="3" end="3"/>
+                                            </p:txEl>
+                                          </p:spTgt>
+                                        </p:tgtEl>
+                                        <p:attrNameLst>
+                                          <p:attrName>style.visibility</p:attrName>
+                                        </p:attrNameLst>
+                                      </p:cBhvr>
+                                      <p:to>
+                                        <p:strVal val="visible"/>
+                                      </p:to>
+                                    </p:set>
+                                  </p:childTnLst>
+                                </p:cTn>
+                              </p:par>
+                            </p:childTnLst>
+                          </p:cTn>
+                        </p:par>
+                      </p:childTnLst>
+                    </p:cTn>
+                  </p:par>
+                </p:childTnLst>
+              </p:cTn>
+              <p:prevCondLst>
+                <p:cond evt="onPrev" delay="0">
+                  <p:tgtEl>
+                    <p:sldTgt/>
+                  </p:tgtEl>
+                </p:cond>
+              </p:prevCondLst>
+              <p:nextCondLst>
+                <p:cond evt="onNext" delay="0">
+                  <p:tgtEl>
+                    <p:sldTgt/>
+                  </p:tgtEl>
+                </p:cond>
+              </p:nextCondLst>
+            </p:seq>
+          </p:childTnLst>
+        </p:cTn>
+      </p:par>
+    </p:tnLst>
+    <p:bldLst>
+      <p:bldP spid="3" grpId="0" uiExpand="1" build="p"/>
+    </p:bldLst>
+  </p:timing>
 </p:sld>
 </file>
 
@@ -3586,7 +10790,7 @@
             </a:pPr>
             <a:r>
               <a:rPr/>
-              <a:t>References</a:t>
+              <a:t>The Parking Garage</a:t>
             </a:r>
           </a:p>
         </p:txBody>
@@ -3611,29 +10815,1183 @@
             </a:pPr>
             <a:r>
               <a:rPr/>
-              <a:t>Herman, Jonathan D., Julianne D. Quinn, Scott Steinschneider, Matteo Giuliani, and Sarah Fletcher. 2020. “Climate Adaptation as a Control Problem: Review and Perspectives on Dynamic Water Resources Planning Under Uncertainty.” </a:t>
-            </a:r>
-            <a:r>
-              <a:rPr i="1"/>
-              <a:t>Water Resources Research</a:t>
+              <a:t>de Neufville, Scholtes, and Wang (2006) — paper you’ll discuss Wednesday.</a:t>
+            </a:r>
+          </a:p>
+        </p:txBody>
+      </p:sp>
+    </p:spTree>
+  </p:cSld>
+</p:sld>
+</file>
+
+<file path=ppt/slides/slide6.xml><?xml version="1.0" encoding="utf-8"?>
+<p:sld xmlns:a="http://schemas.openxmlformats.org/drawingml/2006/main" xmlns:r="http://schemas.openxmlformats.org/officeDocument/2006/relationships" xmlns:p="http://schemas.openxmlformats.org/presentationml/2006/main">
+  <p:cSld>
+    <p:spTree>
+      <p:nvGrpSpPr>
+        <p:cNvPr id="1" name=""/>
+        <p:cNvGrpSpPr/>
+        <p:nvPr/>
+      </p:nvGrpSpPr>
+      <p:grpSpPr>
+        <a:xfrm>
+          <a:off x="0" y="0"/>
+          <a:ext cx="0" cy="0"/>
+          <a:chOff x="0" y="0"/>
+          <a:chExt cx="0" cy="0"/>
+        </a:xfrm>
+      </p:grpSpPr>
+      <p:sp>
+        <p:nvSpPr>
+          <p:cNvPr id="3" name="Text Placeholder 2"/>
+          <p:cNvSpPr>
+            <a:spLocks noGrp="1"/>
+          </p:cNvSpPr>
+          <p:nvPr>
+            <p:ph idx="1" type="body"/>
+          </p:nvPr>
+        </p:nvSpPr>
+        <p:spPr/>
+        <p:txBody>
+          <a:bodyPr/>
+          <a:lstStyle/>
+          <a:p>
+            <a:pPr lvl="0" indent="0" marL="0">
+              <a:buNone/>
+            </a:pPr>
+            <a:r>
+              <a:rPr b="1"/>
+              <a:t>Design choice:</a:t>
             </a:r>
             <a:r>
               <a:rPr/>
-              <a:t>, January, e24389. </a:t>
-            </a:r>
-            <a:r>
-              <a:rPr>
-                <a:hlinkClick r:id="rId2"/>
-              </a:rPr>
-              <a:t>https://doi.org/10.1029/2019wr025502</a:t>
-            </a:r>
+              <a:t> 4 floors with strong columns (option to expand) vs. 6 floors rigid</a:t>
+            </a:r>
+          </a:p>
+        </p:txBody>
+      </p:sp>
+      <p:graphicFrame>
+        <p:nvGraphicFramePr>
+          <p:cNvPr id="6" name="Content Placeholder 5"/>
+          <p:cNvGraphicFramePr>
+            <a:graphicFrameLocks noGrp="1"/>
+          </p:cNvGraphicFramePr>
+          <p:nvPr>
+            <p:ph idx="1"/>
+          </p:nvPr>
+        </p:nvGraphicFramePr>
+        <p:xfrm>
+          <a:off x="457200" y="1625600"/>
+          <a:ext cx="4038600" cy="2959100"/>
+        </p:xfrm>
+        <a:graphic>
+          <a:graphicData uri="http://schemas.openxmlformats.org/drawingml/2006/table">
+            <a:tbl>
+              <a:tblPr firstRow="1" bandRow="1">
+                <a:tableStyleId>{5C22544A-7EE6-4342-B048-85BDC9FD1C3A}</a:tableStyleId>
+              </a:tblPr>
+              <a:tblGrid>
+                <a:gridCol w="1346200"/>
+                <a:gridCol w="1346200"/>
+                <a:gridCol w="1346200"/>
+              </a:tblGrid>
+              <a:tr h="0">
+                <a:tc>
+                  <a:txBody>
+                    <a:bodyPr/>
+                    <a:lstStyle/>
+                    <a:p>
+                      <a:endParaRPr/>
+                    </a:p>
+                  </a:txBody>
+                  <a:tcPr/>
+                </a:tc>
+                <a:tc>
+                  <a:txBody>
+                    <a:bodyPr/>
+                    <a:lstStyle/>
+                    <a:p>
+                      <a:pPr lvl="0" indent="0" marL="0" algn="r">
+                        <a:buNone/>
+                      </a:pPr>
+                      <a:r>
+                        <a:rPr/>
+                        <a:t>No flexibility</a:t>
+                      </a:r>
+                    </a:p>
+                  </a:txBody>
+                  <a:tcPr/>
+                </a:tc>
+                <a:tc>
+                  <a:txBody>
+                    <a:bodyPr/>
+                    <a:lstStyle/>
+                    <a:p>
+                      <a:pPr lvl="0" indent="0" marL="0" algn="r">
+                        <a:buNone/>
+                      </a:pPr>
+                      <a:r>
+                        <a:rPr/>
+                        <a:t>Flexible</a:t>
+                      </a:r>
+                    </a:p>
+                  </a:txBody>
+                  <a:tcPr/>
+                </a:tc>
+              </a:tr>
+              <a:tr h="0">
+                <a:tc>
+                  <a:txBody>
+                    <a:bodyPr/>
+                    <a:lstStyle/>
+                    <a:p>
+                      <a:pPr lvl="0" indent="0" marL="0">
+                        <a:buNone/>
+                      </a:pPr>
+                      <a:r>
+                        <a:rPr/>
+                        <a:t>Initial cost</a:t>
+                      </a:r>
+                    </a:p>
+                  </a:txBody>
+                </a:tc>
+                <a:tc>
+                  <a:txBody>
+                    <a:bodyPr/>
+                    <a:lstStyle/>
+                    <a:p>
+                      <a:pPr lvl="0" indent="0" marL="0" algn="r">
+                        <a:buNone/>
+                      </a:pPr>
+                      <a:r>
+                        <a:rPr/>
+                        <a:t>$22.7M</a:t>
+                      </a:r>
+                    </a:p>
+                  </a:txBody>
+                </a:tc>
+                <a:tc>
+                  <a:txBody>
+                    <a:bodyPr/>
+                    <a:lstStyle/>
+                    <a:p>
+                      <a:pPr lvl="0" indent="0" marL="0" algn="r">
+                        <a:buNone/>
+                      </a:pPr>
+                      <a:r>
+                        <a:rPr/>
+                        <a:t>$14.5M</a:t>
+                      </a:r>
+                    </a:p>
+                  </a:txBody>
+                </a:tc>
+              </a:tr>
+              <a:tr h="0">
+                <a:tc>
+                  <a:txBody>
+                    <a:bodyPr/>
+                    <a:lstStyle/>
+                    <a:p>
+                      <a:pPr lvl="0" indent="0" marL="0">
+                        <a:buNone/>
+                      </a:pPr>
+                      <a:r>
+                        <a:rPr/>
+                        <a:t>Expected NPV</a:t>
+                      </a:r>
+                    </a:p>
+                  </a:txBody>
+                </a:tc>
+                <a:tc>
+                  <a:txBody>
+                    <a:bodyPr/>
+                    <a:lstStyle/>
+                    <a:p>
+                      <a:pPr lvl="0" indent="0" marL="0" algn="r">
+                        <a:buNone/>
+                      </a:pPr>
+                      <a:r>
+                        <a:rPr/>
+                        <a:t>$2.87M</a:t>
+                      </a:r>
+                    </a:p>
+                  </a:txBody>
+                </a:tc>
+                <a:tc>
+                  <a:txBody>
+                    <a:bodyPr/>
+                    <a:lstStyle/>
+                    <a:p>
+                      <a:pPr lvl="0" indent="0" marL="0" algn="r">
+                        <a:buNone/>
+                      </a:pPr>
+                      <a:r>
+                        <a:rPr/>
+                        <a:t>$5.12M</a:t>
+                      </a:r>
+                    </a:p>
+                  </a:txBody>
+                </a:tc>
+              </a:tr>
+              <a:tr h="0">
+                <a:tc>
+                  <a:txBody>
+                    <a:bodyPr/>
+                    <a:lstStyle/>
+                    <a:p>
+                      <a:pPr lvl="0" indent="0" marL="0">
+                        <a:buNone/>
+                      </a:pPr>
+                      <a:r>
+                        <a:rPr/>
+                        <a:t>Minimum NPV</a:t>
+                      </a:r>
+                    </a:p>
+                  </a:txBody>
+                </a:tc>
+                <a:tc>
+                  <a:txBody>
+                    <a:bodyPr/>
+                    <a:lstStyle/>
+                    <a:p>
+                      <a:pPr lvl="0" indent="0" marL="0" algn="r">
+                        <a:buNone/>
+                      </a:pPr>
+                      <a:r>
+                        <a:rPr/>
+                        <a:t>−$24.7M</a:t>
+                      </a:r>
+                    </a:p>
+                  </a:txBody>
+                </a:tc>
+                <a:tc>
+                  <a:txBody>
+                    <a:bodyPr/>
+                    <a:lstStyle/>
+                    <a:p>
+                      <a:pPr lvl="0" indent="0" marL="0" algn="r">
+                        <a:buNone/>
+                      </a:pPr>
+                      <a:r>
+                        <a:rPr/>
+                        <a:t>−$12.6M</a:t>
+                      </a:r>
+                    </a:p>
+                  </a:txBody>
+                </a:tc>
+              </a:tr>
+              <a:tr h="0">
+                <a:tc>
+                  <a:txBody>
+                    <a:bodyPr/>
+                    <a:lstStyle/>
+                    <a:p>
+                      <a:pPr lvl="0" indent="0" marL="0">
+                        <a:buNone/>
+                      </a:pPr>
+                      <a:r>
+                        <a:rPr/>
+                        <a:t>Maximum NPV</a:t>
+                      </a:r>
+                    </a:p>
+                  </a:txBody>
+                </a:tc>
+                <a:tc>
+                  <a:txBody>
+                    <a:bodyPr/>
+                    <a:lstStyle/>
+                    <a:p>
+                      <a:pPr lvl="0" indent="0" marL="0" algn="r">
+                        <a:buNone/>
+                      </a:pPr>
+                      <a:r>
+                        <a:rPr/>
+                        <a:t>$13.8M</a:t>
+                      </a:r>
+                    </a:p>
+                  </a:txBody>
+                </a:tc>
+                <a:tc>
+                  <a:txBody>
+                    <a:bodyPr/>
+                    <a:lstStyle/>
+                    <a:p>
+                      <a:pPr lvl="0" indent="0" marL="0" algn="r">
+                        <a:buNone/>
+                      </a:pPr>
+                      <a:r>
+                        <a:rPr/>
+                        <a:t>$14.8M</a:t>
+                      </a:r>
+                    </a:p>
+                  </a:txBody>
+                </a:tc>
+              </a:tr>
+            </a:tbl>
+          </a:graphicData>
+        </a:graphic>
+      </p:graphicFrame>
+      <p:sp>
+        <p:nvSpPr>
+          <p:cNvPr id="4" name="Content Placeholder 3"/>
+          <p:cNvSpPr>
+            <a:spLocks noGrp="1"/>
+          </p:cNvSpPr>
+          <p:nvPr>
+            <p:ph idx="2" sz="half"/>
+          </p:nvPr>
+        </p:nvSpPr>
+        <p:spPr/>
+        <p:txBody>
+          <a:bodyPr/>
+          <a:lstStyle/>
+          <a:p>
+            <a:pPr lvl="0" indent="0" marL="0">
+              <a:buNone/>
+            </a:pPr>
             <a:r>
               <a:rPr/>
-              <a:t>.</a:t>
-            </a:r>
-          </a:p>
-        </p:txBody>
-      </p:sp>
+              <a:t>Option value ≈ </a:t>
+            </a:r>
+            <a:r>
+              <a:rPr b="1"/>
+              <a:t>$2.25M</a:t>
+            </a:r>
+            <a:r>
+              <a:rPr/>
+              <a:t> — the flexible design wins on ENPV, minimum NPV, and initial cost.</a:t>
+            </a:r>
+          </a:p>
+        </p:txBody>
+      </p:sp>
+      <p:pic>
+        <p:nvPicPr>
+          <p:cNvPr descr="deneufville_fig3.png" id="0" name="Picture 1"/>
+          <p:cNvPicPr>
+            <a:picLocks noGrp="1" noChangeAspect="1"/>
+          </p:cNvPicPr>
+          <p:nvPr/>
+        </p:nvPicPr>
+        <p:blipFill>
+          <a:blip r:embed="rId3"/>
+          <a:stretch>
+            <a:fillRect/>
+          </a:stretch>
+        </p:blipFill>
+        <p:spPr bwMode="auto">
+          <a:xfrm>
+            <a:off x="5397500" y="1625600"/>
+            <a:ext cx="2527300" cy="2451100"/>
+          </a:xfrm>
+          <a:prstGeom prst="rect">
+            <a:avLst/>
+          </a:prstGeom>
+          <a:noFill/>
+          <a:ln w="9525">
+            <a:noFill/>
+            <a:headEnd/>
+            <a:tailEnd/>
+          </a:ln>
+        </p:spPr>
+      </p:pic>
+      <p:sp>
+        <p:nvSpPr>
+          <p:cNvPr id="1" name="TextBox 3"/>
+          <p:cNvSpPr txBox="1"/>
+          <p:nvPr/>
+        </p:nvSpPr>
+        <p:spPr>
+          <a:xfrm>
+            <a:off x="4635500" y="4076700"/>
+            <a:ext cx="4038600" cy="508000"/>
+          </a:xfrm>
+          <a:prstGeom prst="rect">
+            <a:avLst/>
+          </a:prstGeom>
+          <a:noFill/>
+        </p:spPr>
+        <p:txBody>
+          <a:bodyPr/>
+          <a:lstStyle/>
+          <a:p>
+            <a:pPr lvl="0" indent="0" marL="0" algn="ctr">
+              <a:buNone/>
+            </a:pPr>
+            <a:r>
+              <a:rPr/>
+              <a:t>Figure 1: The flexible design shifts the entire VaR curve rightward: less downside, more upside. Source: de Neufville, Scholtes, and Wang (2006)</a:t>
+            </a:r>
+          </a:p>
+        </p:txBody>
+      </p:sp>
+    </p:spTree>
+  </p:cSld>
+</p:sld>
+</file>
+
+<file path=ppt/slides/slide7.xml><?xml version="1.0" encoding="utf-8"?>
+<p:sld xmlns:a="http://schemas.openxmlformats.org/drawingml/2006/main" xmlns:r="http://schemas.openxmlformats.org/officeDocument/2006/relationships" xmlns:p="http://schemas.openxmlformats.org/presentationml/2006/main">
+  <p:cSld>
+    <p:spTree>
+      <p:nvGrpSpPr>
+        <p:cNvPr id="1" name=""/>
+        <p:cNvGrpSpPr/>
+        <p:nvPr/>
+      </p:nvGrpSpPr>
+      <p:grpSpPr>
+        <a:xfrm>
+          <a:off x="0" y="0"/>
+          <a:ext cx="0" cy="0"/>
+          <a:chOff x="0" y="0"/>
+          <a:chExt cx="0" cy="0"/>
+        </a:xfrm>
+      </p:grpSpPr>
+      <p:sp>
+        <p:nvSpPr>
+          <p:cNvPr id="2" name="Title 1"/>
+          <p:cNvSpPr>
+            <a:spLocks noGrp="1"/>
+          </p:cNvSpPr>
+          <p:nvPr>
+            <p:ph type="title"/>
+          </p:nvPr>
+        </p:nvSpPr>
+        <p:spPr/>
+        <p:txBody>
+          <a:bodyPr/>
+          <a:lstStyle/>
+          <a:p>
+            <a:pPr lvl="0" indent="0" marL="0">
+              <a:buNone/>
+            </a:pPr>
+            <a:r>
+              <a:rPr/>
+              <a:t>From Static to Sequential</a:t>
+            </a:r>
+          </a:p>
+        </p:txBody>
+      </p:sp>
+      <mc:AlternateContent xmlns:mc="http://schemas.openxmlformats.org/markup-compatibility/2006">
+        <mc:Choice xmlns:a14="http://schemas.microsoft.com/office/drawing/2010/main" Requires="a14">
+          <p:sp>
+            <p:nvSpPr>
+              <p:cNvPr id="3" name="Content Placeholder 2"/>
+              <p:cNvSpPr>
+                <a:spLocks noGrp="1"/>
+              </p:cNvSpPr>
+              <p:nvPr>
+                <p:ph idx="1"/>
+              </p:nvPr>
+            </p:nvSpPr>
+            <p:spPr/>
+            <p:txBody>
+              <a:bodyPr/>
+              <a:lstStyle/>
+              <a:p>
+                <a:pPr lvl="0" indent="0" marL="0">
+                  <a:buNone/>
+                </a:pPr>
+                <a:r>
+                  <a:rPr/>
+                  <a:t>So far in this course: choose one action </a:t>
+                </a:r>
+                <a14:m>
+                  <m:oMath xmlns:m="http://schemas.openxmlformats.org/officeDocument/2006/math">
+                    <m:sSup>
+                      <m:e>
+                        <m:r>
+                          <m:t>a</m:t>
+                        </m:r>
+                      </m:e>
+                      <m:sup>
+                        <m:r>
+                          <m:rPr>
+                            <m:sty m:val="p"/>
+                          </m:rPr>
+                          <m:t>*</m:t>
+                        </m:r>
+                      </m:sup>
+                    </m:sSup>
+                  </m:oMath>
+                </a14:m>
+                <a:r>
+                  <a:rPr/>
+                  <a:t> today, commit.</a:t>
+                </a:r>
+              </a:p>
+              <a:p>
+                <a:pPr lvl="0" indent="0" marL="0">
+                  <a:buNone/>
+                </a:pPr>
+                <a14:m>
+                  <m:oMathPara xmlns:m="http://schemas.openxmlformats.org/officeDocument/2006/math">
+                    <m:oMathParaPr>
+                      <m:jc m:val="center"/>
+                    </m:oMathParaPr>
+                    <m:oMath>
+                      <m:sSup>
+                        <m:e>
+                          <m:r>
+                            <m:t>a</m:t>
+                          </m:r>
+                        </m:e>
+                        <m:sup>
+                          <m:r>
+                            <m:rPr>
+                              <m:sty m:val="p"/>
+                            </m:rPr>
+                            <m:t>*</m:t>
+                          </m:r>
+                        </m:sup>
+                      </m:sSup>
+                      <m:r>
+                        <m:rPr>
+                          <m:sty m:val="p"/>
+                        </m:rPr>
+                        <m:t>=</m:t>
+                      </m:r>
+                      <m:r>
+                        <m:rPr>
+                          <m:sty m:val="p"/>
+                        </m:rPr>
+                        <m:t>arg</m:t>
+                      </m:r>
+                      <m:limLow>
+                        <m:e>
+                          <m:r>
+                            <m:rPr>
+                              <m:sty m:val="p"/>
+                            </m:rPr>
+                            <m:t>min</m:t>
+                          </m:r>
+                        </m:e>
+                        <m:lim>
+                          <m:r>
+                            <m:t>a</m:t>
+                          </m:r>
+                          <m:r>
+                            <m:rPr>
+                              <m:sty m:val="p"/>
+                            </m:rPr>
+                            <m:t>∈</m:t>
+                          </m:r>
+                          <m:r>
+                            <m:rPr>
+                              <m:sty m:val="p"/>
+                              <m:scr m:val="script"/>
+                            </m:rPr>
+                            <m:t>A</m:t>
+                          </m:r>
+                        </m:lim>
+                      </m:limLow>
+                      <m:r>
+                        <m:t> </m:t>
+                      </m:r>
+                      <m:r>
+                        <m:rPr>
+                          <m:sty m:val="p"/>
+                          <m:scr m:val="double-struck"/>
+                        </m:rPr>
+                        <m:t>E</m:t>
+                      </m:r>
+                      <m:r>
+                        <m:t>​</m:t>
+                      </m:r>
+                      <m:d>
+                        <m:dPr>
+                          <m:begChr m:val="["/>
+                          <m:sepChr m:val=""/>
+                          <m:endChr m:val="]"/>
+                          <m:grow/>
+                        </m:dPr>
+                        <m:e>
+                          <m:r>
+                            <m:rPr>
+                              <m:nor/>
+                              <m:sty m:val="p"/>
+                            </m:rPr>
+                            <m:t>Cost</m:t>
+                          </m:r>
+                          <m:d>
+                            <m:dPr>
+                              <m:begChr m:val="("/>
+                              <m:sepChr m:val=""/>
+                              <m:endChr m:val=")"/>
+                              <m:grow/>
+                            </m:dPr>
+                            <m:e>
+                              <m:r>
+                                <m:t>a</m:t>
+                              </m:r>
+                              <m:r>
+                                <m:rPr>
+                                  <m:sty m:val="p"/>
+                                </m:rPr>
+                                <m:t>,</m:t>
+                              </m:r>
+                              <m:r>
+                                <m:rPr>
+                                  <m:sty m:val="b"/>
+                                </m:rPr>
+                                <m:t>s</m:t>
+                              </m:r>
+                            </m:e>
+                          </m:d>
+                        </m:e>
+                      </m:d>
+                    </m:oMath>
+                  </m:oMathPara>
+                </a14:m>
+              </a:p>
+              <a:p>
+                <a:pPr lvl="0" indent="0" marL="0">
+                  <a:buNone/>
+                </a:pPr>
+                <a:r>
+                  <a:rPr/>
+                  <a:t>. . .</a:t>
+                </a:r>
+              </a:p>
+              <a:p>
+                <a:pPr lvl="0" indent="0" marL="0">
+                  <a:buNone/>
+                </a:pPr>
+                <a:r>
+                  <a:rPr/>
+                  <a:t>This ignores two things we know to be true:</a:t>
+                </a:r>
+              </a:p>
+              <a:p>
+                <a:pPr lvl="0" indent="-342900" marL="342900">
+                  <a:buAutoNum type="arabicPeriod"/>
+                </a:pPr>
+                <a:r>
+                  <a:rPr b="1"/>
+                  <a:t>We learn over time</a:t>
+                </a:r>
+                <a:r>
+                  <a:rPr/>
+                  <a:t> — SLR observations will sharpen; storm records will grow.</a:t>
+                </a:r>
+              </a:p>
+              <a:p>
+                <a:pPr lvl="0" indent="-342900" marL="342900">
+                  <a:buAutoNum type="arabicPeriod"/>
+                </a:pPr>
+                <a:r>
+                  <a:rPr b="1"/>
+                  <a:t>Actions have lifetimes</a:t>
+                </a:r>
+                <a:r>
+                  <a:rPr/>
+                  <a:t> — a dike built to 3.5m today constrains what you can do in 2040.</a:t>
+                </a:r>
+              </a:p>
+              <a:p>
+                <a:pPr lvl="0" indent="0" marL="0">
+                  <a:buNone/>
+                </a:pPr>
+                <a:r>
+                  <a:rPr/>
+                  <a:t>. . .</a:t>
+                </a:r>
+              </a:p>
+              <a:p>
+                <a:pPr lvl="0" indent="0" marL="0">
+                  <a:buNone/>
+                </a:pPr>
+                <a:r>
+                  <a:rPr/>
+                  <a:t>Sequential decision making asks: </a:t>
+                </a:r>
+                <a:r>
+                  <a:rPr b="1"/>
+                  <a:t>what rule should govern each future choice</a:t>
+                </a:r>
+                <a:r>
+                  <a:rPr/>
+                  <a:t>, given what you observe at the time you choose?</a:t>
+                </a:r>
+              </a:p>
+            </p:txBody>
+          </p:sp>
+        </mc:Choice>
+      </mc:AlternateContent>
+    </p:spTree>
+  </p:cSld>
+  <p:timing>
+    <p:tnLst>
+      <p:par>
+        <p:cTn id="1" dur="indefinite" restart="never" nodeType="tmRoot">
+          <p:childTnLst>
+            <p:seq concurrent="1" nextAc="seek">
+              <p:cTn id="2" dur="indefinite" nodeType="mainSeq">
+                <p:childTnLst>
+                  <p:par>
+                    <p:cTn id="3" fill="hold">
+                      <p:stCondLst>
+                        <p:cond delay="indefinite"/>
+                      </p:stCondLst>
+                      <p:childTnLst>
+                        <p:par>
+                          <p:cTn id="4" fill="hold">
+                            <p:stCondLst>
+                              <p:cond delay="0"/>
+                            </p:stCondLst>
+                            <p:childTnLst>
+                              <p:par>
+                                <p:cTn id="5" presetID="1" presetClass="entr" presetSubtype="0" fill="hold" grpId="0" nodeType="clickEffect">
+                                  <p:stCondLst>
+                                    <p:cond delay="0"/>
+                                  </p:stCondLst>
+                                  <p:childTnLst>
+                                    <p:set>
+                                      <p:cBhvr>
+                                        <p:cTn id="6" dur="1" fill="hold">
+                                          <p:stCondLst>
+                                            <p:cond delay="0"/>
+                                          </p:stCondLst>
+                                        </p:cTn>
+                                        <p:tgtEl>
+                                          <p:spTgt spid="3">
+                                            <p:txEl>
+                                              <p:pRg st="4" end="4"/>
+                                            </p:txEl>
+                                          </p:spTgt>
+                                        </p:tgtEl>
+                                        <p:attrNameLst>
+                                          <p:attrName>style.visibility</p:attrName>
+                                        </p:attrNameLst>
+                                      </p:cBhvr>
+                                      <p:to>
+                                        <p:strVal val="visible"/>
+                                      </p:to>
+                                    </p:set>
+                                  </p:childTnLst>
+                                </p:cTn>
+                              </p:par>
+                            </p:childTnLst>
+                          </p:cTn>
+                        </p:par>
+                      </p:childTnLst>
+                    </p:cTn>
+                  </p:par>
+                  <p:par>
+                    <p:cTn id="7" fill="hold">
+                      <p:stCondLst>
+                        <p:cond delay="indefinite"/>
+                      </p:stCondLst>
+                      <p:childTnLst>
+                        <p:par>
+                          <p:cTn id="8" fill="hold">
+                            <p:stCondLst>
+                              <p:cond delay="0"/>
+                            </p:stCondLst>
+                            <p:childTnLst>
+                              <p:par>
+                                <p:cTn id="9" presetID="1" presetClass="entr" presetSubtype="0" fill="hold" grpId="0" nodeType="clickEffect">
+                                  <p:stCondLst>
+                                    <p:cond delay="0"/>
+                                  </p:stCondLst>
+                                  <p:childTnLst>
+                                    <p:set>
+                                      <p:cBhvr>
+                                        <p:cTn id="10" dur="1" fill="hold">
+                                          <p:stCondLst>
+                                            <p:cond delay="0"/>
+                                          </p:stCondLst>
+                                        </p:cTn>
+                                        <p:tgtEl>
+                                          <p:spTgt spid="3">
+                                            <p:txEl>
+                                              <p:pRg st="5" end="5"/>
+                                            </p:txEl>
+                                          </p:spTgt>
+                                        </p:tgtEl>
+                                        <p:attrNameLst>
+                                          <p:attrName>style.visibility</p:attrName>
+                                        </p:attrNameLst>
+                                      </p:cBhvr>
+                                      <p:to>
+                                        <p:strVal val="visible"/>
+                                      </p:to>
+                                    </p:set>
+                                  </p:childTnLst>
+                                </p:cTn>
+                              </p:par>
+                            </p:childTnLst>
+                          </p:cTn>
+                        </p:par>
+                      </p:childTnLst>
+                    </p:cTn>
+                  </p:par>
+                </p:childTnLst>
+              </p:cTn>
+              <p:prevCondLst>
+                <p:cond evt="onPrev" delay="0">
+                  <p:tgtEl>
+                    <p:sldTgt/>
+                  </p:tgtEl>
+                </p:cond>
+              </p:prevCondLst>
+              <p:nextCondLst>
+                <p:cond evt="onNext" delay="0">
+                  <p:tgtEl>
+                    <p:sldTgt/>
+                  </p:tgtEl>
+                </p:cond>
+              </p:nextCondLst>
+            </p:seq>
+          </p:childTnLst>
+        </p:cTn>
+      </p:par>
+    </p:tnLst>
+    <p:bldLst>
+      <p:bldP spid="3" grpId="0" uiExpand="1" build="p"/>
+    </p:bldLst>
+  </p:timing>
+</p:sld>
+</file>
+
+<file path=ppt/slides/slide8.xml><?xml version="1.0" encoding="utf-8"?>
+<p:sld xmlns:a="http://schemas.openxmlformats.org/drawingml/2006/main" xmlns:r="http://schemas.openxmlformats.org/officeDocument/2006/relationships" xmlns:p="http://schemas.openxmlformats.org/presentationml/2006/main">
+  <p:cSld>
+    <p:spTree>
+      <p:nvGrpSpPr>
+        <p:cNvPr id="1" name=""/>
+        <p:cNvGrpSpPr/>
+        <p:nvPr/>
+      </p:nvGrpSpPr>
+      <p:grpSpPr>
+        <a:xfrm>
+          <a:off x="0" y="0"/>
+          <a:ext cx="0" cy="0"/>
+          <a:chOff x="0" y="0"/>
+          <a:chExt cx="0" cy="0"/>
+        </a:xfrm>
+      </p:grpSpPr>
+      <p:sp>
+        <p:nvSpPr>
+          <p:cNvPr id="2" name="Title 1"/>
+          <p:cNvSpPr>
+            <a:spLocks noGrp="1"/>
+          </p:cNvSpPr>
+          <p:nvPr>
+            <p:ph type="title"/>
+          </p:nvPr>
+        </p:nvSpPr>
+        <p:spPr>
+          <a:xfrm>
+            <a:off x="457201" y="204787"/>
+            <a:ext cx="3008313" cy="871538"/>
+          </a:xfrm>
+        </p:spPr>
+        <p:txBody>
+          <a:bodyPr/>
+          <a:lstStyle/>
+          <a:p>
+            <a:pPr lvl="0" indent="0" marL="0">
+              <a:buNone/>
+            </a:pPr>
+            <a:r>
+              <a:rPr/>
+              <a:t>Two Paradigms for Planning Under Uncertainty</a:t>
+            </a:r>
+          </a:p>
+        </p:txBody>
+      </p:sp>
+      <p:sp>
+        <p:nvSpPr>
+          <p:cNvPr id="4" name="Text Placeholder 3"/>
+          <p:cNvSpPr>
+            <a:spLocks noGrp="1"/>
+          </p:cNvSpPr>
+          <p:nvPr>
+            <p:ph idx="2" sz="half" type="body"/>
+          </p:nvPr>
+        </p:nvSpPr>
+        <p:spPr/>
+        <p:txBody>
+          <a:bodyPr/>
+          <a:lstStyle/>
+          <a:p>
+            <a:pPr lvl="0" indent="0" marL="0">
+              <a:buNone/>
+            </a:pPr>
+            <a:r>
+              <a:rPr/>
+              <a:t>Herman et al. (2020) classify decision support frameworks for water resources planning under climate change into two families.</a:t>
+            </a:r>
+          </a:p>
+        </p:txBody>
+      </p:sp>
+      <p:pic>
+        <p:nvPicPr>
+          <p:cNvPr descr="herman_fig1.png" id="0" name="Picture 1"/>
+          <p:cNvPicPr>
+            <a:picLocks noGrp="1" noChangeAspect="1"/>
+          </p:cNvPicPr>
+          <p:nvPr/>
+        </p:nvPicPr>
+        <p:blipFill>
+          <a:blip r:embed="rId3"/>
+          <a:stretch>
+            <a:fillRect/>
+          </a:stretch>
+        </p:blipFill>
+        <p:spPr bwMode="auto">
+          <a:xfrm>
+            <a:off x="3568700" y="876300"/>
+            <a:ext cx="5105400" cy="2527300"/>
+          </a:xfrm>
+          <a:prstGeom prst="rect">
+            <a:avLst/>
+          </a:prstGeom>
+          <a:noFill/>
+          <a:ln w="9525">
+            <a:noFill/>
+            <a:headEnd/>
+            <a:tailEnd/>
+          </a:ln>
+        </p:spPr>
+      </p:pic>
+      <p:sp>
+        <p:nvSpPr>
+          <p:cNvPr id="1" name="TextBox 3"/>
+          <p:cNvSpPr txBox="1"/>
+          <p:nvPr/>
+        </p:nvSpPr>
+        <p:spPr>
+          <a:xfrm>
+            <a:off x="3568700" y="4076700"/>
+            <a:ext cx="5105400" cy="508000"/>
+          </a:xfrm>
+          <a:prstGeom prst="rect">
+            <a:avLst/>
+          </a:prstGeom>
+          <a:noFill/>
+        </p:spPr>
+        <p:txBody>
+          <a:bodyPr/>
+          <a:lstStyle/>
+          <a:p>
+            <a:pPr lvl="0" indent="0" marL="0" algn="ctr">
+              <a:buNone/>
+            </a:pPr>
+            <a:r>
+              <a:rPr/>
+              <a:t>Figure 2: We have already covered robust planning (Weeks 7–8). Today focuses on dynamic planning — the highlighted column.</a:t>
+            </a:r>
+          </a:p>
+        </p:txBody>
+      </p:sp>
+    </p:spTree>
+  </p:cSld>
+</p:sld>
+</file>
+
+<file path=ppt/slides/slide9.xml><?xml version="1.0" encoding="utf-8"?>
+<p:sld xmlns:a="http://schemas.openxmlformats.org/drawingml/2006/main" xmlns:r="http://schemas.openxmlformats.org/officeDocument/2006/relationships" xmlns:p="http://schemas.openxmlformats.org/presentationml/2006/main">
+  <p:cSld>
+    <p:spTree>
+      <p:nvGrpSpPr>
+        <p:cNvPr id="1" name=""/>
+        <p:cNvGrpSpPr/>
+        <p:nvPr/>
+      </p:nvGrpSpPr>
+      <p:grpSpPr>
+        <a:xfrm>
+          <a:off x="0" y="0"/>
+          <a:ext cx="0" cy="0"/>
+          <a:chOff x="0" y="0"/>
+          <a:chExt cx="0" cy="0"/>
+        </a:xfrm>
+      </p:grpSpPr>
+      <p:sp>
+        <p:nvSpPr>
+          <p:cNvPr id="2" name="Title 1"/>
+          <p:cNvSpPr>
+            <a:spLocks noGrp="1"/>
+          </p:cNvSpPr>
+          <p:nvPr>
+            <p:ph type="title"/>
+          </p:nvPr>
+        </p:nvSpPr>
+        <p:spPr>
+          <a:xfrm>
+            <a:off x="457201" y="204787"/>
+            <a:ext cx="3008313" cy="871538"/>
+          </a:xfrm>
+        </p:spPr>
+        <p:txBody>
+          <a:bodyPr/>
+          <a:lstStyle/>
+          <a:p>
+            <a:pPr lvl="0" indent="0" marL="0">
+              <a:buNone/>
+            </a:pPr>
+            <a:r>
+              <a:rPr/>
+              <a:t>The Control Problem: Components</a:t>
+            </a:r>
+          </a:p>
+        </p:txBody>
+      </p:sp>
+      <p:sp>
+        <p:nvSpPr>
+          <p:cNvPr id="4" name="Text Placeholder 3"/>
+          <p:cNvSpPr>
+            <a:spLocks noGrp="1"/>
+          </p:cNvSpPr>
+          <p:nvPr>
+            <p:ph idx="2" sz="half" type="body"/>
+          </p:nvPr>
+        </p:nvSpPr>
+        <p:spPr/>
+        <p:txBody>
+          <a:bodyPr/>
+          <a:lstStyle/>
+          <a:p>
+            <a:pPr lvl="0" indent="0" marL="0">
+              <a:buNone/>
+            </a:pPr>
+            <a:r>
+              <a:rPr/>
+              <a:t>Dynamic planning has four components: policy structure, uncertainty characterization, solution method, and validation.</a:t>
+            </a:r>
+          </a:p>
+        </p:txBody>
+      </p:sp>
+      <p:pic>
+        <p:nvPicPr>
+          <p:cNvPr descr="herman_fig3.png" id="0" name="Picture 1"/>
+          <p:cNvPicPr>
+            <a:picLocks noGrp="1" noChangeAspect="1"/>
+          </p:cNvPicPr>
+          <p:nvPr/>
+        </p:nvPicPr>
+        <p:blipFill>
+          <a:blip r:embed="rId3"/>
+          <a:stretch>
+            <a:fillRect/>
+          </a:stretch>
+        </p:blipFill>
+        <p:spPr bwMode="auto">
+          <a:xfrm>
+            <a:off x="3568700" y="596900"/>
+            <a:ext cx="5105400" cy="3098800"/>
+          </a:xfrm>
+          <a:prstGeom prst="rect">
+            <a:avLst/>
+          </a:prstGeom>
+          <a:noFill/>
+          <a:ln w="9525">
+            <a:noFill/>
+            <a:headEnd/>
+            <a:tailEnd/>
+          </a:ln>
+        </p:spPr>
+      </p:pic>
+      <mc:AlternateContent xmlns:mc="http://schemas.openxmlformats.org/markup-compatibility/2006">
+        <mc:Choice xmlns:a14="http://schemas.microsoft.com/office/drawing/2010/main" Requires="a14">
+          <p:sp>
+            <p:nvSpPr>
+              <p:cNvPr id="1" name="TextBox 3"/>
+              <p:cNvSpPr txBox="1"/>
+              <p:nvPr/>
+            </p:nvSpPr>
+            <p:spPr>
+              <a:xfrm>
+                <a:off x="3568700" y="4076700"/>
+                <a:ext cx="5105400" cy="508000"/>
+              </a:xfrm>
+              <a:prstGeom prst="rect">
+                <a:avLst/>
+              </a:prstGeom>
+              <a:noFill/>
+            </p:spPr>
+            <p:txBody>
+              <a:bodyPr/>
+              <a:lstStyle/>
+              <a:p>
+                <a:pPr lvl="0" indent="0" marL="0" algn="ctr">
+                  <a:buNone/>
+                </a:pPr>
+                <a:r>
+                  <a:rPr/>
+                  <a:t>Figure 3: The control policy </a:t>
+                </a:r>
+                <a14:m>
+                  <m:oMath xmlns:m="http://schemas.openxmlformats.org/officeDocument/2006/math">
+                    <m:r>
+                      <m:t>π</m:t>
+                    </m:r>
+                  </m:oMath>
+                </a14:m>
+                <a:r>
+                  <a:rPr/>
+                  <a:t> (left box) observes the system and selects actions </a:t>
+                </a:r>
+                <a14:m>
+                  <m:oMath xmlns:m="http://schemas.openxmlformats.org/officeDocument/2006/math">
+                    <m:sSub>
+                      <m:e>
+                        <m:r>
+                          <m:t>a</m:t>
+                        </m:r>
+                      </m:e>
+                      <m:sub>
+                        <m:r>
+                          <m:t>t</m:t>
+                        </m:r>
+                      </m:sub>
+                    </m:sSub>
+                  </m:oMath>
+                </a14:m>
+                <a:r>
+                  <a:rPr/>
+                  <a:t>. Forcing </a:t>
+                </a:r>
+                <a14:m>
+                  <m:oMath xmlns:m="http://schemas.openxmlformats.org/officeDocument/2006/math">
+                    <m:sSub>
+                      <m:e>
+                        <m:r>
+                          <m:rPr>
+                            <m:sty m:val="b"/>
+                          </m:rPr>
+                          <m:t>e</m:t>
+                        </m:r>
+                      </m:e>
+                      <m:sub>
+                        <m:r>
+                          <m:t>t</m:t>
+                        </m:r>
+                      </m:sub>
+                    </m:sSub>
+                  </m:oMath>
+                </a14:m>
+                <a:r>
+                  <a:rPr/>
+                  <a:t> propagates through the climate-hydrology chain into the human-environmental system, producing performance metrics </a:t>
+                </a:r>
+                <a14:m>
+                  <m:oMath xmlns:m="http://schemas.openxmlformats.org/officeDocument/2006/math">
+                    <m:r>
+                      <m:t>J</m:t>
+                    </m:r>
+                  </m:oMath>
+                </a14:m>
+                <a:r>
+                  <a:rPr/>
+                  <a:t>. From Herman et al. (2020).</a:t>
+                </a:r>
+              </a:p>
+            </p:txBody>
+          </p:sp>
+        </mc:Choice>
+      </mc:AlternateContent>
     </p:spTree>
   </p:cSld>
 </p:sld>

--- a/lectures/week-11/index.pptx
+++ b/lectures/week-11/index.pptx
@@ -5134,7 +5134,7 @@
 </p:sld>
 </file>
 
-<file path=ppt/slides/slide10.xml><?xml version="1.0" encoding="UTF-8"?><p:sld xmlns:a="http://schemas.openxmlformats.org/drawingml/2006/main" xmlns:r="http://schemas.openxmlformats.org/officeDocument/2006/relationships" xmlns:p="http://schemas.openxmlformats.org/presentationml/2006/main"><p:cSld><p:spTree><p:nvGrpSpPr><p:cNvPr id="1" name="" /><p:cNvGrpSpPr /><p:nvPr /></p:nvGrpSpPr><p:grpSpPr><a:xfrm><a:off x="0" y="0" /><a:ext cx="0" cy="0" /><a:chOff x="0" y="0" /><a:chExt cx="0" cy="0" /></a:xfrm></p:grpSpPr><p:sp><p:nvSpPr><p:cNvPr id="2" name="Title 1" /><p:cNvSpPr><a:spLocks noGrp="1" /></p:cNvSpPr><p:nvPr><p:ph type="title" /></p:nvPr></p:nvSpPr><p:spPr><a:xfrm><a:off x="457201" y="204787" /><a:ext cx="3008313" cy="871538" /></a:xfrm></p:spPr><p:txBody><a:bodyPr /><a:lstStyle /><a:p><a:pPr lvl="0" indent="0" marL="0"><a:buNone /></a:pPr><a:r><a:rPr /><a:t>State, Action, Forcing</a:t></a:r></a:p></p:txBody></p:sp><mc:AlternateContent xmlns:mc="http://schemas.openxmlformats.org/markup-compatibility/2006"><mc:Choice xmlns:a14="http://schemas.microsoft.com/office/drawing/2010/main" Requires="a14"><p:sp><p:nvSpPr><p:cNvPr id="4" name="Text Placeholder 3" /><p:cNvSpPr><a:spLocks noGrp="1" /></p:cNvSpPr><p:nvPr><p:ph idx="2" sz="half" type="body" /></p:nvPr></p:nvSpPr><p:spPr /><p:txBody><a:bodyPr /><a:lstStyle /><a:p><a:pPr lvl="0" indent="0" marL="0"><a:buNone /></a:pPr><a:r><a:rPr /><a:t>Formal setup: at each time step </a:t></a:r><a14:m><m:oMath xmlns:m="http://schemas.openxmlformats.org/officeDocument/2006/math"><m:r><m:t>t</m:t></m:r></m:oMath></a14:m><a:r><a:rPr /><a:t>,</a:t></a:r></a:p></p:txBody></p:sp></mc:Choice></mc:AlternateContent><p:graphicFrame><p:nvGraphicFramePr><p:cNvPr id="6" name="Content Placeholder 5" /><p:cNvGraphicFramePr><a:graphicFrameLocks noGrp="1" /></p:cNvGraphicFramePr><p:nvPr><p:ph idx="1" /></p:nvPr></p:nvGraphicFramePr><p:xfrm><a:off x="3568700" y="203200" /><a:ext cx="5105400" cy="4381500" /></p:xfrm><a:graphic><a:graphicData uri="http://schemas.openxmlformats.org/drawingml/2006/table"><a:tbl><a:tblPr firstRow="1" bandRow="1"><a:tableStyleId>{5C22544A-7EE6-4342-B048-85BDC9FD1C3A}</a:tableStyleId></a:tblPr><a:tblGrid><a:gridCol w="1701800" /><a:gridCol w="1701800" /><a:gridCol w="1701800" /></a:tblGrid><a:tr h="0"><a:tc><a:txBody><a:bodyPr /><a:lstStyle /><a:p><a:pPr lvl="0" indent="0" marL="0"><a:buNone /></a:pPr><a:r><a:rPr /><a:t>Symbol</a:t></a:r></a:p></a:txBody><a:tcPr /></a:tc><a:tc><a:txBody><a:bodyPr /><a:lstStyle /><a:p><a:pPr lvl="0" indent="0" marL="0"><a:buNone /></a:pPr><a:r><a:rPr /><a:t>Meaning</a:t></a:r></a:p></a:txBody><a:tcPr /></a:tc><a:tc><a:txBody><a:bodyPr /><a:lstStyle /><a:p><a:pPr lvl="0" indent="0" marL="0"><a:buNone /></a:pPr><a:r><a:rPr /><a:t>Example</a:t></a:r></a:p></a:txBody><a:tcPr /></a:tc></a:tr><a:tr h="0"><a:tc><a:txBody><a:bodyPr /><a:lstStyle /><a:p><a:pPr lvl="0" indent="0" marL="0"><a:buNone /></a:pPr><a14:m><m:oMath xmlns:m="http://schemas.openxmlformats.org/officeDocument/2006/math"><m:sSub><m:e><m:r><m:rPr><m:sty m:val="b" /></m:rPr><m:t>x</m:t></m:r></m:e><m:sub><m:r><m:t>t</m:t></m:r></m:sub></m:sSub></m:oMath></a14:m></a:p></a:txBody></a:tc><a:tc><a:txBody><a:bodyPr /><a:lstStyle /><a:p><a:pPr lvl="0" indent="0" marL="0"><a:buNone /></a:pPr><a:r><a:rPr /><a:t>System state</a:t></a:r></a:p></a:txBody></a:tc><a:tc><a:txBody><a:bodyPr /><a:lstStyle /><a:p><a:pPr lvl="0" indent="0" marL="0"><a:buNone /></a:pPr><a:r><a:rPr /><a:t>Dike height, reservoir storage</a:t></a:r></a:p></a:txBody></a:tc></a:tr><a:tr h="0"><a:tc><a:txBody><a:bodyPr /><a:lstStyle /><a:p><a:pPr lvl="0" indent="0" marL="0"><a:buNone /></a:pPr><a14:m><m:oMath xmlns:m="http://schemas.openxmlformats.org/officeDocument/2006/math"><m:sSub><m:e><m:r><m:t>a</m:t></m:r></m:e><m:sub><m:r><m:t>t</m:t></m:r></m:sub></m:sSub><m:r><m:rPr><m:sty m:val="p" /></m:rPr><m:t>∈</m:t></m:r><m:r><m:rPr><m:sty m:val="p" /><m:scr m:val="script" /></m:rPr><m:t>A</m:t></m:r></m:oMath></a14:m></a:p></a:txBody></a:tc><a:tc><a:txBody><a:bodyPr /><a:lstStyle /><a:p><a:pPr lvl="0" indent="0" marL="0"><a:buNone /></a:pPr><a:r><a:rPr /><a:t>Action</a:t></a:r></a:p></a:txBody></a:tc><a:tc><a:txBody><a:bodyPr /><a:lstStyle /><a:p><a:pPr lvl="0" indent="0" marL="0"><a:buNone /></a:pPr><a:r><a:rPr /><a:t>Heighten by </a:t></a:r><a14:m><m:oMath xmlns:m="http://schemas.openxmlformats.org/officeDocument/2006/math"><m:sSub><m:e><m:r><m:t>u</m:t></m:r></m:e><m:sub><m:r><m:t>t</m:t></m:r></m:sub></m:sSub></m:oMath></a14:m><a:r><a:rPr /><a:t>; expand; do nothing</a:t></a:r></a:p></a:txBody></a:tc></a:tr><a:tr h="0"><a:tc><a:txBody><a:bodyPr /><a:lstStyle /><a:p><a:pPr lvl="0" indent="0" marL="0"><a:buNone /></a:pPr><a14:m><m:oMath xmlns:m="http://schemas.openxmlformats.org/officeDocument/2006/math"><m:sSub><m:e><m:r><m:rPr><m:sty m:val="b" /></m:rPr><m:t>e</m:t></m:r></m:e><m:sub><m:r><m:t>t</m:t></m:r></m:sub></m:sSub></m:oMath></a14:m></a:p></a:txBody></a:tc><a:tc><a:txBody><a:bodyPr /><a:lstStyle /><a:p><a:pPr lvl="0" indent="0" marL="0"><a:buNone /></a:pPr><a:r><a:rPr /><a:t>Stochastic forcing</a:t></a:r></a:p></a:txBody></a:tc><a:tc><a:txBody><a:bodyPr /><a:lstStyle /><a:p><a:pPr lvl="0" indent="0" marL="0"><a:buNone /></a:pPr><a:r><a:rPr /><a:t>SLR realization, storm surge, precipitation</a:t></a:r></a:p></a:txBody></a:tc></a:tr><a:tr h="0"><a:tc><a:txBody><a:bodyPr /><a:lstStyle /><a:p><a:pPr lvl="0" indent="0" marL="0"><a:buNone /></a:pPr><a14:m><m:oMath xmlns:m="http://schemas.openxmlformats.org/officeDocument/2006/math"><m:sSub><m:e><m:r><m:t>J</m:t></m:r></m:e><m:sub><m:r><m:t>t</m:t></m:r></m:sub></m:sSub></m:oMath></a14:m></a:p></a:txBody></a:tc><a:tc><a:txBody><a:bodyPr /><a:lstStyle /><a:p><a:pPr lvl="0" indent="0" marL="0"><a:buNone /></a:pPr><a:r><a:rPr /><a:t>Cost</a:t></a:r></a:p></a:txBody></a:tc><a:tc><a:txBody><a:bodyPr /><a:lstStyle /><a:p><a:pPr lvl="0" indent="0" marL="0"><a:buNone /></a:pPr><a:r><a:rPr /><a:t>Investment cost + expected damages</a:t></a:r></a:p></a:txBody></a:tc></a:tr></a:tbl></a:graphicData></a:graphic></p:graphicFrame></p:spTree></p:cSld></p:sld>
+<file path=ppt/slides/slide10.xml><?xml version="1.0" encoding="UTF-8"?><p:sld xmlns:a="http://schemas.openxmlformats.org/drawingml/2006/main" xmlns:r="http://schemas.openxmlformats.org/officeDocument/2006/relationships" xmlns:p="http://schemas.openxmlformats.org/presentationml/2006/main"><p:cSld><p:spTree><p:nvGrpSpPr><p:cNvPr id="1" name="" /><p:cNvGrpSpPr /><p:nvPr /></p:nvGrpSpPr><p:grpSpPr><a:xfrm><a:off x="0" y="0" /><a:ext cx="0" cy="0" /><a:chOff x="0" y="0" /><a:chExt cx="0" cy="0" /></a:xfrm></p:grpSpPr><p:sp><p:nvSpPr><p:cNvPr id="2" name="Title 1" /><p:cNvSpPr><a:spLocks noGrp="1" /></p:cNvSpPr><p:nvPr><p:ph type="title" /></p:nvPr></p:nvSpPr><p:spPr><a:xfrm><a:off x="457201" y="204787" /><a:ext cx="3008313" cy="871538" /></a:xfrm></p:spPr><p:txBody><a:bodyPr /><a:lstStyle /><a:p><a:pPr lvl="0" indent="0" marL="0"><a:buNone /></a:pPr><a:r><a:rPr /><a:t>State, Action, Forcing</a:t></a:r></a:p></p:txBody></p:sp><mc:AlternateContent xmlns:mc="http://schemas.openxmlformats.org/markup-compatibility/2006"><mc:Choice xmlns:a14="http://schemas.microsoft.com/office/drawing/2010/main" Requires="a14"><p:sp><p:nvSpPr><p:cNvPr id="4" name="Text Placeholder 3" /><p:cNvSpPr><a:spLocks noGrp="1" /></p:cNvSpPr><p:nvPr><p:ph idx="2" sz="half" type="body" /></p:nvPr></p:nvSpPr><p:spPr /><p:txBody><a:bodyPr /><a:lstStyle /><a:p><a:pPr lvl="0" indent="0" marL="0"><a:buNone /></a:pPr><a:r><a:rPr /><a:t>Formal setup: at each time step </a:t></a:r><a14:m><m:oMath xmlns:m="http://schemas.openxmlformats.org/officeDocument/2006/math"><m:r><m:t>t</m:t></m:r></m:oMath></a14:m><a:r><a:rPr /><a:t>,</a:t></a:r></a:p></p:txBody></p:sp></mc:Choice></mc:AlternateContent><p:graphicFrame><p:nvGraphicFramePr><p:cNvPr id="6" name="Content Placeholder 5" /><p:cNvGraphicFramePr><a:graphicFrameLocks noGrp="1" /></p:cNvGraphicFramePr><p:nvPr><p:ph idx="1" /></p:nvPr></p:nvGraphicFramePr><p:xfrm><a:off x="3568700" y="203200" /><a:ext cx="5105400" cy="4381500" /></p:xfrm><a:graphic><a:graphicData uri="http://schemas.openxmlformats.org/drawingml/2006/table"><a:tbl><a:tblPr firstRow="1" bandRow="1"><a:tableStyleId>{5C22544A-7EE6-4342-B048-85BDC9FD1C3A}</a:tableStyleId></a:tblPr><a:tblGrid><a:gridCol w="1701800" /><a:gridCol w="1701800" /><a:gridCol w="1701800" /></a:tblGrid><a:tr h="0"><a:tc><a:txBody><a:bodyPr /><a:lstStyle /><a:p><a:pPr lvl="0" indent="0" marL="0"><a:buNone /></a:pPr><a:r><a:rPr /><a:t>Symbol</a:t></a:r></a:p></a:txBody><a:tcPr /></a:tc><a:tc><a:txBody><a:bodyPr /><a:lstStyle /><a:p><a:pPr lvl="0" indent="0" marL="0"><a:buNone /></a:pPr><a:r><a:rPr /><a:t>Meaning</a:t></a:r></a:p></a:txBody><a:tcPr /></a:tc><a:tc><a:txBody><a:bodyPr /><a:lstStyle /><a:p><a:pPr lvl="0" indent="0" marL="0"><a:buNone /></a:pPr><a:r><a:rPr /><a:t>Example</a:t></a:r></a:p></a:txBody><a:tcPr /></a:tc></a:tr><a:tr h="0"><a:tc><a:txBody><a:bodyPr /><a:lstStyle /><a:p><a:pPr lvl="0" indent="0" marL="0"><a:buNone /></a:pPr><a14:m><m:oMath xmlns:m="http://schemas.openxmlformats.org/officeDocument/2006/math"><m:sSub><m:e><m:r><m:rPr><m:sty m:val="b" /></m:rPr><m:t>x</m:t></m:r></m:e><m:sub><m:r><m:t>t</m:t></m:r></m:sub></m:sSub></m:oMath></a14:m></a:p></a:txBody></a:tc><a:tc><a:txBody><a:bodyPr /><a:lstStyle /><a:p><a:pPr lvl="0" indent="0" marL="0"><a:buNone /></a:pPr><a:r><a:rPr /><a:t>System state</a:t></a:r></a:p></a:txBody></a:tc><a:tc><a:txBody><a:bodyPr /><a:lstStyle /><a:p><a:pPr lvl="0" indent="0" marL="0"><a:buNone /></a:pPr><a:r><a:rPr /><a:t>Dike height, reservoir storage</a:t></a:r></a:p></a:txBody></a:tc></a:tr><a:tr h="0"><a:tc><a:txBody><a:bodyPr /><a:lstStyle /><a:p><a:pPr lvl="0" indent="0" marL="0"><a:buNone /></a:pPr><a14:m><m:oMath xmlns:m="http://schemas.openxmlformats.org/officeDocument/2006/math"><m:sSub><m:e><m:r><m:t>a</m:t></m:r></m:e><m:sub><m:r><m:t>t</m:t></m:r></m:sub></m:sSub><m:r><m:rPr><m:sty m:val="p" /></m:rPr><m:t>∈</m:t></m:r><m:r><m:rPr><m:scr m:val="script" /><m:sty m:val="p" /></m:rPr><m:t>A</m:t></m:r></m:oMath></a14:m></a:p></a:txBody></a:tc><a:tc><a:txBody><a:bodyPr /><a:lstStyle /><a:p><a:pPr lvl="0" indent="0" marL="0"><a:buNone /></a:pPr><a:r><a:rPr /><a:t>Action</a:t></a:r></a:p></a:txBody></a:tc><a:tc><a:txBody><a:bodyPr /><a:lstStyle /><a:p><a:pPr lvl="0" indent="0" marL="0"><a:buNone /></a:pPr><a:r><a:rPr /><a:t>Heighten by </a:t></a:r><a14:m><m:oMath xmlns:m="http://schemas.openxmlformats.org/officeDocument/2006/math"><m:sSub><m:e><m:r><m:t>u</m:t></m:r></m:e><m:sub><m:r><m:t>t</m:t></m:r></m:sub></m:sSub></m:oMath></a14:m><a:r><a:rPr /><a:t>; expand; do nothing</a:t></a:r></a:p></a:txBody></a:tc></a:tr><a:tr h="0"><a:tc><a:txBody><a:bodyPr /><a:lstStyle /><a:p><a:pPr lvl="0" indent="0" marL="0"><a:buNone /></a:pPr><a14:m><m:oMath xmlns:m="http://schemas.openxmlformats.org/officeDocument/2006/math"><m:sSub><m:e><m:r><m:rPr><m:sty m:val="b" /></m:rPr><m:t>e</m:t></m:r></m:e><m:sub><m:r><m:t>t</m:t></m:r></m:sub></m:sSub></m:oMath></a14:m></a:p></a:txBody></a:tc><a:tc><a:txBody><a:bodyPr /><a:lstStyle /><a:p><a:pPr lvl="0" indent="0" marL="0"><a:buNone /></a:pPr><a:r><a:rPr /><a:t>Stochastic forcing</a:t></a:r></a:p></a:txBody></a:tc><a:tc><a:txBody><a:bodyPr /><a:lstStyle /><a:p><a:pPr lvl="0" indent="0" marL="0"><a:buNone /></a:pPr><a:r><a:rPr /><a:t>SLR realization, storm surge, precipitation</a:t></a:r></a:p></a:txBody></a:tc></a:tr><a:tr h="0"><a:tc><a:txBody><a:bodyPr /><a:lstStyle /><a:p><a:pPr lvl="0" indent="0" marL="0"><a:buNone /></a:pPr><a14:m><m:oMath xmlns:m="http://schemas.openxmlformats.org/officeDocument/2006/math"><m:sSub><m:e><m:r><m:t>J</m:t></m:r></m:e><m:sub><m:r><m:t>t</m:t></m:r></m:sub></m:sSub></m:oMath></a14:m></a:p></a:txBody></a:tc><a:tc><a:txBody><a:bodyPr /><a:lstStyle /><a:p><a:pPr lvl="0" indent="0" marL="0"><a:buNone /></a:pPr><a:r><a:rPr /><a:t>Cost</a:t></a:r></a:p></a:txBody></a:tc><a:tc><a:txBody><a:bodyPr /><a:lstStyle /><a:p><a:pPr lvl="0" indent="0" marL="0"><a:buNone /></a:pPr><a:r><a:rPr /><a:t>Investment cost + expected damages</a:t></a:r></a:p></a:txBody></a:tc></a:tr></a:tbl></a:graphicData></a:graphic></p:graphicFrame></p:spTree></p:cSld></p:sld>
 </file>
 
 <file path=ppt/slides/slide11.xml><?xml version="1.0" encoding="utf-8"?>
@@ -5240,85 +5240,87 @@
                           </m:r>
                         </m:sub>
                       </m:sSub>
-                      <m:d>
-                        <m:dPr>
-                          <m:begChr m:val="("/>
-                          <m:sepChr m:val=""/>
-                          <m:endChr m:val=")"/>
-                          <m:grow/>
-                        </m:dPr>
+                      <m:r>
+                        <m:rPr>
+                          <m:sty m:val="p"/>
+                        </m:rPr>
+                        <m:t>(</m:t>
+                      </m:r>
+                      <m:sSub>
                         <m:e>
-                          <m:sSub>
-                            <m:e>
-                              <m:r>
-                                <m:rPr>
-                                  <m:sty m:val="b"/>
-                                </m:rPr>
-                                <m:t>x</m:t>
-                              </m:r>
-                            </m:e>
-                            <m:sub>
-                              <m:r>
-                                <m:t>t</m:t>
-                              </m:r>
-                            </m:sub>
-                          </m:sSub>
+                          <m:r>
+                            <m:rPr>
+                              <m:sty m:val="b"/>
+                            </m:rPr>
+                            <m:t>x</m:t>
+                          </m:r>
+                        </m:e>
+                        <m:sub>
+                          <m:r>
+                            <m:t>t</m:t>
+                          </m:r>
+                        </m:sub>
+                      </m:sSub>
+                      <m:r>
+                        <m:rPr>
+                          <m:sty m:val="p"/>
+                        </m:rPr>
+                        <m:t>,</m:t>
+                      </m:r>
+                      <m:r>
+                        <m:t> </m:t>
+                      </m:r>
+                      <m:sSub>
+                        <m:e>
+                          <m:r>
+                            <m:t>a</m:t>
+                          </m:r>
+                        </m:e>
+                        <m:sub>
+                          <m:r>
+                            <m:t>t</m:t>
+                          </m:r>
+                        </m:sub>
+                      </m:sSub>
+                      <m:r>
+                        <m:rPr>
+                          <m:sty m:val="p"/>
+                        </m:rPr>
+                        <m:t>,</m:t>
+                      </m:r>
+                      <m:r>
+                        <m:t> </m:t>
+                      </m:r>
+                      <m:sSub>
+                        <m:e>
+                          <m:r>
+                            <m:rPr>
+                              <m:sty m:val="b"/>
+                            </m:rPr>
+                            <m:t>e</m:t>
+                          </m:r>
+                        </m:e>
+                        <m:sub>
+                          <m:r>
+                            <m:t>t</m:t>
+                          </m:r>
                           <m:r>
                             <m:rPr>
                               <m:sty m:val="p"/>
                             </m:rPr>
-                            <m:t>,</m:t>
+                            <m:t>+</m:t>
                           </m:r>
                           <m:r>
-                            <m:t> </m:t>
+                            <m:t>1</m:t>
                           </m:r>
-                          <m:sSub>
-                            <m:e>
-                              <m:r>
-                                <m:t>a</m:t>
-                              </m:r>
-                            </m:e>
-                            <m:sub>
-                              <m:r>
-                                <m:t>t</m:t>
-                              </m:r>
-                            </m:sub>
-                          </m:sSub>
-                          <m:r>
-                            <m:rPr>
-                              <m:sty m:val="p"/>
-                            </m:rPr>
-                            <m:t>,</m:t>
-                          </m:r>
-                          <m:r>
-                            <m:t> </m:t>
-                          </m:r>
-                          <m:sSub>
-                            <m:e>
-                              <m:r>
-                                <m:rPr>
-                                  <m:sty m:val="b"/>
-                                </m:rPr>
-                                <m:t>e</m:t>
-                              </m:r>
-                            </m:e>
-                            <m:sub>
-                              <m:r>
-                                <m:t>t</m:t>
-                              </m:r>
-                              <m:r>
-                                <m:rPr>
-                                  <m:sty m:val="p"/>
-                                </m:rPr>
-                                <m:t>+</m:t>
-                              </m:r>
-                              <m:r>
-                                <m:t>1</m:t>
-                              </m:r>
-                            </m:sub>
-                          </m:sSub>
-                        </m:e>
-                      </m:d>
+                        </m:sub>
+                      </m:sSub>
+                      <m:r>
+                        <m:rPr>
+                          <m:sty m:val="p"/>
+                        </m:rPr>
+                        <m:t>)</m:t>
+                      </m:r>
                     </m:oMath>
                   </m:oMathPara>
                 </a14:m>
@@ -5512,31 +5514,33 @@
                       <m:r>
                         <m:t>π</m:t>
                       </m:r>
-                      <m:d>
-                        <m:dPr>
-                          <m:begChr m:val="("/>
-                          <m:sepChr m:val=""/>
-                          <m:endChr m:val=")"/>
-                          <m:grow/>
-                        </m:dPr>
+                      <m:r>
+                        <m:rPr>
+                          <m:sty m:val="p"/>
+                        </m:rPr>
+                        <m:t>(</m:t>
+                      </m:r>
+                      <m:sSub>
                         <m:e>
-                          <m:sSub>
-                            <m:e>
-                              <m:r>
-                                <m:rPr>
-                                  <m:sty m:val="b"/>
-                                </m:rPr>
-                                <m:t>I</m:t>
-                              </m:r>
-                            </m:e>
-                            <m:sub>
-                              <m:r>
-                                <m:t>t</m:t>
-                              </m:r>
-                            </m:sub>
-                          </m:sSub>
+                          <m:r>
+                            <m:rPr>
+                              <m:sty m:val="b"/>
+                            </m:rPr>
+                            <m:t>I</m:t>
+                          </m:r>
                         </m:e>
-                      </m:d>
+                        <m:sub>
+                          <m:r>
+                            <m:t>t</m:t>
+                          </m:r>
+                        </m:sub>
+                      </m:sSub>
+                      <m:r>
+                        <m:rPr>
+                          <m:sty m:val="p"/>
+                        </m:rPr>
+                        <m:t>)</m:t>
+                      </m:r>
                     </m:oMath>
                   </m:oMathPara>
                 </a14:m>
@@ -5634,8 +5638,8 @@
                         <m:e>
                           <m:r>
                             <m:rPr>
+                              <m:scr m:val="double-struck"/>
                               <m:sty m:val="p"/>
-                              <m:scr m:val="double-struck"/>
                             </m:rPr>
                             <m:t>E</m:t>
                           </m:r>
@@ -5710,85 +5714,87 @@
                               </m:sSub>
                             </m:e>
                           </m:nary>
-                          <m:d>
-                            <m:dPr>
-                              <m:begChr m:val="("/>
-                              <m:sepChr m:val=""/>
-                              <m:endChr m:val=")"/>
-                              <m:grow/>
-                            </m:dPr>
+                          <m:r>
+                            <m:rPr>
+                              <m:sty m:val="p"/>
+                            </m:rPr>
+                            <m:t>(</m:t>
+                          </m:r>
+                          <m:sSub>
                             <m:e>
-                              <m:sSub>
-                                <m:e>
-                                  <m:r>
-                                    <m:rPr>
-                                      <m:sty m:val="b"/>
-                                    </m:rPr>
-                                    <m:t>x</m:t>
-                                  </m:r>
-                                </m:e>
-                                <m:sub>
-                                  <m:r>
-                                    <m:t>t</m:t>
-                                  </m:r>
-                                </m:sub>
-                              </m:sSub>
+                              <m:r>
+                                <m:rPr>
+                                  <m:sty m:val="b"/>
+                                </m:rPr>
+                                <m:t>x</m:t>
+                              </m:r>
+                            </m:e>
+                            <m:sub>
+                              <m:r>
+                                <m:t>t</m:t>
+                              </m:r>
+                            </m:sub>
+                          </m:sSub>
+                          <m:r>
+                            <m:rPr>
+                              <m:sty m:val="p"/>
+                            </m:rPr>
+                            <m:t>,</m:t>
+                          </m:r>
+                          <m:r>
+                            <m:t> </m:t>
+                          </m:r>
+                          <m:sSub>
+                            <m:e>
+                              <m:r>
+                                <m:t>a</m:t>
+                              </m:r>
+                            </m:e>
+                            <m:sub>
+                              <m:r>
+                                <m:t>t</m:t>
+                              </m:r>
+                            </m:sub>
+                          </m:sSub>
+                          <m:r>
+                            <m:rPr>
+                              <m:sty m:val="p"/>
+                            </m:rPr>
+                            <m:t>,</m:t>
+                          </m:r>
+                          <m:r>
+                            <m:t> </m:t>
+                          </m:r>
+                          <m:sSub>
+                            <m:e>
+                              <m:r>
+                                <m:rPr>
+                                  <m:sty m:val="b"/>
+                                </m:rPr>
+                                <m:t>e</m:t>
+                              </m:r>
+                            </m:e>
+                            <m:sub>
+                              <m:r>
+                                <m:t>t</m:t>
+                              </m:r>
                               <m:r>
                                 <m:rPr>
                                   <m:sty m:val="p"/>
                                 </m:rPr>
-                                <m:t>,</m:t>
+                                <m:t>+</m:t>
                               </m:r>
                               <m:r>
-                                <m:t> </m:t>
+                                <m:t>1</m:t>
                               </m:r>
-                              <m:sSub>
-                                <m:e>
-                                  <m:r>
-                                    <m:t>a</m:t>
-                                  </m:r>
-                                </m:e>
-                                <m:sub>
-                                  <m:r>
-                                    <m:t>t</m:t>
-                                  </m:r>
-                                </m:sub>
-                              </m:sSub>
-                              <m:r>
-                                <m:rPr>
-                                  <m:sty m:val="p"/>
-                                </m:rPr>
-                                <m:t>,</m:t>
-                              </m:r>
-                              <m:r>
-                                <m:t> </m:t>
-                              </m:r>
-                              <m:sSub>
-                                <m:e>
-                                  <m:r>
-                                    <m:rPr>
-                                      <m:sty m:val="b"/>
-                                    </m:rPr>
-                                    <m:t>e</m:t>
-                                  </m:r>
-                                </m:e>
-                                <m:sub>
-                                  <m:r>
-                                    <m:t>t</m:t>
-                                  </m:r>
-                                  <m:r>
-                                    <m:rPr>
-                                      <m:sty m:val="p"/>
-                                    </m:rPr>
-                                    <m:t>+</m:t>
-                                  </m:r>
-                                  <m:r>
-                                    <m:t>1</m:t>
-                                  </m:r>
-                                </m:sub>
-                              </m:sSub>
-                            </m:e>
-                          </m:d>
+                            </m:sub>
+                          </m:sSub>
+                          <m:r>
+                            <m:rPr>
+                              <m:sty m:val="p"/>
+                            </m:rPr>
+                            <m:t>)</m:t>
+                          </m:r>
                         </m:e>
                       </m:d>
                     </m:oMath>
@@ -6355,19 +6361,21 @@
                       <m:r>
                         <m:t>π</m:t>
                       </m:r>
-                      <m:d>
-                        <m:dPr>
-                          <m:begChr m:val="("/>
-                          <m:sepChr m:val=""/>
-                          <m:endChr m:val=")"/>
-                          <m:grow/>
-                        </m:dPr>
-                        <m:e>
-                          <m:r>
-                            <m:t>t</m:t>
-                          </m:r>
-                        </m:e>
-                      </m:d>
+                      <m:r>
+                        <m:rPr>
+                          <m:sty m:val="p"/>
+                        </m:rPr>
+                        <m:t>(</m:t>
+                      </m:r>
+                      <m:r>
+                        <m:t>t</m:t>
+                      </m:r>
+                      <m:r>
+                        <m:rPr>
+                          <m:sty m:val="p"/>
+                        </m:rPr>
+                        <m:t>)</m:t>
+                      </m:r>
                     </m:oMath>
                   </m:oMathPara>
                 </a14:m>
@@ -6760,31 +6768,33 @@
                           </m:r>
                         </m:sub>
                       </m:sSub>
-                      <m:d>
-                        <m:dPr>
-                          <m:begChr m:val="("/>
-                          <m:sepChr m:val=""/>
-                          <m:endChr m:val=")"/>
-                          <m:grow/>
-                        </m:dPr>
+                      <m:r>
+                        <m:rPr>
+                          <m:sty m:val="p"/>
+                        </m:rPr>
+                        <m:t>(</m:t>
+                      </m:r>
+                      <m:sSub>
                         <m:e>
-                          <m:sSub>
-                            <m:e>
-                              <m:r>
-                                <m:rPr>
-                                  <m:sty m:val="b"/>
-                                </m:rPr>
-                                <m:t>x</m:t>
-                              </m:r>
-                            </m:e>
-                            <m:sub>
-                              <m:r>
-                                <m:t>t</m:t>
-                              </m:r>
-                            </m:sub>
-                          </m:sSub>
+                          <m:r>
+                            <m:rPr>
+                              <m:sty m:val="b"/>
+                            </m:rPr>
+                            <m:t>x</m:t>
+                          </m:r>
                         </m:e>
-                      </m:d>
+                        <m:sub>
+                          <m:r>
+                            <m:t>t</m:t>
+                          </m:r>
+                        </m:sub>
+                      </m:sSub>
+                      <m:r>
+                        <m:rPr>
+                          <m:sty m:val="p"/>
+                        </m:rPr>
+                        <m:t>)</m:t>
+                      </m:r>
                       <m:r>
                         <m:rPr>
                           <m:sty m:val="p"/>
@@ -6822,8 +6832,8 @@
                         <m:e>
                           <m:r>
                             <m:rPr>
+                              <m:scr m:val="double-struck"/>
                               <m:sty m:val="p"/>
-                              <m:scr m:val="double-struck"/>
                             </m:rPr>
                             <m:t>E</m:t>
                           </m:r>
@@ -6872,85 +6882,87 @@
                           <m:r>
                             <m:t>J</m:t>
                           </m:r>
-                          <m:d>
-                            <m:dPr>
-                              <m:begChr m:val="("/>
-                              <m:sepChr m:val=""/>
-                              <m:endChr m:val=")"/>
-                              <m:grow/>
-                            </m:dPr>
+                          <m:r>
+                            <m:rPr>
+                              <m:sty m:val="p"/>
+                            </m:rPr>
+                            <m:t>(</m:t>
+                          </m:r>
+                          <m:sSub>
                             <m:e>
-                              <m:sSub>
-                                <m:e>
-                                  <m:r>
-                                    <m:rPr>
-                                      <m:sty m:val="b"/>
-                                    </m:rPr>
-                                    <m:t>x</m:t>
-                                  </m:r>
-                                </m:e>
-                                <m:sub>
-                                  <m:r>
-                                    <m:t>t</m:t>
-                                  </m:r>
-                                </m:sub>
-                              </m:sSub>
+                              <m:r>
+                                <m:rPr>
+                                  <m:sty m:val="b"/>
+                                </m:rPr>
+                                <m:t>x</m:t>
+                              </m:r>
+                            </m:e>
+                            <m:sub>
+                              <m:r>
+                                <m:t>t</m:t>
+                              </m:r>
+                            </m:sub>
+                          </m:sSub>
+                          <m:r>
+                            <m:rPr>
+                              <m:sty m:val="p"/>
+                            </m:rPr>
+                            <m:t>,</m:t>
+                          </m:r>
+                          <m:r>
+                            <m:t> </m:t>
+                          </m:r>
+                          <m:sSub>
+                            <m:e>
+                              <m:r>
+                                <m:t>a</m:t>
+                              </m:r>
+                            </m:e>
+                            <m:sub>
+                              <m:r>
+                                <m:t>t</m:t>
+                              </m:r>
+                            </m:sub>
+                          </m:sSub>
+                          <m:r>
+                            <m:rPr>
+                              <m:sty m:val="p"/>
+                            </m:rPr>
+                            <m:t>,</m:t>
+                          </m:r>
+                          <m:r>
+                            <m:t> </m:t>
+                          </m:r>
+                          <m:sSub>
+                            <m:e>
+                              <m:r>
+                                <m:rPr>
+                                  <m:sty m:val="b"/>
+                                </m:rPr>
+                                <m:t>e</m:t>
+                              </m:r>
+                            </m:e>
+                            <m:sub>
+                              <m:r>
+                                <m:t>t</m:t>
+                              </m:r>
                               <m:r>
                                 <m:rPr>
                                   <m:sty m:val="p"/>
                                 </m:rPr>
-                                <m:t>,</m:t>
+                                <m:t>+</m:t>
                               </m:r>
                               <m:r>
-                                <m:t> </m:t>
+                                <m:t>1</m:t>
                               </m:r>
-                              <m:sSub>
-                                <m:e>
-                                  <m:r>
-                                    <m:t>a</m:t>
-                                  </m:r>
-                                </m:e>
-                                <m:sub>
-                                  <m:r>
-                                    <m:t>t</m:t>
-                                  </m:r>
-                                </m:sub>
-                              </m:sSub>
-                              <m:r>
-                                <m:rPr>
-                                  <m:sty m:val="p"/>
-                                </m:rPr>
-                                <m:t>,</m:t>
-                              </m:r>
-                              <m:r>
-                                <m:t> </m:t>
-                              </m:r>
-                              <m:sSub>
-                                <m:e>
-                                  <m:r>
-                                    <m:rPr>
-                                      <m:sty m:val="b"/>
-                                    </m:rPr>
-                                    <m:t>e</m:t>
-                                  </m:r>
-                                </m:e>
-                                <m:sub>
-                                  <m:r>
-                                    <m:t>t</m:t>
-                                  </m:r>
-                                  <m:r>
-                                    <m:rPr>
-                                      <m:sty m:val="p"/>
-                                    </m:rPr>
-                                    <m:t>+</m:t>
-                                  </m:r>
-                                  <m:r>
-                                    <m:t>1</m:t>
-                                  </m:r>
-                                </m:sub>
-                              </m:sSub>
-                            </m:e>
-                          </m:d>
+                            </m:sub>
+                          </m:sSub>
+                          <m:r>
+                            <m:rPr>
+                              <m:sty m:val="p"/>
+                            </m:rPr>
+                            <m:t>)</m:t>
+                          </m:r>
                           <m:r>
                             <m:t> </m:t>
                           </m:r>
@@ -6990,40 +7002,42 @@
                               </m:r>
                             </m:sub>
                           </m:sSub>
-                          <m:d>
-                            <m:dPr>
-                              <m:begChr m:val="("/>
-                              <m:sepChr m:val=""/>
-                              <m:endChr m:val=")"/>
-                              <m:grow/>
-                            </m:dPr>
+                          <m:r>
+                            <m:rPr>
+                              <m:sty m:val="p"/>
+                            </m:rPr>
+                            <m:t>(</m:t>
+                          </m:r>
+                          <m:sSub>
                             <m:e>
-                              <m:sSub>
-                                <m:e>
-                                  <m:r>
-                                    <m:rPr>
-                                      <m:sty m:val="b"/>
-                                    </m:rPr>
-                                    <m:t>x</m:t>
-                                  </m:r>
-                                </m:e>
-                                <m:sub>
-                                  <m:r>
-                                    <m:t>t</m:t>
-                                  </m:r>
-                                  <m:r>
-                                    <m:rPr>
-                                      <m:sty m:val="p"/>
-                                    </m:rPr>
-                                    <m:t>+</m:t>
-                                  </m:r>
-                                  <m:r>
-                                    <m:t>1</m:t>
-                                  </m:r>
-                                </m:sub>
-                              </m:sSub>
+                              <m:r>
+                                <m:rPr>
+                                  <m:sty m:val="b"/>
+                                </m:rPr>
+                                <m:t>x</m:t>
+                              </m:r>
                             </m:e>
-                          </m:d>
+                            <m:sub>
+                              <m:r>
+                                <m:t>t</m:t>
+                              </m:r>
+                              <m:r>
+                                <m:rPr>
+                                  <m:sty m:val="p"/>
+                                </m:rPr>
+                                <m:t>+</m:t>
+                              </m:r>
+                              <m:r>
+                                <m:t>1</m:t>
+                              </m:r>
+                            </m:sub>
+                          </m:sSub>
+                          <m:r>
+                            <m:rPr>
+                              <m:sty m:val="p"/>
+                            </m:rPr>
+                            <m:t>)</m:t>
+                          </m:r>
                           <m:r>
                             <m:t> </m:t>
                           </m:r>
@@ -7049,22 +7063,24 @@
                         </m:r>
                       </m:sub>
                     </m:sSub>
-                    <m:d>
-                      <m:dPr>
-                        <m:begChr m:val="("/>
-                        <m:sepChr m:val=""/>
-                        <m:endChr m:val=")"/>
-                        <m:grow/>
-                      </m:dPr>
-                      <m:e>
-                        <m:r>
-                          <m:rPr>
-                            <m:sty m:val="b"/>
-                          </m:rPr>
-                          <m:t>x</m:t>
-                        </m:r>
-                      </m:e>
-                    </m:d>
+                    <m:r>
+                      <m:rPr>
+                        <m:sty m:val="p"/>
+                      </m:rPr>
+                      <m:t>(</m:t>
+                    </m:r>
+                    <m:r>
+                      <m:rPr>
+                        <m:sty m:val="b"/>
+                      </m:rPr>
+                      <m:t>x</m:t>
+                    </m:r>
+                    <m:r>
+                      <m:rPr>
+                        <m:sty m:val="p"/>
+                      </m:rPr>
+                      <m:t>)</m:t>
+                    </m:r>
                   </m:oMath>
                 </a14:m>
                 <a:r>
@@ -7563,43 +7579,45 @@
                       <m:r>
                         <m:t>π</m:t>
                       </m:r>
-                      <m:d>
-                        <m:dPr>
-                          <m:begChr m:val="("/>
-                          <m:sepChr m:val=""/>
-                          <m:endChr m:val=")"/>
-                          <m:grow/>
-                        </m:dPr>
+                      <m:r>
+                        <m:rPr>
+                          <m:sty m:val="p"/>
+                        </m:rPr>
+                        <m:t>(</m:t>
+                      </m:r>
+                      <m:sSub>
                         <m:e>
-                          <m:sSub>
-                            <m:e>
-                              <m:r>
-                                <m:rPr>
-                                  <m:sty m:val="b"/>
-                                </m:rPr>
-                                <m:t>I</m:t>
-                              </m:r>
-                            </m:e>
-                            <m:sub>
-                              <m:r>
-                                <m:t>t</m:t>
-                              </m:r>
-                            </m:sub>
-                          </m:sSub>
                           <m:r>
                             <m:rPr>
-                              <m:sty m:val="p"/>
+                              <m:sty m:val="b"/>
                             </m:rPr>
-                            <m:t>,</m:t>
-                          </m:r>
-                          <m:r>
-                            <m:t> </m:t>
-                          </m:r>
-                          <m:r>
-                            <m:t>θ</m:t>
+                            <m:t>I</m:t>
                           </m:r>
                         </m:e>
-                      </m:d>
+                        <m:sub>
+                          <m:r>
+                            <m:t>t</m:t>
+                          </m:r>
+                        </m:sub>
+                      </m:sSub>
+                      <m:r>
+                        <m:rPr>
+                          <m:sty m:val="p"/>
+                        </m:rPr>
+                        <m:t>,</m:t>
+                      </m:r>
+                      <m:r>
+                        <m:t> </m:t>
+                      </m:r>
+                      <m:r>
+                        <m:t>θ</m:t>
+                      </m:r>
+                      <m:r>
+                        <m:rPr>
+                          <m:sty m:val="p"/>
+                        </m:rPr>
+                        <m:t>)</m:t>
+                      </m:r>
                     </m:oMath>
                   </m:oMathPara>
                 </a14:m>
@@ -7775,147 +7793,155 @@
                                   </m:r>
                                 </m:sub>
                                 <m:sup>
-                                  <m:d>
-                                    <m:dPr>
-                                      <m:begChr m:val="("/>
-                                      <m:sepChr m:val=""/>
-                                      <m:endChr m:val=")"/>
-                                      <m:grow/>
-                                    </m:dPr>
-                                    <m:e>
-                                      <m:r>
-                                        <m:t>i</m:t>
-                                      </m:r>
-                                    </m:e>
-                                  </m:d>
+                                  <m:r>
+                                    <m:rPr>
+                                      <m:sty m:val="p"/>
+                                    </m:rPr>
+                                    <m:t>(</m:t>
+                                  </m:r>
+                                  <m:r>
+                                    <m:t>i</m:t>
+                                  </m:r>
+                                  <m:r>
+                                    <m:rPr>
+                                      <m:sty m:val="p"/>
+                                    </m:rPr>
+                                    <m:t>)</m:t>
+                                  </m:r>
                                 </m:sup>
                               </m:sSubSup>
                             </m:e>
                           </m:nary>
                         </m:e>
                       </m:nary>
-                      <m:d>
-                        <m:dPr>
-                          <m:begChr m:val="("/>
-                          <m:sepChr m:val=""/>
-                          <m:endChr m:val=")"/>
-                          <m:grow/>
-                        </m:dPr>
+                      <m:r>
+                        <m:rPr>
+                          <m:sty m:val="p"/>
+                        </m:rPr>
+                        <m:t>(</m:t>
+                      </m:r>
+                      <m:sSub>
                         <m:e>
-                          <m:sSub>
-                            <m:e>
-                              <m:r>
-                                <m:rPr>
-                                  <m:sty m:val="b"/>
-                                </m:rPr>
-                                <m:t>x</m:t>
-                              </m:r>
-                            </m:e>
-                            <m:sub>
-                              <m:r>
-                                <m:t>t</m:t>
-                              </m:r>
-                            </m:sub>
-                          </m:sSub>
+                          <m:r>
+                            <m:rPr>
+                              <m:sty m:val="b"/>
+                            </m:rPr>
+                            <m:t>x</m:t>
+                          </m:r>
+                        </m:e>
+                        <m:sub>
+                          <m:r>
+                            <m:t>t</m:t>
+                          </m:r>
+                        </m:sub>
+                      </m:sSub>
+                      <m:r>
+                        <m:rPr>
+                          <m:sty m:val="p"/>
+                        </m:rPr>
+                        <m:t>,</m:t>
+                      </m:r>
+                      <m:r>
+                        <m:t> </m:t>
+                      </m:r>
+                      <m:r>
+                        <m:t>π</m:t>
+                      </m:r>
+                      <m:r>
+                        <m:rPr>
+                          <m:sty m:val="p"/>
+                        </m:rPr>
+                        <m:t>(</m:t>
+                      </m:r>
+                      <m:sSub>
+                        <m:e>
+                          <m:r>
+                            <m:rPr>
+                              <m:sty m:val="b"/>
+                            </m:rPr>
+                            <m:t>I</m:t>
+                          </m:r>
+                        </m:e>
+                        <m:sub>
+                          <m:r>
+                            <m:t>t</m:t>
+                          </m:r>
+                        </m:sub>
+                      </m:sSub>
+                      <m:r>
+                        <m:rPr>
+                          <m:sty m:val="p"/>
+                        </m:rPr>
+                        <m:t>,</m:t>
+                      </m:r>
+                      <m:r>
+                        <m:t> </m:t>
+                      </m:r>
+                      <m:r>
+                        <m:t>θ</m:t>
+                      </m:r>
+                      <m:r>
+                        <m:rPr>
+                          <m:sty m:val="p"/>
+                        </m:rPr>
+                        <m:t>)</m:t>
+                      </m:r>
+                      <m:r>
+                        <m:rPr>
+                          <m:sty m:val="p"/>
+                        </m:rPr>
+                        <m:t>,</m:t>
+                      </m:r>
+                      <m:r>
+                        <m:t> </m:t>
+                      </m:r>
+                      <m:sSubSup>
+                        <m:e>
+                          <m:r>
+                            <m:rPr>
+                              <m:sty m:val="b"/>
+                            </m:rPr>
+                            <m:t>e</m:t>
+                          </m:r>
+                        </m:e>
+                        <m:sub>
+                          <m:r>
+                            <m:t>t</m:t>
+                          </m:r>
                           <m:r>
                             <m:rPr>
                               <m:sty m:val="p"/>
                             </m:rPr>
-                            <m:t>,</m:t>
+                            <m:t>+</m:t>
                           </m:r>
                           <m:r>
-                            <m:t> </m:t>
+                            <m:t>1</m:t>
                           </m:r>
-                          <m:r>
-                            <m:t>π</m:t>
-                          </m:r>
-                          <m:d>
-                            <m:dPr>
-                              <m:begChr m:val="("/>
-                              <m:sepChr m:val=""/>
-                              <m:endChr m:val=")"/>
-                              <m:grow/>
-                            </m:dPr>
-                            <m:e>
-                              <m:sSub>
-                                <m:e>
-                                  <m:r>
-                                    <m:rPr>
-                                      <m:sty m:val="b"/>
-                                    </m:rPr>
-                                    <m:t>I</m:t>
-                                  </m:r>
-                                </m:e>
-                                <m:sub>
-                                  <m:r>
-                                    <m:t>t</m:t>
-                                  </m:r>
-                                </m:sub>
-                              </m:sSub>
-                              <m:r>
-                                <m:rPr>
-                                  <m:sty m:val="p"/>
-                                </m:rPr>
-                                <m:t>,</m:t>
-                              </m:r>
-                              <m:r>
-                                <m:t> </m:t>
-                              </m:r>
-                              <m:r>
-                                <m:t>θ</m:t>
-                              </m:r>
-                            </m:e>
-                          </m:d>
+                        </m:sub>
+                        <m:sup>
                           <m:r>
                             <m:rPr>
                               <m:sty m:val="p"/>
                             </m:rPr>
-                            <m:t>,</m:t>
+                            <m:t>(</m:t>
                           </m:r>
                           <m:r>
-                            <m:t> </m:t>
+                            <m:t>i</m:t>
                           </m:r>
-                          <m:sSubSup>
-                            <m:e>
-                              <m:r>
-                                <m:rPr>
-                                  <m:sty m:val="b"/>
-                                </m:rPr>
-                                <m:t>e</m:t>
-                              </m:r>
-                            </m:e>
-                            <m:sub>
-                              <m:r>
-                                <m:t>t</m:t>
-                              </m:r>
-                              <m:r>
-                                <m:rPr>
-                                  <m:sty m:val="p"/>
-                                </m:rPr>
-                                <m:t>+</m:t>
-                              </m:r>
-                              <m:r>
-                                <m:t>1</m:t>
-                              </m:r>
-                            </m:sub>
-                            <m:sup>
-                              <m:d>
-                                <m:dPr>
-                                  <m:begChr m:val="("/>
-                                  <m:sepChr m:val=""/>
-                                  <m:endChr m:val=")"/>
-                                  <m:grow/>
-                                </m:dPr>
-                                <m:e>
-                                  <m:r>
-                                    <m:t>i</m:t>
-                                  </m:r>
-                                </m:e>
-                              </m:d>
-                            </m:sup>
-                          </m:sSubSup>
-                        </m:e>
-                      </m:d>
+                          <m:r>
+                            <m:rPr>
+                              <m:sty m:val="p"/>
+                            </m:rPr>
+                            <m:t>)</m:t>
+                          </m:r>
+                        </m:sup>
+                      </m:sSubSup>
+                      <m:r>
+                        <m:rPr>
+                          <m:sty m:val="p"/>
+                        </m:rPr>
+                        <m:t>)</m:t>
+                      </m:r>
                     </m:oMath>
                   </m:oMathPara>
                 </a14:m>
@@ -8169,7 +8195,9 @@
         <p:nvSpPr>
           <p:cNvPr id="1" name="TextBox 3"/>
           <p:cNvSpPr txBox="1"/>
-          <p:nvPr/>
+          <p:nvPr>
+            <p:ph idx="1"/>
+          </p:nvPr>
         </p:nvSpPr>
         <p:spPr>
           <a:xfrm>
@@ -8271,40 +8299,42 @@
                     <m:r>
                       <m:t>π</m:t>
                     </m:r>
-                    <m:d>
-                      <m:dPr>
-                        <m:begChr m:val="("/>
-                        <m:sepChr m:val=""/>
-                        <m:endChr m:val=")"/>
-                        <m:grow/>
-                      </m:dPr>
+                    <m:r>
+                      <m:rPr>
+                        <m:sty m:val="p"/>
+                      </m:rPr>
+                      <m:t>(</m:t>
+                    </m:r>
+                    <m:sSub>
                       <m:e>
-                        <m:sSub>
-                          <m:e>
-                            <m:r>
-                              <m:rPr>
-                                <m:sty m:val="b"/>
-                              </m:rPr>
-                              <m:t>I</m:t>
-                            </m:r>
-                          </m:e>
-                          <m:sub>
-                            <m:r>
-                              <m:t>t</m:t>
-                            </m:r>
-                          </m:sub>
-                        </m:sSub>
                         <m:r>
                           <m:rPr>
-                            <m:sty m:val="p"/>
+                            <m:sty m:val="b"/>
                           </m:rPr>
-                          <m:t>,</m:t>
-                        </m:r>
-                        <m:r>
-                          <m:t>θ</m:t>
+                          <m:t>I</m:t>
                         </m:r>
                       </m:e>
-                    </m:d>
+                      <m:sub>
+                        <m:r>
+                          <m:t>t</m:t>
+                        </m:r>
+                      </m:sub>
+                    </m:sSub>
+                    <m:r>
+                      <m:rPr>
+                        <m:sty m:val="p"/>
+                      </m:rPr>
+                      <m:t>,</m:t>
+                    </m:r>
+                    <m:r>
+                      <m:t>θ</m:t>
+                    </m:r>
+                    <m:r>
+                      <m:rPr>
+                        <m:sty m:val="p"/>
+                      </m:rPr>
+                      <m:t>)</m:t>
+                    </m:r>
                   </m:oMath>
                 </a14:m>
                 <a:r>
@@ -8927,40 +8957,42 @@
                     <m:r>
                       <m:t>π</m:t>
                     </m:r>
-                    <m:d>
-                      <m:dPr>
-                        <m:begChr m:val="("/>
-                        <m:sepChr m:val=""/>
-                        <m:endChr m:val=")"/>
-                        <m:grow/>
-                      </m:dPr>
+                    <m:r>
+                      <m:rPr>
+                        <m:sty m:val="p"/>
+                      </m:rPr>
+                      <m:t>(</m:t>
+                    </m:r>
+                    <m:sSub>
                       <m:e>
-                        <m:sSub>
-                          <m:e>
-                            <m:r>
-                              <m:rPr>
-                                <m:sty m:val="b"/>
-                              </m:rPr>
-                              <m:t>I</m:t>
-                            </m:r>
-                          </m:e>
-                          <m:sub>
-                            <m:r>
-                              <m:t>t</m:t>
-                            </m:r>
-                          </m:sub>
-                        </m:sSub>
                         <m:r>
                           <m:rPr>
-                            <m:sty m:val="p"/>
+                            <m:sty m:val="b"/>
                           </m:rPr>
-                          <m:t>,</m:t>
-                        </m:r>
-                        <m:r>
-                          <m:t>θ</m:t>
+                          <m:t>I</m:t>
                         </m:r>
                       </m:e>
-                    </m:d>
+                      <m:sub>
+                        <m:r>
+                          <m:t>t</m:t>
+                        </m:r>
+                      </m:sub>
+                    </m:sSub>
+                    <m:r>
+                      <m:rPr>
+                        <m:sty m:val="p"/>
+                      </m:rPr>
+                      <m:t>,</m:t>
+                    </m:r>
+                    <m:r>
+                      <m:t>θ</m:t>
+                    </m:r>
+                    <m:r>
+                      <m:rPr>
+                        <m:sty m:val="p"/>
+                      </m:rPr>
+                      <m:t>)</m:t>
+                    </m:r>
                   </m:oMath>
                 </a14:m>
                 <a:r>
@@ -9409,7 +9441,9 @@
         <p:nvSpPr>
           <p:cNvPr id="1" name="TextBox 3"/>
           <p:cNvSpPr txBox="1"/>
-          <p:nvPr/>
+          <p:nvPr>
+            <p:ph idx="1"/>
+          </p:nvPr>
         </p:nvSpPr>
         <p:spPr>
           <a:xfrm>
@@ -9524,40 +9558,42 @@
                     <m:r>
                       <m:t>π</m:t>
                     </m:r>
-                    <m:d>
-                      <m:dPr>
-                        <m:begChr m:val="("/>
-                        <m:sepChr m:val=""/>
-                        <m:endChr m:val=")"/>
-                        <m:grow/>
-                      </m:dPr>
+                    <m:r>
+                      <m:rPr>
+                        <m:sty m:val="p"/>
+                      </m:rPr>
+                      <m:t>(</m:t>
+                    </m:r>
+                    <m:sSub>
                       <m:e>
-                        <m:sSub>
-                          <m:e>
-                            <m:r>
-                              <m:rPr>
-                                <m:sty m:val="b"/>
-                              </m:rPr>
-                              <m:t>I</m:t>
-                            </m:r>
-                          </m:e>
-                          <m:sub>
-                            <m:r>
-                              <m:t>t</m:t>
-                            </m:r>
-                          </m:sub>
-                        </m:sSub>
                         <m:r>
                           <m:rPr>
-                            <m:sty m:val="p"/>
+                            <m:sty m:val="b"/>
                           </m:rPr>
-                          <m:t>,</m:t>
-                        </m:r>
-                        <m:r>
-                          <m:t>θ</m:t>
+                          <m:t>I</m:t>
                         </m:r>
                       </m:e>
-                    </m:d>
+                      <m:sub>
+                        <m:r>
+                          <m:t>t</m:t>
+                        </m:r>
+                      </m:sub>
+                    </m:sSub>
+                    <m:r>
+                      <m:rPr>
+                        <m:sty m:val="p"/>
+                      </m:rPr>
+                      <m:t>,</m:t>
+                    </m:r>
+                    <m:r>
+                      <m:t>θ</m:t>
+                    </m:r>
+                    <m:r>
+                      <m:rPr>
+                        <m:sty m:val="p"/>
+                      </m:rPr>
+                      <m:t>)</m:t>
+                    </m:r>
                   </m:oMath>
                 </a14:m>
                 <a:r>
@@ -9628,7 +9664,7 @@
                 </a:r>
                 <a:r>
                   <a:rPr/>
-                  <a:t> Fuad leads discussion of Garner and Keller (2018) and de Neufville, Scholtes, and Wang (2006).</a:t>
+                  <a:t> Fuad leads discussion of Garner and Keller (2018) and de Neufville et al. (2006).</a:t>
                 </a:r>
               </a:p>
               <a:p>
@@ -10073,7 +10109,7 @@
             </a:r>
             <a:r>
               <a:rPr/>
-              <a:t>, January, e24389. </a:t>
+              <a:t>, January 7, e24389. </a:t>
             </a:r>
             <a:r>
               <a:rPr>
@@ -10815,7 +10851,7 @@
             </a:pPr>
             <a:r>
               <a:rPr/>
-              <a:t>de Neufville, Scholtes, and Wang (2006) — paper you’ll discuss Wednesday.</a:t>
+              <a:t>de Neufville et al. (2006) — paper you’ll discuss Wednesday.</a:t>
             </a:r>
           </a:p>
         </p:txBody>
@@ -11199,7 +11235,9 @@
         <p:nvSpPr>
           <p:cNvPr id="1" name="TextBox 3"/>
           <p:cNvSpPr txBox="1"/>
-          <p:nvPr/>
+          <p:nvPr>
+            <p:ph idx="1"/>
+          </p:nvPr>
         </p:nvSpPr>
         <p:spPr>
           <a:xfrm>
@@ -11220,7 +11258,7 @@
             </a:pPr>
             <a:r>
               <a:rPr/>
-              <a:t>Figure 1: The flexible design shifts the entire VaR curve rightward: less downside, more upside. Source: de Neufville, Scholtes, and Wang (2006)</a:t>
+              <a:t>Figure 1: The flexible design shifts the entire VaR curve rightward: less downside, more upside. Source: de Neufville et al. (2006)</a:t>
             </a:r>
           </a:p>
         </p:txBody>
@@ -11378,8 +11416,8 @@
                           </m:r>
                           <m:r>
                             <m:rPr>
+                              <m:scr m:val="script"/>
                               <m:sty m:val="p"/>
-                              <m:scr m:val="script"/>
                             </m:rPr>
                             <m:t>A</m:t>
                           </m:r>
@@ -11390,8 +11428,8 @@
                       </m:r>
                       <m:r>
                         <m:rPr>
+                          <m:scr m:val="double-struck"/>
                           <m:sty m:val="p"/>
-                          <m:scr m:val="double-struck"/>
                         </m:rPr>
                         <m:t>E</m:t>
                       </m:r>
@@ -11413,31 +11451,33 @@
                             </m:rPr>
                             <m:t>Cost</m:t>
                           </m:r>
-                          <m:d>
-                            <m:dPr>
-                              <m:begChr m:val="("/>
-                              <m:sepChr m:val=""/>
-                              <m:endChr m:val=")"/>
-                              <m:grow/>
-                            </m:dPr>
-                            <m:e>
-                              <m:r>
-                                <m:t>a</m:t>
-                              </m:r>
-                              <m:r>
-                                <m:rPr>
-                                  <m:sty m:val="p"/>
-                                </m:rPr>
-                                <m:t>,</m:t>
-                              </m:r>
-                              <m:r>
-                                <m:rPr>
-                                  <m:sty m:val="b"/>
-                                </m:rPr>
-                                <m:t>s</m:t>
-                              </m:r>
-                            </m:e>
-                          </m:d>
+                          <m:r>
+                            <m:rPr>
+                              <m:sty m:val="p"/>
+                            </m:rPr>
+                            <m:t>(</m:t>
+                          </m:r>
+                          <m:r>
+                            <m:t>a</m:t>
+                          </m:r>
+                          <m:r>
+                            <m:rPr>
+                              <m:sty m:val="p"/>
+                            </m:rPr>
+                            <m:t>,</m:t>
+                          </m:r>
+                          <m:r>
+                            <m:rPr>
+                              <m:sty m:val="b"/>
+                            </m:rPr>
+                            <m:t>s</m:t>
+                          </m:r>
+                          <m:r>
+                            <m:rPr>
+                              <m:sty m:val="p"/>
+                            </m:rPr>
+                            <m:t>)</m:t>
+                          </m:r>
                         </m:e>
                       </m:d>
                     </m:oMath>
@@ -11760,7 +11800,9 @@
         <p:nvSpPr>
           <p:cNvPr id="1" name="TextBox 3"/>
           <p:cNvSpPr txBox="1"/>
-          <p:nvPr/>
+          <p:nvPr>
+            <p:ph idx="1"/>
+          </p:nvPr>
         </p:nvSpPr>
         <p:spPr>
           <a:xfrm>
@@ -11899,7 +11941,9 @@
             <p:nvSpPr>
               <p:cNvPr id="1" name="TextBox 3"/>
               <p:cNvSpPr txBox="1"/>
-              <p:nvPr/>
+              <p:nvPr>
+                <p:ph idx="1"/>
+              </p:nvPr>
             </p:nvSpPr>
             <p:spPr>
               <a:xfrm>

--- a/lectures/week-11/index.pptx
+++ b/lectures/week-11/index.pptx
@@ -5,7 +5,7 @@
     <p:sldMasterId id="2147483648" r:id="rId1"/>
   </p:sldMasterIdLst>
   <p:notesMasterIdLst>
-    <p:notesMasterId r:id="rId25"/>
+    <p:notesMasterId r:id="rId24"/>
   </p:notesMasterIdLst>
   <p:sldIdLst>
     <p:sldId id="256" r:id="rId2"/>
@@ -30,7 +30,6 @@
     <p:sldId id="275" r:id="rId21"/>
     <p:sldId id="276" r:id="rId22"/>
     <p:sldId id="277" r:id="rId23"/>
-    <p:sldId id="278" r:id="rId24"/>
   </p:sldIdLst>
   <p:sldSz cx="9144000" cy="5143500" type="screen16x9"/>
   <p:notesSz cx="6858000" cy="9144000"/>
@@ -568,7 +567,7 @@
           <a:p>
             <a:fld id="{18BDFEC3-8487-43E8-A154-7C12CBC1FFF2}" type="slidenum">
               <a:rPr lang="en-US"/>
-              <a:t>3</a:t>
+              <a:t>2</a:t>
             </a:fld>
             <a:endParaRPr lang="en-US"/>
           </a:p>
@@ -650,7 +649,7 @@
           <a:p>
             <a:fld id="{18BDFEC3-8487-43E8-A154-7C12CBC1FFF2}" type="slidenum">
               <a:rPr lang="en-US"/>
-              <a:t>14</a:t>
+              <a:t>13</a:t>
             </a:fld>
             <a:endParaRPr lang="en-US"/>
           </a:p>
@@ -732,7 +731,7 @@
           <a:p>
             <a:fld id="{18BDFEC3-8487-43E8-A154-7C12CBC1FFF2}" type="slidenum">
               <a:rPr lang="en-US"/>
-              <a:t>15</a:t>
+              <a:t>14</a:t>
             </a:fld>
             <a:endParaRPr lang="en-US"/>
           </a:p>
@@ -814,7 +813,7 @@
           <a:p>
             <a:fld id="{18BDFEC3-8487-43E8-A154-7C12CBC1FFF2}" type="slidenum">
               <a:rPr lang="en-US"/>
-              <a:t>16</a:t>
+              <a:t>15</a:t>
             </a:fld>
             <a:endParaRPr lang="en-US"/>
           </a:p>
@@ -896,7 +895,7 @@
           <a:p>
             <a:fld id="{18BDFEC3-8487-43E8-A154-7C12CBC1FFF2}" type="slidenum">
               <a:rPr lang="en-US"/>
-              <a:t>17</a:t>
+              <a:t>16</a:t>
             </a:fld>
             <a:endParaRPr lang="en-US"/>
           </a:p>
@@ -978,7 +977,7 @@
           <a:p>
             <a:fld id="{18BDFEC3-8487-43E8-A154-7C12CBC1FFF2}" type="slidenum">
               <a:rPr lang="en-US"/>
-              <a:t>18</a:t>
+              <a:t>17</a:t>
             </a:fld>
             <a:endParaRPr lang="en-US"/>
           </a:p>
@@ -1068,7 +1067,7 @@
           <a:p>
             <a:fld id="{18BDFEC3-8487-43E8-A154-7C12CBC1FFF2}" type="slidenum">
               <a:rPr lang="en-US"/>
-              <a:t>19</a:t>
+              <a:t>18</a:t>
             </a:fld>
             <a:endParaRPr lang="en-US"/>
           </a:p>
@@ -1150,7 +1149,7 @@
           <a:p>
             <a:fld id="{18BDFEC3-8487-43E8-A154-7C12CBC1FFF2}" type="slidenum">
               <a:rPr lang="en-US"/>
-              <a:t>20</a:t>
+              <a:t>19</a:t>
             </a:fld>
             <a:endParaRPr lang="en-US"/>
           </a:p>
@@ -1232,7 +1231,7 @@
           <a:p>
             <a:fld id="{18BDFEC3-8487-43E8-A154-7C12CBC1FFF2}" type="slidenum">
               <a:rPr lang="en-US"/>
-              <a:t>21</a:t>
+              <a:t>20</a:t>
             </a:fld>
             <a:endParaRPr lang="en-US"/>
           </a:p>
@@ -1292,7 +1291,7 @@
             </a:pPr>
             <a:r>
               <a:rPr/>
-              <a:t>Target: 1:50. Flag the error in Garner/Keller clearly so students know before discussion. The summary list should feel like a coherent arc, not a bag of concepts.</a:t>
+              <a:t>Target: 1:50. The summary list should feel like a coherent arc, not a bag of concepts.</a:t>
             </a:r>
           </a:p>
         </p:txBody>
@@ -1314,7 +1313,7 @@
           <a:p>
             <a:fld id="{18BDFEC3-8487-43E8-A154-7C12CBC1FFF2}" type="slidenum">
               <a:rPr lang="en-US"/>
-              <a:t>22</a:t>
+              <a:t>21</a:t>
             </a:fld>
             <a:endParaRPr lang="en-US"/>
           </a:p>
@@ -1396,7 +1395,7 @@
           <a:p>
             <a:fld id="{18BDFEC3-8487-43E8-A154-7C12CBC1FFF2}" type="slidenum">
               <a:rPr lang="en-US"/>
-              <a:t>23</a:t>
+              <a:t>22</a:t>
             </a:fld>
             <a:endParaRPr lang="en-US"/>
           </a:p>
@@ -1478,7 +1477,7 @@
           <a:p>
             <a:fld id="{18BDFEC3-8487-43E8-A154-7C12CBC1FFF2}" type="slidenum">
               <a:rPr lang="en-US"/>
-              <a:t>4</a:t>
+              <a:t>3</a:t>
             </a:fld>
             <a:endParaRPr lang="en-US"/>
           </a:p>
@@ -1560,7 +1559,7 @@
           <a:p>
             <a:fld id="{18BDFEC3-8487-43E8-A154-7C12CBC1FFF2}" type="slidenum">
               <a:rPr lang="en-US"/>
-              <a:t>6</a:t>
+              <a:t>5</a:t>
             </a:fld>
             <a:endParaRPr lang="en-US"/>
           </a:p>
@@ -1642,7 +1641,7 @@
           <a:p>
             <a:fld id="{18BDFEC3-8487-43E8-A154-7C12CBC1FFF2}" type="slidenum">
               <a:rPr lang="en-US"/>
-              <a:t>7</a:t>
+              <a:t>6</a:t>
             </a:fld>
             <a:endParaRPr lang="en-US"/>
           </a:p>
@@ -1732,7 +1731,7 @@
           <a:p>
             <a:fld id="{18BDFEC3-8487-43E8-A154-7C12CBC1FFF2}" type="slidenum">
               <a:rPr lang="en-US"/>
-              <a:t>8</a:t>
+              <a:t>7</a:t>
             </a:fld>
             <a:endParaRPr lang="en-US"/>
           </a:p>
@@ -1814,7 +1813,7 @@
           <a:p>
             <a:fld id="{18BDFEC3-8487-43E8-A154-7C12CBC1FFF2}" type="slidenum">
               <a:rPr lang="en-US"/>
-              <a:t>9</a:t>
+              <a:t>8</a:t>
             </a:fld>
             <a:endParaRPr lang="en-US"/>
           </a:p>
@@ -1896,7 +1895,7 @@
           <a:p>
             <a:fld id="{18BDFEC3-8487-43E8-A154-7C12CBC1FFF2}" type="slidenum">
               <a:rPr lang="en-US"/>
-              <a:t>11</a:t>
+              <a:t>10</a:t>
             </a:fld>
             <a:endParaRPr lang="en-US"/>
           </a:p>
@@ -1978,7 +1977,7 @@
           <a:p>
             <a:fld id="{18BDFEC3-8487-43E8-A154-7C12CBC1FFF2}" type="slidenum">
               <a:rPr lang="en-US"/>
-              <a:t>12</a:t>
+              <a:t>11</a:t>
             </a:fld>
             <a:endParaRPr lang="en-US"/>
           </a:p>
@@ -2060,7 +2059,7 @@
           <a:p>
             <a:fld id="{18BDFEC3-8487-43E8-A154-7C12CBC1FFF2}" type="slidenum">
               <a:rPr lang="en-US"/>
-              <a:t>13</a:t>
+              <a:t>12</a:t>
             </a:fld>
             <a:endParaRPr lang="en-US"/>
           </a:p>
@@ -5134,10 +5133,7 @@
 </p:sld>
 </file>
 
-<file path=ppt/slides/slide10.xml><?xml version="1.0" encoding="UTF-8"?><p:sld xmlns:a="http://schemas.openxmlformats.org/drawingml/2006/main" xmlns:r="http://schemas.openxmlformats.org/officeDocument/2006/relationships" xmlns:p="http://schemas.openxmlformats.org/presentationml/2006/main"><p:cSld><p:spTree><p:nvGrpSpPr><p:cNvPr id="1" name="" /><p:cNvGrpSpPr /><p:nvPr /></p:nvGrpSpPr><p:grpSpPr><a:xfrm><a:off x="0" y="0" /><a:ext cx="0" cy="0" /><a:chOff x="0" y="0" /><a:chExt cx="0" cy="0" /></a:xfrm></p:grpSpPr><p:sp><p:nvSpPr><p:cNvPr id="2" name="Title 1" /><p:cNvSpPr><a:spLocks noGrp="1" /></p:cNvSpPr><p:nvPr><p:ph type="title" /></p:nvPr></p:nvSpPr><p:spPr><a:xfrm><a:off x="457201" y="204787" /><a:ext cx="3008313" cy="871538" /></a:xfrm></p:spPr><p:txBody><a:bodyPr /><a:lstStyle /><a:p><a:pPr lvl="0" indent="0" marL="0"><a:buNone /></a:pPr><a:r><a:rPr /><a:t>State, Action, Forcing</a:t></a:r></a:p></p:txBody></p:sp><mc:AlternateContent xmlns:mc="http://schemas.openxmlformats.org/markup-compatibility/2006"><mc:Choice xmlns:a14="http://schemas.microsoft.com/office/drawing/2010/main" Requires="a14"><p:sp><p:nvSpPr><p:cNvPr id="4" name="Text Placeholder 3" /><p:cNvSpPr><a:spLocks noGrp="1" /></p:cNvSpPr><p:nvPr><p:ph idx="2" sz="half" type="body" /></p:nvPr></p:nvSpPr><p:spPr /><p:txBody><a:bodyPr /><a:lstStyle /><a:p><a:pPr lvl="0" indent="0" marL="0"><a:buNone /></a:pPr><a:r><a:rPr /><a:t>Formal setup: at each time step </a:t></a:r><a14:m><m:oMath xmlns:m="http://schemas.openxmlformats.org/officeDocument/2006/math"><m:r><m:t>t</m:t></m:r></m:oMath></a14:m><a:r><a:rPr /><a:t>,</a:t></a:r></a:p></p:txBody></p:sp></mc:Choice></mc:AlternateContent><p:graphicFrame><p:nvGraphicFramePr><p:cNvPr id="6" name="Content Placeholder 5" /><p:cNvGraphicFramePr><a:graphicFrameLocks noGrp="1" /></p:cNvGraphicFramePr><p:nvPr><p:ph idx="1" /></p:nvPr></p:nvGraphicFramePr><p:xfrm><a:off x="3568700" y="203200" /><a:ext cx="5105400" cy="4381500" /></p:xfrm><a:graphic><a:graphicData uri="http://schemas.openxmlformats.org/drawingml/2006/table"><a:tbl><a:tblPr firstRow="1" bandRow="1"><a:tableStyleId>{5C22544A-7EE6-4342-B048-85BDC9FD1C3A}</a:tableStyleId></a:tblPr><a:tblGrid><a:gridCol w="1701800" /><a:gridCol w="1701800" /><a:gridCol w="1701800" /></a:tblGrid><a:tr h="0"><a:tc><a:txBody><a:bodyPr /><a:lstStyle /><a:p><a:pPr lvl="0" indent="0" marL="0"><a:buNone /></a:pPr><a:r><a:rPr /><a:t>Symbol</a:t></a:r></a:p></a:txBody><a:tcPr /></a:tc><a:tc><a:txBody><a:bodyPr /><a:lstStyle /><a:p><a:pPr lvl="0" indent="0" marL="0"><a:buNone /></a:pPr><a:r><a:rPr /><a:t>Meaning</a:t></a:r></a:p></a:txBody><a:tcPr /></a:tc><a:tc><a:txBody><a:bodyPr /><a:lstStyle /><a:p><a:pPr lvl="0" indent="0" marL="0"><a:buNone /></a:pPr><a:r><a:rPr /><a:t>Example</a:t></a:r></a:p></a:txBody><a:tcPr /></a:tc></a:tr><a:tr h="0"><a:tc><a:txBody><a:bodyPr /><a:lstStyle /><a:p><a:pPr lvl="0" indent="0" marL="0"><a:buNone /></a:pPr><a14:m><m:oMath xmlns:m="http://schemas.openxmlformats.org/officeDocument/2006/math"><m:sSub><m:e><m:r><m:rPr><m:sty m:val="b" /></m:rPr><m:t>x</m:t></m:r></m:e><m:sub><m:r><m:t>t</m:t></m:r></m:sub></m:sSub></m:oMath></a14:m></a:p></a:txBody></a:tc><a:tc><a:txBody><a:bodyPr /><a:lstStyle /><a:p><a:pPr lvl="0" indent="0" marL="0"><a:buNone /></a:pPr><a:r><a:rPr /><a:t>System state</a:t></a:r></a:p></a:txBody></a:tc><a:tc><a:txBody><a:bodyPr /><a:lstStyle /><a:p><a:pPr lvl="0" indent="0" marL="0"><a:buNone /></a:pPr><a:r><a:rPr /><a:t>Dike height, reservoir storage</a:t></a:r></a:p></a:txBody></a:tc></a:tr><a:tr h="0"><a:tc><a:txBody><a:bodyPr /><a:lstStyle /><a:p><a:pPr lvl="0" indent="0" marL="0"><a:buNone /></a:pPr><a14:m><m:oMath xmlns:m="http://schemas.openxmlformats.org/officeDocument/2006/math"><m:sSub><m:e><m:r><m:t>a</m:t></m:r></m:e><m:sub><m:r><m:t>t</m:t></m:r></m:sub></m:sSub><m:r><m:rPr><m:sty m:val="p" /></m:rPr><m:t>∈</m:t></m:r><m:r><m:rPr><m:scr m:val="script" /><m:sty m:val="p" /></m:rPr><m:t>A</m:t></m:r></m:oMath></a14:m></a:p></a:txBody></a:tc><a:tc><a:txBody><a:bodyPr /><a:lstStyle /><a:p><a:pPr lvl="0" indent="0" marL="0"><a:buNone /></a:pPr><a:r><a:rPr /><a:t>Action</a:t></a:r></a:p></a:txBody></a:tc><a:tc><a:txBody><a:bodyPr /><a:lstStyle /><a:p><a:pPr lvl="0" indent="0" marL="0"><a:buNone /></a:pPr><a:r><a:rPr /><a:t>Heighten by </a:t></a:r><a14:m><m:oMath xmlns:m="http://schemas.openxmlformats.org/officeDocument/2006/math"><m:sSub><m:e><m:r><m:t>u</m:t></m:r></m:e><m:sub><m:r><m:t>t</m:t></m:r></m:sub></m:sSub></m:oMath></a14:m><a:r><a:rPr /><a:t>; expand; do nothing</a:t></a:r></a:p></a:txBody></a:tc></a:tr><a:tr h="0"><a:tc><a:txBody><a:bodyPr /><a:lstStyle /><a:p><a:pPr lvl="0" indent="0" marL="0"><a:buNone /></a:pPr><a14:m><m:oMath xmlns:m="http://schemas.openxmlformats.org/officeDocument/2006/math"><m:sSub><m:e><m:r><m:rPr><m:sty m:val="b" /></m:rPr><m:t>e</m:t></m:r></m:e><m:sub><m:r><m:t>t</m:t></m:r></m:sub></m:sSub></m:oMath></a14:m></a:p></a:txBody></a:tc><a:tc><a:txBody><a:bodyPr /><a:lstStyle /><a:p><a:pPr lvl="0" indent="0" marL="0"><a:buNone /></a:pPr><a:r><a:rPr /><a:t>Stochastic forcing</a:t></a:r></a:p></a:txBody></a:tc><a:tc><a:txBody><a:bodyPr /><a:lstStyle /><a:p><a:pPr lvl="0" indent="0" marL="0"><a:buNone /></a:pPr><a:r><a:rPr /><a:t>SLR realization, storm surge, precipitation</a:t></a:r></a:p></a:txBody></a:tc></a:tr><a:tr h="0"><a:tc><a:txBody><a:bodyPr /><a:lstStyle /><a:p><a:pPr lvl="0" indent="0" marL="0"><a:buNone /></a:pPr><a14:m><m:oMath xmlns:m="http://schemas.openxmlformats.org/officeDocument/2006/math"><m:sSub><m:e><m:r><m:t>J</m:t></m:r></m:e><m:sub><m:r><m:t>t</m:t></m:r></m:sub></m:sSub></m:oMath></a14:m></a:p></a:txBody></a:tc><a:tc><a:txBody><a:bodyPr /><a:lstStyle /><a:p><a:pPr lvl="0" indent="0" marL="0"><a:buNone /></a:pPr><a:r><a:rPr /><a:t>Cost</a:t></a:r></a:p></a:txBody></a:tc><a:tc><a:txBody><a:bodyPr /><a:lstStyle /><a:p><a:pPr lvl="0" indent="0" marL="0"><a:buNone /></a:pPr><a:r><a:rPr /><a:t>Investment cost + expected damages</a:t></a:r></a:p></a:txBody></a:tc></a:tr></a:tbl></a:graphicData></a:graphic></p:graphicFrame></p:spTree></p:cSld></p:sld>
-</file>
-
-<file path=ppt/slides/slide11.xml><?xml version="1.0" encoding="utf-8"?>
+<file path=ppt/slides/slide10.xml><?xml version="1.0" encoding="utf-8"?>
 <p:sld xmlns:a="http://schemas.openxmlformats.org/drawingml/2006/main" xmlns:r="http://schemas.openxmlformats.org/officeDocument/2006/relationships" xmlns:p="http://schemas.openxmlformats.org/presentationml/2006/main">
   <p:cSld>
     <p:spTree>
@@ -5187,142 +5183,136 @@
                   <a:rPr b="1"/>
                   <a:t>State transition:</a:t>
                 </a:r>
-              </a:p>
-              <a:p>
-                <a:pPr lvl="0" indent="0" marL="0">
-                  <a:buNone/>
-                </a:pPr>
+                <a:r>
+                  <a:rPr/>
+                  <a:t> </a:t>
+                </a:r>
                 <a14:m>
-                  <m:oMathPara xmlns:m="http://schemas.openxmlformats.org/officeDocument/2006/math">
-                    <m:oMathParaPr>
-                      <m:jc m:val="center"/>
-                    </m:oMathParaPr>
-                    <m:oMath>
-                      <m:sSub>
-                        <m:e>
-                          <m:r>
-                            <m:rPr>
-                              <m:sty m:val="b"/>
-                            </m:rPr>
-                            <m:t>x</m:t>
-                          </m:r>
-                        </m:e>
-                        <m:sub>
-                          <m:r>
-                            <m:t>t</m:t>
-                          </m:r>
-                          <m:r>
-                            <m:rPr>
-                              <m:sty m:val="p"/>
-                            </m:rPr>
-                            <m:t>+</m:t>
-                          </m:r>
-                          <m:r>
-                            <m:t>1</m:t>
-                          </m:r>
-                        </m:sub>
-                      </m:sSub>
-                      <m:r>
-                        <m:rPr>
-                          <m:sty m:val="p"/>
-                        </m:rPr>
-                        <m:t>=</m:t>
-                      </m:r>
-                      <m:sSub>
-                        <m:e>
-                          <m:r>
-                            <m:t>f</m:t>
-                          </m:r>
-                        </m:e>
-                        <m:sub>
-                          <m:r>
-                            <m:t>t</m:t>
-                          </m:r>
-                        </m:sub>
-                      </m:sSub>
-                      <m:r>
-                        <m:rPr>
-                          <m:sty m:val="p"/>
-                        </m:rPr>
-                        <m:t>(</m:t>
-                      </m:r>
-                      <m:sSub>
-                        <m:e>
-                          <m:r>
-                            <m:rPr>
-                              <m:sty m:val="b"/>
-                            </m:rPr>
-                            <m:t>x</m:t>
-                          </m:r>
-                        </m:e>
-                        <m:sub>
-                          <m:r>
-                            <m:t>t</m:t>
-                          </m:r>
-                        </m:sub>
-                      </m:sSub>
-                      <m:r>
-                        <m:rPr>
-                          <m:sty m:val="p"/>
-                        </m:rPr>
-                        <m:t>,</m:t>
-                      </m:r>
-                      <m:r>
-                        <m:t> </m:t>
-                      </m:r>
-                      <m:sSub>
-                        <m:e>
-                          <m:r>
-                            <m:t>a</m:t>
-                          </m:r>
-                        </m:e>
-                        <m:sub>
-                          <m:r>
-                            <m:t>t</m:t>
-                          </m:r>
-                        </m:sub>
-                      </m:sSub>
-                      <m:r>
-                        <m:rPr>
-                          <m:sty m:val="p"/>
-                        </m:rPr>
-                        <m:t>,</m:t>
-                      </m:r>
-                      <m:r>
-                        <m:t> </m:t>
-                      </m:r>
-                      <m:sSub>
-                        <m:e>
-                          <m:r>
-                            <m:rPr>
-                              <m:sty m:val="b"/>
-                            </m:rPr>
-                            <m:t>e</m:t>
-                          </m:r>
-                        </m:e>
-                        <m:sub>
-                          <m:r>
-                            <m:t>t</m:t>
-                          </m:r>
-                          <m:r>
-                            <m:rPr>
-                              <m:sty m:val="p"/>
-                            </m:rPr>
-                            <m:t>+</m:t>
-                          </m:r>
-                          <m:r>
-                            <m:t>1</m:t>
-                          </m:r>
-                        </m:sub>
-                      </m:sSub>
-                      <m:r>
-                        <m:rPr>
-                          <m:sty m:val="p"/>
-                        </m:rPr>
-                        <m:t>)</m:t>
-                      </m:r>
-                    </m:oMath>
-                  </m:oMathPara>
+                  <m:oMath xmlns:m="http://schemas.openxmlformats.org/officeDocument/2006/math">
+                    <m:sSub>
+                      <m:e>
+                        <m:r>
+                          <m:rPr>
+                            <m:sty m:val="b"/>
+                          </m:rPr>
+                          <m:t>x</m:t>
+                        </m:r>
+                      </m:e>
+                      <m:sub>
+                        <m:r>
+                          <m:t>t</m:t>
+                        </m:r>
+                        <m:r>
+                          <m:rPr>
+                            <m:sty m:val="p"/>
+                          </m:rPr>
+                          <m:t>+</m:t>
+                        </m:r>
+                        <m:r>
+                          <m:t>1</m:t>
+                        </m:r>
+                      </m:sub>
+                    </m:sSub>
+                    <m:r>
+                      <m:rPr>
+                        <m:sty m:val="p"/>
+                      </m:rPr>
+                      <m:t>=</m:t>
+                    </m:r>
+                    <m:sSub>
+                      <m:e>
+                        <m:r>
+                          <m:t>f</m:t>
+                        </m:r>
+                      </m:e>
+                      <m:sub>
+                        <m:r>
+                          <m:t>t</m:t>
+                        </m:r>
+                      </m:sub>
+                    </m:sSub>
+                    <m:r>
+                      <m:rPr>
+                        <m:sty m:val="p"/>
+                      </m:rPr>
+                      <m:t>(</m:t>
+                    </m:r>
+                    <m:sSub>
+                      <m:e>
+                        <m:r>
+                          <m:rPr>
+                            <m:sty m:val="b"/>
+                          </m:rPr>
+                          <m:t>x</m:t>
+                        </m:r>
+                      </m:e>
+                      <m:sub>
+                        <m:r>
+                          <m:t>t</m:t>
+                        </m:r>
+                      </m:sub>
+                    </m:sSub>
+                    <m:r>
+                      <m:rPr>
+                        <m:sty m:val="p"/>
+                      </m:rPr>
+                      <m:t>,</m:t>
+                    </m:r>
+                    <m:r>
+                      <m:t> </m:t>
+                    </m:r>
+                    <m:sSub>
+                      <m:e>
+                        <m:r>
+                          <m:t>a</m:t>
+                        </m:r>
+                      </m:e>
+                      <m:sub>
+                        <m:r>
+                          <m:t>t</m:t>
+                        </m:r>
+                      </m:sub>
+                    </m:sSub>
+                    <m:r>
+                      <m:rPr>
+                        <m:sty m:val="p"/>
+                      </m:rPr>
+                      <m:t>,</m:t>
+                    </m:r>
+                    <m:r>
+                      <m:t> </m:t>
+                    </m:r>
+                    <m:sSub>
+                      <m:e>
+                        <m:r>
+                          <m:rPr>
+                            <m:sty m:val="b"/>
+                          </m:rPr>
+                          <m:t>e</m:t>
+                        </m:r>
+                      </m:e>
+                      <m:sub>
+                        <m:r>
+                          <m:t>t</m:t>
+                        </m:r>
+                        <m:r>
+                          <m:rPr>
+                            <m:sty m:val="p"/>
+                          </m:rPr>
+                          <m:t>+</m:t>
+                        </m:r>
+                        <m:r>
+                          <m:t>1</m:t>
+                        </m:r>
+                      </m:sub>
+                    </m:sSub>
+                    <m:r>
+                      <m:rPr>
+                        <m:sty m:val="p"/>
+                      </m:rPr>
+                      <m:t>)</m:t>
+                    </m:r>
+                  </m:oMath>
                 </a14:m>
               </a:p>
               <a:p>
@@ -5330,8 +5320,12 @@
                   <a:buNone/>
                 </a:pPr>
                 <a:r>
+                  <a:rPr b="1"/>
+                  <a:t>Convention:</a:t>
+                </a:r>
+                <a:r>
                   <a:rPr/>
-                  <a:t>Actions are chosen </a:t>
+                  <a:t> actions are chosen </a:t>
                 </a:r>
                 <a:r>
                   <a:rPr i="1"/>
@@ -5360,10 +5354,6 @@
                     </m:sSub>
                   </m:oMath>
                 </a14:m>
-                <a:r>
-                  <a:rPr/>
-                  <a:t> — this is what makes the problem sequential.</a:t>
-                </a:r>
               </a:p>
             </p:txBody>
           </p:sp>
@@ -5374,7 +5364,7 @@
 </p:sld>
 </file>
 
-<file path=ppt/slides/slide12.xml><?xml version="1.0" encoding="utf-8"?>
+<file path=ppt/slides/slide11.xml><?xml version="1.0" encoding="utf-8"?>
 <p:sld xmlns:a="http://schemas.openxmlformats.org/drawingml/2006/main" xmlns:r="http://schemas.openxmlformats.org/officeDocument/2006/relationships" xmlns:p="http://schemas.openxmlformats.org/presentationml/2006/main">
   <p:cSld>
     <p:spTree>
@@ -5824,16 +5814,7 @@
                 </a:r>
                 <a:r>
                   <a:rPr/>
-                  <a:t>, not a sequence of actions.</a:t>
-                </a:r>
-              </a:p>
-              <a:p>
-                <a:pPr lvl="0" indent="0" marL="0">
-                  <a:buNone/>
-                </a:pPr>
-                <a:r>
-                  <a:rPr/>
-                  <a:t>Different solution methods disagree on </a:t>
+                  <a:t>, not a sequence of actions. Solution methods specify </a:t>
                 </a:r>
                 <a:r>
                   <a:rPr i="1"/>
@@ -5850,10 +5831,6 @@
                     </m:r>
                   </m:oMath>
                 </a14:m>
-                <a:r>
-                  <a:rPr/>
-                  <a:t> — that’s the rest of this lecture.</a:t>
-                </a:r>
               </a:p>
             </p:txBody>
           </p:sp>
@@ -5864,7 +5841,7 @@
 </p:sld>
 </file>
 
-<file path=ppt/slides/slide13.xml><?xml version="1.0" encoding="utf-8"?>
+<file path=ppt/slides/slide12.xml><?xml version="1.0" encoding="utf-8"?>
 <p:sld xmlns:a="http://schemas.openxmlformats.org/drawingml/2006/main" xmlns:r="http://schemas.openxmlformats.org/officeDocument/2006/relationships" xmlns:p="http://schemas.openxmlformats.org/presentationml/2006/main">
   <p:cSld>
     <p:spTree>
@@ -5987,6 +5964,15 @@
             <a:r>
               <a:rPr/>
               <a:t>. . .</a:t>
+            </a:r>
+          </a:p>
+          <a:p>
+            <a:pPr lvl="0" indent="0" marL="0">
+              <a:buNone/>
+            </a:pPr>
+            <a:r>
+              <a:rPr/>
+              <a:t>Similar to Srikrishnan et al. (2022) framing, more tailored to water resources.</a:t>
             </a:r>
           </a:p>
           <a:p>
@@ -6185,7 +6171,7 @@
 </p:sld>
 </file>
 
-<file path=ppt/slides/slide14.xml><?xml version="1.0" encoding="utf-8"?>
+<file path=ppt/slides/slide13.xml><?xml version="1.0" encoding="utf-8"?>
 <p:sld xmlns:a="http://schemas.openxmlformats.org/drawingml/2006/main" xmlns:r="http://schemas.openxmlformats.org/officeDocument/2006/relationships" xmlns:p="http://schemas.openxmlformats.org/presentationml/2006/main">
   <p:cSld>
     <p:spTree>
@@ -6401,7 +6387,7 @@
                 <a:pPr lvl="0"/>
                 <a:r>
                   <a:rPr/>
-                  <a:t>Equivalent to extended static BCA: optimize once, execute forever</a:t>
+                  <a:t>Optimize once, then execute</a:t>
                 </a:r>
               </a:p>
               <a:p>
@@ -6409,21 +6395,6 @@
                 <a:r>
                   <a:rPr/>
                   <a:t>No feedback — same dike-heightening schedule regardless of whether SLR is fast or slow</a:t>
-                </a:r>
-              </a:p>
-              <a:p>
-                <a:pPr lvl="0"/>
-                <a:r>
-                  <a:rPr/>
-                  <a:t>To meet reliability constraints under all futures, must </a:t>
-                </a:r>
-                <a:r>
-                  <a:rPr b="1"/>
-                  <a:t>over-build</a:t>
-                </a:r>
-                <a:r>
-                  <a:rPr/>
-                  <a:t> for the worst case</a:t>
                 </a:r>
               </a:p>
               <a:p>
@@ -6594,55 +6565,6 @@
                       </p:childTnLst>
                     </p:cTn>
                   </p:par>
-                  <p:par>
-                    <p:cTn id="15" fill="hold">
-                      <p:stCondLst>
-                        <p:cond delay="indefinite"/>
-                      </p:stCondLst>
-                      <p:childTnLst>
-                        <p:par>
-                          <p:cTn id="16" fill="hold">
-                            <p:stCondLst>
-                              <p:cond delay="0"/>
-                            </p:stCondLst>
-                            <p:childTnLst>
-                              <p:par>
-                                <p:cTn id="17" presetID="1" presetClass="entr" presetSubtype="0" fill="hold" grpId="0" nodeType="clickEffect">
-                                  <p:stCondLst>
-                                    <p:cond delay="0"/>
-                                  </p:stCondLst>
-                                  <p:childTnLst>
-                                    <p:set>
-                                      <p:cBhvr>
-                                        <p:cTn id="18" dur="1" fill="hold">
-                                          <p:stCondLst>
-                                            <p:cond delay="0"/>
-                                          </p:stCondLst>
-                                        </p:cTn>
-                                        <p:tgtEl>
-                                          <p:spTgt spid="3">
-                                            <p:txEl>
-                                              <p:pRg st="6" end="6"/>
-                                            </p:txEl>
-                                          </p:spTgt>
-                                        </p:tgtEl>
-                                        <p:attrNameLst>
-                                          <p:attrName>style.visibility</p:attrName>
-                                        </p:attrNameLst>
-                                      </p:cBhvr>
-                                      <p:to>
-                                        <p:strVal val="visible"/>
-                                      </p:to>
-                                    </p:set>
-                                  </p:childTnLst>
-                                </p:cTn>
-                              </p:par>
-                            </p:childTnLst>
-                          </p:cTn>
-                        </p:par>
-                      </p:childTnLst>
-                    </p:cTn>
-                  </p:par>
                 </p:childTnLst>
               </p:cTn>
               <p:prevCondLst>
@@ -6671,7 +6593,7 @@
 </p:sld>
 </file>
 
-<file path=ppt/slides/slide15.xml><?xml version="1.0" encoding="utf-8"?>
+<file path=ppt/slides/slide14.xml><?xml version="1.0" encoding="utf-8"?>
 <p:sld xmlns:a="http://schemas.openxmlformats.org/drawingml/2006/main" xmlns:r="http://schemas.openxmlformats.org/officeDocument/2006/relationships" xmlns:p="http://schemas.openxmlformats.org/presentationml/2006/main">
   <p:cSld>
     <p:spTree>
@@ -7473,7 +7395,7 @@
 </p:sld>
 </file>
 
-<file path=ppt/slides/slide16.xml><?xml version="1.0" encoding="utf-8"?>
+<file path=ppt/slides/slide15.xml><?xml version="1.0" encoding="utf-8"?>
 <p:sld xmlns:a="http://schemas.openxmlformats.org/drawingml/2006/main" xmlns:r="http://schemas.openxmlformats.org/officeDocument/2006/relationships" xmlns:p="http://schemas.openxmlformats.org/presentationml/2006/main">
   <p:cSld>
     <p:spTree>
@@ -7966,32 +7888,6 @@
                   <a:t> indexes scenarios.</a:t>
                 </a:r>
               </a:p>
-              <a:p>
-                <a:pPr lvl="0" indent="0" marL="0">
-                  <a:buNone/>
-                </a:pPr>
-                <a:r>
-                  <a:rPr/>
-                  <a:t>. . .</a:t>
-                </a:r>
-              </a:p>
-              <a:p>
-                <a:pPr lvl="0" indent="0" marL="0">
-                  <a:buNone/>
-                </a:pPr>
-                <a:r>
-                  <a:rPr/>
-                  <a:t>This is the </a:t>
-                </a:r>
-                <a:r>
-                  <a:rPr b="1"/>
-                  <a:t>scenario framework you’ve been using all semester</a:t>
-                </a:r>
-                <a:r>
-                  <a:rPr/>
-                  <a:t> — simulate forward, aggregate performance.</a:t>
-                </a:r>
-              </a:p>
             </p:txBody>
           </p:sp>
         </mc:Choice>
@@ -8001,7 +7897,7 @@
 </p:sld>
 </file>
 
-<file path=ppt/slides/slide17.xml><?xml version="1.0" encoding="utf-8"?>
+<file path=ppt/slides/slide16.xml><?xml version="1.0" encoding="utf-8"?>
 <p:sld xmlns:a="http://schemas.openxmlformats.org/drawingml/2006/main" xmlns:r="http://schemas.openxmlformats.org/officeDocument/2006/relationships" xmlns:p="http://schemas.openxmlformats.org/presentationml/2006/main">
   <p:cSld>
     <p:spTree>
@@ -8028,12 +7924,7 @@
             <p:ph type="title"/>
           </p:nvPr>
         </p:nvSpPr>
-        <p:spPr>
-          <a:xfrm>
-            <a:off x="457201" y="204787"/>
-            <a:ext cx="3008313" cy="871538"/>
-          </a:xfrm>
-        </p:spPr>
+        <p:spPr/>
         <p:txBody>
           <a:bodyPr/>
           <a:lstStyle/>
@@ -8052,12 +7943,12 @@
         <mc:Choice xmlns:a14="http://schemas.microsoft.com/office/drawing/2010/main" Requires="a14">
           <p:sp>
             <p:nvSpPr>
-              <p:cNvPr id="4" name="Text Placeholder 3"/>
+              <p:cNvPr id="3" name="Content Placeholder 2"/>
               <p:cNvSpPr>
                 <a:spLocks noGrp="1"/>
               </p:cNvSpPr>
               <p:nvPr>
-                <p:ph idx="2" sz="half" type="body"/>
+                <p:ph idx="1" sz="half"/>
               </p:nvPr>
             </p:nvSpPr>
             <p:spPr/>
@@ -8065,9 +7956,7 @@
               <a:bodyPr/>
               <a:lstStyle/>
               <a:p>
-                <a:pPr lvl="0" indent="0" marL="0">
-                  <a:buNone/>
-                </a:pPr>
+                <a:pPr lvl="0"/>
                 <a:r>
                   <a:rPr/>
                   <a:t>Intertemporal (open-loop): prescribe annual heightenings </a:t>
@@ -8124,18 +8013,7 @@
                 </a:r>
               </a:p>
               <a:p>
-                <a:pPr lvl="0" indent="0" marL="0">
-                  <a:buNone/>
-                </a:pPr>
-                <a:r>
-                  <a:rPr/>
-                  <a:t>. . .</a:t>
-                </a:r>
-              </a:p>
-              <a:p>
-                <a:pPr lvl="0" indent="0" marL="0">
-                  <a:buNone/>
-                </a:pPr>
+                <a:pPr lvl="0"/>
                 <a:r>
                   <a:rPr/>
                   <a:t>DPS (closed-loop): observe the </a:t>
@@ -8177,8 +8055,8 @@
         </p:blipFill>
         <p:spPr bwMode="auto">
           <a:xfrm>
-            <a:off x="4940300" y="203200"/>
-            <a:ext cx="2362200" cy="3873500"/>
+            <a:off x="5308600" y="1193800"/>
+            <a:ext cx="2705100" cy="2882900"/>
           </a:xfrm>
           <a:prstGeom prst="rect">
             <a:avLst/>
@@ -8201,8 +8079,8 @@
         </p:nvSpPr>
         <p:spPr>
           <a:xfrm>
-            <a:off x="3568700" y="4076700"/>
-            <a:ext cx="5105400" cy="508000"/>
+            <a:off x="4648200" y="4076700"/>
+            <a:ext cx="4038600" cy="508000"/>
           </a:xfrm>
           <a:prstGeom prst="rect">
             <a:avLst/>
@@ -8218,7 +8096,7 @@
             </a:pPr>
             <a:r>
               <a:rPr/>
-              <a:t>Figure 4: Dike height trajectories under DPS (colored) vs. intertemporal (solid black), for three scenarios. Source: Garner and Keller (2018)</a:t>
+              <a:t>Garner and Keller (2018)</a:t>
             </a:r>
           </a:p>
         </p:txBody>
@@ -8228,7 +8106,7 @@
 </p:sld>
 </file>
 
-<file path=ppt/slides/slide18.xml><?xml version="1.0" encoding="utf-8"?>
+<file path=ppt/slides/slide17.xml><?xml version="1.0" encoding="utf-8"?>
 <p:sld xmlns:a="http://schemas.openxmlformats.org/drawingml/2006/main" xmlns:r="http://schemas.openxmlformats.org/officeDocument/2006/relationships" xmlns:p="http://schemas.openxmlformats.org/presentationml/2006/main">
   <p:cSld>
     <p:spTree>
@@ -8265,7 +8143,7 @@
             </a:pPr>
             <a:r>
               <a:rPr/>
-              <a:t>Indicator Variables: What Do You Observe?</a:t>
+              <a:t>Choosing Indicator Variables</a:t>
             </a:r>
           </a:p>
         </p:txBody>
@@ -8733,7 +8611,7 @@
 </p:sld>
 </file>
 
-<file path=ppt/slides/slide19.xml><?xml version="1.0" encoding="utf-8"?>
+<file path=ppt/slides/slide18.xml><?xml version="1.0" encoding="utf-8"?>
 <p:sld xmlns:a="http://schemas.openxmlformats.org/drawingml/2006/main" xmlns:r="http://schemas.openxmlformats.org/officeDocument/2006/relationships" xmlns:p="http://schemas.openxmlformats.org/presentationml/2006/main">
   <p:cSld>
     <p:spTree>
@@ -9125,6 +9003,157 @@
 </p:sld>
 </file>
 
+<file path=ppt/slides/slide19.xml><?xml version="1.0" encoding="utf-8"?>
+<p:sld xmlns:a="http://schemas.openxmlformats.org/drawingml/2006/main" xmlns:r="http://schemas.openxmlformats.org/officeDocument/2006/relationships" xmlns:p="http://schemas.openxmlformats.org/presentationml/2006/main">
+  <p:cSld>
+    <p:spTree>
+      <p:nvGrpSpPr>
+        <p:cNvPr id="1" name=""/>
+        <p:cNvGrpSpPr/>
+        <p:nvPr/>
+      </p:nvGrpSpPr>
+      <p:grpSpPr>
+        <a:xfrm>
+          <a:off x="0" y="0"/>
+          <a:ext cx="0" cy="0"/>
+          <a:chOff x="0" y="0"/>
+          <a:chExt cx="0" cy="0"/>
+        </a:xfrm>
+      </p:grpSpPr>
+      <p:sp>
+        <p:nvSpPr>
+          <p:cNvPr id="2" name="Title 1"/>
+          <p:cNvSpPr>
+            <a:spLocks noGrp="1"/>
+          </p:cNvSpPr>
+          <p:nvPr>
+            <p:ph type="title"/>
+          </p:nvPr>
+        </p:nvSpPr>
+        <p:spPr/>
+        <p:txBody>
+          <a:bodyPr/>
+          <a:lstStyle/>
+          <a:p>
+            <a:pPr lvl="0" indent="0" marL="0">
+              <a:buNone/>
+            </a:pPr>
+            <a:r>
+              <a:rPr/>
+              <a:t>Evaluating vs. Designing Policies</a:t>
+            </a:r>
+          </a:p>
+        </p:txBody>
+      </p:sp>
+      <mc:AlternateContent xmlns:mc="http://schemas.openxmlformats.org/markup-compatibility/2006">
+        <mc:Choice xmlns:a14="http://schemas.microsoft.com/office/drawing/2010/main" Requires="a14">
+          <p:sp>
+            <p:nvSpPr>
+              <p:cNvPr id="3" name="Content Placeholder 2"/>
+              <p:cNvSpPr>
+                <a:spLocks noGrp="1"/>
+              </p:cNvSpPr>
+              <p:nvPr>
+                <p:ph idx="1"/>
+              </p:nvPr>
+            </p:nvSpPr>
+            <p:spPr/>
+            <p:txBody>
+              <a:bodyPr/>
+              <a:lstStyle/>
+              <a:p>
+                <a:pPr lvl="0" indent="0" marL="0">
+                  <a:buNone/>
+                </a:pPr>
+                <a:r>
+                  <a:rPr/>
+                  <a:t>These are different tasks and are easy to confuse.</a:t>
+                </a:r>
+              </a:p>
+              <a:p>
+                <a:pPr lvl="0" indent="0" marL="0">
+                  <a:buNone/>
+                </a:pPr>
+                <a:r>
+                  <a:rPr b="1"/>
+                  <a:t>Evaluating</a:t>
+                </a:r>
+                <a:r>
+                  <a:rPr/>
+                  <a:t> a policy: given fixed </a:t>
+                </a:r>
+                <a14:m>
+                  <m:oMath xmlns:m="http://schemas.openxmlformats.org/officeDocument/2006/math">
+                    <m:r>
+                      <m:t>θ</m:t>
+                    </m:r>
+                  </m:oMath>
+                </a14:m>
+                <a:r>
+                  <a:rPr/>
+                  <a:t>, simulate over scenarios and compute costs. This is what robustness analysis in Weeks 7–8 did.</a:t>
+                </a:r>
+              </a:p>
+              <a:p>
+                <a:pPr lvl="0" indent="0" marL="0">
+                  <a:buNone/>
+                </a:pPr>
+                <a:r>
+                  <a:rPr/>
+                  <a:t>. . .</a:t>
+                </a:r>
+              </a:p>
+              <a:p>
+                <a:pPr lvl="0" indent="0" marL="0">
+                  <a:buNone/>
+                </a:pPr>
+                <a:r>
+                  <a:rPr b="1"/>
+                  <a:t>Designing</a:t>
+                </a:r>
+                <a:r>
+                  <a:rPr/>
+                  <a:t> a policy: search over </a:t>
+                </a:r>
+                <a14:m>
+                  <m:oMath xmlns:m="http://schemas.openxmlformats.org/officeDocument/2006/math">
+                    <m:r>
+                      <m:t>θ</m:t>
+                    </m:r>
+                  </m:oMath>
+                </a14:m>
+                <a:r>
+                  <a:rPr/>
+                  <a:t> to minimize expected costs across the ensemble. This is what DPS does.</a:t>
+                </a:r>
+              </a:p>
+              <a:p>
+                <a:pPr lvl="0" indent="0" marL="0">
+                  <a:buNone/>
+                </a:pPr>
+                <a:r>
+                  <a:rPr/>
+                  <a:t>. . .</a:t>
+                </a:r>
+              </a:p>
+              <a:p>
+                <a:pPr lvl="0" indent="0" marL="0">
+                  <a:buNone/>
+                </a:pPr>
+                <a:r>
+                  <a:rPr/>
+                  <a:t>The quality of a designed policy depends on the quality of the uncertainty characterization used during optimization.</a:t>
+                </a:r>
+              </a:p>
+            </p:txBody>
+          </p:sp>
+        </mc:Choice>
+      </mc:AlternateContent>
+    </p:spTree>
+  </p:cSld>
+</p:sld>
+</file>
+
 <file path=ppt/slides/slide2.xml><?xml version="1.0" encoding="utf-8"?>
 <p:sld xmlns:a="http://schemas.openxmlformats.org/drawingml/2006/main" xmlns:r="http://schemas.openxmlformats.org/officeDocument/2006/relationships" xmlns:p="http://schemas.openxmlformats.org/presentationml/2006/main">
   <p:cSld>
@@ -9144,12 +9173,12 @@
       </p:grpSpPr>
       <p:sp>
         <p:nvSpPr>
-          <p:cNvPr id="3" name="Content Placeholder 2"/>
-          <p:cNvSpPr>
-            <a:spLocks noGrp="1"/>
-          </p:cNvSpPr>
-          <p:nvPr>
-            <p:ph idx="1"/>
+          <p:cNvPr id="2" name="Title 1"/>
+          <p:cNvSpPr>
+            <a:spLocks noGrp="1"/>
+          </p:cNvSpPr>
+          <p:nvPr>
+            <p:ph type="title"/>
           </p:nvPr>
         </p:nvSpPr>
         <p:spPr/>
@@ -9161,18 +9190,273 @@
               <a:buNone/>
             </a:pPr>
             <a:r>
+              <a:rPr/>
+              <a:t>Three Infrastructure Puzzles</a:t>
+            </a:r>
+          </a:p>
+        </p:txBody>
+      </p:sp>
+      <p:sp>
+        <p:nvSpPr>
+          <p:cNvPr id="3" name="Content Placeholder 2"/>
+          <p:cNvSpPr>
+            <a:spLocks noGrp="1"/>
+          </p:cNvSpPr>
+          <p:nvPr>
+            <p:ph idx="1"/>
+          </p:nvPr>
+        </p:nvSpPr>
+        <p:spPr/>
+        <p:txBody>
+          <a:bodyPr/>
+          <a:lstStyle/>
+          <a:p>
+            <a:pPr lvl="0"/>
+            <a:r>
+              <a:rPr/>
+              <a:t>The </a:t>
+            </a:r>
+            <a:r>
               <a:rPr b="1"/>
-              <a:t>Draft Material:</a:t>
+              <a:t>Tagus River bridge</a:t>
             </a:r>
             <a:r>
               <a:rPr/>
-              <a:t> This content is under development and subject to change.</a:t>
+              <a:t> (Lisbon, 1966) was built for road traffic. Rail was added in 1999 — because the original design reserved the option.</a:t>
+            </a:r>
+          </a:p>
+          <a:p>
+            <a:pPr lvl="0"/>
+            <a:r>
+              <a:rPr/>
+              <a:t>A </a:t>
+            </a:r>
+            <a:r>
+              <a:rPr b="1"/>
+              <a:t>satellite constellation</a:t>
+            </a:r>
+            <a:r>
+              <a:rPr/>
+              <a:t> (de Weck et al., 2004): staging deployment in phases rather than launching all satellites at once improved expected value by ~30%.</a:t>
+            </a:r>
+          </a:p>
+          <a:p>
+            <a:pPr lvl="0"/>
+            <a:r>
+              <a:rPr/>
+              <a:t>A </a:t>
+            </a:r>
+            <a:r>
+              <a:rPr b="1"/>
+              <a:t>parking garage</a:t>
+            </a:r>
+            <a:r>
+              <a:rPr/>
+              <a:t> in England reinforced its columns during construction. Extra floors were added later when demand grew.</a:t>
+            </a:r>
+          </a:p>
+          <a:p>
+            <a:pPr lvl="0" indent="0" marL="0">
+              <a:buNone/>
+            </a:pPr>
+            <a:r>
+              <a:rPr/>
+              <a:t>. . .</a:t>
+            </a:r>
+          </a:p>
+          <a:p>
+            <a:pPr lvl="0" indent="0" marL="0">
+              <a:buNone/>
+            </a:pPr>
+            <a:r>
+              <a:rPr/>
+              <a:t>What do these have in common?</a:t>
             </a:r>
           </a:p>
         </p:txBody>
       </p:sp>
     </p:spTree>
   </p:cSld>
+  <p:timing>
+    <p:tnLst>
+      <p:par>
+        <p:cTn id="1" dur="indefinite" restart="never" nodeType="tmRoot">
+          <p:childTnLst>
+            <p:seq concurrent="1" nextAc="seek">
+              <p:cTn id="2" dur="indefinite" nodeType="mainSeq">
+                <p:childTnLst>
+                  <p:par>
+                    <p:cTn id="3" fill="hold">
+                      <p:stCondLst>
+                        <p:cond delay="indefinite"/>
+                      </p:stCondLst>
+                      <p:childTnLst>
+                        <p:par>
+                          <p:cTn id="4" fill="hold">
+                            <p:stCondLst>
+                              <p:cond delay="0"/>
+                            </p:stCondLst>
+                            <p:childTnLst>
+                              <p:par>
+                                <p:cTn id="5" presetID="1" presetClass="entr" presetSubtype="0" fill="hold" grpId="0" nodeType="clickEffect">
+                                  <p:stCondLst>
+                                    <p:cond delay="0"/>
+                                  </p:stCondLst>
+                                  <p:childTnLst>
+                                    <p:set>
+                                      <p:cBhvr>
+                                        <p:cTn id="6" dur="1" fill="hold">
+                                          <p:stCondLst>
+                                            <p:cond delay="0"/>
+                                          </p:stCondLst>
+                                        </p:cTn>
+                                        <p:tgtEl>
+                                          <p:spTgt spid="3">
+                                            <p:txEl>
+                                              <p:pRg st="0" end="0"/>
+                                            </p:txEl>
+                                          </p:spTgt>
+                                        </p:tgtEl>
+                                        <p:attrNameLst>
+                                          <p:attrName>style.visibility</p:attrName>
+                                        </p:attrNameLst>
+                                      </p:cBhvr>
+                                      <p:to>
+                                        <p:strVal val="visible"/>
+                                      </p:to>
+                                    </p:set>
+                                  </p:childTnLst>
+                                </p:cTn>
+                              </p:par>
+                            </p:childTnLst>
+                          </p:cTn>
+                        </p:par>
+                      </p:childTnLst>
+                    </p:cTn>
+                  </p:par>
+                  <p:par>
+                    <p:cTn id="7" fill="hold">
+                      <p:stCondLst>
+                        <p:cond delay="indefinite"/>
+                      </p:stCondLst>
+                      <p:childTnLst>
+                        <p:par>
+                          <p:cTn id="8" fill="hold">
+                            <p:stCondLst>
+                              <p:cond delay="0"/>
+                            </p:stCondLst>
+                            <p:childTnLst>
+                              <p:par>
+                                <p:cTn id="9" presetID="1" presetClass="entr" presetSubtype="0" fill="hold" grpId="0" nodeType="clickEffect">
+                                  <p:stCondLst>
+                                    <p:cond delay="0"/>
+                                  </p:stCondLst>
+                                  <p:childTnLst>
+                                    <p:set>
+                                      <p:cBhvr>
+                                        <p:cTn id="10" dur="1" fill="hold">
+                                          <p:stCondLst>
+                                            <p:cond delay="0"/>
+                                          </p:stCondLst>
+                                        </p:cTn>
+                                        <p:tgtEl>
+                                          <p:spTgt spid="3">
+                                            <p:txEl>
+                                              <p:pRg st="1" end="1"/>
+                                            </p:txEl>
+                                          </p:spTgt>
+                                        </p:tgtEl>
+                                        <p:attrNameLst>
+                                          <p:attrName>style.visibility</p:attrName>
+                                        </p:attrNameLst>
+                                      </p:cBhvr>
+                                      <p:to>
+                                        <p:strVal val="visible"/>
+                                      </p:to>
+                                    </p:set>
+                                  </p:childTnLst>
+                                </p:cTn>
+                              </p:par>
+                            </p:childTnLst>
+                          </p:cTn>
+                        </p:par>
+                      </p:childTnLst>
+                    </p:cTn>
+                  </p:par>
+                  <p:par>
+                    <p:cTn id="11" fill="hold">
+                      <p:stCondLst>
+                        <p:cond delay="indefinite"/>
+                      </p:stCondLst>
+                      <p:childTnLst>
+                        <p:par>
+                          <p:cTn id="12" fill="hold">
+                            <p:stCondLst>
+                              <p:cond delay="0"/>
+                            </p:stCondLst>
+                            <p:childTnLst>
+                              <p:par>
+                                <p:cTn id="13" presetID="1" presetClass="entr" presetSubtype="0" fill="hold" grpId="0" nodeType="clickEffect">
+                                  <p:stCondLst>
+                                    <p:cond delay="0"/>
+                                  </p:stCondLst>
+                                  <p:childTnLst>
+                                    <p:set>
+                                      <p:cBhvr>
+                                        <p:cTn id="14" dur="1" fill="hold">
+                                          <p:stCondLst>
+                                            <p:cond delay="0"/>
+                                          </p:stCondLst>
+                                        </p:cTn>
+                                        <p:tgtEl>
+                                          <p:spTgt spid="3">
+                                            <p:txEl>
+                                              <p:pRg st="2" end="2"/>
+                                            </p:txEl>
+                                          </p:spTgt>
+                                        </p:tgtEl>
+                                        <p:attrNameLst>
+                                          <p:attrName>style.visibility</p:attrName>
+                                        </p:attrNameLst>
+                                      </p:cBhvr>
+                                      <p:to>
+                                        <p:strVal val="visible"/>
+                                      </p:to>
+                                    </p:set>
+                                  </p:childTnLst>
+                                </p:cTn>
+                              </p:par>
+                            </p:childTnLst>
+                          </p:cTn>
+                        </p:par>
+                      </p:childTnLst>
+                    </p:cTn>
+                  </p:par>
+                </p:childTnLst>
+              </p:cTn>
+              <p:prevCondLst>
+                <p:cond evt="onPrev" delay="0">
+                  <p:tgtEl>
+                    <p:sldTgt/>
+                  </p:tgtEl>
+                </p:cond>
+              </p:prevCondLst>
+              <p:nextCondLst>
+                <p:cond evt="onNext" delay="0">
+                  <p:tgtEl>
+                    <p:sldTgt/>
+                  </p:tgtEl>
+                </p:cond>
+              </p:nextCondLst>
+            </p:seq>
+          </p:childTnLst>
+        </p:cTn>
+      </p:par>
+    </p:tnLst>
+    <p:bldLst>
+      <p:bldP spid="3" grpId="0" uiExpand="1" build="p"/>
+    </p:bldLst>
+  </p:timing>
 </p:sld>
 </file>
 
@@ -9213,268 +9497,50 @@
             </a:pPr>
             <a:r>
               <a:rPr/>
-              <a:t>Evaluating vs. Designing Policies</a:t>
-            </a:r>
-          </a:p>
-        </p:txBody>
-      </p:sp>
-      <mc:AlternateContent xmlns:mc="http://schemas.openxmlformats.org/markup-compatibility/2006">
-        <mc:Choice xmlns:a14="http://schemas.microsoft.com/office/drawing/2010/main" Requires="a14">
-          <p:sp>
-            <p:nvSpPr>
-              <p:cNvPr id="3" name="Content Placeholder 2"/>
-              <p:cNvSpPr>
-                <a:spLocks noGrp="1"/>
-              </p:cNvSpPr>
-              <p:nvPr>
-                <p:ph idx="1"/>
-              </p:nvPr>
-            </p:nvSpPr>
-            <p:spPr/>
-            <p:txBody>
-              <a:bodyPr/>
-              <a:lstStyle/>
-              <a:p>
-                <a:pPr lvl="0" indent="0" marL="0">
-                  <a:buNone/>
-                </a:pPr>
-                <a:r>
-                  <a:rPr/>
-                  <a:t>These are different tasks and are easy to confuse.</a:t>
-                </a:r>
-              </a:p>
-              <a:p>
-                <a:pPr lvl="0" indent="0" marL="0">
-                  <a:buNone/>
-                </a:pPr>
-                <a:r>
-                  <a:rPr b="1"/>
-                  <a:t>Evaluating</a:t>
-                </a:r>
-                <a:r>
-                  <a:rPr/>
-                  <a:t> a policy: given fixed </a:t>
-                </a:r>
-                <a14:m>
-                  <m:oMath xmlns:m="http://schemas.openxmlformats.org/officeDocument/2006/math">
-                    <m:r>
-                      <m:t>θ</m:t>
-                    </m:r>
-                  </m:oMath>
-                </a14:m>
-                <a:r>
-                  <a:rPr/>
-                  <a:t>, simulate over scenarios and compute costs. This is what robustness analysis in Weeks 7–8 did.</a:t>
-                </a:r>
-              </a:p>
-              <a:p>
-                <a:pPr lvl="0" indent="0" marL="0">
-                  <a:buNone/>
-                </a:pPr>
-                <a:r>
-                  <a:rPr/>
-                  <a:t>. . .</a:t>
-                </a:r>
-              </a:p>
-              <a:p>
-                <a:pPr lvl="0" indent="0" marL="0">
-                  <a:buNone/>
-                </a:pPr>
-                <a:r>
-                  <a:rPr b="1"/>
-                  <a:t>Designing</a:t>
-                </a:r>
-                <a:r>
-                  <a:rPr/>
-                  <a:t> a policy: search over </a:t>
-                </a:r>
-                <a14:m>
-                  <m:oMath xmlns:m="http://schemas.openxmlformats.org/officeDocument/2006/math">
-                    <m:r>
-                      <m:t>θ</m:t>
-                    </m:r>
-                  </m:oMath>
-                </a14:m>
-                <a:r>
-                  <a:rPr/>
-                  <a:t> to minimize expected costs across the ensemble. This is what DPS does.</a:t>
-                </a:r>
-              </a:p>
-              <a:p>
-                <a:pPr lvl="0" indent="0" marL="0">
-                  <a:buNone/>
-                </a:pPr>
-                <a:r>
-                  <a:rPr/>
-                  <a:t>. . .</a:t>
-                </a:r>
-              </a:p>
-              <a:p>
-                <a:pPr lvl="0" indent="0" marL="0">
-                  <a:buNone/>
-                </a:pPr>
-                <a:r>
-                  <a:rPr/>
-                  <a:t>The quality of a designed policy depends on the quality of the uncertainty characterization used during optimization.</a:t>
-                </a:r>
-              </a:p>
-            </p:txBody>
-          </p:sp>
-        </mc:Choice>
-      </mc:AlternateContent>
+              <a:t>Validation: How Good Is Your Policy?</a:t>
+            </a:r>
+          </a:p>
+        </p:txBody>
+      </p:sp>
+      <p:sp>
+        <p:nvSpPr>
+          <p:cNvPr id="3" name="Content Placeholder 2"/>
+          <p:cNvSpPr>
+            <a:spLocks noGrp="1"/>
+          </p:cNvSpPr>
+          <p:nvPr>
+            <p:ph idx="1"/>
+          </p:nvPr>
+        </p:nvSpPr>
+        <p:spPr/>
+        <p:txBody>
+          <a:bodyPr/>
+          <a:lstStyle/>
+          <a:p>
+            <a:pPr lvl="0" indent="0" marL="0">
+              <a:buNone/>
+            </a:pPr>
+            <a:r>
+              <a:rPr/>
+              <a:t>Test the optimized policy against scenarios </a:t>
+            </a:r>
+            <a:r>
+              <a:rPr i="1"/>
+              <a:t>not used in optimization</a:t>
+            </a:r>
+            <a:r>
+              <a:rPr/>
+              <a:t>.</a:t>
+            </a:r>
+          </a:p>
+        </p:txBody>
+      </p:sp>
     </p:spTree>
   </p:cSld>
 </p:sld>
 </file>
 
 <file path=ppt/slides/slide21.xml><?xml version="1.0" encoding="utf-8"?>
-<p:sld xmlns:a="http://schemas.openxmlformats.org/drawingml/2006/main" xmlns:r="http://schemas.openxmlformats.org/officeDocument/2006/relationships" xmlns:p="http://schemas.openxmlformats.org/presentationml/2006/main">
-  <p:cSld>
-    <p:spTree>
-      <p:nvGrpSpPr>
-        <p:cNvPr id="1" name=""/>
-        <p:cNvGrpSpPr/>
-        <p:nvPr/>
-      </p:nvGrpSpPr>
-      <p:grpSpPr>
-        <a:xfrm>
-          <a:off x="0" y="0"/>
-          <a:ext cx="0" cy="0"/>
-          <a:chOff x="0" y="0"/>
-          <a:chExt cx="0" cy="0"/>
-        </a:xfrm>
-      </p:grpSpPr>
-      <p:sp>
-        <p:nvSpPr>
-          <p:cNvPr id="2" name="Title 1"/>
-          <p:cNvSpPr>
-            <a:spLocks noGrp="1"/>
-          </p:cNvSpPr>
-          <p:nvPr>
-            <p:ph type="title"/>
-          </p:nvPr>
-        </p:nvSpPr>
-        <p:spPr>
-          <a:xfrm>
-            <a:off x="457201" y="204787"/>
-            <a:ext cx="3008313" cy="871538"/>
-          </a:xfrm>
-        </p:spPr>
-        <p:txBody>
-          <a:bodyPr/>
-          <a:lstStyle/>
-          <a:p>
-            <a:pPr lvl="0" indent="0" marL="0">
-              <a:buNone/>
-            </a:pPr>
-            <a:r>
-              <a:rPr/>
-              <a:t>Validation: How Good Is Your Policy?</a:t>
-            </a:r>
-          </a:p>
-        </p:txBody>
-      </p:sp>
-      <p:sp>
-        <p:nvSpPr>
-          <p:cNvPr id="4" name="Text Placeholder 3"/>
-          <p:cNvSpPr>
-            <a:spLocks noGrp="1"/>
-          </p:cNvSpPr>
-          <p:nvPr>
-            <p:ph idx="2" sz="half" type="body"/>
-          </p:nvPr>
-        </p:nvSpPr>
-        <p:spPr/>
-        <p:txBody>
-          <a:bodyPr/>
-          <a:lstStyle/>
-          <a:p>
-            <a:pPr lvl="0" indent="0" marL="0">
-              <a:buNone/>
-            </a:pPr>
-            <a:r>
-              <a:rPr/>
-              <a:t>Test the optimized policy against scenarios </a:t>
-            </a:r>
-            <a:r>
-              <a:rPr i="1"/>
-              <a:t>not used in optimization</a:t>
-            </a:r>
-            <a:r>
-              <a:rPr/>
-              <a:t>. Five possible outcomes (Herman et al. (2020), Fig. 6):</a:t>
-            </a:r>
-          </a:p>
-        </p:txBody>
-      </p:sp>
-      <p:pic>
-        <p:nvPicPr>
-          <p:cNvPr descr="herman_fig6.png" id="0" name="Picture 1"/>
-          <p:cNvPicPr>
-            <a:picLocks noGrp="1" noChangeAspect="1"/>
-          </p:cNvPicPr>
-          <p:nvPr/>
-        </p:nvPicPr>
-        <p:blipFill>
-          <a:blip r:embed="rId3"/>
-          <a:stretch>
-            <a:fillRect/>
-          </a:stretch>
-        </p:blipFill>
-        <p:spPr bwMode="auto">
-          <a:xfrm>
-            <a:off x="3568700" y="419100"/>
-            <a:ext cx="5105400" cy="3441700"/>
-          </a:xfrm>
-          <a:prstGeom prst="rect">
-            <a:avLst/>
-          </a:prstGeom>
-          <a:noFill/>
-          <a:ln w="9525">
-            <a:noFill/>
-            <a:headEnd/>
-            <a:tailEnd/>
-          </a:ln>
-        </p:spPr>
-      </p:pic>
-      <p:sp>
-        <p:nvSpPr>
-          <p:cNvPr id="1" name="TextBox 3"/>
-          <p:cNvSpPr txBox="1"/>
-          <p:nvPr>
-            <p:ph idx="1"/>
-          </p:nvPr>
-        </p:nvSpPr>
-        <p:spPr>
-          <a:xfrm>
-            <a:off x="3568700" y="4076700"/>
-            <a:ext cx="5105400" cy="508000"/>
-          </a:xfrm>
-          <a:prstGeom prst="rect">
-            <a:avLst/>
-          </a:prstGeom>
-          <a:noFill/>
-        </p:spPr>
-        <p:txBody>
-          <a:bodyPr/>
-          <a:lstStyle/>
-          <a:p>
-            <a:pPr lvl="0" indent="0" marL="0" algn="ctr">
-              <a:buNone/>
-            </a:pPr>
-            <a:r>
-              <a:rPr/>
-              <a:t>Figure 5: NA = no action; V = validation; O = optimization; P = perfect foresight.</a:t>
-            </a:r>
-          </a:p>
-        </p:txBody>
-      </p:sp>
-    </p:spTree>
-  </p:cSld>
-</p:sld>
-</file>
-
-<file path=ppt/slides/slide22.xml><?xml version="1.0" encoding="utf-8"?>
 <p:sld xmlns:a="http://schemas.openxmlformats.org/drawingml/2006/main" xmlns:r="http://schemas.openxmlformats.org/officeDocument/2006/relationships" xmlns:p="http://schemas.openxmlformats.org/presentationml/2006/main">
   <p:cSld>
     <p:spTree>
@@ -9664,16 +9730,7 @@
                 </a:r>
                 <a:r>
                   <a:rPr/>
-                  <a:t> Fuad leads discussion of Garner and Keller (2018) and de Neufville et al. (2006).</a:t>
-                </a:r>
-              </a:p>
-              <a:p>
-                <a:pPr lvl="0" indent="0" marL="0">
-                  <a:buNone/>
-                </a:pPr>
-                <a:r>
-                  <a:rPr/>
-                  <a:t>Note: there is a known unit error in Garner and Keller (2018) — storm surge is off by a factor of 10, over-weighting SLR. Methods and qualitative findings remain valid.</a:t>
+                  <a:t> Fuad leads discussion of de Neufville et al. (2006).</a:t>
                 </a:r>
               </a:p>
             </p:txBody>
@@ -10012,7 +10069,7 @@
 </p:sld>
 </file>
 
-<file path=ppt/slides/slide23.xml><?xml version="1.0" encoding="utf-8"?>
+<file path=ppt/slides/slide22.xml><?xml version="1.0" encoding="utf-8"?>
 <p:sld xmlns:a="http://schemas.openxmlformats.org/drawingml/2006/main" xmlns:r="http://schemas.openxmlformats.org/officeDocument/2006/relationships" xmlns:p="http://schemas.openxmlformats.org/presentationml/2006/main">
   <p:cSld>
     <p:spTree>
@@ -10149,6 +10206,33 @@
               <a:t>.</a:t>
             </a:r>
           </a:p>
+          <a:p>
+            <a:pPr lvl="0" indent="0" marL="0">
+              <a:buNone/>
+            </a:pPr>
+            <a:r>
+              <a:rPr/>
+              <a:t>Srikrishnan, Vivek, David C. Lafferty, Tony E. Wong, et al. 2022. “Uncertainty Analysis in Multi-Sector Systems: Considerations for Risk Analysis, Projection, and Planning for Complex Systems.” </a:t>
+            </a:r>
+            <a:r>
+              <a:rPr i="1"/>
+              <a:t>Earth’s Future</a:t>
+            </a:r>
+            <a:r>
+              <a:rPr/>
+              <a:t> 10 (8): e2021EF002644. </a:t>
+            </a:r>
+            <a:r>
+              <a:rPr>
+                <a:hlinkClick r:id="rId6"/>
+              </a:rPr>
+              <a:t>https://doi.org/10.1029/2021EF002644</a:t>
+            </a:r>
+            <a:r>
+              <a:rPr/>
+              <a:t>.</a:t>
+            </a:r>
+          </a:p>
         </p:txBody>
       </p:sp>
     </p:spTree>
@@ -10157,312 +10241,6 @@
 </file>
 
 <file path=ppt/slides/slide3.xml><?xml version="1.0" encoding="utf-8"?>
-<p:sld xmlns:a="http://schemas.openxmlformats.org/drawingml/2006/main" xmlns:r="http://schemas.openxmlformats.org/officeDocument/2006/relationships" xmlns:p="http://schemas.openxmlformats.org/presentationml/2006/main">
-  <p:cSld>
-    <p:spTree>
-      <p:nvGrpSpPr>
-        <p:cNvPr id="1" name=""/>
-        <p:cNvGrpSpPr/>
-        <p:nvPr/>
-      </p:nvGrpSpPr>
-      <p:grpSpPr>
-        <a:xfrm>
-          <a:off x="0" y="0"/>
-          <a:ext cx="0" cy="0"/>
-          <a:chOff x="0" y="0"/>
-          <a:chExt cx="0" cy="0"/>
-        </a:xfrm>
-      </p:grpSpPr>
-      <p:sp>
-        <p:nvSpPr>
-          <p:cNvPr id="2" name="Title 1"/>
-          <p:cNvSpPr>
-            <a:spLocks noGrp="1"/>
-          </p:cNvSpPr>
-          <p:nvPr>
-            <p:ph type="title"/>
-          </p:nvPr>
-        </p:nvSpPr>
-        <p:spPr/>
-        <p:txBody>
-          <a:bodyPr/>
-          <a:lstStyle/>
-          <a:p>
-            <a:pPr lvl="0" indent="0" marL="0">
-              <a:buNone/>
-            </a:pPr>
-            <a:r>
-              <a:rPr/>
-              <a:t>Three Infrastructure Puzzles</a:t>
-            </a:r>
-          </a:p>
-        </p:txBody>
-      </p:sp>
-      <p:sp>
-        <p:nvSpPr>
-          <p:cNvPr id="3" name="Content Placeholder 2"/>
-          <p:cNvSpPr>
-            <a:spLocks noGrp="1"/>
-          </p:cNvSpPr>
-          <p:nvPr>
-            <p:ph idx="1"/>
-          </p:nvPr>
-        </p:nvSpPr>
-        <p:spPr/>
-        <p:txBody>
-          <a:bodyPr/>
-          <a:lstStyle/>
-          <a:p>
-            <a:pPr lvl="0"/>
-            <a:r>
-              <a:rPr/>
-              <a:t>The </a:t>
-            </a:r>
-            <a:r>
-              <a:rPr b="1"/>
-              <a:t>Tagus River bridge</a:t>
-            </a:r>
-            <a:r>
-              <a:rPr/>
-              <a:t> (Lisbon, 1966) was built for road traffic. Rail was added in 1999 — because the original design reserved the option.</a:t>
-            </a:r>
-          </a:p>
-          <a:p>
-            <a:pPr lvl="0"/>
-            <a:r>
-              <a:rPr/>
-              <a:t>A </a:t>
-            </a:r>
-            <a:r>
-              <a:rPr b="1"/>
-              <a:t>satellite constellation</a:t>
-            </a:r>
-            <a:r>
-              <a:rPr/>
-              <a:t> (de Weck et al., 2004): staging deployment in phases rather than launching all satellites at once improved expected value by ~30%.</a:t>
-            </a:r>
-          </a:p>
-          <a:p>
-            <a:pPr lvl="0"/>
-            <a:r>
-              <a:rPr/>
-              <a:t>A </a:t>
-            </a:r>
-            <a:r>
-              <a:rPr b="1"/>
-              <a:t>parking garage</a:t>
-            </a:r>
-            <a:r>
-              <a:rPr/>
-              <a:t> in England reinforced its columns during construction. Extra floors were added later when demand grew.</a:t>
-            </a:r>
-          </a:p>
-          <a:p>
-            <a:pPr lvl="0" indent="0" marL="0">
-              <a:buNone/>
-            </a:pPr>
-            <a:r>
-              <a:rPr/>
-              <a:t>. . .</a:t>
-            </a:r>
-          </a:p>
-          <a:p>
-            <a:pPr lvl="0" indent="0" marL="0">
-              <a:buNone/>
-            </a:pPr>
-            <a:r>
-              <a:rPr/>
-              <a:t>What do these have in common?</a:t>
-            </a:r>
-          </a:p>
-        </p:txBody>
-      </p:sp>
-    </p:spTree>
-  </p:cSld>
-  <p:timing>
-    <p:tnLst>
-      <p:par>
-        <p:cTn id="1" dur="indefinite" restart="never" nodeType="tmRoot">
-          <p:childTnLst>
-            <p:seq concurrent="1" nextAc="seek">
-              <p:cTn id="2" dur="indefinite" nodeType="mainSeq">
-                <p:childTnLst>
-                  <p:par>
-                    <p:cTn id="3" fill="hold">
-                      <p:stCondLst>
-                        <p:cond delay="indefinite"/>
-                      </p:stCondLst>
-                      <p:childTnLst>
-                        <p:par>
-                          <p:cTn id="4" fill="hold">
-                            <p:stCondLst>
-                              <p:cond delay="0"/>
-                            </p:stCondLst>
-                            <p:childTnLst>
-                              <p:par>
-                                <p:cTn id="5" presetID="1" presetClass="entr" presetSubtype="0" fill="hold" grpId="0" nodeType="clickEffect">
-                                  <p:stCondLst>
-                                    <p:cond delay="0"/>
-                                  </p:stCondLst>
-                                  <p:childTnLst>
-                                    <p:set>
-                                      <p:cBhvr>
-                                        <p:cTn id="6" dur="1" fill="hold">
-                                          <p:stCondLst>
-                                            <p:cond delay="0"/>
-                                          </p:stCondLst>
-                                        </p:cTn>
-                                        <p:tgtEl>
-                                          <p:spTgt spid="3">
-                                            <p:txEl>
-                                              <p:pRg st="0" end="0"/>
-                                            </p:txEl>
-                                          </p:spTgt>
-                                        </p:tgtEl>
-                                        <p:attrNameLst>
-                                          <p:attrName>style.visibility</p:attrName>
-                                        </p:attrNameLst>
-                                      </p:cBhvr>
-                                      <p:to>
-                                        <p:strVal val="visible"/>
-                                      </p:to>
-                                    </p:set>
-                                  </p:childTnLst>
-                                </p:cTn>
-                              </p:par>
-                            </p:childTnLst>
-                          </p:cTn>
-                        </p:par>
-                      </p:childTnLst>
-                    </p:cTn>
-                  </p:par>
-                  <p:par>
-                    <p:cTn id="7" fill="hold">
-                      <p:stCondLst>
-                        <p:cond delay="indefinite"/>
-                      </p:stCondLst>
-                      <p:childTnLst>
-                        <p:par>
-                          <p:cTn id="8" fill="hold">
-                            <p:stCondLst>
-                              <p:cond delay="0"/>
-                            </p:stCondLst>
-                            <p:childTnLst>
-                              <p:par>
-                                <p:cTn id="9" presetID="1" presetClass="entr" presetSubtype="0" fill="hold" grpId="0" nodeType="clickEffect">
-                                  <p:stCondLst>
-                                    <p:cond delay="0"/>
-                                  </p:stCondLst>
-                                  <p:childTnLst>
-                                    <p:set>
-                                      <p:cBhvr>
-                                        <p:cTn id="10" dur="1" fill="hold">
-                                          <p:stCondLst>
-                                            <p:cond delay="0"/>
-                                          </p:stCondLst>
-                                        </p:cTn>
-                                        <p:tgtEl>
-                                          <p:spTgt spid="3">
-                                            <p:txEl>
-                                              <p:pRg st="1" end="1"/>
-                                            </p:txEl>
-                                          </p:spTgt>
-                                        </p:tgtEl>
-                                        <p:attrNameLst>
-                                          <p:attrName>style.visibility</p:attrName>
-                                        </p:attrNameLst>
-                                      </p:cBhvr>
-                                      <p:to>
-                                        <p:strVal val="visible"/>
-                                      </p:to>
-                                    </p:set>
-                                  </p:childTnLst>
-                                </p:cTn>
-                              </p:par>
-                            </p:childTnLst>
-                          </p:cTn>
-                        </p:par>
-                      </p:childTnLst>
-                    </p:cTn>
-                  </p:par>
-                  <p:par>
-                    <p:cTn id="11" fill="hold">
-                      <p:stCondLst>
-                        <p:cond delay="indefinite"/>
-                      </p:stCondLst>
-                      <p:childTnLst>
-                        <p:par>
-                          <p:cTn id="12" fill="hold">
-                            <p:stCondLst>
-                              <p:cond delay="0"/>
-                            </p:stCondLst>
-                            <p:childTnLst>
-                              <p:par>
-                                <p:cTn id="13" presetID="1" presetClass="entr" presetSubtype="0" fill="hold" grpId="0" nodeType="clickEffect">
-                                  <p:stCondLst>
-                                    <p:cond delay="0"/>
-                                  </p:stCondLst>
-                                  <p:childTnLst>
-                                    <p:set>
-                                      <p:cBhvr>
-                                        <p:cTn id="14" dur="1" fill="hold">
-                                          <p:stCondLst>
-                                            <p:cond delay="0"/>
-                                          </p:stCondLst>
-                                        </p:cTn>
-                                        <p:tgtEl>
-                                          <p:spTgt spid="3">
-                                            <p:txEl>
-                                              <p:pRg st="2" end="2"/>
-                                            </p:txEl>
-                                          </p:spTgt>
-                                        </p:tgtEl>
-                                        <p:attrNameLst>
-                                          <p:attrName>style.visibility</p:attrName>
-                                        </p:attrNameLst>
-                                      </p:cBhvr>
-                                      <p:to>
-                                        <p:strVal val="visible"/>
-                                      </p:to>
-                                    </p:set>
-                                  </p:childTnLst>
-                                </p:cTn>
-                              </p:par>
-                            </p:childTnLst>
-                          </p:cTn>
-                        </p:par>
-                      </p:childTnLst>
-                    </p:cTn>
-                  </p:par>
-                </p:childTnLst>
-              </p:cTn>
-              <p:prevCondLst>
-                <p:cond evt="onPrev" delay="0">
-                  <p:tgtEl>
-                    <p:sldTgt/>
-                  </p:tgtEl>
-                </p:cond>
-              </p:prevCondLst>
-              <p:nextCondLst>
-                <p:cond evt="onNext" delay="0">
-                  <p:tgtEl>
-                    <p:sldTgt/>
-                  </p:tgtEl>
-                </p:cond>
-              </p:nextCondLst>
-            </p:seq>
-          </p:childTnLst>
-        </p:cTn>
-      </p:par>
-    </p:tnLst>
-    <p:bldLst>
-      <p:bldP spid="3" grpId="0" uiExpand="1" build="p"/>
-    </p:bldLst>
-  </p:timing>
-</p:sld>
-</file>
-
-<file path=ppt/slides/slide4.xml><?xml version="1.0" encoding="utf-8"?>
 <p:sld xmlns:a="http://schemas.openxmlformats.org/drawingml/2006/main" xmlns:r="http://schemas.openxmlformats.org/officeDocument/2006/relationships" xmlns:p="http://schemas.openxmlformats.org/presentationml/2006/main">
   <p:cSld>
     <p:spTree>
@@ -10789,7 +10567,7 @@
 </p:sld>
 </file>
 
-<file path=ppt/slides/slide5.xml><?xml version="1.0" encoding="utf-8"?>
+<file path=ppt/slides/slide4.xml><?xml version="1.0" encoding="utf-8"?>
 <p:sld xmlns:a="http://schemas.openxmlformats.org/drawingml/2006/main" xmlns:r="http://schemas.openxmlformats.org/officeDocument/2006/relationships" xmlns:p="http://schemas.openxmlformats.org/presentationml/2006/main">
   <p:cSld>
     <p:spTree>
@@ -10861,7 +10639,7 @@
 </p:sld>
 </file>
 
-<file path=ppt/slides/slide6.xml><?xml version="1.0" encoding="utf-8"?>
+<file path=ppt/slides/slide5.xml><?xml version="1.0" encoding="utf-8"?>
 <p:sld xmlns:a="http://schemas.openxmlformats.org/drawingml/2006/main" xmlns:r="http://schemas.openxmlformats.org/officeDocument/2006/relationships" xmlns:p="http://schemas.openxmlformats.org/presentationml/2006/main">
   <p:cSld>
     <p:spTree>
@@ -11217,8 +10995,8 @@
         </p:blipFill>
         <p:spPr bwMode="auto">
           <a:xfrm>
-            <a:off x="5397500" y="1625600"/>
-            <a:ext cx="2527300" cy="2451100"/>
+            <a:off x="4876800" y="1625600"/>
+            <a:ext cx="3556000" cy="2451100"/>
           </a:xfrm>
           <a:prstGeom prst="rect">
             <a:avLst/>
@@ -11258,7 +11036,7 @@
             </a:pPr>
             <a:r>
               <a:rPr/>
-              <a:t>Figure 1: The flexible design shifts the entire VaR curve rightward: less downside, more upside. Source: de Neufville et al. (2006)</a:t>
+              <a:t>de Neufville et al. (2006)</a:t>
             </a:r>
           </a:p>
         </p:txBody>
@@ -11268,7 +11046,7 @@
 </p:sld>
 </file>
 
-<file path=ppt/slides/slide7.xml><?xml version="1.0" encoding="utf-8"?>
+<file path=ppt/slides/slide6.xml><?xml version="1.0" encoding="utf-8"?>
 <p:sld xmlns:a="http://schemas.openxmlformats.org/drawingml/2006/main" xmlns:r="http://schemas.openxmlformats.org/officeDocument/2006/relationships" xmlns:p="http://schemas.openxmlformats.org/presentationml/2006/main">
   <p:cSld>
     <p:spTree>
@@ -11694,6 +11472,145 @@
 </p:sld>
 </file>
 
+<file path=ppt/slides/slide7.xml><?xml version="1.0" encoding="utf-8"?>
+<p:sld xmlns:a="http://schemas.openxmlformats.org/drawingml/2006/main" xmlns:r="http://schemas.openxmlformats.org/officeDocument/2006/relationships" xmlns:p="http://schemas.openxmlformats.org/presentationml/2006/main">
+  <p:cSld>
+    <p:spTree>
+      <p:nvGrpSpPr>
+        <p:cNvPr id="1" name=""/>
+        <p:cNvGrpSpPr/>
+        <p:nvPr/>
+      </p:nvGrpSpPr>
+      <p:grpSpPr>
+        <a:xfrm>
+          <a:off x="0" y="0"/>
+          <a:ext cx="0" cy="0"/>
+          <a:chOff x="0" y="0"/>
+          <a:chExt cx="0" cy="0"/>
+        </a:xfrm>
+      </p:grpSpPr>
+      <p:sp>
+        <p:nvSpPr>
+          <p:cNvPr id="2" name="Title 1"/>
+          <p:cNvSpPr>
+            <a:spLocks noGrp="1"/>
+          </p:cNvSpPr>
+          <p:nvPr>
+            <p:ph type="title"/>
+          </p:nvPr>
+        </p:nvSpPr>
+        <p:spPr>
+          <a:xfrm>
+            <a:off x="457201" y="204787"/>
+            <a:ext cx="3008313" cy="871538"/>
+          </a:xfrm>
+        </p:spPr>
+        <p:txBody>
+          <a:bodyPr/>
+          <a:lstStyle/>
+          <a:p>
+            <a:pPr lvl="0" indent="0" marL="0">
+              <a:buNone/>
+            </a:pPr>
+            <a:r>
+              <a:rPr/>
+              <a:t>Two Paradigms for Planning Under Uncertainty</a:t>
+            </a:r>
+          </a:p>
+        </p:txBody>
+      </p:sp>
+      <p:sp>
+        <p:nvSpPr>
+          <p:cNvPr id="4" name="Text Placeholder 3"/>
+          <p:cNvSpPr>
+            <a:spLocks noGrp="1"/>
+          </p:cNvSpPr>
+          <p:nvPr>
+            <p:ph idx="2" sz="half" type="body"/>
+          </p:nvPr>
+        </p:nvSpPr>
+        <p:spPr/>
+        <p:txBody>
+          <a:bodyPr/>
+          <a:lstStyle/>
+          <a:p>
+            <a:pPr lvl="0" indent="0" marL="0">
+              <a:buNone/>
+            </a:pPr>
+            <a:r>
+              <a:rPr/>
+              <a:t>Herman et al. (2020) classifies decision support frameworks for water resources planning under climate change into two families:</a:t>
+            </a:r>
+          </a:p>
+        </p:txBody>
+      </p:sp>
+      <p:pic>
+        <p:nvPicPr>
+          <p:cNvPr descr="herman_fig1.png" id="0" name="Picture 1"/>
+          <p:cNvPicPr>
+            <a:picLocks noGrp="1" noChangeAspect="1"/>
+          </p:cNvPicPr>
+          <p:nvPr/>
+        </p:nvPicPr>
+        <p:blipFill>
+          <a:blip r:embed="rId3"/>
+          <a:stretch>
+            <a:fillRect/>
+          </a:stretch>
+        </p:blipFill>
+        <p:spPr bwMode="auto">
+          <a:xfrm>
+            <a:off x="3568700" y="1651000"/>
+            <a:ext cx="5105400" cy="977900"/>
+          </a:xfrm>
+          <a:prstGeom prst="rect">
+            <a:avLst/>
+          </a:prstGeom>
+          <a:noFill/>
+          <a:ln w="9525">
+            <a:noFill/>
+            <a:headEnd/>
+            <a:tailEnd/>
+          </a:ln>
+        </p:spPr>
+      </p:pic>
+      <p:sp>
+        <p:nvSpPr>
+          <p:cNvPr id="1" name="TextBox 3"/>
+          <p:cNvSpPr txBox="1"/>
+          <p:nvPr>
+            <p:ph idx="1"/>
+          </p:nvPr>
+        </p:nvSpPr>
+        <p:spPr>
+          <a:xfrm>
+            <a:off x="3568700" y="4076700"/>
+            <a:ext cx="5105400" cy="508000"/>
+          </a:xfrm>
+          <a:prstGeom prst="rect">
+            <a:avLst/>
+          </a:prstGeom>
+          <a:noFill/>
+        </p:spPr>
+        <p:txBody>
+          <a:bodyPr/>
+          <a:lstStyle/>
+          <a:p>
+            <a:pPr lvl="0" indent="0" marL="0" algn="ctr">
+              <a:buNone/>
+            </a:pPr>
+            <a:r>
+              <a:rPr/>
+              <a:t>Herman et al. (2020)</a:t>
+            </a:r>
+          </a:p>
+        </p:txBody>
+      </p:sp>
+    </p:spTree>
+  </p:cSld>
+</p:sld>
+</file>
+
 <file path=ppt/slides/slide8.xml><?xml version="1.0" encoding="utf-8"?>
 <p:sld xmlns:a="http://schemas.openxmlformats.org/drawingml/2006/main" xmlns:r="http://schemas.openxmlformats.org/officeDocument/2006/relationships" xmlns:p="http://schemas.openxmlformats.org/presentationml/2006/main">
   <p:cSld>
@@ -11736,145 +11653,6 @@
             </a:pPr>
             <a:r>
               <a:rPr/>
-              <a:t>Two Paradigms for Planning Under Uncertainty</a:t>
-            </a:r>
-          </a:p>
-        </p:txBody>
-      </p:sp>
-      <p:sp>
-        <p:nvSpPr>
-          <p:cNvPr id="4" name="Text Placeholder 3"/>
-          <p:cNvSpPr>
-            <a:spLocks noGrp="1"/>
-          </p:cNvSpPr>
-          <p:nvPr>
-            <p:ph idx="2" sz="half" type="body"/>
-          </p:nvPr>
-        </p:nvSpPr>
-        <p:spPr/>
-        <p:txBody>
-          <a:bodyPr/>
-          <a:lstStyle/>
-          <a:p>
-            <a:pPr lvl="0" indent="0" marL="0">
-              <a:buNone/>
-            </a:pPr>
-            <a:r>
-              <a:rPr/>
-              <a:t>Herman et al. (2020) classify decision support frameworks for water resources planning under climate change into two families.</a:t>
-            </a:r>
-          </a:p>
-        </p:txBody>
-      </p:sp>
-      <p:pic>
-        <p:nvPicPr>
-          <p:cNvPr descr="herman_fig1.png" id="0" name="Picture 1"/>
-          <p:cNvPicPr>
-            <a:picLocks noGrp="1" noChangeAspect="1"/>
-          </p:cNvPicPr>
-          <p:nvPr/>
-        </p:nvPicPr>
-        <p:blipFill>
-          <a:blip r:embed="rId3"/>
-          <a:stretch>
-            <a:fillRect/>
-          </a:stretch>
-        </p:blipFill>
-        <p:spPr bwMode="auto">
-          <a:xfrm>
-            <a:off x="3568700" y="876300"/>
-            <a:ext cx="5105400" cy="2527300"/>
-          </a:xfrm>
-          <a:prstGeom prst="rect">
-            <a:avLst/>
-          </a:prstGeom>
-          <a:noFill/>
-          <a:ln w="9525">
-            <a:noFill/>
-            <a:headEnd/>
-            <a:tailEnd/>
-          </a:ln>
-        </p:spPr>
-      </p:pic>
-      <p:sp>
-        <p:nvSpPr>
-          <p:cNvPr id="1" name="TextBox 3"/>
-          <p:cNvSpPr txBox="1"/>
-          <p:nvPr>
-            <p:ph idx="1"/>
-          </p:nvPr>
-        </p:nvSpPr>
-        <p:spPr>
-          <a:xfrm>
-            <a:off x="3568700" y="4076700"/>
-            <a:ext cx="5105400" cy="508000"/>
-          </a:xfrm>
-          <a:prstGeom prst="rect">
-            <a:avLst/>
-          </a:prstGeom>
-          <a:noFill/>
-        </p:spPr>
-        <p:txBody>
-          <a:bodyPr/>
-          <a:lstStyle/>
-          <a:p>
-            <a:pPr lvl="0" indent="0" marL="0" algn="ctr">
-              <a:buNone/>
-            </a:pPr>
-            <a:r>
-              <a:rPr/>
-              <a:t>Figure 2: We have already covered robust planning (Weeks 7–8). Today focuses on dynamic planning — the highlighted column.</a:t>
-            </a:r>
-          </a:p>
-        </p:txBody>
-      </p:sp>
-    </p:spTree>
-  </p:cSld>
-</p:sld>
-</file>
-
-<file path=ppt/slides/slide9.xml><?xml version="1.0" encoding="utf-8"?>
-<p:sld xmlns:a="http://schemas.openxmlformats.org/drawingml/2006/main" xmlns:r="http://schemas.openxmlformats.org/officeDocument/2006/relationships" xmlns:p="http://schemas.openxmlformats.org/presentationml/2006/main">
-  <p:cSld>
-    <p:spTree>
-      <p:nvGrpSpPr>
-        <p:cNvPr id="1" name=""/>
-        <p:cNvGrpSpPr/>
-        <p:nvPr/>
-      </p:nvGrpSpPr>
-      <p:grpSpPr>
-        <a:xfrm>
-          <a:off x="0" y="0"/>
-          <a:ext cx="0" cy="0"/>
-          <a:chOff x="0" y="0"/>
-          <a:chExt cx="0" cy="0"/>
-        </a:xfrm>
-      </p:grpSpPr>
-      <p:sp>
-        <p:nvSpPr>
-          <p:cNvPr id="2" name="Title 1"/>
-          <p:cNvSpPr>
-            <a:spLocks noGrp="1"/>
-          </p:cNvSpPr>
-          <p:nvPr>
-            <p:ph type="title"/>
-          </p:nvPr>
-        </p:nvSpPr>
-        <p:spPr>
-          <a:xfrm>
-            <a:off x="457201" y="204787"/>
-            <a:ext cx="3008313" cy="871538"/>
-          </a:xfrm>
-        </p:spPr>
-        <p:txBody>
-          <a:bodyPr/>
-          <a:lstStyle/>
-          <a:p>
-            <a:pPr lvl="0" indent="0" marL="0">
-              <a:buNone/>
-            </a:pPr>
-            <a:r>
-              <a:rPr/>
               <a:t>The Control Problem: Components</a:t>
             </a:r>
           </a:p>
@@ -11921,8 +11699,8 @@
         </p:blipFill>
         <p:spPr bwMode="auto">
           <a:xfrm>
-            <a:off x="3568700" y="596900"/>
-            <a:ext cx="5105400" cy="3098800"/>
+            <a:off x="3568700" y="1155700"/>
+            <a:ext cx="5105400" cy="1955800"/>
           </a:xfrm>
           <a:prstGeom prst="rect">
             <a:avLst/>
@@ -11964,7 +11742,7 @@
                 </a:pPr>
                 <a:r>
                   <a:rPr/>
-                  <a:t>Figure 3: The control policy </a:t>
+                  <a:t>The control policy </a:t>
                 </a:r>
                 <a14:m>
                   <m:oMath xmlns:m="http://schemas.openxmlformats.org/officeDocument/2006/math">
@@ -12039,6 +11817,9 @@
     </p:spTree>
   </p:cSld>
 </p:sld>
+</file>
+
+<file path=ppt/slides/slide9.xml><?xml version="1.0" encoding="UTF-8"?><p:sld xmlns:a="http://schemas.openxmlformats.org/drawingml/2006/main" xmlns:r="http://schemas.openxmlformats.org/officeDocument/2006/relationships" xmlns:p="http://schemas.openxmlformats.org/presentationml/2006/main"><p:cSld><p:spTree><p:nvGrpSpPr><p:cNvPr id="1" name="" /><p:cNvGrpSpPr /><p:nvPr /></p:nvGrpSpPr><p:grpSpPr><a:xfrm><a:off x="0" y="0" /><a:ext cx="0" cy="0" /><a:chOff x="0" y="0" /><a:chExt cx="0" cy="0" /></a:xfrm></p:grpSpPr><p:sp><p:nvSpPr><p:cNvPr id="2" name="Title 1" /><p:cNvSpPr><a:spLocks noGrp="1" /></p:cNvSpPr><p:nvPr><p:ph type="title" /></p:nvPr></p:nvSpPr><p:spPr><a:xfrm><a:off x="457201" y="204787" /><a:ext cx="3008313" cy="871538" /></a:xfrm></p:spPr><p:txBody><a:bodyPr /><a:lstStyle /><a:p><a:pPr lvl="0" indent="0" marL="0"><a:buNone /></a:pPr><a:r><a:rPr /><a:t>State, Action, Forcing</a:t></a:r></a:p></p:txBody></p:sp><mc:AlternateContent xmlns:mc="http://schemas.openxmlformats.org/markup-compatibility/2006"><mc:Choice xmlns:a14="http://schemas.microsoft.com/office/drawing/2010/main" Requires="a14"><p:sp><p:nvSpPr><p:cNvPr id="4" name="Text Placeholder 3" /><p:cNvSpPr><a:spLocks noGrp="1" /></p:cNvSpPr><p:nvPr><p:ph idx="2" sz="half" type="body" /></p:nvPr></p:nvSpPr><p:spPr /><p:txBody><a:bodyPr /><a:lstStyle /><a:p><a:pPr lvl="0" indent="0" marL="0"><a:buNone /></a:pPr><a:r><a:rPr /><a:t>Formal setup: at each time step </a:t></a:r><a14:m><m:oMath xmlns:m="http://schemas.openxmlformats.org/officeDocument/2006/math"><m:r><m:t>t</m:t></m:r></m:oMath></a14:m><a:r><a:rPr /><a:t>,</a:t></a:r></a:p></p:txBody></p:sp></mc:Choice></mc:AlternateContent><p:graphicFrame><p:nvGraphicFramePr><p:cNvPr id="6" name="Content Placeholder 5" /><p:cNvGraphicFramePr><a:graphicFrameLocks noGrp="1" /></p:cNvGraphicFramePr><p:nvPr><p:ph idx="1" /></p:nvPr></p:nvGraphicFramePr><p:xfrm><a:off x="3568700" y="203200" /><a:ext cx="5105400" cy="4381500" /></p:xfrm><a:graphic><a:graphicData uri="http://schemas.openxmlformats.org/drawingml/2006/table"><a:tbl><a:tblPr firstRow="1" bandRow="1"><a:tableStyleId>{5C22544A-7EE6-4342-B048-85BDC9FD1C3A}</a:tableStyleId></a:tblPr><a:tblGrid><a:gridCol w="1701800" /><a:gridCol w="1701800" /><a:gridCol w="1701800" /></a:tblGrid><a:tr h="0"><a:tc><a:txBody><a:bodyPr /><a:lstStyle /><a:p><a:pPr lvl="0" indent="0" marL="0"><a:buNone /></a:pPr><a:r><a:rPr /><a:t>Symbol</a:t></a:r></a:p></a:txBody><a:tcPr /></a:tc><a:tc><a:txBody><a:bodyPr /><a:lstStyle /><a:p><a:pPr lvl="0" indent="0" marL="0"><a:buNone /></a:pPr><a:r><a:rPr /><a:t>Meaning</a:t></a:r></a:p></a:txBody><a:tcPr /></a:tc><a:tc><a:txBody><a:bodyPr /><a:lstStyle /><a:p><a:pPr lvl="0" indent="0" marL="0"><a:buNone /></a:pPr><a:r><a:rPr /><a:t>Example</a:t></a:r></a:p></a:txBody><a:tcPr /></a:tc></a:tr><a:tr h="0"><a:tc><a:txBody><a:bodyPr /><a:lstStyle /><a:p><a:pPr lvl="0" indent="0" marL="0"><a:buNone /></a:pPr><a14:m><m:oMath xmlns:m="http://schemas.openxmlformats.org/officeDocument/2006/math"><m:sSub><m:e><m:r><m:rPr><m:sty m:val="b" /></m:rPr><m:t>x</m:t></m:r></m:e><m:sub><m:r><m:t>t</m:t></m:r></m:sub></m:sSub></m:oMath></a14:m></a:p></a:txBody></a:tc><a:tc><a:txBody><a:bodyPr /><a:lstStyle /><a:p><a:pPr lvl="0" indent="0" marL="0"><a:buNone /></a:pPr><a:r><a:rPr /><a:t>System state</a:t></a:r></a:p></a:txBody></a:tc><a:tc><a:txBody><a:bodyPr /><a:lstStyle /><a:p><a:pPr lvl="0" indent="0" marL="0"><a:buNone /></a:pPr><a:r><a:rPr /><a:t>Dike height, reservoir storage</a:t></a:r></a:p></a:txBody></a:tc></a:tr><a:tr h="0"><a:tc><a:txBody><a:bodyPr /><a:lstStyle /><a:p><a:pPr lvl="0" indent="0" marL="0"><a:buNone /></a:pPr><a14:m><m:oMath xmlns:m="http://schemas.openxmlformats.org/officeDocument/2006/math"><m:sSub><m:e><m:r><m:t>a</m:t></m:r></m:e><m:sub><m:r><m:t>t</m:t></m:r></m:sub></m:sSub><m:r><m:rPr><m:sty m:val="p" /></m:rPr><m:t>∈</m:t></m:r><m:r><m:rPr><m:scr m:val="script" /><m:sty m:val="p" /></m:rPr><m:t>A</m:t></m:r></m:oMath></a14:m></a:p></a:txBody></a:tc><a:tc><a:txBody><a:bodyPr /><a:lstStyle /><a:p><a:pPr lvl="0" indent="0" marL="0"><a:buNone /></a:pPr><a:r><a:rPr /><a:t>Action</a:t></a:r></a:p></a:txBody></a:tc><a:tc><a:txBody><a:bodyPr /><a:lstStyle /><a:p><a:pPr lvl="0" indent="0" marL="0"><a:buNone /></a:pPr><a:r><a:rPr /><a:t>Heighten by </a:t></a:r><a14:m><m:oMath xmlns:m="http://schemas.openxmlformats.org/officeDocument/2006/math"><m:sSub><m:e><m:r><m:t>u</m:t></m:r></m:e><m:sub><m:r><m:t>t</m:t></m:r></m:sub></m:sSub></m:oMath></a14:m><a:r><a:rPr /><a:t>; expand; do nothing</a:t></a:r></a:p></a:txBody></a:tc></a:tr><a:tr h="0"><a:tc><a:txBody><a:bodyPr /><a:lstStyle /><a:p><a:pPr lvl="0" indent="0" marL="0"><a:buNone /></a:pPr><a14:m><m:oMath xmlns:m="http://schemas.openxmlformats.org/officeDocument/2006/math"><m:sSub><m:e><m:r><m:rPr><m:sty m:val="b" /></m:rPr><m:t>e</m:t></m:r></m:e><m:sub><m:r><m:t>t</m:t></m:r></m:sub></m:sSub></m:oMath></a14:m></a:p></a:txBody></a:tc><a:tc><a:txBody><a:bodyPr /><a:lstStyle /><a:p><a:pPr lvl="0" indent="0" marL="0"><a:buNone /></a:pPr><a:r><a:rPr /><a:t>Stochastic forcing</a:t></a:r></a:p></a:txBody></a:tc><a:tc><a:txBody><a:bodyPr /><a:lstStyle /><a:p><a:pPr lvl="0" indent="0" marL="0"><a:buNone /></a:pPr><a:r><a:rPr /><a:t>SLR realization, storm surge, precipitation</a:t></a:r></a:p></a:txBody></a:tc></a:tr><a:tr h="0"><a:tc><a:txBody><a:bodyPr /><a:lstStyle /><a:p><a:pPr lvl="0" indent="0" marL="0"><a:buNone /></a:pPr><a14:m><m:oMath xmlns:m="http://schemas.openxmlformats.org/officeDocument/2006/math"><m:sSub><m:e><m:r><m:t>J</m:t></m:r></m:e><m:sub><m:r><m:t>t</m:t></m:r></m:sub></m:sSub></m:oMath></a14:m></a:p></a:txBody></a:tc><a:tc><a:txBody><a:bodyPr /><a:lstStyle /><a:p><a:pPr lvl="0" indent="0" marL="0"><a:buNone /></a:pPr><a:r><a:rPr /><a:t>Cost</a:t></a:r></a:p></a:txBody></a:tc><a:tc><a:txBody><a:bodyPr /><a:lstStyle /><a:p><a:pPr lvl="0" indent="0" marL="0"><a:buNone /></a:pPr><a:r><a:rPr /><a:t>Investment cost + expected damages</a:t></a:r></a:p></a:txBody></a:tc></a:tr></a:tbl></a:graphicData></a:graphic></p:graphicFrame></p:spTree></p:cSld></p:sld>
 </file>
 
 <file path=ppt/theme/theme1.xml><?xml version="1.0" encoding="utf-8"?>
